--- a/ClyxOS.pptx
+++ b/ClyxOS.pptx
@@ -5,7 +5,7 @@
     <p:sldMasterId id="2147483648" r:id="rId1"/>
   </p:sldMasterIdLst>
   <p:notesMasterIdLst>
-    <p:notesMasterId r:id="rId12"/>
+    <p:notesMasterId r:id="rId15"/>
   </p:notesMasterIdLst>
   <p:sldIdLst>
     <p:sldId id="256" r:id="rId4"/>
@@ -16,6 +16,9 @@
     <p:sldId id="261" r:id="rId9"/>
     <p:sldId id="262" r:id="rId10"/>
     <p:sldId id="263" r:id="rId11"/>
+    <p:sldId id="264" r:id="rId12"/>
+    <p:sldId id="265" r:id="rId13"/>
+    <p:sldId id="266" r:id="rId14"/>
   </p:sldIdLst>
   <p:sldSz cx="12192000" cy="6858000"/>
   <p:notesSz cx="6858000" cy="9144000"/>
@@ -141,7 +144,7 @@
       </p:grpSpPr>
       <p:sp>
         <p:nvSpPr>
-          <p:cNvPr id="76111351" name="Header Placeholder 1"/>
+          <p:cNvPr id="1546214639" name="Header Placeholder 1"/>
           <p:cNvSpPr>
             <a:spLocks noGrp="1"/>
           </p:cNvSpPr>
@@ -175,7 +178,7 @@
       </p:sp>
       <p:sp>
         <p:nvSpPr>
-          <p:cNvPr id="940053685" name="Date Placeholder 2"/>
+          <p:cNvPr id="1030570847" name="Date Placeholder 2"/>
           <p:cNvSpPr>
             <a:spLocks noGrp="1"/>
           </p:cNvSpPr>
@@ -213,7 +216,7 @@
       </p:sp>
       <p:sp>
         <p:nvSpPr>
-          <p:cNvPr id="1956753693" name="Slide Image Placeholder 3"/>
+          <p:cNvPr id="1296843825" name="Slide Image Placeholder 3"/>
           <p:cNvSpPr>
             <a:spLocks noChangeAspect="1" noGrp="1" noRot="1"/>
           </p:cNvSpPr>
@@ -249,7 +252,7 @@
       </p:sp>
       <p:sp>
         <p:nvSpPr>
-          <p:cNvPr id="648221377" name="Notes Placeholder 4"/>
+          <p:cNvPr id="1529434634" name="Notes Placeholder 4"/>
           <p:cNvSpPr>
             <a:spLocks noGrp="1"/>
           </p:cNvSpPr>
@@ -323,7 +326,7 @@
       </p:sp>
       <p:sp>
         <p:nvSpPr>
-          <p:cNvPr id="1455516876" name="Footer Placeholder 5"/>
+          <p:cNvPr id="712225383" name="Footer Placeholder 5"/>
           <p:cNvSpPr>
             <a:spLocks noGrp="1"/>
           </p:cNvSpPr>
@@ -357,7 +360,7 @@
       </p:sp>
       <p:sp>
         <p:nvSpPr>
-          <p:cNvPr id="778250022" name="Slide Number Placeholder 6"/>
+          <p:cNvPr id="717050537" name="Slide Number Placeholder 6"/>
           <p:cNvSpPr>
             <a:spLocks noGrp="1"/>
           </p:cNvSpPr>
@@ -510,7 +513,7 @@
       </p:grpSpPr>
       <p:sp>
         <p:nvSpPr>
-          <p:cNvPr id="537399863" name="Slide Image Placeholder 1"/>
+          <p:cNvPr id="1434426961" name="Slide Image Placeholder 1"/>
           <p:cNvSpPr>
             <a:spLocks noChangeAspect="1" noGrp="1" noRot="1"/>
           </p:cNvSpPr>
@@ -527,7 +530,7 @@
       </p:sp>
       <p:sp>
         <p:nvSpPr>
-          <p:cNvPr id="1199274106" name="Notes Placeholder 2"/>
+          <p:cNvPr id="1900912322" name="Notes Placeholder 2"/>
           <p:cNvSpPr>
             <a:spLocks noGrp="1"/>
           </p:cNvSpPr>
@@ -552,7 +555,7 @@
       </p:sp>
       <p:sp>
         <p:nvSpPr>
-          <p:cNvPr id="961941099" name="Slide Number Placeholder 3"/>
+          <p:cNvPr id="717295177" name="Slide Number Placeholder 3"/>
           <p:cNvSpPr>
             <a:spLocks noGrp="1"/>
           </p:cNvSpPr>
@@ -573,6 +576,176 @@
               <a:t>1</a:t>
             </a:fld>
             <a:endParaRPr lang="en-US"/>
+          </a:p>
+        </p:txBody>
+      </p:sp>
+    </p:spTree>
+  </p:cSld>
+  <p:clrMapOvr>
+    <a:masterClrMapping/>
+  </p:clrMapOvr>
+</p:notes>
+</file>
+
+<file path=ppt/notesSlides/notesSlide10.xml><?xml version="1.0" encoding="utf-8"?>
+<p:notes xmlns:a="http://schemas.openxmlformats.org/drawingml/2006/main" xmlns:r="http://schemas.openxmlformats.org/officeDocument/2006/relationships" xmlns:p="http://schemas.openxmlformats.org/presentationml/2006/main" xmlns:m="http://schemas.openxmlformats.org/officeDocument/2006/math" xmlns:w="http://schemas.openxmlformats.org/wordprocessingml/2006/main">
+  <p:cSld name="">
+    <p:spTree>
+      <p:nvGrpSpPr>
+        <p:cNvPr id="1" name=""/>
+        <p:cNvGrpSpPr/>
+        <p:nvPr/>
+      </p:nvGrpSpPr>
+      <p:grpSpPr bwMode="auto">
+        <a:xfrm>
+          <a:off x="0" y="0"/>
+          <a:ext cx="0" cy="0"/>
+          <a:chOff x="0" y="0"/>
+          <a:chExt cx="0" cy="0"/>
+        </a:xfrm>
+      </p:grpSpPr>
+      <p:sp>
+        <p:nvSpPr>
+          <p:cNvPr id="442835609" name="Slide Image Placeholder 1"/>
+          <p:cNvSpPr>
+            <a:spLocks noChangeAspect="1" noGrp="1" noRot="1"/>
+          </p:cNvSpPr>
+          <p:nvPr>
+            <p:ph type="sldImg"/>
+          </p:nvPr>
+        </p:nvSpPr>
+        <p:spPr bwMode="auto"/>
+      </p:sp>
+      <p:sp>
+        <p:nvSpPr>
+          <p:cNvPr id="207696533" name="Notes Placeholder 2"/>
+          <p:cNvSpPr>
+            <a:spLocks noGrp="1"/>
+          </p:cNvSpPr>
+          <p:nvPr>
+            <p:ph type="body" idx="1"/>
+          </p:nvPr>
+        </p:nvSpPr>
+        <p:spPr bwMode="auto"/>
+        <p:txBody>
+          <a:bodyPr/>
+          <a:lstStyle/>
+          <a:p>
+            <a:pPr>
+              <a:defRPr/>
+            </a:pPr>
+            <a:endParaRPr/>
+          </a:p>
+        </p:txBody>
+      </p:sp>
+      <p:sp>
+        <p:nvSpPr>
+          <p:cNvPr id="1149383519" name="Slide Number Placeholder 3"/>
+          <p:cNvSpPr>
+            <a:spLocks noGrp="1"/>
+          </p:cNvSpPr>
+          <p:nvPr>
+            <p:ph type="sldNum" sz="quarter" idx="10"/>
+          </p:nvPr>
+        </p:nvSpPr>
+        <p:spPr bwMode="auto"/>
+        <p:txBody>
+          <a:bodyPr/>
+          <a:lstStyle/>
+          <a:p>
+            <a:pPr>
+              <a:defRPr/>
+            </a:pPr>
+            <a:fld id="{471BBC87-CBAF-E622-B935-3DD98305F33D}" type="slidenum">
+              <a:rPr/>
+              <a:t/>
+            </a:fld>
+            <a:endParaRPr/>
+          </a:p>
+        </p:txBody>
+      </p:sp>
+    </p:spTree>
+  </p:cSld>
+  <p:clrMapOvr>
+    <a:masterClrMapping/>
+  </p:clrMapOvr>
+</p:notes>
+</file>
+
+<file path=ppt/notesSlides/notesSlide11.xml><?xml version="1.0" encoding="utf-8"?>
+<p:notes xmlns:a="http://schemas.openxmlformats.org/drawingml/2006/main" xmlns:r="http://schemas.openxmlformats.org/officeDocument/2006/relationships" xmlns:p="http://schemas.openxmlformats.org/presentationml/2006/main" xmlns:m="http://schemas.openxmlformats.org/officeDocument/2006/math" xmlns:w="http://schemas.openxmlformats.org/wordprocessingml/2006/main">
+  <p:cSld name="">
+    <p:spTree>
+      <p:nvGrpSpPr>
+        <p:cNvPr id="1" name=""/>
+        <p:cNvGrpSpPr/>
+        <p:nvPr/>
+      </p:nvGrpSpPr>
+      <p:grpSpPr bwMode="auto">
+        <a:xfrm>
+          <a:off x="0" y="0"/>
+          <a:ext cx="0" cy="0"/>
+          <a:chOff x="0" y="0"/>
+          <a:chExt cx="0" cy="0"/>
+        </a:xfrm>
+      </p:grpSpPr>
+      <p:sp>
+        <p:nvSpPr>
+          <p:cNvPr id="1884893003" name="Slide Image Placeholder 1"/>
+          <p:cNvSpPr>
+            <a:spLocks noChangeAspect="1" noGrp="1" noRot="1"/>
+          </p:cNvSpPr>
+          <p:nvPr>
+            <p:ph type="sldImg"/>
+          </p:nvPr>
+        </p:nvSpPr>
+        <p:spPr bwMode="auto"/>
+      </p:sp>
+      <p:sp>
+        <p:nvSpPr>
+          <p:cNvPr id="1544111720" name="Notes Placeholder 2"/>
+          <p:cNvSpPr>
+            <a:spLocks noGrp="1"/>
+          </p:cNvSpPr>
+          <p:nvPr>
+            <p:ph type="body" idx="1"/>
+          </p:nvPr>
+        </p:nvSpPr>
+        <p:spPr bwMode="auto"/>
+        <p:txBody>
+          <a:bodyPr/>
+          <a:lstStyle/>
+          <a:p>
+            <a:pPr>
+              <a:defRPr/>
+            </a:pPr>
+            <a:endParaRPr/>
+          </a:p>
+        </p:txBody>
+      </p:sp>
+      <p:sp>
+        <p:nvSpPr>
+          <p:cNvPr id="1179951378" name="Slide Number Placeholder 3"/>
+          <p:cNvSpPr>
+            <a:spLocks noGrp="1"/>
+          </p:cNvSpPr>
+          <p:nvPr>
+            <p:ph type="sldNum" sz="quarter" idx="10"/>
+          </p:nvPr>
+        </p:nvSpPr>
+        <p:spPr bwMode="auto"/>
+        <p:txBody>
+          <a:bodyPr/>
+          <a:lstStyle/>
+          <a:p>
+            <a:pPr>
+              <a:defRPr/>
+            </a:pPr>
+            <a:fld id="{6251210B-7D10-78E5-DC7E-A4CE5232484C}" type="slidenum">
+              <a:rPr/>
+              <a:t/>
+            </a:fld>
+            <a:endParaRPr/>
           </a:p>
         </p:txBody>
       </p:sp>
@@ -603,7 +776,7 @@
       </p:grpSpPr>
       <p:sp>
         <p:nvSpPr>
-          <p:cNvPr id="2" name="Slide Image Placeholder 1"/>
+          <p:cNvPr id="2136477417" name="Slide Image Placeholder 1"/>
           <p:cNvSpPr>
             <a:spLocks noChangeAspect="1" noGrp="1" noRot="1"/>
           </p:cNvSpPr>
@@ -615,7 +788,7 @@
       </p:sp>
       <p:sp>
         <p:nvSpPr>
-          <p:cNvPr id="3" name="Notes Placeholder 2"/>
+          <p:cNvPr id="1162925322" name="Notes Placeholder 2"/>
           <p:cNvSpPr>
             <a:spLocks noGrp="1"/>
           </p:cNvSpPr>
@@ -637,7 +810,7 @@
       </p:sp>
       <p:sp>
         <p:nvSpPr>
-          <p:cNvPr id="4" name="Slide Number Placeholder 3"/>
+          <p:cNvPr id="1110719619" name="Slide Number Placeholder 3"/>
           <p:cNvSpPr>
             <a:spLocks noGrp="1"/>
           </p:cNvSpPr>
@@ -738,7 +911,7 @@
             <a:pPr>
               <a:defRPr/>
             </a:pPr>
-            <a:fld id="{179CF294-21B3-F560-A21E-8107897AEADF}" type="slidenum">
+            <a:fld id="{21216FB3-DB42-6A08-4AF7-0F3AB439D9A6}" type="slidenum">
               <a:rPr/>
               <a:t/>
             </a:fld>
@@ -773,7 +946,7 @@
       </p:grpSpPr>
       <p:sp>
         <p:nvSpPr>
-          <p:cNvPr id="2" name="Slide Image Placeholder 1"/>
+          <p:cNvPr id="1221180262" name="Slide Image Placeholder 1"/>
           <p:cNvSpPr>
             <a:spLocks noChangeAspect="1" noGrp="1" noRot="1"/>
           </p:cNvSpPr>
@@ -785,7 +958,7 @@
       </p:sp>
       <p:sp>
         <p:nvSpPr>
-          <p:cNvPr id="3" name="Notes Placeholder 2"/>
+          <p:cNvPr id="1358109955" name="Notes Placeholder 2"/>
           <p:cNvSpPr>
             <a:spLocks noGrp="1"/>
           </p:cNvSpPr>
@@ -807,7 +980,7 @@
       </p:sp>
       <p:sp>
         <p:nvSpPr>
-          <p:cNvPr id="4" name="Slide Number Placeholder 3"/>
+          <p:cNvPr id="1065458239" name="Slide Number Placeholder 3"/>
           <p:cNvSpPr>
             <a:spLocks noGrp="1"/>
           </p:cNvSpPr>
@@ -823,7 +996,7 @@
             <a:pPr>
               <a:defRPr/>
             </a:pPr>
-            <a:fld id="{527439A2-67E8-0215-5218-5B32AFCD49DA}" type="slidenum">
+            <a:fld id="{4F705752-0C38-0F49-9A2C-27E409111FE8}" type="slidenum">
               <a:rPr/>
               <a:t/>
             </a:fld>
@@ -858,7 +1031,7 @@
       </p:grpSpPr>
       <p:sp>
         <p:nvSpPr>
-          <p:cNvPr id="2" name="Slide Image Placeholder 1"/>
+          <p:cNvPr id="227364297" name="Slide Image Placeholder 1"/>
           <p:cNvSpPr>
             <a:spLocks noChangeAspect="1" noGrp="1" noRot="1"/>
           </p:cNvSpPr>
@@ -870,7 +1043,7 @@
       </p:sp>
       <p:sp>
         <p:nvSpPr>
-          <p:cNvPr id="3" name="Notes Placeholder 2"/>
+          <p:cNvPr id="935987977" name="Notes Placeholder 2"/>
           <p:cNvSpPr>
             <a:spLocks noGrp="1"/>
           </p:cNvSpPr>
@@ -892,7 +1065,7 @@
       </p:sp>
       <p:sp>
         <p:nvSpPr>
-          <p:cNvPr id="4" name="Slide Number Placeholder 3"/>
+          <p:cNvPr id="545001859" name="Slide Number Placeholder 3"/>
           <p:cNvSpPr>
             <a:spLocks noGrp="1"/>
           </p:cNvSpPr>
@@ -908,7 +1081,7 @@
             <a:pPr>
               <a:defRPr/>
             </a:pPr>
-            <a:fld id="{ABEF7C7D-E779-4B40-2F65-832F04C6C48A}" type="slidenum">
+            <a:fld id="{713B4F46-A54C-563C-F60F-6A3D197967AB}" type="slidenum">
               <a:rPr/>
               <a:t/>
             </a:fld>
@@ -943,7 +1116,7 @@
       </p:grpSpPr>
       <p:sp>
         <p:nvSpPr>
-          <p:cNvPr id="2" name="Slide Image Placeholder 1"/>
+          <p:cNvPr id="1788857747" name="Slide Image Placeholder 1"/>
           <p:cNvSpPr>
             <a:spLocks noChangeAspect="1" noGrp="1" noRot="1"/>
           </p:cNvSpPr>
@@ -955,7 +1128,7 @@
       </p:sp>
       <p:sp>
         <p:nvSpPr>
-          <p:cNvPr id="3" name="Notes Placeholder 2"/>
+          <p:cNvPr id="43765420" name="Notes Placeholder 2"/>
           <p:cNvSpPr>
             <a:spLocks noGrp="1"/>
           </p:cNvSpPr>
@@ -977,7 +1150,7 @@
       </p:sp>
       <p:sp>
         <p:nvSpPr>
-          <p:cNvPr id="4" name="Slide Number Placeholder 3"/>
+          <p:cNvPr id="962072152" name="Slide Number Placeholder 3"/>
           <p:cNvSpPr>
             <a:spLocks noGrp="1"/>
           </p:cNvSpPr>
@@ -993,7 +1166,7 @@
             <a:pPr>
               <a:defRPr/>
             </a:pPr>
-            <a:fld id="{114E3E1B-8D5A-2057-61F1-83FF16082702}" type="slidenum">
+            <a:fld id="{179CF294-21B3-F560-A21E-8107897AEADF}" type="slidenum">
               <a:rPr/>
               <a:t/>
             </a:fld>
@@ -1028,7 +1201,7 @@
       </p:grpSpPr>
       <p:sp>
         <p:nvSpPr>
-          <p:cNvPr id="2" name="Slide Image Placeholder 1"/>
+          <p:cNvPr id="2021856405" name="Slide Image Placeholder 1"/>
           <p:cNvSpPr>
             <a:spLocks noChangeAspect="1" noGrp="1" noRot="1"/>
           </p:cNvSpPr>
@@ -1040,7 +1213,7 @@
       </p:sp>
       <p:sp>
         <p:nvSpPr>
-          <p:cNvPr id="3" name="Notes Placeholder 2"/>
+          <p:cNvPr id="487941059" name="Notes Placeholder 2"/>
           <p:cNvSpPr>
             <a:spLocks noGrp="1"/>
           </p:cNvSpPr>
@@ -1062,7 +1235,7 @@
       </p:sp>
       <p:sp>
         <p:nvSpPr>
-          <p:cNvPr id="4" name="Slide Number Placeholder 3"/>
+          <p:cNvPr id="2135174091" name="Slide Number Placeholder 3"/>
           <p:cNvSpPr>
             <a:spLocks noGrp="1"/>
           </p:cNvSpPr>
@@ -1078,7 +1251,7 @@
             <a:pPr>
               <a:defRPr/>
             </a:pPr>
-            <a:fld id="{471BBC87-CBAF-E622-B935-3DD98305F33D}" type="slidenum">
+            <a:fld id="{527439A2-67E8-0215-5218-5B32AFCD49DA}" type="slidenum">
               <a:rPr/>
               <a:t/>
             </a:fld>
@@ -1113,7 +1286,7 @@
       </p:grpSpPr>
       <p:sp>
         <p:nvSpPr>
-          <p:cNvPr id="2" name="Slide Image Placeholder 1"/>
+          <p:cNvPr id="1555249552" name="Slide Image Placeholder 1"/>
           <p:cNvSpPr>
             <a:spLocks noChangeAspect="1" noGrp="1" noRot="1"/>
           </p:cNvSpPr>
@@ -1125,7 +1298,7 @@
       </p:sp>
       <p:sp>
         <p:nvSpPr>
-          <p:cNvPr id="3" name="Notes Placeholder 2"/>
+          <p:cNvPr id="888052847" name="Notes Placeholder 2"/>
           <p:cNvSpPr>
             <a:spLocks noGrp="1"/>
           </p:cNvSpPr>
@@ -1147,7 +1320,7 @@
       </p:sp>
       <p:sp>
         <p:nvSpPr>
-          <p:cNvPr id="4" name="Slide Number Placeholder 3"/>
+          <p:cNvPr id="1464331475" name="Slide Number Placeholder 3"/>
           <p:cNvSpPr>
             <a:spLocks noGrp="1"/>
           </p:cNvSpPr>
@@ -1163,7 +1336,92 @@
             <a:pPr>
               <a:defRPr/>
             </a:pPr>
-            <a:fld id="{6251210B-7D10-78E5-DC7E-A4CE5232484C}" type="slidenum">
+            <a:fld id="{ABEF7C7D-E779-4B40-2F65-832F04C6C48A}" type="slidenum">
+              <a:rPr/>
+              <a:t/>
+            </a:fld>
+            <a:endParaRPr/>
+          </a:p>
+        </p:txBody>
+      </p:sp>
+    </p:spTree>
+  </p:cSld>
+  <p:clrMapOvr>
+    <a:masterClrMapping/>
+  </p:clrMapOvr>
+</p:notes>
+</file>
+
+<file path=ppt/notesSlides/notesSlide9.xml><?xml version="1.0" encoding="utf-8"?>
+<p:notes xmlns:a="http://schemas.openxmlformats.org/drawingml/2006/main" xmlns:r="http://schemas.openxmlformats.org/officeDocument/2006/relationships" xmlns:p="http://schemas.openxmlformats.org/presentationml/2006/main" xmlns:m="http://schemas.openxmlformats.org/officeDocument/2006/math" xmlns:w="http://schemas.openxmlformats.org/wordprocessingml/2006/main">
+  <p:cSld name="">
+    <p:spTree>
+      <p:nvGrpSpPr>
+        <p:cNvPr id="1" name=""/>
+        <p:cNvGrpSpPr/>
+        <p:nvPr/>
+      </p:nvGrpSpPr>
+      <p:grpSpPr bwMode="auto">
+        <a:xfrm>
+          <a:off x="0" y="0"/>
+          <a:ext cx="0" cy="0"/>
+          <a:chOff x="0" y="0"/>
+          <a:chExt cx="0" cy="0"/>
+        </a:xfrm>
+      </p:grpSpPr>
+      <p:sp>
+        <p:nvSpPr>
+          <p:cNvPr id="1916252987" name="Slide Image Placeholder 1"/>
+          <p:cNvSpPr>
+            <a:spLocks noChangeAspect="1" noGrp="1" noRot="1"/>
+          </p:cNvSpPr>
+          <p:nvPr>
+            <p:ph type="sldImg"/>
+          </p:nvPr>
+        </p:nvSpPr>
+        <p:spPr bwMode="auto"/>
+      </p:sp>
+      <p:sp>
+        <p:nvSpPr>
+          <p:cNvPr id="1997868791" name="Notes Placeholder 2"/>
+          <p:cNvSpPr>
+            <a:spLocks noGrp="1"/>
+          </p:cNvSpPr>
+          <p:nvPr>
+            <p:ph type="body" idx="1"/>
+          </p:nvPr>
+        </p:nvSpPr>
+        <p:spPr bwMode="auto"/>
+        <p:txBody>
+          <a:bodyPr/>
+          <a:lstStyle/>
+          <a:p>
+            <a:pPr>
+              <a:defRPr/>
+            </a:pPr>
+            <a:endParaRPr/>
+          </a:p>
+        </p:txBody>
+      </p:sp>
+      <p:sp>
+        <p:nvSpPr>
+          <p:cNvPr id="907772003" name="Slide Number Placeholder 3"/>
+          <p:cNvSpPr>
+            <a:spLocks noGrp="1"/>
+          </p:cNvSpPr>
+          <p:nvPr>
+            <p:ph type="sldNum" sz="quarter" idx="10"/>
+          </p:nvPr>
+        </p:nvSpPr>
+        <p:spPr bwMode="auto"/>
+        <p:txBody>
+          <a:bodyPr/>
+          <a:lstStyle/>
+          <a:p>
+            <a:pPr>
+              <a:defRPr/>
+            </a:pPr>
+            <a:fld id="{114E3E1B-8D5A-2057-61F1-83FF16082702}" type="slidenum">
               <a:rPr/>
               <a:t/>
             </a:fld>
@@ -1198,7 +1456,7 @@
       </p:grpSpPr>
       <p:sp>
         <p:nvSpPr>
-          <p:cNvPr id="57210366" name="Shape 1059"/>
+          <p:cNvPr id="1361604766" name="Shape 1059"/>
           <p:cNvSpPr>
             <a:spLocks noChangeArrowheads="1" noGrp="1"/>
           </p:cNvSpPr>
@@ -1321,7 +1579,7 @@
       </p:sp>
       <p:sp>
         <p:nvSpPr>
-          <p:cNvPr id="185610297" name="Shape 1060"/>
+          <p:cNvPr id="1443726683" name="Shape 1060"/>
           <p:cNvSpPr>
             <a:spLocks noChangeArrowheads="1" noGrp="1"/>
           </p:cNvSpPr>
@@ -1330,7 +1588,7 @@
         <p:spPr bwMode="auto">
           <a:xfrm>
             <a:off x="1309514" y="1839834"/>
-            <a:ext cx="4011787" cy="1314325"/>
+            <a:ext cx="4011787" cy="1314324"/>
           </a:xfrm>
           <a:custGeom>
             <a:avLst/>
@@ -1412,7 +1670,7 @@
       </p:sp>
       <p:sp>
         <p:nvSpPr>
-          <p:cNvPr id="283242917" name="Shape 1061"/>
+          <p:cNvPr id="1858021488" name="Shape 1061"/>
           <p:cNvSpPr>
             <a:spLocks noChangeArrowheads="1" noGrp="1"/>
           </p:cNvSpPr>
@@ -1420,7 +1678,7 @@
         </p:nvSpPr>
         <p:spPr bwMode="auto">
           <a:xfrm>
-            <a:off x="6567031" y="4629133"/>
+            <a:off x="6567030" y="4629133"/>
             <a:ext cx="5395523" cy="2231707"/>
           </a:xfrm>
           <a:custGeom>
@@ -1498,7 +1756,7 @@
       </p:sp>
       <p:sp>
         <p:nvSpPr>
-          <p:cNvPr id="1458988165" name="Shape 1062"/>
+          <p:cNvPr id="409781565" name="Shape 1062"/>
           <p:cNvSpPr>
             <a:spLocks noChangeArrowheads="1" noGrp="1"/>
           </p:cNvSpPr>
@@ -1576,7 +1834,7 @@
       </p:sp>
       <p:sp>
         <p:nvSpPr>
-          <p:cNvPr id="900990903" name="Shape 1063"/>
+          <p:cNvPr id="2020034623" name="Shape 1063"/>
           <p:cNvSpPr>
             <a:spLocks noChangeArrowheads="1" noGrp="1"/>
           </p:cNvSpPr>
@@ -1654,7 +1912,7 @@
       </p:sp>
       <p:sp>
         <p:nvSpPr>
-          <p:cNvPr id="2026894816" name="Subtitle 2"/>
+          <p:cNvPr id="562372629" name="Subtitle 2"/>
           <p:cNvSpPr>
             <a:spLocks noGrp="1"/>
           </p:cNvSpPr>
@@ -1665,7 +1923,7 @@
         <p:spPr bwMode="auto">
           <a:xfrm>
             <a:off x="4655839" y="2708919"/>
-            <a:ext cx="6720746" cy="720079"/>
+            <a:ext cx="6720745" cy="720079"/>
           </a:xfrm>
         </p:spPr>
         <p:txBody>
@@ -1777,7 +2035,7 @@
       </p:sp>
       <p:sp>
         <p:nvSpPr>
-          <p:cNvPr id="17334846" name="Date Placeholder 3"/>
+          <p:cNvPr id="386448257" name="Date Placeholder 3"/>
           <p:cNvSpPr>
             <a:spLocks noGrp="1"/>
           </p:cNvSpPr>
@@ -1803,7 +2061,7 @@
       </p:sp>
       <p:sp>
         <p:nvSpPr>
-          <p:cNvPr id="621368734" name="Footer Placeholder 4"/>
+          <p:cNvPr id="706480022" name="Footer Placeholder 4"/>
           <p:cNvSpPr>
             <a:spLocks noGrp="1"/>
           </p:cNvSpPr>
@@ -1825,7 +2083,7 @@
       </p:sp>
       <p:sp>
         <p:nvSpPr>
-          <p:cNvPr id="809499703" name="Slide Number Placeholder 5"/>
+          <p:cNvPr id="2110048032" name="Slide Number Placeholder 5"/>
           <p:cNvSpPr>
             <a:spLocks noGrp="1"/>
           </p:cNvSpPr>
@@ -1851,7 +2109,7 @@
       </p:sp>
       <p:sp>
         <p:nvSpPr>
-          <p:cNvPr id="1717012898" name="Title 6"/>
+          <p:cNvPr id="1264488901" name="Title 6"/>
           <p:cNvSpPr>
             <a:spLocks noGrp="1"/>
           </p:cNvSpPr>
@@ -1862,7 +2120,7 @@
         <p:spPr bwMode="auto">
           <a:xfrm>
             <a:off x="4595833" y="1808820"/>
-            <a:ext cx="6720746" cy="720079"/>
+            <a:ext cx="6720745" cy="720079"/>
           </a:xfrm>
         </p:spPr>
         <p:txBody>
@@ -1911,7 +2169,7 @@
       </p:grpSpPr>
       <p:sp>
         <p:nvSpPr>
-          <p:cNvPr id="1309816963" name="Title 1"/>
+          <p:cNvPr id="1724010757" name="Title 1"/>
           <p:cNvSpPr>
             <a:spLocks noGrp="1"/>
           </p:cNvSpPr>
@@ -1937,7 +2195,7 @@
       </p:sp>
       <p:sp>
         <p:nvSpPr>
-          <p:cNvPr id="1742323020" name="Vertical Text Placeholder 2"/>
+          <p:cNvPr id="1168036887" name="Vertical Text Placeholder 2"/>
           <p:cNvSpPr>
             <a:spLocks noGrp="1"/>
           </p:cNvSpPr>
@@ -2003,7 +2261,7 @@
       </p:sp>
       <p:sp>
         <p:nvSpPr>
-          <p:cNvPr id="412590620" name="Date Placeholder 3"/>
+          <p:cNvPr id="822797777" name="Date Placeholder 3"/>
           <p:cNvSpPr>
             <a:spLocks noGrp="1"/>
           </p:cNvSpPr>
@@ -2029,7 +2287,7 @@
       </p:sp>
       <p:sp>
         <p:nvSpPr>
-          <p:cNvPr id="2130753119" name="Footer Placeholder 4"/>
+          <p:cNvPr id="213844211" name="Footer Placeholder 4"/>
           <p:cNvSpPr>
             <a:spLocks noGrp="1"/>
           </p:cNvSpPr>
@@ -2051,7 +2309,7 @@
       </p:sp>
       <p:sp>
         <p:nvSpPr>
-          <p:cNvPr id="1773775470" name="Slide Number Placeholder 5"/>
+          <p:cNvPr id="945496698" name="Slide Number Placeholder 5"/>
           <p:cNvSpPr>
             <a:spLocks noGrp="1"/>
           </p:cNvSpPr>
@@ -2102,7 +2360,7 @@
       </p:grpSpPr>
       <p:sp>
         <p:nvSpPr>
-          <p:cNvPr id="66560751" name="Vertical Title 1"/>
+          <p:cNvPr id="901514425" name="Vertical Title 1"/>
           <p:cNvSpPr>
             <a:spLocks noGrp="1"/>
           </p:cNvSpPr>
@@ -2137,7 +2395,7 @@
       </p:sp>
       <p:sp>
         <p:nvSpPr>
-          <p:cNvPr id="2142797112" name="Vertical Text Placeholder 2"/>
+          <p:cNvPr id="603358356" name="Vertical Text Placeholder 2"/>
           <p:cNvSpPr>
             <a:spLocks noGrp="1"/>
           </p:cNvSpPr>
@@ -2208,7 +2466,7 @@
       </p:sp>
       <p:sp>
         <p:nvSpPr>
-          <p:cNvPr id="1208377787" name="Date Placeholder 3"/>
+          <p:cNvPr id="1837906410" name="Date Placeholder 3"/>
           <p:cNvSpPr>
             <a:spLocks noGrp="1"/>
           </p:cNvSpPr>
@@ -2234,7 +2492,7 @@
       </p:sp>
       <p:sp>
         <p:nvSpPr>
-          <p:cNvPr id="1569819640" name="Footer Placeholder 4"/>
+          <p:cNvPr id="1853479407" name="Footer Placeholder 4"/>
           <p:cNvSpPr>
             <a:spLocks noGrp="1"/>
           </p:cNvSpPr>
@@ -2256,7 +2514,7 @@
       </p:sp>
       <p:sp>
         <p:nvSpPr>
-          <p:cNvPr id="333020805" name="Slide Number Placeholder 5"/>
+          <p:cNvPr id="961255319" name="Slide Number Placeholder 5"/>
           <p:cNvSpPr>
             <a:spLocks noGrp="1"/>
           </p:cNvSpPr>
@@ -2307,7 +2565,7 @@
       </p:grpSpPr>
       <p:sp>
         <p:nvSpPr>
-          <p:cNvPr id="1884758918" name="Title 1"/>
+          <p:cNvPr id="1791787101" name="Title 1"/>
           <p:cNvSpPr>
             <a:spLocks noGrp="1"/>
           </p:cNvSpPr>
@@ -2333,7 +2591,7 @@
       </p:sp>
       <p:sp>
         <p:nvSpPr>
-          <p:cNvPr id="42606753" name="Content Placeholder 2"/>
+          <p:cNvPr id="15610185" name="Content Placeholder 2"/>
           <p:cNvSpPr>
             <a:spLocks noGrp="1"/>
           </p:cNvSpPr>
@@ -2399,7 +2657,7 @@
       </p:sp>
       <p:sp>
         <p:nvSpPr>
-          <p:cNvPr id="140927570" name="Date Placeholder 3"/>
+          <p:cNvPr id="1503545973" name="Date Placeholder 3"/>
           <p:cNvSpPr>
             <a:spLocks noGrp="1"/>
           </p:cNvSpPr>
@@ -2425,7 +2683,7 @@
       </p:sp>
       <p:sp>
         <p:nvSpPr>
-          <p:cNvPr id="1628492750" name="Footer Placeholder 4"/>
+          <p:cNvPr id="293403106" name="Footer Placeholder 4"/>
           <p:cNvSpPr>
             <a:spLocks noGrp="1"/>
           </p:cNvSpPr>
@@ -2447,7 +2705,7 @@
       </p:sp>
       <p:sp>
         <p:nvSpPr>
-          <p:cNvPr id="117455624" name="Slide Number Placeholder 5"/>
+          <p:cNvPr id="1856825072" name="Slide Number Placeholder 5"/>
           <p:cNvSpPr>
             <a:spLocks noGrp="1"/>
           </p:cNvSpPr>
@@ -2498,7 +2756,7 @@
       </p:grpSpPr>
       <p:sp>
         <p:nvSpPr>
-          <p:cNvPr id="513904767" name="Title 1"/>
+          <p:cNvPr id="441596050" name="Title 1"/>
           <p:cNvSpPr>
             <a:spLocks noGrp="1"/>
           </p:cNvSpPr>
@@ -2533,7 +2791,7 @@
       </p:sp>
       <p:sp>
         <p:nvSpPr>
-          <p:cNvPr id="392136052" name="Text Placeholder 2"/>
+          <p:cNvPr id="3408106" name="Text Placeholder 2"/>
           <p:cNvSpPr>
             <a:spLocks noGrp="1"/>
           </p:cNvSpPr>
@@ -2655,7 +2913,7 @@
       </p:sp>
       <p:sp>
         <p:nvSpPr>
-          <p:cNvPr id="256248996" name="Date Placeholder 3"/>
+          <p:cNvPr id="1160799768" name="Date Placeholder 3"/>
           <p:cNvSpPr>
             <a:spLocks noGrp="1"/>
           </p:cNvSpPr>
@@ -2681,7 +2939,7 @@
       </p:sp>
       <p:sp>
         <p:nvSpPr>
-          <p:cNvPr id="1104232275" name="Footer Placeholder 4"/>
+          <p:cNvPr id="80220066" name="Footer Placeholder 4"/>
           <p:cNvSpPr>
             <a:spLocks noGrp="1"/>
           </p:cNvSpPr>
@@ -2703,7 +2961,7 @@
       </p:sp>
       <p:sp>
         <p:nvSpPr>
-          <p:cNvPr id="90105117" name="Slide Number Placeholder 5"/>
+          <p:cNvPr id="1290921426" name="Slide Number Placeholder 5"/>
           <p:cNvSpPr>
             <a:spLocks noGrp="1"/>
           </p:cNvSpPr>
@@ -2754,7 +3012,7 @@
       </p:grpSpPr>
       <p:sp>
         <p:nvSpPr>
-          <p:cNvPr id="1128563115" name="Title 1"/>
+          <p:cNvPr id="1000992035" name="Title 1"/>
           <p:cNvSpPr>
             <a:spLocks noGrp="1"/>
           </p:cNvSpPr>
@@ -2780,7 +3038,7 @@
       </p:sp>
       <p:sp>
         <p:nvSpPr>
-          <p:cNvPr id="181100540" name="Content Placeholder 2"/>
+          <p:cNvPr id="2116548036" name="Content Placeholder 2"/>
           <p:cNvSpPr>
             <a:spLocks noGrp="1"/>
           </p:cNvSpPr>
@@ -2879,7 +3137,7 @@
       </p:sp>
       <p:sp>
         <p:nvSpPr>
-          <p:cNvPr id="1675232117" name="Content Placeholder 3"/>
+          <p:cNvPr id="299514990" name="Content Placeholder 3"/>
           <p:cNvSpPr>
             <a:spLocks noGrp="1"/>
           </p:cNvSpPr>
@@ -2978,7 +3236,7 @@
       </p:sp>
       <p:sp>
         <p:nvSpPr>
-          <p:cNvPr id="262224997" name="Date Placeholder 4"/>
+          <p:cNvPr id="377373710" name="Date Placeholder 4"/>
           <p:cNvSpPr>
             <a:spLocks noGrp="1"/>
           </p:cNvSpPr>
@@ -3004,7 +3262,7 @@
       </p:sp>
       <p:sp>
         <p:nvSpPr>
-          <p:cNvPr id="969822929" name="Footer Placeholder 5"/>
+          <p:cNvPr id="532661011" name="Footer Placeholder 5"/>
           <p:cNvSpPr>
             <a:spLocks noGrp="1"/>
           </p:cNvSpPr>
@@ -3026,7 +3284,7 @@
       </p:sp>
       <p:sp>
         <p:nvSpPr>
-          <p:cNvPr id="1077246249" name="Slide Number Placeholder 6"/>
+          <p:cNvPr id="116776367" name="Slide Number Placeholder 6"/>
           <p:cNvSpPr>
             <a:spLocks noGrp="1"/>
           </p:cNvSpPr>
@@ -3077,7 +3335,7 @@
       </p:grpSpPr>
       <p:sp>
         <p:nvSpPr>
-          <p:cNvPr id="942674443" name="Title 1"/>
+          <p:cNvPr id="80687333" name="Title 1"/>
           <p:cNvSpPr>
             <a:spLocks noGrp="1"/>
           </p:cNvSpPr>
@@ -3107,7 +3365,7 @@
       </p:sp>
       <p:sp>
         <p:nvSpPr>
-          <p:cNvPr id="1886648745" name="Text Placeholder 2"/>
+          <p:cNvPr id="1692879156" name="Text Placeholder 2"/>
           <p:cNvSpPr>
             <a:spLocks noGrp="1"/>
           </p:cNvSpPr>
@@ -3175,7 +3433,7 @@
       </p:sp>
       <p:sp>
         <p:nvSpPr>
-          <p:cNvPr id="340604533" name="Content Placeholder 3"/>
+          <p:cNvPr id="1588713457" name="Content Placeholder 3"/>
           <p:cNvSpPr>
             <a:spLocks noGrp="1"/>
           </p:cNvSpPr>
@@ -3274,7 +3532,7 @@
       </p:sp>
       <p:sp>
         <p:nvSpPr>
-          <p:cNvPr id="10752074" name="Text Placeholder 4"/>
+          <p:cNvPr id="581812948" name="Text Placeholder 4"/>
           <p:cNvSpPr>
             <a:spLocks noGrp="1"/>
           </p:cNvSpPr>
@@ -3342,7 +3600,7 @@
       </p:sp>
       <p:sp>
         <p:nvSpPr>
-          <p:cNvPr id="1738865245" name="Content Placeholder 5"/>
+          <p:cNvPr id="47481304" name="Content Placeholder 5"/>
           <p:cNvSpPr>
             <a:spLocks noGrp="1"/>
           </p:cNvSpPr>
@@ -3441,7 +3699,7 @@
       </p:sp>
       <p:sp>
         <p:nvSpPr>
-          <p:cNvPr id="1805782556" name="Date Placeholder 6"/>
+          <p:cNvPr id="1041479345" name="Date Placeholder 6"/>
           <p:cNvSpPr>
             <a:spLocks noGrp="1"/>
           </p:cNvSpPr>
@@ -3467,7 +3725,7 @@
       </p:sp>
       <p:sp>
         <p:nvSpPr>
-          <p:cNvPr id="14192751" name="Footer Placeholder 7"/>
+          <p:cNvPr id="229041608" name="Footer Placeholder 7"/>
           <p:cNvSpPr>
             <a:spLocks noGrp="1"/>
           </p:cNvSpPr>
@@ -3489,7 +3747,7 @@
       </p:sp>
       <p:sp>
         <p:nvSpPr>
-          <p:cNvPr id="1020746900" name="Slide Number Placeholder 8"/>
+          <p:cNvPr id="2024346745" name="Slide Number Placeholder 8"/>
           <p:cNvSpPr>
             <a:spLocks noGrp="1"/>
           </p:cNvSpPr>
@@ -3540,7 +3798,7 @@
       </p:grpSpPr>
       <p:sp>
         <p:nvSpPr>
-          <p:cNvPr id="1984355524" name="Title 1"/>
+          <p:cNvPr id="1788733204" name="Title 1"/>
           <p:cNvSpPr>
             <a:spLocks noGrp="1"/>
           </p:cNvSpPr>
@@ -3566,7 +3824,7 @@
       </p:sp>
       <p:sp>
         <p:nvSpPr>
-          <p:cNvPr id="86603503" name="Date Placeholder 2"/>
+          <p:cNvPr id="808595696" name="Date Placeholder 2"/>
           <p:cNvSpPr>
             <a:spLocks noGrp="1"/>
           </p:cNvSpPr>
@@ -3592,7 +3850,7 @@
       </p:sp>
       <p:sp>
         <p:nvSpPr>
-          <p:cNvPr id="601139490" name="Footer Placeholder 3"/>
+          <p:cNvPr id="2064847498" name="Footer Placeholder 3"/>
           <p:cNvSpPr>
             <a:spLocks noGrp="1"/>
           </p:cNvSpPr>
@@ -3614,7 +3872,7 @@
       </p:sp>
       <p:sp>
         <p:nvSpPr>
-          <p:cNvPr id="319385388" name="Slide Number Placeholder 4"/>
+          <p:cNvPr id="1588779311" name="Slide Number Placeholder 4"/>
           <p:cNvSpPr>
             <a:spLocks noGrp="1"/>
           </p:cNvSpPr>
@@ -3665,7 +3923,7 @@
       </p:grpSpPr>
       <p:sp>
         <p:nvSpPr>
-          <p:cNvPr id="194262738" name="Date Placeholder 1"/>
+          <p:cNvPr id="804447782" name="Date Placeholder 1"/>
           <p:cNvSpPr>
             <a:spLocks noGrp="1"/>
           </p:cNvSpPr>
@@ -3691,7 +3949,7 @@
       </p:sp>
       <p:sp>
         <p:nvSpPr>
-          <p:cNvPr id="33659482" name="Footer Placeholder 2"/>
+          <p:cNvPr id="1940385705" name="Footer Placeholder 2"/>
           <p:cNvSpPr>
             <a:spLocks noGrp="1"/>
           </p:cNvSpPr>
@@ -3713,7 +3971,7 @@
       </p:sp>
       <p:sp>
         <p:nvSpPr>
-          <p:cNvPr id="1433761193" name="Slide Number Placeholder 3"/>
+          <p:cNvPr id="1134901183" name="Slide Number Placeholder 3"/>
           <p:cNvSpPr>
             <a:spLocks noGrp="1"/>
           </p:cNvSpPr>
@@ -3764,7 +4022,7 @@
       </p:grpSpPr>
       <p:sp>
         <p:nvSpPr>
-          <p:cNvPr id="1086800870" name="Title 1"/>
+          <p:cNvPr id="1007611105" name="Title 1"/>
           <p:cNvSpPr>
             <a:spLocks noGrp="1"/>
           </p:cNvSpPr>
@@ -3799,7 +4057,7 @@
       </p:sp>
       <p:sp>
         <p:nvSpPr>
-          <p:cNvPr id="2030652192" name="Content Placeholder 2"/>
+          <p:cNvPr id="940310134" name="Content Placeholder 2"/>
           <p:cNvSpPr>
             <a:spLocks noGrp="1"/>
           </p:cNvSpPr>
@@ -3898,7 +4156,7 @@
       </p:sp>
       <p:sp>
         <p:nvSpPr>
-          <p:cNvPr id="7084556" name="Text Placeholder 3"/>
+          <p:cNvPr id="1419996346" name="Text Placeholder 3"/>
           <p:cNvSpPr>
             <a:spLocks noGrp="1"/>
           </p:cNvSpPr>
@@ -3966,7 +4224,7 @@
       </p:sp>
       <p:sp>
         <p:nvSpPr>
-          <p:cNvPr id="2098224031" name="Date Placeholder 4"/>
+          <p:cNvPr id="978744076" name="Date Placeholder 4"/>
           <p:cNvSpPr>
             <a:spLocks noGrp="1"/>
           </p:cNvSpPr>
@@ -3992,7 +4250,7 @@
       </p:sp>
       <p:sp>
         <p:nvSpPr>
-          <p:cNvPr id="1662005344" name="Footer Placeholder 5"/>
+          <p:cNvPr id="859123333" name="Footer Placeholder 5"/>
           <p:cNvSpPr>
             <a:spLocks noGrp="1"/>
           </p:cNvSpPr>
@@ -4014,7 +4272,7 @@
       </p:sp>
       <p:sp>
         <p:nvSpPr>
-          <p:cNvPr id="335903169" name="Slide Number Placeholder 6"/>
+          <p:cNvPr id="490835867" name="Slide Number Placeholder 6"/>
           <p:cNvSpPr>
             <a:spLocks noGrp="1"/>
           </p:cNvSpPr>
@@ -4065,7 +4323,7 @@
       </p:grpSpPr>
       <p:sp>
         <p:nvSpPr>
-          <p:cNvPr id="827011926" name="Title 1"/>
+          <p:cNvPr id="671318907" name="Title 1"/>
           <p:cNvSpPr>
             <a:spLocks noGrp="1"/>
           </p:cNvSpPr>
@@ -4100,7 +4358,7 @@
       </p:sp>
       <p:sp>
         <p:nvSpPr>
-          <p:cNvPr id="1736260978" name="Picture Placeholder 2"/>
+          <p:cNvPr id="2098991379" name="Picture Placeholder 2"/>
           <p:cNvSpPr>
             <a:spLocks noGrp="1"/>
           </p:cNvSpPr>
@@ -4164,7 +4422,7 @@
       </p:sp>
       <p:sp>
         <p:nvSpPr>
-          <p:cNvPr id="59008526" name="Text Placeholder 3"/>
+          <p:cNvPr id="1133672244" name="Text Placeholder 3"/>
           <p:cNvSpPr>
             <a:spLocks noGrp="1"/>
           </p:cNvSpPr>
@@ -4232,7 +4490,7 @@
       </p:sp>
       <p:sp>
         <p:nvSpPr>
-          <p:cNvPr id="41947129" name="Date Placeholder 4"/>
+          <p:cNvPr id="506133223" name="Date Placeholder 4"/>
           <p:cNvSpPr>
             <a:spLocks noGrp="1"/>
           </p:cNvSpPr>
@@ -4258,7 +4516,7 @@
       </p:sp>
       <p:sp>
         <p:nvSpPr>
-          <p:cNvPr id="543866851" name="Footer Placeholder 5"/>
+          <p:cNvPr id="881624304" name="Footer Placeholder 5"/>
           <p:cNvSpPr>
             <a:spLocks noGrp="1"/>
           </p:cNvSpPr>
@@ -4280,7 +4538,7 @@
       </p:sp>
       <p:sp>
         <p:nvSpPr>
-          <p:cNvPr id="1998509468" name="Slide Number Placeholder 6"/>
+          <p:cNvPr id="383699409" name="Slide Number Placeholder 6"/>
           <p:cNvSpPr>
             <a:spLocks noGrp="1"/>
           </p:cNvSpPr>
@@ -4336,7 +4594,7 @@
       </p:grpSpPr>
       <p:sp>
         <p:nvSpPr>
-          <p:cNvPr id="754019679" name="Shape 1059"/>
+          <p:cNvPr id="2057428238" name="Shape 1059"/>
           <p:cNvSpPr>
             <a:spLocks noChangeArrowheads="1" noGrp="1"/>
           </p:cNvSpPr>
@@ -4414,7 +4672,7 @@
       </p:sp>
       <p:sp>
         <p:nvSpPr>
-          <p:cNvPr id="58638138" name="Shape 1060"/>
+          <p:cNvPr id="1842909667" name="Shape 1060"/>
           <p:cNvSpPr>
             <a:spLocks noChangeArrowheads="1" noGrp="1"/>
           </p:cNvSpPr>
@@ -4495,7 +4753,7 @@
       </p:sp>
       <p:sp>
         <p:nvSpPr>
-          <p:cNvPr id="134367174" name="Shape 1061"/>
+          <p:cNvPr id="1673697037" name="Shape 1061"/>
           <p:cNvSpPr>
             <a:spLocks noChangeArrowheads="1" noGrp="1"/>
           </p:cNvSpPr>
@@ -4503,7 +4761,7 @@
         </p:nvSpPr>
         <p:spPr bwMode="auto">
           <a:xfrm>
-            <a:off x="1637457" y="1"/>
+            <a:off x="1637456" y="1"/>
             <a:ext cx="3839633" cy="2609650"/>
           </a:xfrm>
           <a:custGeom>
@@ -4613,7 +4871,7 @@
       </p:sp>
       <p:sp>
         <p:nvSpPr>
-          <p:cNvPr id="163112286" name="Title 1"/>
+          <p:cNvPr id="1450524932" name="Title 1"/>
           <p:cNvSpPr>
             <a:spLocks noGrp="1"/>
           </p:cNvSpPr>
@@ -4649,7 +4907,7 @@
       </p:sp>
       <p:sp>
         <p:nvSpPr>
-          <p:cNvPr id="313247065" name="Text Placeholder 2"/>
+          <p:cNvPr id="1834658112" name="Text Placeholder 2"/>
           <p:cNvSpPr>
             <a:spLocks noGrp="1"/>
           </p:cNvSpPr>
@@ -4725,7 +4983,7 @@
       </p:sp>
       <p:sp>
         <p:nvSpPr>
-          <p:cNvPr id="1422598279" name="Date Placeholder 3"/>
+          <p:cNvPr id="1976158528" name="Date Placeholder 3"/>
           <p:cNvSpPr>
             <a:spLocks noGrp="1"/>
           </p:cNvSpPr>
@@ -4736,7 +4994,7 @@
         <p:spPr bwMode="auto">
           <a:xfrm>
             <a:off x="609599" y="6356351"/>
-            <a:ext cx="2844799" cy="365125"/>
+            <a:ext cx="2844798" cy="365125"/>
           </a:xfrm>
           <a:prstGeom prst="rect">
             <a:avLst/>
@@ -4769,7 +5027,7 @@
       </p:sp>
       <p:sp>
         <p:nvSpPr>
-          <p:cNvPr id="112957990" name="Footer Placeholder 4"/>
+          <p:cNvPr id="1509448092" name="Footer Placeholder 4"/>
           <p:cNvSpPr>
             <a:spLocks noGrp="1"/>
           </p:cNvSpPr>
@@ -4809,7 +5067,7 @@
       </p:sp>
       <p:sp>
         <p:nvSpPr>
-          <p:cNvPr id="38531742" name="Slide Number Placeholder 5"/>
+          <p:cNvPr id="501728937" name="Slide Number Placeholder 5"/>
           <p:cNvSpPr>
             <a:spLocks noGrp="1"/>
           </p:cNvSpPr>
@@ -4820,7 +5078,7 @@
         <p:spPr bwMode="auto">
           <a:xfrm>
             <a:off x="8737599" y="6356351"/>
-            <a:ext cx="2844799" cy="365125"/>
+            <a:ext cx="2844798" cy="365125"/>
           </a:xfrm>
           <a:prstGeom prst="rect">
             <a:avLst/>
@@ -5158,7 +5416,7 @@
       </p:grpSpPr>
       <p:sp>
         <p:nvSpPr>
-          <p:cNvPr id="58379854" name="Title 1"/>
+          <p:cNvPr id="538637553" name="Title 1"/>
           <p:cNvSpPr>
             <a:spLocks noGrp="1"/>
           </p:cNvSpPr>
@@ -5169,7 +5427,7 @@
         <p:spPr bwMode="auto">
           <a:xfrm flipH="0" flipV="0">
             <a:off x="4595833" y="1637631"/>
-            <a:ext cx="6720746" cy="1186447"/>
+            <a:ext cx="6720745" cy="1186447"/>
           </a:xfrm>
         </p:spPr>
         <p:txBody>
@@ -5195,7 +5453,7 @@
       </p:sp>
       <p:sp>
         <p:nvSpPr>
-          <p:cNvPr id="1170986502" name="Subtitle 2"/>
+          <p:cNvPr id="1729781235" name="Subtitle 2"/>
           <p:cNvSpPr>
             <a:spLocks noGrp="1"/>
           </p:cNvSpPr>
@@ -5206,7 +5464,7 @@
         <p:spPr bwMode="auto">
           <a:xfrm>
             <a:off x="4655839" y="3068959"/>
-            <a:ext cx="6720746" cy="720079"/>
+            <a:ext cx="6720745" cy="720079"/>
           </a:xfrm>
         </p:spPr>
         <p:txBody>
@@ -5217,6 +5475,184 @@
               <a:defRPr/>
             </a:pPr>
             <a:endParaRPr lang="en-US"/>
+          </a:p>
+        </p:txBody>
+      </p:sp>
+    </p:spTree>
+  </p:cSld>
+  <p:clrMapOvr>
+    <a:masterClrMapping/>
+  </p:clrMapOvr>
+  <mc:AlternateContent xmlns:mc="http://schemas.openxmlformats.org/markup-compatibility/2006">
+    <mc:Choice xmlns:p159="http://schemas.microsoft.com/office/powerpoint/2015/09/main" xmlns:p14="http://schemas.microsoft.com/office/powerpoint/2010/main" Requires="p159">
+      <p:transition p14:dur="2000" advClick="1"/>
+    </mc:Choice>
+    <mc:Fallback>
+      <p:transition advClick="1"/>
+    </mc:Fallback>
+  </mc:AlternateContent>
+</p:sld>
+</file>
+
+<file path=ppt/slides/slide10.xml><?xml version="1.0" encoding="utf-8"?>
+<p:sld xmlns:a="http://schemas.openxmlformats.org/drawingml/2006/main" xmlns:r="http://schemas.openxmlformats.org/officeDocument/2006/relationships" xmlns:p="http://schemas.openxmlformats.org/presentationml/2006/main" xmlns:m="http://schemas.openxmlformats.org/officeDocument/2006/math" xmlns:w="http://schemas.openxmlformats.org/wordprocessingml/2006/main" xmlns:mc="http://schemas.openxmlformats.org/markup-compatibility/2006" showMasterPhAnim="0" showMasterSp="1" show="1">
+  <p:cSld name="">
+    <p:spTree>
+      <p:nvGrpSpPr>
+        <p:cNvPr id="1" name=""/>
+        <p:cNvGrpSpPr/>
+        <p:nvPr/>
+      </p:nvGrpSpPr>
+      <p:grpSpPr bwMode="auto">
+        <a:xfrm>
+          <a:off x="0" y="0"/>
+          <a:ext cx="0" cy="0"/>
+          <a:chOff x="0" y="0"/>
+          <a:chExt cx="0" cy="0"/>
+        </a:xfrm>
+      </p:grpSpPr>
+      <p:sp>
+        <p:nvSpPr>
+          <p:cNvPr id="2085401184" name="Title 1"/>
+          <p:cNvSpPr>
+            <a:spLocks noGrp="1"/>
+          </p:cNvSpPr>
+          <p:nvPr>
+            <p:ph type="title"/>
+          </p:nvPr>
+        </p:nvSpPr>
+        <p:spPr bwMode="auto"/>
+        <p:txBody>
+          <a:bodyPr/>
+          <a:lstStyle/>
+          <a:p>
+            <a:pPr>
+              <a:defRPr/>
+            </a:pPr>
+            <a:r>
+              <a:rPr/>
+              <a:t>V.II. </a:t>
+            </a:r>
+            <a:r>
+              <a:rPr lang="ru-RU"/>
+              <a:t>Итог – минусы </a:t>
+            </a:r>
+            <a:r>
+              <a:rPr lang="en-US"/>
+              <a:t>Clyx</a:t>
+            </a:r>
+            <a:endParaRPr/>
+          </a:p>
+        </p:txBody>
+      </p:sp>
+      <p:sp>
+        <p:nvSpPr>
+          <p:cNvPr id="1782545448" name="Content Placeholder 2"/>
+          <p:cNvSpPr>
+            <a:spLocks noGrp="1"/>
+          </p:cNvSpPr>
+          <p:nvPr>
+            <p:ph idx="1"/>
+          </p:nvPr>
+        </p:nvSpPr>
+        <p:spPr bwMode="auto"/>
+        <p:txBody>
+          <a:bodyPr/>
+          <a:lstStyle/>
+          <a:p>
+            <a:pPr>
+              <a:defRPr/>
+            </a:pPr>
+            <a:endParaRPr/>
+          </a:p>
+        </p:txBody>
+      </p:sp>
+    </p:spTree>
+  </p:cSld>
+  <p:clrMapOvr>
+    <a:masterClrMapping/>
+  </p:clrMapOvr>
+  <mc:AlternateContent xmlns:mc="http://schemas.openxmlformats.org/markup-compatibility/2006">
+    <mc:Choice xmlns:p159="http://schemas.microsoft.com/office/powerpoint/2015/09/main" xmlns:p14="http://schemas.microsoft.com/office/powerpoint/2010/main" Requires="p159">
+      <p:transition p14:dur="2000" advClick="1"/>
+    </mc:Choice>
+    <mc:Fallback>
+      <p:transition advClick="1"/>
+    </mc:Fallback>
+  </mc:AlternateContent>
+</p:sld>
+</file>
+
+<file path=ppt/slides/slide11.xml><?xml version="1.0" encoding="utf-8"?>
+<p:sld xmlns:a="http://schemas.openxmlformats.org/drawingml/2006/main" xmlns:r="http://schemas.openxmlformats.org/officeDocument/2006/relationships" xmlns:p="http://schemas.openxmlformats.org/presentationml/2006/main" xmlns:m="http://schemas.openxmlformats.org/officeDocument/2006/math" xmlns:w="http://schemas.openxmlformats.org/wordprocessingml/2006/main" xmlns:mc="http://schemas.openxmlformats.org/markup-compatibility/2006" showMasterPhAnim="0" showMasterSp="1" show="1">
+  <p:cSld name="">
+    <p:spTree>
+      <p:nvGrpSpPr>
+        <p:cNvPr id="1" name=""/>
+        <p:cNvGrpSpPr/>
+        <p:nvPr/>
+      </p:nvGrpSpPr>
+      <p:grpSpPr bwMode="auto">
+        <a:xfrm>
+          <a:off x="0" y="0"/>
+          <a:ext cx="0" cy="0"/>
+          <a:chOff x="0" y="0"/>
+          <a:chExt cx="0" cy="0"/>
+        </a:xfrm>
+      </p:grpSpPr>
+      <p:sp>
+        <p:nvSpPr>
+          <p:cNvPr id="1221484332" name="Title 1"/>
+          <p:cNvSpPr>
+            <a:spLocks noGrp="1"/>
+          </p:cNvSpPr>
+          <p:nvPr>
+            <p:ph type="title"/>
+          </p:nvPr>
+        </p:nvSpPr>
+        <p:spPr bwMode="auto"/>
+        <p:txBody>
+          <a:bodyPr/>
+          <a:lstStyle/>
+          <a:p>
+            <a:pPr>
+              <a:defRPr/>
+            </a:pPr>
+            <a:r>
+              <a:rPr/>
+              <a:t>V.III. </a:t>
+            </a:r>
+            <a:r>
+              <a:rPr lang="ru-RU"/>
+              <a:t>Итог – сферы применения </a:t>
+            </a:r>
+            <a:r>
+              <a:rPr lang="en-US"/>
+              <a:t>Clyx</a:t>
+            </a:r>
+            <a:endParaRPr/>
+          </a:p>
+        </p:txBody>
+      </p:sp>
+      <p:sp>
+        <p:nvSpPr>
+          <p:cNvPr id="797841894" name="Content Placeholder 2"/>
+          <p:cNvSpPr>
+            <a:spLocks noGrp="1"/>
+          </p:cNvSpPr>
+          <p:nvPr>
+            <p:ph idx="1"/>
+          </p:nvPr>
+        </p:nvSpPr>
+        <p:spPr bwMode="auto"/>
+        <p:txBody>
+          <a:bodyPr/>
+          <a:lstStyle/>
+          <a:p>
+            <a:pPr>
+              <a:defRPr/>
+            </a:pPr>
+            <a:endParaRPr/>
           </a:p>
         </p:txBody>
       </p:sp>
@@ -5255,7 +5691,7 @@
       </p:grpSpPr>
       <p:sp>
         <p:nvSpPr>
-          <p:cNvPr id="1471728192" name="Title 1"/>
+          <p:cNvPr id="513476392" name="Title 1"/>
           <p:cNvSpPr>
             <a:spLocks noGrp="1"/>
           </p:cNvSpPr>
@@ -5286,7 +5722,7 @@
       </p:sp>
       <p:sp>
         <p:nvSpPr>
-          <p:cNvPr id="1553212308" name="Content Placeholder 2"/>
+          <p:cNvPr id="1892579997" name="Content Placeholder 2"/>
           <p:cNvSpPr>
             <a:spLocks noGrp="1"/>
           </p:cNvSpPr>
@@ -5294,16 +5730,23 @@
             <p:ph idx="1"/>
           </p:nvPr>
         </p:nvSpPr>
-        <p:spPr bwMode="auto"/>
-        <p:txBody>
-          <a:bodyPr/>
+        <p:spPr bwMode="auto">
+          <a:xfrm flipH="0" flipV="0">
+            <a:off x="609598" y="1600200"/>
+            <a:ext cx="8219021" cy="2784893"/>
+          </a:xfrm>
+        </p:spPr>
+        <p:txBody>
+          <a:bodyPr vertOverflow="overflow" horzOverflow="overflow" vert="horz" wrap="square" lIns="91440" tIns="45720" rIns="91440" bIns="45720" numCol="1" spcCol="0" rtlCol="0" fromWordArt="0" anchor="t" anchorCtr="0" forceAA="0" upright="0" compatLnSpc="0">
+            <a:normAutofit/>
+          </a:bodyPr>
           <a:lstStyle/>
           <a:p>
             <a:pPr>
               <a:defRPr/>
             </a:pPr>
             <a:r>
-              <a:rPr lang="ru-RU" sz="3200" b="0" i="0" u="none" strike="noStrike" cap="none" spc="0">
+              <a:rPr lang="ru-RU" sz="2200" b="0" i="0" u="none" strike="noStrike" cap="none" spc="0">
                 <a:solidFill>
                   <a:schemeClr val="tx1">
                     <a:lumMod val="75000"/>
@@ -5317,7 +5760,7 @@
               <a:t>В настоящее время существует большое количество дистрибутивов Linux, </a:t>
             </a:r>
             <a:r>
-              <a:rPr lang="ru-RU" sz="3200" b="0" i="0" u="none" strike="noStrike" cap="none" spc="0">
+              <a:rPr lang="ru-RU" sz="2200" b="0" i="0" u="none" strike="noStrike" cap="none" spc="0">
                 <a:solidFill>
                   <a:schemeClr val="tx1">
                     <a:lumMod val="75000"/>
@@ -5331,7 +5774,7 @@
               <a:t>таких как</a:t>
             </a:r>
             <a:r>
-              <a:rPr lang="en-US" sz="3200" b="0" i="0" u="none" strike="noStrike" cap="none" spc="0">
+              <a:rPr lang="en-US" sz="2200" b="0" i="0" u="none" strike="noStrike" cap="none" spc="0">
                 <a:solidFill>
                   <a:schemeClr val="tx1">
                     <a:lumMod val="75000"/>
@@ -5342,10 +5785,262 @@
                 <a:ea typeface="Arial"/>
                 <a:cs typeface="Arial"/>
               </a:rPr>
-              <a:t> Debian, Ubuntu</a:t>
-            </a:r>
-            <a:r>
-              <a:rPr lang="en-US" sz="3200" b="0" i="0" u="none" strike="noStrike" cap="none" spc="0">
+              <a:t> </a:t>
+            </a:r>
+            <a:r>
+              <a:rPr lang="en-US" sz="2200" b="1" i="0" u="none" strike="noStrike" cap="none" spc="0">
+                <a:solidFill>
+                  <a:schemeClr val="tx1">
+                    <a:lumMod val="75000"/>
+                    <a:lumOff val="25000"/>
+                  </a:schemeClr>
+                </a:solidFill>
+                <a:latin typeface="Arial"/>
+                <a:ea typeface="Arial"/>
+                <a:cs typeface="Arial"/>
+              </a:rPr>
+              <a:t>Debian</a:t>
+            </a:r>
+            <a:r>
+              <a:rPr lang="en-US" sz="2200" b="0" i="0" u="none" strike="noStrike" cap="none" spc="0">
+                <a:solidFill>
+                  <a:schemeClr val="tx1">
+                    <a:lumMod val="75000"/>
+                    <a:lumOff val="25000"/>
+                  </a:schemeClr>
+                </a:solidFill>
+                <a:latin typeface="Arial"/>
+                <a:ea typeface="Arial"/>
+                <a:cs typeface="Arial"/>
+              </a:rPr>
+              <a:t>, </a:t>
+            </a:r>
+            <a:r>
+              <a:rPr lang="en-US" sz="2200" b="1" i="0" u="none" strike="noStrike" cap="none" spc="0">
+                <a:solidFill>
+                  <a:schemeClr val="tx1">
+                    <a:lumMod val="75000"/>
+                    <a:lumOff val="25000"/>
+                  </a:schemeClr>
+                </a:solidFill>
+                <a:latin typeface="Arial"/>
+                <a:ea typeface="Arial"/>
+                <a:cs typeface="Arial"/>
+              </a:rPr>
+              <a:t>Ubuntu</a:t>
+            </a:r>
+            <a:r>
+              <a:rPr lang="en-US" sz="2200" b="1" i="0" u="none" strike="noStrike" cap="none" spc="0">
+                <a:solidFill>
+                  <a:schemeClr val="tx1">
+                    <a:lumMod val="75000"/>
+                    <a:lumOff val="25000"/>
+                  </a:schemeClr>
+                </a:solidFill>
+                <a:latin typeface="Arial"/>
+                <a:ea typeface="Arial"/>
+                <a:cs typeface="Arial"/>
+              </a:rPr>
+              <a:t> </a:t>
+            </a:r>
+            <a:r>
+              <a:rPr lang="en-US" sz="2200" b="0" i="0" u="none" strike="noStrike" cap="none" spc="0">
+                <a:solidFill>
+                  <a:schemeClr val="tx1">
+                    <a:lumMod val="75000"/>
+                    <a:lumOff val="25000"/>
+                  </a:schemeClr>
+                </a:solidFill>
+                <a:latin typeface="Arial"/>
+                <a:ea typeface="Arial"/>
+                <a:cs typeface="Arial"/>
+              </a:rPr>
+              <a:t>(</a:t>
+            </a:r>
+            <a:r>
+              <a:rPr lang="ru-RU" sz="2200" b="0" i="0" u="none" strike="noStrike" cap="none" spc="0">
+                <a:solidFill>
+                  <a:schemeClr val="tx1">
+                    <a:lumMod val="75000"/>
+                    <a:lumOff val="25000"/>
+                  </a:schemeClr>
+                </a:solidFill>
+                <a:latin typeface="Arial"/>
+                <a:ea typeface="Arial"/>
+                <a:cs typeface="Arial"/>
+              </a:rPr>
+              <a:t>на базе </a:t>
+            </a:r>
+            <a:r>
+              <a:rPr lang="en-US" sz="2200" b="0" i="0" u="none" strike="noStrike" cap="none" spc="0">
+                <a:solidFill>
+                  <a:schemeClr val="tx1">
+                    <a:lumMod val="75000"/>
+                    <a:lumOff val="25000"/>
+                  </a:schemeClr>
+                </a:solidFill>
+                <a:latin typeface="Arial"/>
+                <a:ea typeface="Arial"/>
+                <a:cs typeface="Arial"/>
+              </a:rPr>
+              <a:t>debian</a:t>
+            </a:r>
+            <a:r>
+              <a:rPr lang="en-US" sz="2200" b="0" i="0" u="none" strike="noStrike" cap="none" spc="0">
+                <a:solidFill>
+                  <a:schemeClr val="tx1">
+                    <a:lumMod val="75000"/>
+                    <a:lumOff val="25000"/>
+                  </a:schemeClr>
+                </a:solidFill>
+                <a:latin typeface="Arial"/>
+                <a:ea typeface="Arial"/>
+                <a:cs typeface="Arial"/>
+              </a:rPr>
+              <a:t>)</a:t>
+            </a:r>
+            <a:r>
+              <a:rPr lang="en-US" sz="2200" b="0" i="0" u="none" strike="noStrike" cap="none" spc="0">
+                <a:solidFill>
+                  <a:schemeClr val="tx1">
+                    <a:lumMod val="75000"/>
+                    <a:lumOff val="25000"/>
+                  </a:schemeClr>
+                </a:solidFill>
+                <a:latin typeface="Arial"/>
+                <a:ea typeface="Arial"/>
+                <a:cs typeface="Arial"/>
+              </a:rPr>
+              <a:t>, </a:t>
+            </a:r>
+            <a:r>
+              <a:rPr lang="en-US" sz="2200" b="1" i="0" u="none" strike="noStrike" cap="none" spc="0">
+                <a:solidFill>
+                  <a:schemeClr val="tx1">
+                    <a:lumMod val="75000"/>
+                    <a:lumOff val="25000"/>
+                  </a:schemeClr>
+                </a:solidFill>
+                <a:latin typeface="Arial"/>
+                <a:ea typeface="Arial"/>
+                <a:cs typeface="Arial"/>
+              </a:rPr>
+              <a:t>ArchLinux</a:t>
+            </a:r>
+            <a:r>
+              <a:rPr lang="en-US" sz="2200" b="0" i="0" u="none" strike="noStrike" cap="none" spc="0">
+                <a:solidFill>
+                  <a:schemeClr val="tx1">
+                    <a:lumMod val="75000"/>
+                    <a:lumOff val="25000"/>
+                  </a:schemeClr>
+                </a:solidFill>
+                <a:latin typeface="Arial"/>
+                <a:ea typeface="Arial"/>
+                <a:cs typeface="Arial"/>
+              </a:rPr>
+              <a:t>, </a:t>
+            </a:r>
+            <a:r>
+              <a:rPr lang="en-US" sz="2200" b="1" i="0" u="none" strike="noStrike" cap="none" spc="0">
+                <a:solidFill>
+                  <a:schemeClr val="tx1">
+                    <a:lumMod val="75000"/>
+                    <a:lumOff val="25000"/>
+                  </a:schemeClr>
+                </a:solidFill>
+                <a:latin typeface="Arial"/>
+                <a:ea typeface="Arial"/>
+                <a:cs typeface="Arial"/>
+              </a:rPr>
+              <a:t>NixOS </a:t>
+            </a:r>
+            <a:r>
+              <a:rPr lang="ru-RU" sz="2200" b="0" i="0" u="none" strike="noStrike" cap="none" spc="0">
+                <a:solidFill>
+                  <a:schemeClr val="tx1">
+                    <a:lumMod val="75000"/>
+                    <a:lumOff val="25000"/>
+                  </a:schemeClr>
+                </a:solidFill>
+                <a:latin typeface="Arial"/>
+                <a:ea typeface="Arial"/>
+                <a:cs typeface="Arial"/>
+              </a:rPr>
+              <a:t>и др</a:t>
+            </a:r>
+            <a:r>
+              <a:rPr lang="en-US" sz="2200" b="0" i="0" u="none" strike="noStrike" cap="none" spc="0">
+                <a:solidFill>
+                  <a:schemeClr val="tx1">
+                    <a:lumMod val="75000"/>
+                    <a:lumOff val="25000"/>
+                  </a:schemeClr>
+                </a:solidFill>
+                <a:latin typeface="Arial"/>
+                <a:ea typeface="Arial"/>
+                <a:cs typeface="Arial"/>
+              </a:rPr>
+              <a:t>; </a:t>
+            </a:r>
+            <a:r>
+              <a:rPr lang="ru-RU" sz="2200" b="0" i="0" u="none" strike="noStrike" cap="none" spc="0">
+                <a:solidFill>
+                  <a:schemeClr val="tx1">
+                    <a:lumMod val="75000"/>
+                    <a:lumOff val="25000"/>
+                  </a:schemeClr>
+                </a:solidFill>
+                <a:latin typeface="Arial"/>
+                <a:ea typeface="Arial"/>
+                <a:cs typeface="Arial"/>
+              </a:rPr>
+              <a:t>из российских – </a:t>
+            </a:r>
+            <a:r>
+              <a:rPr lang="en-US" sz="2200" b="1" i="0" u="none" strike="noStrike" cap="none" spc="0">
+                <a:solidFill>
+                  <a:schemeClr val="tx1">
+                    <a:lumMod val="75000"/>
+                    <a:lumOff val="25000"/>
+                  </a:schemeClr>
+                </a:solidFill>
+                <a:latin typeface="Arial"/>
+                <a:ea typeface="Arial"/>
+                <a:cs typeface="Arial"/>
+              </a:rPr>
+              <a:t>Alt linux</a:t>
+            </a:r>
+            <a:r>
+              <a:rPr lang="en-US" sz="2200" b="0" i="0" u="none" strike="noStrike" cap="none" spc="0">
+                <a:solidFill>
+                  <a:schemeClr val="tx1">
+                    <a:lumMod val="75000"/>
+                    <a:lumOff val="25000"/>
+                  </a:schemeClr>
+                </a:solidFill>
+                <a:latin typeface="Arial"/>
+                <a:ea typeface="Arial"/>
+                <a:cs typeface="Arial"/>
+              </a:rPr>
+              <a:t>, </a:t>
+            </a:r>
+            <a:r>
+              <a:rPr lang="en-US" sz="2200" b="1" i="0" u="none" strike="noStrike" cap="none" spc="0">
+                <a:solidFill>
+                  <a:schemeClr val="tx1">
+                    <a:lumMod val="75000"/>
+                    <a:lumOff val="25000"/>
+                  </a:schemeClr>
+                </a:solidFill>
+                <a:latin typeface="Arial"/>
+                <a:ea typeface="Arial"/>
+                <a:cs typeface="Arial"/>
+              </a:rPr>
+              <a:t>Astra linux</a:t>
+            </a:r>
+            <a:r>
+              <a:rPr lang="en-US" sz="2200" b="0" i="0" u="none" strike="noStrike" cap="none" spc="0">
                 <a:solidFill>
                   <a:schemeClr val="tx1">
                     <a:lumMod val="75000"/>
@@ -5359,7 +6054,7 @@
               <a:t> (</a:t>
             </a:r>
             <a:r>
-              <a:rPr lang="ru-RU" sz="3200" b="0" i="0" u="none" strike="noStrike" cap="none" spc="0">
+              <a:rPr lang="ru-RU" sz="2200" b="0" i="0" u="none" strike="noStrike" cap="none" spc="0">
                 <a:solidFill>
                   <a:schemeClr val="tx1">
                     <a:lumMod val="75000"/>
@@ -5373,7 +6068,7 @@
               <a:t>на базе </a:t>
             </a:r>
             <a:r>
-              <a:rPr lang="en-US" sz="3200" b="0" i="0" u="none" strike="noStrike" cap="none" spc="0">
+              <a:rPr lang="en-US" sz="2200" b="0" i="0" u="none" strike="noStrike" cap="none" spc="0">
                 <a:solidFill>
                   <a:schemeClr val="tx1">
                     <a:lumMod val="75000"/>
@@ -5387,7 +6082,7 @@
               <a:t>debian</a:t>
             </a:r>
             <a:r>
-              <a:rPr lang="en-US" sz="3200" b="0" i="0" u="none" strike="noStrike" cap="none" spc="0">
+              <a:rPr lang="en-US" sz="2200" b="0" i="0" u="none" strike="noStrike" cap="none" spc="0">
                 <a:solidFill>
                   <a:schemeClr val="tx1">
                     <a:lumMod val="75000"/>
@@ -5401,7 +6096,7 @@
               <a:t>)</a:t>
             </a:r>
             <a:r>
-              <a:rPr lang="en-US" sz="3200" b="0" i="0" u="none" strike="noStrike" cap="none" spc="0">
+              <a:rPr lang="ru-RU" sz="2200" b="0" i="0" u="none" strike="noStrike" cap="none" spc="0">
                 <a:solidFill>
                   <a:schemeClr val="tx1">
                     <a:lumMod val="75000"/>
@@ -5412,10 +6107,26 @@
                 <a:ea typeface="Arial"/>
                 <a:cs typeface="Arial"/>
               </a:rPr>
-              <a:t>, ArchLinux, NixOS, Fedora</a:t>
-            </a:r>
-            <a:r>
-              <a:rPr lang="ru-RU" sz="3200" b="0" i="0" u="none" strike="noStrike" cap="none" spc="0">
+              <a:t>. </a:t>
+            </a:r>
+            <a:endParaRPr sz="2200" b="0" i="0" u="none" strike="noStrike" cap="none" spc="0">
+              <a:solidFill>
+                <a:schemeClr val="tx1">
+                  <a:lumMod val="75000"/>
+                  <a:lumOff val="25000"/>
+                </a:schemeClr>
+              </a:solidFill>
+              <a:latin typeface="Arial"/>
+              <a:ea typeface="Arial"/>
+              <a:cs typeface="Arial"/>
+            </a:endParaRPr>
+          </a:p>
+          <a:p>
+            <a:pPr>
+              <a:defRPr/>
+            </a:pPr>
+            <a:r>
+              <a:rPr lang="ru-RU" sz="2200" b="0" i="0" u="none" strike="noStrike" cap="none" spc="0">
                 <a:solidFill>
                   <a:schemeClr val="tx1">
                     <a:lumMod val="75000"/>
@@ -5426,10 +6137,10 @@
                 <a:ea typeface="Arial"/>
                 <a:cs typeface="Arial"/>
               </a:rPr>
-              <a:t> и др</a:t>
-            </a:r>
-            <a:r>
-              <a:rPr lang="en-US" sz="3200" b="0" i="0" u="none" strike="noStrike" cap="none" spc="0">
+              <a:t>Они отличаются </a:t>
+            </a:r>
+            <a:r>
+              <a:rPr lang="ru-RU" sz="2200" b="1" i="0" u="none" strike="noStrike" cap="none" spc="0">
                 <a:solidFill>
                   <a:schemeClr val="tx1">
                     <a:lumMod val="75000"/>
@@ -5440,10 +6151,10 @@
                 <a:ea typeface="Arial"/>
                 <a:cs typeface="Arial"/>
               </a:rPr>
-              <a:t>; </a:t>
-            </a:r>
-            <a:r>
-              <a:rPr lang="ru-RU" sz="3200" b="0" i="0" u="none" strike="noStrike" cap="none" spc="0">
+              <a:t>внешним видом</a:t>
+            </a:r>
+            <a:r>
+              <a:rPr lang="ru-RU" sz="2200" b="0" i="0" u="none" strike="noStrike" cap="none" spc="0">
                 <a:solidFill>
                   <a:schemeClr val="tx1">
                     <a:lumMod val="75000"/>
@@ -5454,10 +6165,10 @@
                 <a:ea typeface="Arial"/>
                 <a:cs typeface="Arial"/>
               </a:rPr>
-              <a:t>из российских – </a:t>
-            </a:r>
-            <a:r>
-              <a:rPr lang="en-US" sz="3200" b="0" i="0" u="none" strike="noStrike" cap="none" spc="0">
+              <a:t>, </a:t>
+            </a:r>
+            <a:r>
+              <a:rPr lang="ru-RU" sz="2200" b="1" i="0" u="none" strike="noStrike" cap="none" spc="0">
                 <a:solidFill>
                   <a:schemeClr val="tx1">
                     <a:lumMod val="75000"/>
@@ -5468,10 +6179,10 @@
                 <a:ea typeface="Arial"/>
                 <a:cs typeface="Arial"/>
               </a:rPr>
-              <a:t>Alt linux, Astra linux (</a:t>
-            </a:r>
-            <a:r>
-              <a:rPr lang="ru-RU" sz="3200" b="0" i="0" u="none" strike="noStrike" cap="none" spc="0">
+              <a:t>способом установки программ</a:t>
+            </a:r>
+            <a:r>
+              <a:rPr lang="ru-RU" sz="2200" b="0" i="0" u="none" strike="noStrike" cap="none" spc="0">
                 <a:solidFill>
                   <a:schemeClr val="tx1">
                     <a:lumMod val="75000"/>
@@ -5482,10 +6193,10 @@
                 <a:ea typeface="Arial"/>
                 <a:cs typeface="Arial"/>
               </a:rPr>
-              <a:t>на базе </a:t>
-            </a:r>
-            <a:r>
-              <a:rPr lang="en-US" sz="3200" b="0" i="0" u="none" strike="noStrike" cap="none" spc="0">
+              <a:t>, </a:t>
+            </a:r>
+            <a:r>
+              <a:rPr lang="ru-RU" sz="2200" b="1" i="0" u="none" strike="noStrike" cap="none" spc="0">
                 <a:solidFill>
                   <a:schemeClr val="tx1">
                     <a:lumMod val="75000"/>
@@ -5496,10 +6207,10 @@
                 <a:ea typeface="Arial"/>
                 <a:cs typeface="Arial"/>
               </a:rPr>
-              <a:t>debian</a:t>
-            </a:r>
-            <a:r>
-              <a:rPr lang="en-US" sz="3200" b="0" i="0" u="none" strike="noStrike" cap="none" spc="0">
+              <a:t>стабильностью</a:t>
+            </a:r>
+            <a:r>
+              <a:rPr lang="ru-RU" sz="2200" b="0" i="0" u="none" strike="noStrike" cap="none" spc="0">
                 <a:solidFill>
                   <a:schemeClr val="tx1">
                     <a:lumMod val="75000"/>
@@ -5510,10 +6221,10 @@
                 <a:ea typeface="Arial"/>
                 <a:cs typeface="Arial"/>
               </a:rPr>
-              <a:t>)</a:t>
-            </a:r>
-            <a:r>
-              <a:rPr lang="ru-RU" sz="3200" b="0" i="0" u="none" strike="noStrike" cap="none" spc="0">
+              <a:t>, </a:t>
+            </a:r>
+            <a:r>
+              <a:rPr lang="ru-RU" sz="2200" b="1" i="0" u="none" strike="noStrike" cap="none" spc="0">
                 <a:solidFill>
                   <a:schemeClr val="tx1">
                     <a:lumMod val="75000"/>
@@ -5524,9 +6235,23 @@
                 <a:ea typeface="Arial"/>
                 <a:cs typeface="Arial"/>
               </a:rPr>
-              <a:t>. Они отличаются внешним видом, способом установки программ, стабильностью, требованиями к оборудованию и назначением. </a:t>
-            </a:r>
-            <a:endParaRPr sz="3200" b="0" i="0" u="none" strike="noStrike" cap="none" spc="0">
+              <a:t>требованиями к оборудованию и назначением</a:t>
+            </a:r>
+            <a:r>
+              <a:rPr lang="ru-RU" sz="2200" b="0" i="0" u="none" strike="noStrike" cap="none" spc="0">
+                <a:solidFill>
+                  <a:schemeClr val="tx1">
+                    <a:lumMod val="75000"/>
+                    <a:lumOff val="25000"/>
+                  </a:schemeClr>
+                </a:solidFill>
+                <a:latin typeface="Arial"/>
+                <a:ea typeface="Arial"/>
+                <a:cs typeface="Arial"/>
+              </a:rPr>
+              <a:t>. </a:t>
+            </a:r>
+            <a:endParaRPr sz="2200" b="0" i="0" u="none" strike="noStrike" cap="none" spc="0">
               <a:solidFill>
                 <a:schemeClr val="tx1">
                   <a:lumMod val="75000"/>
@@ -5540,6 +6265,144 @@
           </a:p>
         </p:txBody>
       </p:sp>
+      <p:pic>
+        <p:nvPicPr>
+          <p:cNvPr id="977548682" name=""/>
+          <p:cNvPicPr>
+            <a:picLocks noChangeAspect="1"/>
+          </p:cNvPicPr>
+          <p:nvPr/>
+        </p:nvPicPr>
+        <p:blipFill rotWithShape="1">
+          <a:blip r:embed="rId3"/>
+          <a:stretch/>
+        </p:blipFill>
+        <p:spPr bwMode="auto">
+          <a:xfrm flipH="0" flipV="0">
+            <a:off x="315960" y="4164102"/>
+            <a:ext cx="2444884" cy="1902120"/>
+          </a:xfrm>
+          <a:prstGeom prst="rect">
+            <a:avLst/>
+          </a:prstGeom>
+        </p:spPr>
+      </p:pic>
+      <p:pic>
+        <p:nvPicPr>
+          <p:cNvPr id="1877366427" name=""/>
+          <p:cNvPicPr>
+            <a:picLocks noChangeAspect="1"/>
+          </p:cNvPicPr>
+          <p:nvPr/>
+        </p:nvPicPr>
+        <p:blipFill rotWithShape="1">
+          <a:blip r:embed="rId4"/>
+          <a:stretch/>
+        </p:blipFill>
+        <p:spPr bwMode="auto">
+          <a:xfrm flipH="0" flipV="0">
+            <a:off x="2760845" y="4858429"/>
+            <a:ext cx="1721610" cy="1147739"/>
+          </a:xfrm>
+          <a:prstGeom prst="rect">
+            <a:avLst/>
+          </a:prstGeom>
+        </p:spPr>
+      </p:pic>
+      <p:pic>
+        <p:nvPicPr>
+          <p:cNvPr id="2106732880" name=""/>
+          <p:cNvPicPr>
+            <a:picLocks noChangeAspect="1"/>
+          </p:cNvPicPr>
+          <p:nvPr/>
+        </p:nvPicPr>
+        <p:blipFill rotWithShape="1">
+          <a:blip r:embed="rId5"/>
+          <a:stretch/>
+        </p:blipFill>
+        <p:spPr bwMode="auto">
+          <a:xfrm flipH="0" flipV="0">
+            <a:off x="4719109" y="5115162"/>
+            <a:ext cx="2640522" cy="875773"/>
+          </a:xfrm>
+          <a:prstGeom prst="rect">
+            <a:avLst/>
+          </a:prstGeom>
+        </p:spPr>
+      </p:pic>
+      <p:pic>
+        <p:nvPicPr>
+          <p:cNvPr id="1534628498" name=""/>
+          <p:cNvPicPr>
+            <a:picLocks noChangeAspect="1"/>
+          </p:cNvPicPr>
+          <p:nvPr/>
+        </p:nvPicPr>
+        <p:blipFill rotWithShape="1">
+          <a:blip r:embed="rId6">
+            <a:extLst>
+              <a:ext uri="{96DAC541-7B7A-43D3-8B79-37D633B846F1}">
+                <asvg:svgBlip xmlns:asvg="http://schemas.microsoft.com/office/drawing/2016/SVG/main" r:embed="rId7"/>
+              </a:ext>
+            </a:extLst>
+          </a:blip>
+          <a:stretch/>
+        </p:blipFill>
+        <p:spPr bwMode="auto">
+          <a:xfrm flipH="0" flipV="0">
+            <a:off x="7244807" y="4648051"/>
+            <a:ext cx="3167625" cy="1703024"/>
+          </a:xfrm>
+          <a:prstGeom prst="rect">
+            <a:avLst/>
+          </a:prstGeom>
+        </p:spPr>
+      </p:pic>
+      <p:pic>
+        <p:nvPicPr>
+          <p:cNvPr id="1366800950" name=""/>
+          <p:cNvPicPr>
+            <a:picLocks noChangeAspect="1"/>
+          </p:cNvPicPr>
+          <p:nvPr/>
+        </p:nvPicPr>
+        <p:blipFill rotWithShape="1">
+          <a:blip r:embed="rId8"/>
+          <a:stretch/>
+        </p:blipFill>
+        <p:spPr bwMode="auto">
+          <a:xfrm flipH="0" flipV="0">
+            <a:off x="9055645" y="2693897"/>
+            <a:ext cx="2613697" cy="1470204"/>
+          </a:xfrm>
+          <a:prstGeom prst="rect">
+            <a:avLst/>
+          </a:prstGeom>
+        </p:spPr>
+      </p:pic>
+      <p:pic>
+        <p:nvPicPr>
+          <p:cNvPr id="679470168" name=""/>
+          <p:cNvPicPr>
+            <a:picLocks noChangeAspect="1"/>
+          </p:cNvPicPr>
+          <p:nvPr/>
+        </p:nvPicPr>
+        <p:blipFill rotWithShape="1">
+          <a:blip r:embed="rId9"/>
+          <a:stretch/>
+        </p:blipFill>
+        <p:spPr bwMode="auto">
+          <a:xfrm flipH="0" flipV="0">
+            <a:off x="8828620" y="1600200"/>
+            <a:ext cx="3067747" cy="1160769"/>
+          </a:xfrm>
+          <a:prstGeom prst="rect">
+            <a:avLst/>
+          </a:prstGeom>
+        </p:spPr>
+      </p:pic>
     </p:spTree>
   </p:cSld>
   <p:clrMapOvr>
@@ -5575,7 +6438,7 @@
       </p:grpSpPr>
       <p:sp>
         <p:nvSpPr>
-          <p:cNvPr id="1048253507" name="Title 1"/>
+          <p:cNvPr id="236037654" name="Title 1"/>
           <p:cNvSpPr>
             <a:spLocks noGrp="1"/>
           </p:cNvSpPr>
@@ -5593,155 +6456,154 @@
             </a:pPr>
             <a:r>
               <a:rPr/>
-              <a:t>II. </a:t>
+              <a:t>_. </a:t>
             </a:r>
             <a:r>
               <a:rPr lang="ru-RU"/>
-              <a:t>Проблемы существующих ОС</a:t>
-            </a:r>
-            <a:endParaRPr/>
-          </a:p>
-        </p:txBody>
-      </p:sp>
-      <p:sp>
-        <p:nvSpPr>
-          <p:cNvPr id="1871885516" name="Content Placeholder 2"/>
-          <p:cNvSpPr>
-            <a:spLocks noGrp="1"/>
-          </p:cNvSpPr>
-          <p:nvPr>
-            <p:ph idx="1"/>
+              <a:t>Основные принципы </a:t>
+            </a:r>
+            <a:r>
+              <a:rPr lang="en-US"/>
+              <a:t>Clyx</a:t>
+            </a:r>
+            <a:endParaRPr/>
+          </a:p>
+        </p:txBody>
+      </p:sp>
+      <p:sp>
+        <p:nvSpPr>
+          <p:cNvPr id="390523747" name="Content Placeholder 2"/>
+          <p:cNvSpPr>
+            <a:spLocks noGrp="1"/>
+          </p:cNvSpPr>
+          <p:nvPr>
+            <p:ph sz="half" idx="1"/>
           </p:nvPr>
         </p:nvSpPr>
         <p:spPr bwMode="auto">
-          <a:xfrm flipH="0" flipV="0">
-            <a:off x="609599" y="1600201"/>
-            <a:ext cx="4572373" cy="4525962"/>
+          <a:xfrm>
+            <a:off x="609598" y="1600200"/>
+            <a:ext cx="5384799" cy="4525961"/>
           </a:xfrm>
         </p:spPr>
         <p:txBody>
-          <a:bodyPr vertOverflow="overflow" horzOverflow="overflow" vert="horz" wrap="square" lIns="91440" tIns="45720" rIns="91440" bIns="45720" numCol="1" spcCol="0" rtlCol="0" fromWordArt="0" anchor="t" anchorCtr="0" forceAA="0" upright="0" compatLnSpc="0">
-            <a:normAutofit fontScale="95000" lnSpcReduction="1000"/>
-          </a:bodyPr>
-          <a:lstStyle/>
-          <a:p>
-            <a:pPr>
-              <a:defRPr/>
-            </a:pPr>
-            <a:r>
-              <a:rPr lang="ru-RU" sz="3200" b="0" i="0" u="none" strike="noStrike" cap="none" spc="0">
-                <a:solidFill>
-                  <a:schemeClr val="tx1">
-                    <a:lumMod val="75000"/>
-                    <a:lumOff val="25000"/>
-                  </a:schemeClr>
-                </a:solidFill>
-                <a:latin typeface="Arial"/>
-                <a:ea typeface="Arial"/>
-                <a:cs typeface="Arial"/>
-              </a:rPr>
-              <a:t>Большинство решений </a:t>
-            </a:r>
-            <a:r>
-              <a:rPr lang="ru-RU" sz="3200" b="1" i="0" u="none" strike="noStrike" cap="none" spc="0">
-                <a:solidFill>
-                  <a:schemeClr val="tx1">
-                    <a:lumMod val="75000"/>
-                    <a:lumOff val="25000"/>
-                  </a:schemeClr>
-                </a:solidFill>
-                <a:latin typeface="Arial"/>
-                <a:ea typeface="Arial"/>
-                <a:cs typeface="Arial"/>
-              </a:rPr>
-              <a:t>либо сложны</a:t>
-            </a:r>
-            <a:r>
-              <a:rPr lang="ru-RU" sz="3200" b="0" i="0" u="none" strike="noStrike" cap="none" spc="0">
-                <a:solidFill>
-                  <a:schemeClr val="tx1">
-                    <a:lumMod val="75000"/>
-                    <a:lumOff val="25000"/>
-                  </a:schemeClr>
-                </a:solidFill>
-                <a:latin typeface="Arial"/>
-                <a:ea typeface="Arial"/>
-                <a:cs typeface="Arial"/>
-              </a:rPr>
-              <a:t> для массового пользователя, </a:t>
-            </a:r>
-            <a:r>
-              <a:rPr lang="ru-RU" sz="3200" b="1" i="0" u="none" strike="noStrike" cap="none" spc="0">
-                <a:solidFill>
-                  <a:schemeClr val="tx1">
-                    <a:lumMod val="75000"/>
-                    <a:lumOff val="25000"/>
-                  </a:schemeClr>
-                </a:solidFill>
-                <a:latin typeface="Arial"/>
-                <a:ea typeface="Arial"/>
-                <a:cs typeface="Arial"/>
-              </a:rPr>
-              <a:t>либо ориентированы на узкие сценарии</a:t>
-            </a:r>
-            <a:r>
-              <a:rPr lang="ru-RU" sz="3200" b="0" i="0" u="none" strike="noStrike" cap="none" spc="0">
-                <a:solidFill>
-                  <a:schemeClr val="tx1">
-                    <a:lumMod val="75000"/>
-                    <a:lumOff val="25000"/>
-                  </a:schemeClr>
-                </a:solidFill>
-                <a:latin typeface="Arial"/>
-                <a:ea typeface="Arial"/>
-                <a:cs typeface="Arial"/>
-              </a:rPr>
-              <a:t> – разработку, серверы, контейнеры.</a:t>
-            </a:r>
-            <a:endParaRPr/>
-          </a:p>
-        </p:txBody>
-      </p:sp>
-      <p:graphicFrame>
-        <p:nvGraphicFramePr>
-          <p:cNvPr id="1495711784" name=""/>
-          <p:cNvGraphicFramePr>
-            <a:graphicFrameLocks xmlns:a="http://schemas.openxmlformats.org/drawingml/2006/main" noChangeAspect="1"/>
-          </p:cNvGraphicFramePr>
-          <p:nvPr/>
-        </p:nvGraphicFramePr>
-        <p:xfrm flipH="0" flipV="0">
-          <a:off x="5181973" y="1417638"/>
-          <a:ext cx="6400425" cy="2653835"/>
-        </p:xfrm>
-        <a:graphic>
-          <a:graphicData uri="http://schemas.openxmlformats.org/presentationml/2006/ole">
-            <p:oleObj name="oleObj" r:id="rId4" imgW="4295775" imgH="1781175" progId="Excel.Sheet.12">
-              <p:embed/>
-              <p:pic>
-                <p:nvPicPr>
-                  <p:cNvPr id="1495711784" name=""/>
-                  <p:cNvPicPr/>
-                  <p:nvPr/>
-                </p:nvPicPr>
-                <p:blipFill rotWithShape="1">
-                  <a:blip r:embed="rId3"/>
-                  <a:stretch/>
-                </p:blipFill>
-                <p:spPr bwMode="auto">
-                  <a:xfrm flipH="0" flipV="0">
-                    <a:off x="5181973" y="1417638"/>
-                    <a:ext cx="6400425" cy="2653835"/>
-                  </a:xfrm>
-                  <a:prstGeom prst="rect">
-                    <a:avLst/>
-                  </a:prstGeom>
-                </p:spPr>
-              </p:pic>
-            </p:oleObj>
-          </a:graphicData>
-        </a:graphic>
-      </p:graphicFrame>
+          <a:bodyPr/>
+          <a:lstStyle>
+            <a:lvl1pPr>
+              <a:defRPr sz="2800"/>
+            </a:lvl1pPr>
+            <a:lvl2pPr>
+              <a:defRPr sz="2400"/>
+            </a:lvl2pPr>
+            <a:lvl3pPr>
+              <a:defRPr sz="2000"/>
+            </a:lvl3pPr>
+            <a:lvl4pPr>
+              <a:defRPr sz="1800"/>
+            </a:lvl4pPr>
+            <a:lvl5pPr>
+              <a:defRPr sz="1800"/>
+            </a:lvl5pPr>
+            <a:lvl6pPr>
+              <a:defRPr sz="1800"/>
+            </a:lvl6pPr>
+            <a:lvl7pPr>
+              <a:defRPr sz="1800"/>
+            </a:lvl7pPr>
+            <a:lvl8pPr>
+              <a:defRPr sz="1800"/>
+            </a:lvl8pPr>
+            <a:lvl9pPr>
+              <a:defRPr sz="1800"/>
+            </a:lvl9pPr>
+          </a:lstStyle>
+          <a:p>
+            <a:pPr>
+              <a:defRPr/>
+            </a:pPr>
+            <a:r>
+              <a:rPr lang="ru-RU" sz="1600" b="1"/>
+              <a:t>Изоляция – </a:t>
+            </a:r>
+            <a:r>
+              <a:rPr lang="ru-RU" sz="1600" b="0"/>
+              <a:t>программы и их </a:t>
+            </a:r>
+            <a:r>
+              <a:rPr lang="en-US" sz="1600" b="0"/>
+              <a:t>runtime-</a:t>
+            </a:r>
+            <a:r>
+              <a:rPr lang="ru-RU" sz="1600" b="0"/>
+              <a:t>зависимости изолированны друг от друга, что избавляет от конфликтов зависимостей и позволяет хранить несколько версий одной программы</a:t>
+            </a:r>
+            <a:endParaRPr lang="ru-RU" sz="1600" b="0"/>
+          </a:p>
+        </p:txBody>
+      </p:sp>
+      <p:sp>
+        <p:nvSpPr>
+          <p:cNvPr id="1462575508" name="Content Placeholder 3"/>
+          <p:cNvSpPr>
+            <a:spLocks noGrp="1"/>
+          </p:cNvSpPr>
+          <p:nvPr>
+            <p:ph sz="half" idx="2"/>
+          </p:nvPr>
+        </p:nvSpPr>
+        <p:spPr bwMode="auto">
+          <a:xfrm>
+            <a:off x="6197598" y="1600200"/>
+            <a:ext cx="5384799" cy="4525961"/>
+          </a:xfrm>
+        </p:spPr>
+        <p:txBody>
+          <a:bodyPr/>
+          <a:lstStyle>
+            <a:lvl1pPr>
+              <a:defRPr sz="2800"/>
+            </a:lvl1pPr>
+            <a:lvl2pPr>
+              <a:defRPr sz="2400"/>
+            </a:lvl2pPr>
+            <a:lvl3pPr>
+              <a:defRPr sz="2000"/>
+            </a:lvl3pPr>
+            <a:lvl4pPr>
+              <a:defRPr sz="1800"/>
+            </a:lvl4pPr>
+            <a:lvl5pPr>
+              <a:defRPr sz="1800"/>
+            </a:lvl5pPr>
+            <a:lvl6pPr>
+              <a:defRPr sz="1800"/>
+            </a:lvl6pPr>
+            <a:lvl7pPr>
+              <a:defRPr sz="1800"/>
+            </a:lvl7pPr>
+            <a:lvl8pPr>
+              <a:defRPr sz="1800"/>
+            </a:lvl8pPr>
+            <a:lvl9pPr>
+              <a:defRPr sz="1800"/>
+            </a:lvl9pPr>
+          </a:lstStyle>
+          <a:p>
+            <a:pPr>
+              <a:defRPr/>
+            </a:pPr>
+            <a:r>
+              <a:rPr lang="ru-RU" sz="1600" b="1"/>
+              <a:t>Декларативность</a:t>
+            </a:r>
+            <a:r>
+              <a:rPr lang="ru-RU" sz="1600" b="0"/>
+              <a:t> – система </a:t>
+            </a:r>
+            <a:endParaRPr sz="1600" b="0"/>
+          </a:p>
+        </p:txBody>
+      </p:sp>
     </p:spTree>
   </p:cSld>
   <p:clrMapOvr>
@@ -5777,7 +6639,7 @@
       </p:grpSpPr>
       <p:sp>
         <p:nvSpPr>
-          <p:cNvPr id="1820486289" name="Title 1"/>
+          <p:cNvPr id="1023439047" name="Title 1"/>
           <p:cNvSpPr>
             <a:spLocks noGrp="1"/>
           </p:cNvSpPr>
@@ -5787,153 +6649,159 @@
         </p:nvSpPr>
         <p:spPr bwMode="auto"/>
         <p:txBody>
-          <a:bodyPr vertOverflow="overflow" horzOverflow="overflow" vert="horz" wrap="square" lIns="91440" tIns="45720" rIns="91440" bIns="45720" numCol="1" spcCol="0" rtlCol="0" fromWordArt="0" anchor="ctr" anchorCtr="0" forceAA="0" upright="0" compatLnSpc="0">
-            <a:normAutofit fontScale="95000" lnSpcReduction="1000"/>
-          </a:bodyPr>
+          <a:bodyPr/>
           <a:lstStyle/>
           <a:p>
             <a:pPr>
               <a:defRPr/>
             </a:pPr>
             <a:r>
-              <a:rPr sz="3800"/>
-              <a:t>III. </a:t>
-            </a:r>
-            <a:r>
-              <a:rPr lang="ru-RU" sz="3800"/>
-              <a:t>Сравнение</a:t>
-            </a:r>
-            <a:r>
-              <a:rPr lang="en-US" sz="3800"/>
-              <a:t> </a:t>
-            </a:r>
-            <a:r>
-              <a:rPr lang="ru-RU" sz="3800"/>
-              <a:t>декларативных ОС </a:t>
-            </a:r>
-            <a:r>
-              <a:rPr lang="ru-RU" sz="3800"/>
-              <a:t>с другими дистрибутивами (на примере </a:t>
-            </a:r>
-            <a:r>
-              <a:rPr lang="en-US" sz="3800"/>
-              <a:t>NixOS</a:t>
-            </a:r>
-            <a:r>
-              <a:rPr lang="ru-RU" sz="3800"/>
-              <a:t>)</a:t>
-            </a:r>
-            <a:endParaRPr sz="3800"/>
-          </a:p>
-        </p:txBody>
-      </p:sp>
-      <p:sp>
-        <p:nvSpPr>
-          <p:cNvPr id="327302220" name="Content Placeholder 2"/>
-          <p:cNvSpPr>
-            <a:spLocks noGrp="1"/>
-          </p:cNvSpPr>
-          <p:nvPr>
-            <p:ph idx="1"/>
-          </p:nvPr>
-        </p:nvSpPr>
-        <p:spPr bwMode="auto"/>
-        <p:txBody>
-          <a:bodyPr/>
-          <a:lstStyle/>
-          <a:p>
-            <a:pPr>
-              <a:defRPr/>
-            </a:pPr>
-            <a:r>
-              <a:rPr lang="ru-RU" sz="2400"/>
-              <a:t>В отличие от классических дистрибутивов, ОС подобные </a:t>
-            </a:r>
-            <a:r>
-              <a:rPr lang="en-US" sz="2400"/>
-              <a:t>NixOS </a:t>
-            </a:r>
-            <a:r>
-              <a:rPr lang="ru-RU" sz="2400"/>
-              <a:t>управляются конфигурацией, к которой система приводится автоматически, а не командами вручную</a:t>
-            </a:r>
-            <a:r>
-              <a:rPr lang="ru-RU" sz="2400"/>
-              <a:t>.</a:t>
-            </a:r>
-            <a:endParaRPr sz="2400"/>
-          </a:p>
-          <a:p>
-            <a:pPr>
-              <a:defRPr/>
-            </a:pPr>
-            <a:r>
-              <a:rPr lang="ru-RU" sz="2400"/>
-              <a:t>Плюсы </a:t>
-            </a:r>
-            <a:r>
-              <a:rPr lang="en-US" sz="2400"/>
-              <a:t>NixOS:</a:t>
-            </a:r>
-            <a:endParaRPr sz="2400"/>
-          </a:p>
-          <a:p>
-            <a:pPr lvl="1">
-              <a:defRPr/>
-            </a:pPr>
-            <a:r>
-              <a:rPr lang="ru-RU" sz="2400"/>
-              <a:t>Пакеты изолированны друг от друга, конфликты архитектурно невозможны.</a:t>
-            </a:r>
-            <a:endParaRPr sz="2400"/>
-          </a:p>
-          <a:p>
-            <a:pPr lvl="1">
-              <a:defRPr/>
-            </a:pPr>
-            <a:r>
-              <a:rPr lang="ru-RU" sz="2400"/>
-              <a:t>Возможность отката к предыдущей версии конфигурации.</a:t>
-            </a:r>
-            <a:endParaRPr lang="ru-RU" sz="2400"/>
-          </a:p>
-          <a:p>
-            <a:pPr lvl="1">
-              <a:defRPr/>
-            </a:pPr>
-            <a:r>
-              <a:rPr lang="ru-RU" sz="2400"/>
-              <a:t>Из одной конфигурации можно развернуть множество одинаковых машин, например, для офиса или кластеров серверов</a:t>
-            </a:r>
-            <a:endParaRPr lang="ru-RU" sz="2400"/>
-          </a:p>
-          <a:p>
-            <a:pPr lvl="0">
-              <a:defRPr/>
-            </a:pPr>
-            <a:r>
-              <a:rPr lang="ru-RU" sz="2800"/>
-              <a:t>Минусы </a:t>
-            </a:r>
-            <a:r>
-              <a:rPr lang="en-US" sz="2800"/>
-              <a:t>NixOS:</a:t>
-            </a:r>
-            <a:endParaRPr lang="en-US" sz="2800"/>
-          </a:p>
-          <a:p>
-            <a:pPr lvl="1">
-              <a:defRPr/>
-            </a:pPr>
-            <a:r>
-              <a:rPr lang="ru-RU" sz="2400"/>
-              <a:t>Высокий порог входа, необходимость учить язык программирования </a:t>
-            </a:r>
-            <a:r>
-              <a:rPr lang="en-US" sz="2400"/>
-              <a:t>nix</a:t>
-            </a:r>
-            <a:endParaRPr sz="2400"/>
+              <a:rPr/>
+              <a:t>_. </a:t>
+            </a:r>
+            <a:r>
+              <a:rPr lang="ru-RU"/>
+              <a:t>Основные принципы </a:t>
+            </a:r>
+            <a:r>
+              <a:rPr lang="en-US"/>
+              <a:t>Clyx</a:t>
+            </a:r>
+            <a:endParaRPr/>
+          </a:p>
+        </p:txBody>
+      </p:sp>
+      <p:sp>
+        <p:nvSpPr>
+          <p:cNvPr id="1863553534" name="Content Placeholder 2"/>
+          <p:cNvSpPr>
+            <a:spLocks noGrp="1"/>
+          </p:cNvSpPr>
+          <p:nvPr>
+            <p:ph sz="half" idx="1"/>
+          </p:nvPr>
+        </p:nvSpPr>
+        <p:spPr bwMode="auto">
+          <a:xfrm>
+            <a:off x="609598" y="1600200"/>
+            <a:ext cx="5384799" cy="4525961"/>
+          </a:xfrm>
+        </p:spPr>
+        <p:txBody>
+          <a:bodyPr/>
+          <a:lstStyle>
+            <a:lvl1pPr>
+              <a:defRPr sz="2800"/>
+            </a:lvl1pPr>
+            <a:lvl2pPr>
+              <a:defRPr sz="2400"/>
+            </a:lvl2pPr>
+            <a:lvl3pPr>
+              <a:defRPr sz="2000"/>
+            </a:lvl3pPr>
+            <a:lvl4pPr>
+              <a:defRPr sz="1800"/>
+            </a:lvl4pPr>
+            <a:lvl5pPr>
+              <a:defRPr sz="1800"/>
+            </a:lvl5pPr>
+            <a:lvl6pPr>
+              <a:defRPr sz="1800"/>
+            </a:lvl6pPr>
+            <a:lvl7pPr>
+              <a:defRPr sz="1800"/>
+            </a:lvl7pPr>
+            <a:lvl8pPr>
+              <a:defRPr sz="1800"/>
+            </a:lvl8pPr>
+            <a:lvl9pPr>
+              <a:defRPr sz="1800"/>
+            </a:lvl9pPr>
+          </a:lstStyle>
+          <a:p>
+            <a:pPr>
+              <a:defRPr/>
+            </a:pPr>
+            <a:r>
+              <a:rPr lang="ru-RU" sz="1600" b="1"/>
+              <a:t>Изоляция – </a:t>
+            </a:r>
+            <a:r>
+              <a:rPr lang="ru-RU" sz="1600" b="0"/>
+              <a:t>программы и их </a:t>
+            </a:r>
+            <a:r>
+              <a:rPr lang="en-US" sz="1600" b="0"/>
+              <a:t>runtime-</a:t>
+            </a:r>
+            <a:r>
+              <a:rPr lang="ru-RU" sz="1600" b="0"/>
+              <a:t>зависимости изолированны друг от друга, что избавляет от конфликтов зависимостей и позволяет хранить несколько версий одной программы</a:t>
+            </a:r>
+            <a:endParaRPr lang="ru-RU" sz="1600" b="0"/>
+          </a:p>
+        </p:txBody>
+      </p:sp>
+      <p:sp>
+        <p:nvSpPr>
+          <p:cNvPr id="69713998" name="Content Placeholder 3"/>
+          <p:cNvSpPr>
+            <a:spLocks noGrp="1"/>
+          </p:cNvSpPr>
+          <p:nvPr>
+            <p:ph sz="half" idx="2"/>
+          </p:nvPr>
+        </p:nvSpPr>
+        <p:spPr bwMode="auto">
+          <a:xfrm>
+            <a:off x="6197598" y="1600200"/>
+            <a:ext cx="5384799" cy="4525961"/>
+          </a:xfrm>
+        </p:spPr>
+        <p:txBody>
+          <a:bodyPr/>
+          <a:lstStyle>
+            <a:lvl1pPr>
+              <a:defRPr sz="2800"/>
+            </a:lvl1pPr>
+            <a:lvl2pPr>
+              <a:defRPr sz="2400"/>
+            </a:lvl2pPr>
+            <a:lvl3pPr>
+              <a:defRPr sz="2000"/>
+            </a:lvl3pPr>
+            <a:lvl4pPr>
+              <a:defRPr sz="1800"/>
+            </a:lvl4pPr>
+            <a:lvl5pPr>
+              <a:defRPr sz="1800"/>
+            </a:lvl5pPr>
+            <a:lvl6pPr>
+              <a:defRPr sz="1800"/>
+            </a:lvl6pPr>
+            <a:lvl7pPr>
+              <a:defRPr sz="1800"/>
+            </a:lvl7pPr>
+            <a:lvl8pPr>
+              <a:defRPr sz="1800"/>
+            </a:lvl8pPr>
+            <a:lvl9pPr>
+              <a:defRPr sz="1800"/>
+            </a:lvl9pPr>
+          </a:lstStyle>
+          <a:p>
+            <a:pPr>
+              <a:defRPr/>
+            </a:pPr>
+            <a:r>
+              <a:rPr lang="ru-RU" sz="1600" b="1"/>
+              <a:t>Декларативность</a:t>
+            </a:r>
+            <a:r>
+              <a:rPr lang="ru-RU" sz="1600" b="0"/>
+              <a:t> – система </a:t>
+            </a:r>
+            <a:endParaRPr sz="1600" b="0"/>
           </a:p>
         </p:txBody>
       </p:sp>
@@ -5972,7 +6840,7 @@
       </p:grpSpPr>
       <p:sp>
         <p:nvSpPr>
-          <p:cNvPr id="280202029" name="Title 1"/>
+          <p:cNvPr id="1991063038" name="Title 1"/>
           <p:cNvSpPr>
             <a:spLocks noGrp="1"/>
           </p:cNvSpPr>
@@ -5982,61 +6850,732 @@
         </p:nvSpPr>
         <p:spPr bwMode="auto"/>
         <p:txBody>
-          <a:bodyPr vertOverflow="overflow" horzOverflow="overflow" vert="horz" wrap="square" lIns="91440" tIns="45720" rIns="91440" bIns="45720" numCol="1" spcCol="0" rtlCol="0" fromWordArt="0" anchor="ctr" anchorCtr="0" forceAA="0" upright="0" compatLnSpc="0">
-            <a:normAutofit fontScale="90000" lnSpcReduction="2000"/>
+          <a:bodyPr/>
+          <a:lstStyle/>
+          <a:p>
+            <a:pPr>
+              <a:defRPr/>
+            </a:pPr>
+            <a:r>
+              <a:rPr/>
+              <a:t>_. </a:t>
+            </a:r>
+            <a:r>
+              <a:rPr lang="ru-RU"/>
+              <a:t>Основные принципы </a:t>
+            </a:r>
+            <a:r>
+              <a:rPr lang="en-US"/>
+              <a:t>Clyx: </a:t>
+            </a:r>
+            <a:r>
+              <a:rPr lang="ru-RU"/>
+              <a:t>Изоляция</a:t>
+            </a:r>
+            <a:endParaRPr/>
+          </a:p>
+        </p:txBody>
+      </p:sp>
+      <p:sp>
+        <p:nvSpPr>
+          <p:cNvPr id="1391179433" name="Content Placeholder 2"/>
+          <p:cNvSpPr>
+            <a:spLocks noGrp="1"/>
+          </p:cNvSpPr>
+          <p:nvPr>
+            <p:ph sz="half" idx="1"/>
+          </p:nvPr>
+        </p:nvSpPr>
+        <p:spPr bwMode="auto">
+          <a:xfrm flipH="0" flipV="0">
+            <a:off x="349009" y="1600200"/>
+            <a:ext cx="4225707" cy="4861601"/>
+          </a:xfrm>
+        </p:spPr>
+        <p:txBody>
+          <a:bodyPr vertOverflow="overflow" horzOverflow="overflow" vert="horz" wrap="square" lIns="91440" tIns="45720" rIns="91440" bIns="45720" numCol="1" spcCol="0" rtlCol="0" fromWordArt="0" anchor="t" anchorCtr="0" forceAA="0" upright="0" compatLnSpc="0">
+            <a:normAutofit/>
           </a:bodyPr>
-          <a:lstStyle/>
-          <a:p>
-            <a:pPr>
-              <a:defRPr/>
-            </a:pPr>
-            <a:r>
-              <a:rPr/>
-              <a:t>IV. </a:t>
-            </a:r>
-            <a:r>
-              <a:rPr lang="ru-RU"/>
-              <a:t>Отличие идей </a:t>
-            </a:r>
-            <a:r>
-              <a:rPr lang="en-US"/>
-              <a:t>Clyx </a:t>
-            </a:r>
-            <a:r>
-              <a:rPr lang="ru-RU"/>
-              <a:t>от </a:t>
-            </a:r>
-            <a:r>
-              <a:rPr lang="en-US"/>
-              <a:t>NixOS</a:t>
-            </a:r>
-            <a:r>
-              <a:rPr lang="ru-RU"/>
-              <a:t>, решение проблем</a:t>
-            </a:r>
-            <a:endParaRPr/>
-          </a:p>
-        </p:txBody>
-      </p:sp>
-      <p:sp>
-        <p:nvSpPr>
-          <p:cNvPr id="982055876" name="Content Placeholder 2"/>
-          <p:cNvSpPr>
-            <a:spLocks noGrp="1"/>
-          </p:cNvSpPr>
-          <p:nvPr>
-            <p:ph idx="1"/>
-          </p:nvPr>
-        </p:nvSpPr>
-        <p:spPr bwMode="auto"/>
-        <p:txBody>
-          <a:bodyPr/>
-          <a:lstStyle/>
-          <a:p>
-            <a:pPr>
-              <a:defRPr/>
-            </a:pPr>
-            <a:endParaRPr/>
+          <a:lstStyle>
+            <a:lvl1pPr>
+              <a:defRPr sz="2800"/>
+            </a:lvl1pPr>
+            <a:lvl2pPr>
+              <a:defRPr sz="2400"/>
+            </a:lvl2pPr>
+            <a:lvl3pPr>
+              <a:defRPr sz="2000"/>
+            </a:lvl3pPr>
+            <a:lvl4pPr>
+              <a:defRPr sz="1800"/>
+            </a:lvl4pPr>
+            <a:lvl5pPr>
+              <a:defRPr sz="1800"/>
+            </a:lvl5pPr>
+            <a:lvl6pPr>
+              <a:defRPr sz="1800"/>
+            </a:lvl6pPr>
+            <a:lvl7pPr>
+              <a:defRPr sz="1800"/>
+            </a:lvl7pPr>
+            <a:lvl8pPr>
+              <a:defRPr sz="1800"/>
+            </a:lvl8pPr>
+            <a:lvl9pPr>
+              <a:defRPr sz="1800"/>
+            </a:lvl9pPr>
+          </a:lstStyle>
+          <a:p>
+            <a:pPr>
+              <a:defRPr/>
+            </a:pPr>
+            <a:r>
+              <a:rPr lang="ru-RU" sz="1800" b="1"/>
+              <a:t>Изоляция – </a:t>
+            </a:r>
+            <a:r>
+              <a:rPr lang="ru-RU" sz="1800" b="0"/>
+              <a:t>программы и их </a:t>
+            </a:r>
+            <a:r>
+              <a:rPr lang="en-US" sz="1800" b="0"/>
+              <a:t>runtime-</a:t>
+            </a:r>
+            <a:r>
+              <a:rPr lang="ru-RU" sz="1800" b="0"/>
+              <a:t>зависимости изолированны друг от друга, что </a:t>
+            </a:r>
+            <a:r>
+              <a:rPr lang="ru-RU" sz="1800" b="1"/>
+              <a:t>избавляет от конфликтов</a:t>
+            </a:r>
+            <a:r>
+              <a:rPr lang="ru-RU" sz="1800" b="0"/>
+              <a:t> зависимостей и позволяет хранить </a:t>
+            </a:r>
+            <a:r>
+              <a:rPr lang="ru-RU" sz="1800" b="1"/>
+              <a:t>несколько версий</a:t>
+            </a:r>
+            <a:r>
+              <a:rPr lang="ru-RU" sz="1800" b="0"/>
+              <a:t> одной программы</a:t>
+            </a:r>
+            <a:r>
+              <a:rPr lang="ru-RU" sz="1800" b="0"/>
+              <a:t>.</a:t>
+            </a:r>
+            <a:endParaRPr sz="1800" b="0"/>
+          </a:p>
+          <a:p>
+            <a:pPr>
+              <a:defRPr/>
+            </a:pPr>
+            <a:r>
+              <a:rPr lang="ru-RU" sz="1800" b="0"/>
+              <a:t>Таким образом, согласно примеру, программе 1 доступна только зависимость 1 и общая зависимость, программе 2 только общая зависимость</a:t>
+            </a:r>
+            <a:r>
+              <a:rPr lang="ru-RU" sz="1800" b="0"/>
+              <a:t> и зависимость 2, а программе 3 только программа 2 и зависимость 3, </a:t>
+            </a:r>
+            <a:r>
+              <a:rPr lang="ru-RU" sz="1800" b="1"/>
+              <a:t>ей не доступны даже зависимости своей зависимости</a:t>
+            </a:r>
+            <a:r>
+              <a:rPr lang="ru-RU" sz="1800" b="0"/>
+              <a:t>.</a:t>
+            </a:r>
+            <a:endParaRPr sz="1800" b="0"/>
+          </a:p>
+        </p:txBody>
+      </p:sp>
+      <p:pic>
+        <p:nvPicPr>
+          <p:cNvPr id="1570392608" name=""/>
+          <p:cNvPicPr>
+            <a:picLocks noChangeAspect="1"/>
+          </p:cNvPicPr>
+          <p:nvPr/>
+        </p:nvPicPr>
+        <p:blipFill rotWithShape="1">
+          <a:blip r:embed="rId3"/>
+          <a:stretch/>
+        </p:blipFill>
+        <p:spPr bwMode="auto">
+          <a:xfrm flipH="0" flipV="0">
+            <a:off x="5349275" y="2243662"/>
+            <a:ext cx="1324513" cy="1324513"/>
+          </a:xfrm>
+          <a:prstGeom prst="rect">
+            <a:avLst/>
+          </a:prstGeom>
+        </p:spPr>
+      </p:pic>
+      <p:pic>
+        <p:nvPicPr>
+          <p:cNvPr id="1305012999" name=""/>
+          <p:cNvPicPr>
+            <a:picLocks noChangeAspect="1"/>
+          </p:cNvPicPr>
+          <p:nvPr/>
+        </p:nvPicPr>
+        <p:blipFill rotWithShape="1">
+          <a:blip r:embed="rId3"/>
+          <a:stretch/>
+        </p:blipFill>
+        <p:spPr bwMode="auto">
+          <a:xfrm flipH="0" flipV="0">
+            <a:off x="8993596" y="1581405"/>
+            <a:ext cx="1324513" cy="1324513"/>
+          </a:xfrm>
+          <a:prstGeom prst="rect">
+            <a:avLst/>
+          </a:prstGeom>
+        </p:spPr>
+      </p:pic>
+      <p:pic>
+        <p:nvPicPr>
+          <p:cNvPr id="1072218317" name=""/>
+          <p:cNvPicPr>
+            <a:picLocks noChangeAspect="1"/>
+          </p:cNvPicPr>
+          <p:nvPr/>
+        </p:nvPicPr>
+        <p:blipFill rotWithShape="1">
+          <a:blip r:embed="rId3"/>
+          <a:stretch/>
+        </p:blipFill>
+        <p:spPr bwMode="auto">
+          <a:xfrm flipH="0" flipV="0">
+            <a:off x="8161486" y="3213774"/>
+            <a:ext cx="1324513" cy="1324513"/>
+          </a:xfrm>
+          <a:prstGeom prst="rect">
+            <a:avLst/>
+          </a:prstGeom>
+        </p:spPr>
+      </p:pic>
+      <p:pic>
+        <p:nvPicPr>
+          <p:cNvPr id="289970956" name=""/>
+          <p:cNvPicPr>
+            <a:picLocks noChangeAspect="1"/>
+          </p:cNvPicPr>
+          <p:nvPr/>
+        </p:nvPicPr>
+        <p:blipFill rotWithShape="1">
+          <a:blip r:embed="rId4"/>
+          <a:stretch/>
+        </p:blipFill>
+        <p:spPr bwMode="auto">
+          <a:xfrm flipH="0" flipV="0">
+            <a:off x="5491880" y="4928902"/>
+            <a:ext cx="1039303" cy="1039303"/>
+          </a:xfrm>
+          <a:prstGeom prst="rect">
+            <a:avLst/>
+          </a:prstGeom>
+        </p:spPr>
+      </p:pic>
+      <p:pic>
+        <p:nvPicPr>
+          <p:cNvPr id="1845368235" name=""/>
+          <p:cNvPicPr>
+            <a:picLocks noChangeAspect="1"/>
+          </p:cNvPicPr>
+          <p:nvPr/>
+        </p:nvPicPr>
+        <p:blipFill rotWithShape="1">
+          <a:blip r:embed="rId4"/>
+          <a:stretch/>
+        </p:blipFill>
+        <p:spPr bwMode="auto">
+          <a:xfrm flipH="0" flipV="0">
+            <a:off x="7369563" y="4928902"/>
+            <a:ext cx="1039302" cy="1039302"/>
+          </a:xfrm>
+          <a:prstGeom prst="rect">
+            <a:avLst/>
+          </a:prstGeom>
+        </p:spPr>
+      </p:pic>
+      <p:pic>
+        <p:nvPicPr>
+          <p:cNvPr id="444123257" name=""/>
+          <p:cNvPicPr>
+            <a:picLocks noChangeAspect="1"/>
+          </p:cNvPicPr>
+          <p:nvPr/>
+        </p:nvPicPr>
+        <p:blipFill rotWithShape="1">
+          <a:blip r:embed="rId4"/>
+          <a:stretch/>
+        </p:blipFill>
+        <p:spPr bwMode="auto">
+          <a:xfrm flipH="0" flipV="0">
+            <a:off x="9939516" y="3343530"/>
+            <a:ext cx="1039302" cy="1039302"/>
+          </a:xfrm>
+          <a:prstGeom prst="rect">
+            <a:avLst/>
+          </a:prstGeom>
+        </p:spPr>
+      </p:pic>
+      <p:pic>
+        <p:nvPicPr>
+          <p:cNvPr id="743388273" name=""/>
+          <p:cNvPicPr>
+            <a:picLocks noChangeAspect="1"/>
+          </p:cNvPicPr>
+          <p:nvPr/>
+        </p:nvPicPr>
+        <p:blipFill rotWithShape="1">
+          <a:blip r:embed="rId4"/>
+          <a:stretch/>
+        </p:blipFill>
+        <p:spPr bwMode="auto">
+          <a:xfrm flipH="0" flipV="0">
+            <a:off x="9419865" y="4928902"/>
+            <a:ext cx="1039302" cy="1039302"/>
+          </a:xfrm>
+          <a:prstGeom prst="rect">
+            <a:avLst/>
+          </a:prstGeom>
+        </p:spPr>
+      </p:pic>
+      <p:sp>
+        <p:nvSpPr>
+          <p:cNvPr id="2004638915" name=""/>
+          <p:cNvSpPr/>
+          <p:nvPr/>
+        </p:nvSpPr>
+        <p:spPr bwMode="auto">
+          <a:xfrm rot="0" flipH="0" flipV="0">
+            <a:off x="5886650" y="3568176"/>
+            <a:ext cx="221072" cy="1248238"/>
+          </a:xfrm>
+          <a:prstGeom prst="downArrow">
+            <a:avLst>
+              <a:gd name="adj1" fmla="val 50000"/>
+              <a:gd name="adj2" fmla="val 50000"/>
+            </a:avLst>
+          </a:prstGeom>
+        </p:spPr>
+        <p:style>
+          <a:lnRef idx="2">
+            <a:schemeClr val="accent1">
+              <a:shade val="50000"/>
+            </a:schemeClr>
+          </a:lnRef>
+          <a:fillRef idx="1">
+            <a:schemeClr val="accent1"/>
+          </a:fillRef>
+          <a:effectRef idx="0">
+            <a:schemeClr val="accent1"/>
+          </a:effectRef>
+          <a:fontRef idx="minor">
+            <a:schemeClr val="lt1"/>
+          </a:fontRef>
+        </p:style>
+      </p:sp>
+      <p:sp>
+        <p:nvSpPr>
+          <p:cNvPr id="1747552102" name=""/>
+          <p:cNvSpPr/>
+          <p:nvPr/>
+        </p:nvSpPr>
+        <p:spPr bwMode="auto">
+          <a:xfrm rot="19646654" flipH="0" flipV="0">
+            <a:off x="6945309" y="3302236"/>
+            <a:ext cx="221071" cy="1766253"/>
+          </a:xfrm>
+          <a:prstGeom prst="downArrow">
+            <a:avLst>
+              <a:gd name="adj1" fmla="val 50000"/>
+              <a:gd name="adj2" fmla="val 50000"/>
+            </a:avLst>
+          </a:prstGeom>
+        </p:spPr>
+        <p:style>
+          <a:lnRef idx="2">
+            <a:schemeClr val="accent1">
+              <a:shade val="50000"/>
+            </a:schemeClr>
+          </a:lnRef>
+          <a:fillRef idx="1">
+            <a:schemeClr val="accent1"/>
+          </a:fillRef>
+          <a:effectRef idx="0">
+            <a:schemeClr val="accent1"/>
+          </a:effectRef>
+          <a:fontRef idx="minor">
+            <a:schemeClr val="lt1"/>
+          </a:fontRef>
+        </p:style>
+      </p:sp>
+      <p:sp>
+        <p:nvSpPr>
+          <p:cNvPr id="540818811" name=""/>
+          <p:cNvSpPr/>
+          <p:nvPr/>
+        </p:nvSpPr>
+        <p:spPr bwMode="auto">
+          <a:xfrm rot="1991830" flipH="0" flipV="0">
+            <a:off x="8233308" y="4278173"/>
+            <a:ext cx="221071" cy="726965"/>
+          </a:xfrm>
+          <a:prstGeom prst="downArrow">
+            <a:avLst>
+              <a:gd name="adj1" fmla="val 50000"/>
+              <a:gd name="adj2" fmla="val 50000"/>
+            </a:avLst>
+          </a:prstGeom>
+        </p:spPr>
+        <p:style>
+          <a:lnRef idx="2">
+            <a:schemeClr val="accent1">
+              <a:shade val="50000"/>
+            </a:schemeClr>
+          </a:lnRef>
+          <a:fillRef idx="1">
+            <a:schemeClr val="accent1"/>
+          </a:fillRef>
+          <a:effectRef idx="0">
+            <a:schemeClr val="accent1"/>
+          </a:effectRef>
+          <a:fontRef idx="minor">
+            <a:schemeClr val="lt1"/>
+          </a:fontRef>
+        </p:style>
+      </p:sp>
+      <p:sp>
+        <p:nvSpPr>
+          <p:cNvPr id="1151759563" name=""/>
+          <p:cNvSpPr/>
+          <p:nvPr/>
+        </p:nvSpPr>
+        <p:spPr bwMode="auto">
+          <a:xfrm rot="1991830" flipH="0" flipV="0">
+            <a:off x="9080862" y="2634971"/>
+            <a:ext cx="221070" cy="726964"/>
+          </a:xfrm>
+          <a:prstGeom prst="downArrow">
+            <a:avLst>
+              <a:gd name="adj1" fmla="val 50000"/>
+              <a:gd name="adj2" fmla="val 50000"/>
+            </a:avLst>
+          </a:prstGeom>
+        </p:spPr>
+        <p:style>
+          <a:lnRef idx="2">
+            <a:schemeClr val="accent1">
+              <a:shade val="50000"/>
+            </a:schemeClr>
+          </a:lnRef>
+          <a:fillRef idx="1">
+            <a:schemeClr val="accent1"/>
+          </a:fillRef>
+          <a:effectRef idx="0">
+            <a:schemeClr val="accent1"/>
+          </a:effectRef>
+          <a:fontRef idx="minor">
+            <a:schemeClr val="lt1"/>
+          </a:fontRef>
+        </p:style>
+      </p:sp>
+      <p:sp>
+        <p:nvSpPr>
+          <p:cNvPr id="454779701" name=""/>
+          <p:cNvSpPr/>
+          <p:nvPr/>
+        </p:nvSpPr>
+        <p:spPr bwMode="auto">
+          <a:xfrm rot="19444720" flipH="0" flipV="0">
+            <a:off x="9311113" y="4277253"/>
+            <a:ext cx="221070" cy="726964"/>
+          </a:xfrm>
+          <a:prstGeom prst="downArrow">
+            <a:avLst>
+              <a:gd name="adj1" fmla="val 50000"/>
+              <a:gd name="adj2" fmla="val 50000"/>
+            </a:avLst>
+          </a:prstGeom>
+        </p:spPr>
+        <p:style>
+          <a:lnRef idx="2">
+            <a:schemeClr val="accent1">
+              <a:shade val="50000"/>
+            </a:schemeClr>
+          </a:lnRef>
+          <a:fillRef idx="1">
+            <a:schemeClr val="accent1"/>
+          </a:fillRef>
+          <a:effectRef idx="0">
+            <a:schemeClr val="accent1"/>
+          </a:effectRef>
+          <a:fontRef idx="minor">
+            <a:schemeClr val="lt1"/>
+          </a:fontRef>
+        </p:style>
+      </p:sp>
+      <p:sp>
+        <p:nvSpPr>
+          <p:cNvPr id="1799519873" name=""/>
+          <p:cNvSpPr/>
+          <p:nvPr/>
+        </p:nvSpPr>
+        <p:spPr bwMode="auto">
+          <a:xfrm rot="19444720" flipH="0" flipV="0">
+            <a:off x="9952711" y="2658831"/>
+            <a:ext cx="221070" cy="726964"/>
+          </a:xfrm>
+          <a:prstGeom prst="downArrow">
+            <a:avLst>
+              <a:gd name="adj1" fmla="val 50000"/>
+              <a:gd name="adj2" fmla="val 50000"/>
+            </a:avLst>
+          </a:prstGeom>
+        </p:spPr>
+        <p:style>
+          <a:lnRef idx="2">
+            <a:schemeClr val="accent1">
+              <a:shade val="50000"/>
+            </a:schemeClr>
+          </a:lnRef>
+          <a:fillRef idx="1">
+            <a:schemeClr val="accent1"/>
+          </a:fillRef>
+          <a:effectRef idx="0">
+            <a:schemeClr val="accent1"/>
+          </a:effectRef>
+          <a:fontRef idx="minor">
+            <a:schemeClr val="lt1"/>
+          </a:fontRef>
+        </p:style>
+      </p:sp>
+      <p:sp>
+        <p:nvSpPr>
+          <p:cNvPr id="502234874" name=""/>
+          <p:cNvSpPr txBox="1"/>
+          <p:nvPr/>
+        </p:nvSpPr>
+        <p:spPr bwMode="auto">
+          <a:xfrm rot="0" flipH="0" flipV="0">
+            <a:off x="5293584" y="1967900"/>
+            <a:ext cx="1540900" cy="335639"/>
+          </a:xfrm>
+          <a:prstGeom prst="rect">
+            <a:avLst/>
+          </a:prstGeom>
+          <a:noFill/>
+        </p:spPr>
+        <p:txBody>
+          <a:bodyPr vertOverflow="overflow" horzOverflow="overflow" vert="horz" wrap="square" lIns="91440" tIns="45720" rIns="91440" bIns="45720" numCol="1" spcCol="0" rtlCol="0" fromWordArt="0" anchor="t" anchorCtr="0" forceAA="0" upright="0" compatLnSpc="0">
+            <a:spAutoFit/>
+          </a:bodyPr>
+          <a:p>
+            <a:pPr>
+              <a:defRPr/>
+            </a:pPr>
+            <a:r>
+              <a:rPr lang="ru-RU" sz="1600"/>
+              <a:t>Программа 1</a:t>
+            </a:r>
+            <a:endParaRPr sz="1600"/>
+          </a:p>
+        </p:txBody>
+      </p:sp>
+      <p:sp>
+        <p:nvSpPr>
+          <p:cNvPr id="392157877" name=""/>
+          <p:cNvSpPr txBox="1"/>
+          <p:nvPr/>
+        </p:nvSpPr>
+        <p:spPr bwMode="auto">
+          <a:xfrm rot="0" flipH="0" flipV="0">
+            <a:off x="8885223" y="1347516"/>
+            <a:ext cx="1541979" cy="335639"/>
+          </a:xfrm>
+          <a:prstGeom prst="rect">
+            <a:avLst/>
+          </a:prstGeom>
+          <a:noFill/>
+        </p:spPr>
+        <p:txBody>
+          <a:bodyPr vertOverflow="overflow" horzOverflow="overflow" vert="horz" wrap="square" lIns="91440" tIns="45720" rIns="91440" bIns="45720" numCol="1" spcCol="0" rtlCol="0" fromWordArt="0" anchor="t" anchorCtr="0" forceAA="0" upright="0" compatLnSpc="0">
+            <a:spAutoFit/>
+          </a:bodyPr>
+          <a:p>
+            <a:pPr>
+              <a:defRPr/>
+            </a:pPr>
+            <a:r>
+              <a:rPr lang="ru-RU" sz="1600"/>
+              <a:t>Программа 3</a:t>
+            </a:r>
+            <a:endParaRPr sz="1600"/>
+          </a:p>
+        </p:txBody>
+      </p:sp>
+      <p:sp>
+        <p:nvSpPr>
+          <p:cNvPr id="2046212899" name=""/>
+          <p:cNvSpPr txBox="1"/>
+          <p:nvPr/>
+        </p:nvSpPr>
+        <p:spPr bwMode="auto">
+          <a:xfrm rot="0" flipH="0" flipV="0">
+            <a:off x="7369563" y="3093359"/>
+            <a:ext cx="1541979" cy="335639"/>
+          </a:xfrm>
+          <a:prstGeom prst="rect">
+            <a:avLst/>
+          </a:prstGeom>
+          <a:noFill/>
+        </p:spPr>
+        <p:txBody>
+          <a:bodyPr vertOverflow="overflow" horzOverflow="overflow" vert="horz" wrap="square" lIns="91440" tIns="45720" rIns="91440" bIns="45720" numCol="1" spcCol="0" rtlCol="0" fromWordArt="0" anchor="t" anchorCtr="0" forceAA="0" upright="0" compatLnSpc="0">
+            <a:spAutoFit/>
+          </a:bodyPr>
+          <a:p>
+            <a:pPr>
+              <a:defRPr/>
+            </a:pPr>
+            <a:r>
+              <a:rPr lang="ru-RU" sz="1600"/>
+              <a:t>Программа 2</a:t>
+            </a:r>
+            <a:endParaRPr sz="1600"/>
+          </a:p>
+        </p:txBody>
+      </p:sp>
+      <p:sp>
+        <p:nvSpPr>
+          <p:cNvPr id="1591690278" name=""/>
+          <p:cNvSpPr txBox="1"/>
+          <p:nvPr/>
+        </p:nvSpPr>
+        <p:spPr bwMode="auto">
+          <a:xfrm rot="0" flipH="0" flipV="0">
+            <a:off x="7118045" y="6126162"/>
+            <a:ext cx="1548458" cy="579479"/>
+          </a:xfrm>
+          <a:prstGeom prst="rect">
+            <a:avLst/>
+          </a:prstGeom>
+          <a:noFill/>
+        </p:spPr>
+        <p:txBody>
+          <a:bodyPr vertOverflow="overflow" horzOverflow="overflow" vert="horz" wrap="square" lIns="91440" tIns="45720" rIns="91440" bIns="45720" numCol="1" spcCol="0" rtlCol="0" fromWordArt="0" anchor="t" anchorCtr="0" forceAA="0" upright="0" compatLnSpc="0">
+            <a:spAutoFit/>
+          </a:bodyPr>
+          <a:p>
+            <a:pPr>
+              <a:defRPr/>
+            </a:pPr>
+            <a:r>
+              <a:rPr lang="ru-RU" sz="1600"/>
+              <a:t>Общая зависимость</a:t>
+            </a:r>
+            <a:endParaRPr sz="1600"/>
+          </a:p>
+        </p:txBody>
+      </p:sp>
+      <p:sp>
+        <p:nvSpPr>
+          <p:cNvPr id="705628538" name=""/>
+          <p:cNvSpPr txBox="1"/>
+          <p:nvPr/>
+        </p:nvSpPr>
+        <p:spPr bwMode="auto">
+          <a:xfrm rot="0" flipH="0" flipV="0">
+            <a:off x="5213239" y="6126162"/>
+            <a:ext cx="1701591" cy="335639"/>
+          </a:xfrm>
+          <a:prstGeom prst="rect">
+            <a:avLst/>
+          </a:prstGeom>
+          <a:noFill/>
+        </p:spPr>
+        <p:txBody>
+          <a:bodyPr vertOverflow="overflow" horzOverflow="overflow" vert="horz" wrap="square" lIns="91440" tIns="45720" rIns="91440" bIns="45720" numCol="1" spcCol="0" rtlCol="0" fromWordArt="0" anchor="t" anchorCtr="0" forceAA="0" upright="0" compatLnSpc="0">
+            <a:spAutoFit/>
+          </a:bodyPr>
+          <a:p>
+            <a:pPr>
+              <a:defRPr/>
+            </a:pPr>
+            <a:r>
+              <a:rPr lang="ru-RU" sz="1600"/>
+              <a:t>Зависимость 1</a:t>
+            </a:r>
+            <a:endParaRPr sz="1600"/>
+          </a:p>
+        </p:txBody>
+      </p:sp>
+      <p:sp>
+        <p:nvSpPr>
+          <p:cNvPr id="821389437" name=""/>
+          <p:cNvSpPr txBox="1"/>
+          <p:nvPr/>
+        </p:nvSpPr>
+        <p:spPr bwMode="auto">
+          <a:xfrm rot="0" flipH="0" flipV="0">
+            <a:off x="9084877" y="6080262"/>
+            <a:ext cx="1702670" cy="335639"/>
+          </a:xfrm>
+          <a:prstGeom prst="rect">
+            <a:avLst/>
+          </a:prstGeom>
+          <a:noFill/>
+        </p:spPr>
+        <p:txBody>
+          <a:bodyPr vertOverflow="overflow" horzOverflow="overflow" vert="horz" wrap="square" lIns="91440" tIns="45720" rIns="91440" bIns="45720" numCol="1" spcCol="0" rtlCol="0" fromWordArt="0" anchor="t" anchorCtr="0" forceAA="0" upright="0" compatLnSpc="0">
+            <a:spAutoFit/>
+          </a:bodyPr>
+          <a:p>
+            <a:pPr>
+              <a:defRPr/>
+            </a:pPr>
+            <a:r>
+              <a:rPr lang="ru-RU" sz="1600"/>
+              <a:t>Зависимость 2</a:t>
+            </a:r>
+            <a:endParaRPr sz="1600"/>
+          </a:p>
+        </p:txBody>
+      </p:sp>
+      <p:sp>
+        <p:nvSpPr>
+          <p:cNvPr id="8913289" name=""/>
+          <p:cNvSpPr txBox="1"/>
+          <p:nvPr/>
+        </p:nvSpPr>
+        <p:spPr bwMode="auto">
+          <a:xfrm rot="0" flipH="0" flipV="0">
+            <a:off x="10186977" y="4411227"/>
+            <a:ext cx="1702310" cy="335639"/>
+          </a:xfrm>
+          <a:prstGeom prst="rect">
+            <a:avLst/>
+          </a:prstGeom>
+          <a:noFill/>
+        </p:spPr>
+        <p:txBody>
+          <a:bodyPr vertOverflow="overflow" horzOverflow="overflow" vert="horz" wrap="square" lIns="91440" tIns="45720" rIns="91440" bIns="45720" numCol="1" spcCol="0" rtlCol="0" fromWordArt="0" anchor="t" anchorCtr="0" forceAA="0" upright="0" compatLnSpc="0">
+            <a:spAutoFit/>
+          </a:bodyPr>
+          <a:p>
+            <a:pPr>
+              <a:defRPr/>
+            </a:pPr>
+            <a:r>
+              <a:rPr lang="ru-RU" sz="1600"/>
+              <a:t>Зависимость 3</a:t>
+            </a:r>
+            <a:endParaRPr sz="1600"/>
           </a:p>
         </p:txBody>
       </p:sp>
@@ -6075,7 +7614,7 @@
       </p:grpSpPr>
       <p:sp>
         <p:nvSpPr>
-          <p:cNvPr id="1562974675" name="Title 1"/>
+          <p:cNvPr id="926603968" name="Title 1"/>
           <p:cNvSpPr>
             <a:spLocks noGrp="1"/>
           </p:cNvSpPr>
@@ -6093,23 +7632,19 @@
             </a:pPr>
             <a:r>
               <a:rPr/>
-              <a:t>V.I. </a:t>
+              <a:t>II. </a:t>
             </a:r>
             <a:r>
               <a:rPr lang="ru-RU"/>
-              <a:t>Итог – почему </a:t>
-            </a:r>
-            <a:r>
-              <a:rPr lang="en-US"/>
-              <a:t>Clyx</a:t>
-            </a:r>
-            <a:endParaRPr/>
-          </a:p>
-        </p:txBody>
-      </p:sp>
-      <p:sp>
-        <p:nvSpPr>
-          <p:cNvPr id="1276770849" name="Content Placeholder 2"/>
+              <a:t>Проблемы существующих ОС</a:t>
+            </a:r>
+            <a:endParaRPr/>
+          </a:p>
+        </p:txBody>
+      </p:sp>
+      <p:sp>
+        <p:nvSpPr>
+          <p:cNvPr id="1921504450" name="Content Placeholder 2"/>
           <p:cNvSpPr>
             <a:spLocks noGrp="1"/>
           </p:cNvSpPr>
@@ -6117,18 +7652,135 @@
             <p:ph idx="1"/>
           </p:nvPr>
         </p:nvSpPr>
-        <p:spPr bwMode="auto"/>
-        <p:txBody>
-          <a:bodyPr/>
+        <p:spPr bwMode="auto">
+          <a:xfrm flipH="0" flipV="0">
+            <a:off x="232193" y="1600200"/>
+            <a:ext cx="3515825" cy="4525961"/>
+          </a:xfrm>
+        </p:spPr>
+        <p:txBody>
+          <a:bodyPr vertOverflow="overflow" horzOverflow="overflow" vert="horz" wrap="square" lIns="91440" tIns="45720" rIns="91440" bIns="45720" numCol="1" spcCol="0" rtlCol="0" fromWordArt="0" anchor="t" anchorCtr="0" forceAA="0" upright="0" compatLnSpc="0">
+            <a:normAutofit/>
+          </a:bodyPr>
           <a:lstStyle/>
           <a:p>
             <a:pPr>
               <a:defRPr/>
             </a:pPr>
-            <a:endParaRPr/>
-          </a:p>
-        </p:txBody>
-      </p:sp>
+            <a:r>
+              <a:rPr lang="ru-RU" sz="2200" b="0" i="0" u="none" strike="noStrike" cap="none" spc="0">
+                <a:solidFill>
+                  <a:schemeClr val="tx1">
+                    <a:lumMod val="75000"/>
+                    <a:lumOff val="25000"/>
+                  </a:schemeClr>
+                </a:solidFill>
+                <a:latin typeface="Arial"/>
+                <a:ea typeface="Arial"/>
+                <a:cs typeface="Arial"/>
+              </a:rPr>
+              <a:t>Большинство решений </a:t>
+            </a:r>
+            <a:r>
+              <a:rPr lang="ru-RU" sz="2200" b="1" i="0" u="none" strike="noStrike" cap="none" spc="0">
+                <a:solidFill>
+                  <a:schemeClr val="tx1">
+                    <a:lumMod val="75000"/>
+                    <a:lumOff val="25000"/>
+                  </a:schemeClr>
+                </a:solidFill>
+                <a:latin typeface="Arial"/>
+                <a:ea typeface="Arial"/>
+                <a:cs typeface="Arial"/>
+              </a:rPr>
+              <a:t>либо сложны</a:t>
+            </a:r>
+            <a:r>
+              <a:rPr lang="ru-RU" sz="2200" b="0" i="0" u="none" strike="noStrike" cap="none" spc="0">
+                <a:solidFill>
+                  <a:schemeClr val="tx1">
+                    <a:lumMod val="75000"/>
+                    <a:lumOff val="25000"/>
+                  </a:schemeClr>
+                </a:solidFill>
+                <a:latin typeface="Arial"/>
+                <a:ea typeface="Arial"/>
+                <a:cs typeface="Arial"/>
+              </a:rPr>
+              <a:t> для массового пользователя, </a:t>
+            </a:r>
+            <a:r>
+              <a:rPr lang="ru-RU" sz="2200" b="1" i="0" u="none" strike="noStrike" cap="none" spc="0">
+                <a:solidFill>
+                  <a:schemeClr val="tx1">
+                    <a:lumMod val="75000"/>
+                    <a:lumOff val="25000"/>
+                  </a:schemeClr>
+                </a:solidFill>
+                <a:latin typeface="Arial"/>
+                <a:ea typeface="Arial"/>
+                <a:cs typeface="Arial"/>
+              </a:rPr>
+              <a:t>либо ориентированы на узкие сценарии</a:t>
+            </a:r>
+            <a:r>
+              <a:rPr lang="ru-RU" sz="2200" b="0" i="0" u="none" strike="noStrike" cap="none" spc="0">
+                <a:solidFill>
+                  <a:schemeClr val="tx1">
+                    <a:lumMod val="75000"/>
+                    <a:lumOff val="25000"/>
+                  </a:schemeClr>
+                </a:solidFill>
+                <a:latin typeface="Arial"/>
+                <a:ea typeface="Arial"/>
+                <a:cs typeface="Arial"/>
+              </a:rPr>
+              <a:t> – разработку, серверы, контейнеры.</a:t>
+            </a:r>
+            <a:endParaRPr sz="2200"/>
+          </a:p>
+        </p:txBody>
+      </p:sp>
+      <p:graphicFrame>
+        <p:nvGraphicFramePr>
+          <p:cNvPr id="2010654640" name=""/>
+          <p:cNvGraphicFramePr>
+            <a:graphicFrameLocks xmlns:a="http://schemas.openxmlformats.org/drawingml/2006/main" noChangeAspect="1"/>
+          </p:cNvGraphicFramePr>
+          <p:nvPr/>
+        </p:nvGraphicFramePr>
+        <p:xfrm flipH="0" flipV="0">
+          <a:off x="4035500" y="1417637"/>
+          <a:ext cx="7546897" cy="3129201"/>
+        </p:xfrm>
+        <a:graphic>
+          <a:graphicData uri="http://schemas.openxmlformats.org/presentationml/2006/ole">
+            <p:oleObj name="oleObj" r:id="rId4" imgW="4295775" imgH="1781175" progId="Excel.Sheet.12">
+              <p:embed/>
+              <p:pic>
+                <p:nvPicPr>
+                  <p:cNvPr id="2010654640" name=""/>
+                  <p:cNvPicPr/>
+                  <p:nvPr/>
+                </p:nvPicPr>
+                <p:blipFill rotWithShape="1">
+                  <a:blip r:embed="rId3"/>
+                  <a:stretch/>
+                </p:blipFill>
+                <p:spPr bwMode="auto">
+                  <a:xfrm flipH="0" flipV="0">
+                    <a:off x="4035500" y="1417637"/>
+                    <a:ext cx="7546897" cy="3129201"/>
+                  </a:xfrm>
+                  <a:prstGeom prst="rect">
+                    <a:avLst/>
+                  </a:prstGeom>
+                </p:spPr>
+              </p:pic>
+            </p:oleObj>
+          </a:graphicData>
+        </a:graphic>
+      </p:graphicFrame>
     </p:spTree>
   </p:cSld>
   <p:clrMapOvr>
@@ -6164,7 +7816,7 @@
       </p:grpSpPr>
       <p:sp>
         <p:nvSpPr>
-          <p:cNvPr id="1381550822" name="Title 1"/>
+          <p:cNvPr id="2051435675" name="Title 1"/>
           <p:cNvSpPr>
             <a:spLocks noGrp="1"/>
           </p:cNvSpPr>
@@ -6174,31 +7826,49 @@
         </p:nvSpPr>
         <p:spPr bwMode="auto"/>
         <p:txBody>
-          <a:bodyPr/>
+          <a:bodyPr vertOverflow="overflow" horzOverflow="overflow" vert="horz" wrap="square" lIns="91440" tIns="45720" rIns="91440" bIns="45720" numCol="1" spcCol="0" rtlCol="0" fromWordArt="0" anchor="ctr" anchorCtr="0" forceAA="0" upright="0" compatLnSpc="0">
+            <a:normAutofit fontScale="95000" lnSpcReduction="1000"/>
+          </a:bodyPr>
           <a:lstStyle/>
           <a:p>
             <a:pPr>
               <a:defRPr/>
             </a:pPr>
             <a:r>
-              <a:rPr/>
-              <a:t>V.II. </a:t>
-            </a:r>
-            <a:r>
-              <a:rPr lang="ru-RU"/>
-              <a:t>Итог – минусы </a:t>
-            </a:r>
-            <a:r>
-              <a:rPr lang="en-US"/>
-              <a:t>Clyx</a:t>
-            </a:r>
-            <a:endParaRPr/>
-          </a:p>
-        </p:txBody>
-      </p:sp>
-      <p:sp>
-        <p:nvSpPr>
-          <p:cNvPr id="1519123020" name="Content Placeholder 2"/>
+              <a:rPr sz="3800"/>
+              <a:t>III. </a:t>
+            </a:r>
+            <a:r>
+              <a:rPr lang="ru-RU" sz="3800"/>
+              <a:t>Сравнение</a:t>
+            </a:r>
+            <a:r>
+              <a:rPr lang="en-US" sz="3800"/>
+              <a:t> </a:t>
+            </a:r>
+            <a:r>
+              <a:rPr lang="ru-RU" sz="3800"/>
+              <a:t>декларативных ОС </a:t>
+            </a:r>
+            <a:r>
+              <a:rPr lang="ru-RU" sz="3800"/>
+              <a:t>с другими дистрибутивами (на примере </a:t>
+            </a:r>
+            <a:r>
+              <a:rPr lang="en-US" sz="3800"/>
+              <a:t>NixOS</a:t>
+            </a:r>
+            <a:r>
+              <a:rPr lang="ru-RU" sz="3800"/>
+              <a:t>)</a:t>
+            </a:r>
+            <a:endParaRPr sz="3800"/>
+          </a:p>
+        </p:txBody>
+      </p:sp>
+      <p:sp>
+        <p:nvSpPr>
+          <p:cNvPr id="1249715865" name="Content Placeholder 2"/>
           <p:cNvSpPr>
             <a:spLocks noGrp="1"/>
           </p:cNvSpPr>
@@ -6214,7 +7884,95 @@
             <a:pPr>
               <a:defRPr/>
             </a:pPr>
-            <a:endParaRPr/>
+            <a:r>
+              <a:rPr lang="ru-RU" sz="2400"/>
+              <a:t>В отличие от классических дистрибутивов, ОС подобные </a:t>
+            </a:r>
+            <a:r>
+              <a:rPr lang="en-US" sz="2400"/>
+              <a:t>NixOS </a:t>
+            </a:r>
+            <a:r>
+              <a:rPr lang="ru-RU" sz="2400"/>
+              <a:t>управляются конфигурацией, к которой система приводится автоматически, а не командами вручную</a:t>
+            </a:r>
+            <a:r>
+              <a:rPr lang="ru-RU" sz="2400"/>
+              <a:t>.</a:t>
+            </a:r>
+            <a:endParaRPr sz="2400"/>
+          </a:p>
+          <a:p>
+            <a:pPr>
+              <a:defRPr/>
+            </a:pPr>
+            <a:r>
+              <a:rPr lang="ru-RU" sz="2400"/>
+              <a:t>Плюсы </a:t>
+            </a:r>
+            <a:r>
+              <a:rPr lang="en-US" sz="2400"/>
+              <a:t>NixOS:</a:t>
+            </a:r>
+            <a:endParaRPr sz="2400"/>
+          </a:p>
+          <a:p>
+            <a:pPr lvl="1">
+              <a:defRPr/>
+            </a:pPr>
+            <a:r>
+              <a:rPr lang="ru-RU" sz="2400"/>
+              <a:t>Пакеты изолированны друг от друга, конфликты архитектурно невозможны.</a:t>
+            </a:r>
+            <a:endParaRPr sz="2400"/>
+          </a:p>
+          <a:p>
+            <a:pPr lvl="1">
+              <a:defRPr/>
+            </a:pPr>
+            <a:r>
+              <a:rPr lang="ru-RU" sz="2400"/>
+              <a:t>Возможность отката к предыдущей версии конфигурации.</a:t>
+            </a:r>
+            <a:endParaRPr lang="ru-RU" sz="2400"/>
+          </a:p>
+          <a:p>
+            <a:pPr lvl="1">
+              <a:defRPr/>
+            </a:pPr>
+            <a:r>
+              <a:rPr lang="ru-RU" sz="2400"/>
+              <a:t>Из одной конфигурации можно развернуть множество одинаковых машин, например, для офиса или кластеров серверов</a:t>
+            </a:r>
+            <a:endParaRPr lang="ru-RU" sz="2400"/>
+          </a:p>
+          <a:p>
+            <a:pPr lvl="0">
+              <a:defRPr/>
+            </a:pPr>
+            <a:r>
+              <a:rPr lang="ru-RU" sz="2800"/>
+              <a:t>Минусы </a:t>
+            </a:r>
+            <a:r>
+              <a:rPr lang="en-US" sz="2800"/>
+              <a:t>NixOS:</a:t>
+            </a:r>
+            <a:endParaRPr lang="en-US" sz="2800"/>
+          </a:p>
+          <a:p>
+            <a:pPr lvl="1">
+              <a:defRPr/>
+            </a:pPr>
+            <a:r>
+              <a:rPr lang="ru-RU" sz="2400"/>
+              <a:t>Высокий порог входа, необходимость учить язык программирования </a:t>
+            </a:r>
+            <a:r>
+              <a:rPr lang="en-US" sz="2400"/>
+              <a:t>nix</a:t>
+            </a:r>
+            <a:endParaRPr sz="2400"/>
           </a:p>
         </p:txBody>
       </p:sp>
@@ -6253,7 +8011,7 @@
       </p:grpSpPr>
       <p:sp>
         <p:nvSpPr>
-          <p:cNvPr id="72289361" name="Title 1"/>
+          <p:cNvPr id="979588513" name="Title 1"/>
           <p:cNvSpPr>
             <a:spLocks noGrp="1"/>
           </p:cNvSpPr>
@@ -6263,7 +8021,9 @@
         </p:nvSpPr>
         <p:spPr bwMode="auto"/>
         <p:txBody>
-          <a:bodyPr/>
+          <a:bodyPr vertOverflow="overflow" horzOverflow="overflow" vert="horz" wrap="square" lIns="91440" tIns="45720" rIns="91440" bIns="45720" numCol="1" spcCol="0" rtlCol="0" fromWordArt="0" anchor="ctr" anchorCtr="0" forceAA="0" upright="0" compatLnSpc="0">
+            <a:normAutofit fontScale="90000" lnSpcReduction="2000"/>
+          </a:bodyPr>
           <a:lstStyle/>
           <a:p>
             <a:pPr>
@@ -6271,11 +8031,112 @@
             </a:pPr>
             <a:r>
               <a:rPr/>
-              <a:t>V.III. </a:t>
+              <a:t>IV. </a:t>
             </a:r>
             <a:r>
               <a:rPr lang="ru-RU"/>
-              <a:t>Итог – сферы применения </a:t>
+              <a:t>Отличие идей </a:t>
+            </a:r>
+            <a:r>
+              <a:rPr lang="en-US"/>
+              <a:t>Clyx </a:t>
+            </a:r>
+            <a:r>
+              <a:rPr lang="ru-RU"/>
+              <a:t>от </a:t>
+            </a:r>
+            <a:r>
+              <a:rPr lang="en-US"/>
+              <a:t>NixOS</a:t>
+            </a:r>
+            <a:r>
+              <a:rPr lang="ru-RU"/>
+              <a:t>, решение проблем</a:t>
+            </a:r>
+            <a:endParaRPr/>
+          </a:p>
+        </p:txBody>
+      </p:sp>
+      <p:sp>
+        <p:nvSpPr>
+          <p:cNvPr id="801279413" name="Content Placeholder 2"/>
+          <p:cNvSpPr>
+            <a:spLocks noGrp="1"/>
+          </p:cNvSpPr>
+          <p:nvPr>
+            <p:ph idx="1"/>
+          </p:nvPr>
+        </p:nvSpPr>
+        <p:spPr bwMode="auto"/>
+        <p:txBody>
+          <a:bodyPr/>
+          <a:lstStyle/>
+          <a:p>
+            <a:pPr>
+              <a:defRPr/>
+            </a:pPr>
+            <a:endParaRPr/>
+          </a:p>
+        </p:txBody>
+      </p:sp>
+    </p:spTree>
+  </p:cSld>
+  <p:clrMapOvr>
+    <a:masterClrMapping/>
+  </p:clrMapOvr>
+  <mc:AlternateContent xmlns:mc="http://schemas.openxmlformats.org/markup-compatibility/2006">
+    <mc:Choice xmlns:p159="http://schemas.microsoft.com/office/powerpoint/2015/09/main" xmlns:p14="http://schemas.microsoft.com/office/powerpoint/2010/main" Requires="p159">
+      <p:transition p14:dur="2000" advClick="1"/>
+    </mc:Choice>
+    <mc:Fallback>
+      <p:transition advClick="1"/>
+    </mc:Fallback>
+  </mc:AlternateContent>
+</p:sld>
+</file>
+
+<file path=ppt/slides/slide9.xml><?xml version="1.0" encoding="utf-8"?>
+<p:sld xmlns:a="http://schemas.openxmlformats.org/drawingml/2006/main" xmlns:r="http://schemas.openxmlformats.org/officeDocument/2006/relationships" xmlns:p="http://schemas.openxmlformats.org/presentationml/2006/main" xmlns:m="http://schemas.openxmlformats.org/officeDocument/2006/math" xmlns:w="http://schemas.openxmlformats.org/wordprocessingml/2006/main" xmlns:mc="http://schemas.openxmlformats.org/markup-compatibility/2006" showMasterPhAnim="0" showMasterSp="1" show="1">
+  <p:cSld name="">
+    <p:spTree>
+      <p:nvGrpSpPr>
+        <p:cNvPr id="1" name=""/>
+        <p:cNvGrpSpPr/>
+        <p:nvPr/>
+      </p:nvGrpSpPr>
+      <p:grpSpPr bwMode="auto">
+        <a:xfrm>
+          <a:off x="0" y="0"/>
+          <a:ext cx="0" cy="0"/>
+          <a:chOff x="0" y="0"/>
+          <a:chExt cx="0" cy="0"/>
+        </a:xfrm>
+      </p:grpSpPr>
+      <p:sp>
+        <p:nvSpPr>
+          <p:cNvPr id="487698773" name="Title 1"/>
+          <p:cNvSpPr>
+            <a:spLocks noGrp="1"/>
+          </p:cNvSpPr>
+          <p:nvPr>
+            <p:ph type="title"/>
+          </p:nvPr>
+        </p:nvSpPr>
+        <p:spPr bwMode="auto"/>
+        <p:txBody>
+          <a:bodyPr/>
+          <a:lstStyle/>
+          <a:p>
+            <a:pPr>
+              <a:defRPr/>
+            </a:pPr>
+            <a:r>
+              <a:rPr/>
+              <a:t>V.I. </a:t>
+            </a:r>
+            <a:r>
+              <a:rPr lang="ru-RU"/>
+              <a:t>Итог – почему </a:t>
             </a:r>
             <a:r>
               <a:rPr lang="en-US"/>
@@ -6287,7 +8148,7 @@
       </p:sp>
       <p:sp>
         <p:nvSpPr>
-          <p:cNvPr id="390585284" name="Content Placeholder 2"/>
+          <p:cNvPr id="1633199837" name="Content Placeholder 2"/>
           <p:cNvSpPr>
             <a:spLocks noGrp="1"/>
           </p:cNvSpPr>

--- a/ClyxOS.pptx
+++ b/ClyxOS.pptx
@@ -5,7 +5,7 @@
     <p:sldMasterId id="2147483648" r:id="rId1"/>
   </p:sldMasterIdLst>
   <p:notesMasterIdLst>
-    <p:notesMasterId r:id="rId15"/>
+    <p:notesMasterId r:id="rId18"/>
   </p:notesMasterIdLst>
   <p:sldIdLst>
     <p:sldId id="256" r:id="rId4"/>
@@ -19,6 +19,9 @@
     <p:sldId id="264" r:id="rId12"/>
     <p:sldId id="265" r:id="rId13"/>
     <p:sldId id="266" r:id="rId14"/>
+    <p:sldId id="267" r:id="rId15"/>
+    <p:sldId id="268" r:id="rId16"/>
+    <p:sldId id="269" r:id="rId17"/>
   </p:sldIdLst>
   <p:sldSz cx="12192000" cy="6858000"/>
   <p:notesSz cx="6858000" cy="9144000"/>
@@ -144,7 +147,7 @@
       </p:grpSpPr>
       <p:sp>
         <p:nvSpPr>
-          <p:cNvPr id="1546214639" name="Header Placeholder 1"/>
+          <p:cNvPr id="179566383" name="Header Placeholder 1"/>
           <p:cNvSpPr>
             <a:spLocks noGrp="1"/>
           </p:cNvSpPr>
@@ -178,7 +181,7 @@
       </p:sp>
       <p:sp>
         <p:nvSpPr>
-          <p:cNvPr id="1030570847" name="Date Placeholder 2"/>
+          <p:cNvPr id="1493158772" name="Date Placeholder 2"/>
           <p:cNvSpPr>
             <a:spLocks noGrp="1"/>
           </p:cNvSpPr>
@@ -216,7 +219,7 @@
       </p:sp>
       <p:sp>
         <p:nvSpPr>
-          <p:cNvPr id="1296843825" name="Slide Image Placeholder 3"/>
+          <p:cNvPr id="2093172003" name="Slide Image Placeholder 3"/>
           <p:cNvSpPr>
             <a:spLocks noChangeAspect="1" noGrp="1" noRot="1"/>
           </p:cNvSpPr>
@@ -252,7 +255,7 @@
       </p:sp>
       <p:sp>
         <p:nvSpPr>
-          <p:cNvPr id="1529434634" name="Notes Placeholder 4"/>
+          <p:cNvPr id="848478479" name="Notes Placeholder 4"/>
           <p:cNvSpPr>
             <a:spLocks noGrp="1"/>
           </p:cNvSpPr>
@@ -326,7 +329,7 @@
       </p:sp>
       <p:sp>
         <p:nvSpPr>
-          <p:cNvPr id="712225383" name="Footer Placeholder 5"/>
+          <p:cNvPr id="1606114938" name="Footer Placeholder 5"/>
           <p:cNvSpPr>
             <a:spLocks noGrp="1"/>
           </p:cNvSpPr>
@@ -360,7 +363,7 @@
       </p:sp>
       <p:sp>
         <p:nvSpPr>
-          <p:cNvPr id="717050537" name="Slide Number Placeholder 6"/>
+          <p:cNvPr id="951011738" name="Slide Number Placeholder 6"/>
           <p:cNvSpPr>
             <a:spLocks noGrp="1"/>
           </p:cNvSpPr>
@@ -513,7 +516,7 @@
       </p:grpSpPr>
       <p:sp>
         <p:nvSpPr>
-          <p:cNvPr id="1434426961" name="Slide Image Placeholder 1"/>
+          <p:cNvPr id="1867454917" name="Slide Image Placeholder 1"/>
           <p:cNvSpPr>
             <a:spLocks noChangeAspect="1" noGrp="1" noRot="1"/>
           </p:cNvSpPr>
@@ -530,7 +533,7 @@
       </p:sp>
       <p:sp>
         <p:nvSpPr>
-          <p:cNvPr id="1900912322" name="Notes Placeholder 2"/>
+          <p:cNvPr id="571134079" name="Notes Placeholder 2"/>
           <p:cNvSpPr>
             <a:spLocks noGrp="1"/>
           </p:cNvSpPr>
@@ -555,7 +558,7 @@
       </p:sp>
       <p:sp>
         <p:nvSpPr>
-          <p:cNvPr id="717295177" name="Slide Number Placeholder 3"/>
+          <p:cNvPr id="880860638" name="Slide Number Placeholder 3"/>
           <p:cNvSpPr>
             <a:spLocks noGrp="1"/>
           </p:cNvSpPr>
@@ -606,7 +609,7 @@
       </p:grpSpPr>
       <p:sp>
         <p:nvSpPr>
-          <p:cNvPr id="442835609" name="Slide Image Placeholder 1"/>
+          <p:cNvPr id="130217301" name="Slide Image Placeholder 1"/>
           <p:cNvSpPr>
             <a:spLocks noChangeAspect="1" noGrp="1" noRot="1"/>
           </p:cNvSpPr>
@@ -618,7 +621,7 @@
       </p:sp>
       <p:sp>
         <p:nvSpPr>
-          <p:cNvPr id="207696533" name="Notes Placeholder 2"/>
+          <p:cNvPr id="1282302534" name="Notes Placeholder 2"/>
           <p:cNvSpPr>
             <a:spLocks noGrp="1"/>
           </p:cNvSpPr>
@@ -640,7 +643,7 @@
       </p:sp>
       <p:sp>
         <p:nvSpPr>
-          <p:cNvPr id="1149383519" name="Slide Number Placeholder 3"/>
+          <p:cNvPr id="1049079469" name="Slide Number Placeholder 3"/>
           <p:cNvSpPr>
             <a:spLocks noGrp="1"/>
           </p:cNvSpPr>
@@ -656,7 +659,7 @@
             <a:pPr>
               <a:defRPr/>
             </a:pPr>
-            <a:fld id="{471BBC87-CBAF-E622-B935-3DD98305F33D}" type="slidenum">
+            <a:fld id="{4F705752-0C38-0F49-9A2C-27E409111FE8}" type="slidenum">
               <a:rPr/>
               <a:t/>
             </a:fld>
@@ -691,7 +694,7 @@
       </p:grpSpPr>
       <p:sp>
         <p:nvSpPr>
-          <p:cNvPr id="1884893003" name="Slide Image Placeholder 1"/>
+          <p:cNvPr id="695493767" name="Slide Image Placeholder 1"/>
           <p:cNvSpPr>
             <a:spLocks noChangeAspect="1" noGrp="1" noRot="1"/>
           </p:cNvSpPr>
@@ -703,7 +706,7 @@
       </p:sp>
       <p:sp>
         <p:nvSpPr>
-          <p:cNvPr id="1544111720" name="Notes Placeholder 2"/>
+          <p:cNvPr id="42054625" name="Notes Placeholder 2"/>
           <p:cNvSpPr>
             <a:spLocks noGrp="1"/>
           </p:cNvSpPr>
@@ -725,7 +728,262 @@
       </p:sp>
       <p:sp>
         <p:nvSpPr>
-          <p:cNvPr id="1179951378" name="Slide Number Placeholder 3"/>
+          <p:cNvPr id="1360083474" name="Slide Number Placeholder 3"/>
+          <p:cNvSpPr>
+            <a:spLocks noGrp="1"/>
+          </p:cNvSpPr>
+          <p:nvPr>
+            <p:ph type="sldNum" sz="quarter" idx="10"/>
+          </p:nvPr>
+        </p:nvSpPr>
+        <p:spPr bwMode="auto"/>
+        <p:txBody>
+          <a:bodyPr/>
+          <a:lstStyle/>
+          <a:p>
+            <a:pPr>
+              <a:defRPr/>
+            </a:pPr>
+            <a:fld id="{ABEF7C7D-E779-4B40-2F65-832F04C6C48A}" type="slidenum">
+              <a:rPr/>
+              <a:t/>
+            </a:fld>
+            <a:endParaRPr/>
+          </a:p>
+        </p:txBody>
+      </p:sp>
+    </p:spTree>
+  </p:cSld>
+  <p:clrMapOvr>
+    <a:masterClrMapping/>
+  </p:clrMapOvr>
+</p:notes>
+</file>
+
+<file path=ppt/notesSlides/notesSlide12.xml><?xml version="1.0" encoding="utf-8"?>
+<p:notes xmlns:a="http://schemas.openxmlformats.org/drawingml/2006/main" xmlns:r="http://schemas.openxmlformats.org/officeDocument/2006/relationships" xmlns:p="http://schemas.openxmlformats.org/presentationml/2006/main" xmlns:m="http://schemas.openxmlformats.org/officeDocument/2006/math" xmlns:w="http://schemas.openxmlformats.org/wordprocessingml/2006/main">
+  <p:cSld name="">
+    <p:spTree>
+      <p:nvGrpSpPr>
+        <p:cNvPr id="1" name=""/>
+        <p:cNvGrpSpPr/>
+        <p:nvPr/>
+      </p:nvGrpSpPr>
+      <p:grpSpPr bwMode="auto">
+        <a:xfrm>
+          <a:off x="0" y="0"/>
+          <a:ext cx="0" cy="0"/>
+          <a:chOff x="0" y="0"/>
+          <a:chExt cx="0" cy="0"/>
+        </a:xfrm>
+      </p:grpSpPr>
+      <p:sp>
+        <p:nvSpPr>
+          <p:cNvPr id="1068138442" name="Slide Image Placeholder 1"/>
+          <p:cNvSpPr>
+            <a:spLocks noChangeAspect="1" noGrp="1" noRot="1"/>
+          </p:cNvSpPr>
+          <p:nvPr>
+            <p:ph type="sldImg"/>
+          </p:nvPr>
+        </p:nvSpPr>
+        <p:spPr bwMode="auto"/>
+      </p:sp>
+      <p:sp>
+        <p:nvSpPr>
+          <p:cNvPr id="1820075222" name="Notes Placeholder 2"/>
+          <p:cNvSpPr>
+            <a:spLocks noGrp="1"/>
+          </p:cNvSpPr>
+          <p:nvPr>
+            <p:ph type="body" idx="1"/>
+          </p:nvPr>
+        </p:nvSpPr>
+        <p:spPr bwMode="auto"/>
+        <p:txBody>
+          <a:bodyPr/>
+          <a:lstStyle/>
+          <a:p>
+            <a:pPr>
+              <a:defRPr/>
+            </a:pPr>
+            <a:endParaRPr/>
+          </a:p>
+        </p:txBody>
+      </p:sp>
+      <p:sp>
+        <p:nvSpPr>
+          <p:cNvPr id="192971186" name="Slide Number Placeholder 3"/>
+          <p:cNvSpPr>
+            <a:spLocks noGrp="1"/>
+          </p:cNvSpPr>
+          <p:nvPr>
+            <p:ph type="sldNum" sz="quarter" idx="10"/>
+          </p:nvPr>
+        </p:nvSpPr>
+        <p:spPr bwMode="auto"/>
+        <p:txBody>
+          <a:bodyPr/>
+          <a:lstStyle/>
+          <a:p>
+            <a:pPr>
+              <a:defRPr/>
+            </a:pPr>
+            <a:fld id="{114E3E1B-8D5A-2057-61F1-83FF16082702}" type="slidenum">
+              <a:rPr/>
+              <a:t/>
+            </a:fld>
+            <a:endParaRPr/>
+          </a:p>
+        </p:txBody>
+      </p:sp>
+    </p:spTree>
+  </p:cSld>
+  <p:clrMapOvr>
+    <a:masterClrMapping/>
+  </p:clrMapOvr>
+</p:notes>
+</file>
+
+<file path=ppt/notesSlides/notesSlide13.xml><?xml version="1.0" encoding="utf-8"?>
+<p:notes xmlns:a="http://schemas.openxmlformats.org/drawingml/2006/main" xmlns:r="http://schemas.openxmlformats.org/officeDocument/2006/relationships" xmlns:p="http://schemas.openxmlformats.org/presentationml/2006/main" xmlns:m="http://schemas.openxmlformats.org/officeDocument/2006/math" xmlns:w="http://schemas.openxmlformats.org/wordprocessingml/2006/main">
+  <p:cSld name="">
+    <p:spTree>
+      <p:nvGrpSpPr>
+        <p:cNvPr id="1" name=""/>
+        <p:cNvGrpSpPr/>
+        <p:nvPr/>
+      </p:nvGrpSpPr>
+      <p:grpSpPr bwMode="auto">
+        <a:xfrm>
+          <a:off x="0" y="0"/>
+          <a:ext cx="0" cy="0"/>
+          <a:chOff x="0" y="0"/>
+          <a:chExt cx="0" cy="0"/>
+        </a:xfrm>
+      </p:grpSpPr>
+      <p:sp>
+        <p:nvSpPr>
+          <p:cNvPr id="1751665923" name="Slide Image Placeholder 1"/>
+          <p:cNvSpPr>
+            <a:spLocks noChangeAspect="1" noGrp="1" noRot="1"/>
+          </p:cNvSpPr>
+          <p:nvPr>
+            <p:ph type="sldImg"/>
+          </p:nvPr>
+        </p:nvSpPr>
+        <p:spPr bwMode="auto"/>
+      </p:sp>
+      <p:sp>
+        <p:nvSpPr>
+          <p:cNvPr id="740602293" name="Notes Placeholder 2"/>
+          <p:cNvSpPr>
+            <a:spLocks noGrp="1"/>
+          </p:cNvSpPr>
+          <p:nvPr>
+            <p:ph type="body" idx="1"/>
+          </p:nvPr>
+        </p:nvSpPr>
+        <p:spPr bwMode="auto"/>
+        <p:txBody>
+          <a:bodyPr/>
+          <a:lstStyle/>
+          <a:p>
+            <a:pPr>
+              <a:defRPr/>
+            </a:pPr>
+            <a:endParaRPr/>
+          </a:p>
+        </p:txBody>
+      </p:sp>
+      <p:sp>
+        <p:nvSpPr>
+          <p:cNvPr id="1548942265" name="Slide Number Placeholder 3"/>
+          <p:cNvSpPr>
+            <a:spLocks noGrp="1"/>
+          </p:cNvSpPr>
+          <p:nvPr>
+            <p:ph type="sldNum" sz="quarter" idx="10"/>
+          </p:nvPr>
+        </p:nvSpPr>
+        <p:spPr bwMode="auto"/>
+        <p:txBody>
+          <a:bodyPr/>
+          <a:lstStyle/>
+          <a:p>
+            <a:pPr>
+              <a:defRPr/>
+            </a:pPr>
+            <a:fld id="{471BBC87-CBAF-E622-B935-3DD98305F33D}" type="slidenum">
+              <a:rPr/>
+              <a:t/>
+            </a:fld>
+            <a:endParaRPr/>
+          </a:p>
+        </p:txBody>
+      </p:sp>
+    </p:spTree>
+  </p:cSld>
+  <p:clrMapOvr>
+    <a:masterClrMapping/>
+  </p:clrMapOvr>
+</p:notes>
+</file>
+
+<file path=ppt/notesSlides/notesSlide14.xml><?xml version="1.0" encoding="utf-8"?>
+<p:notes xmlns:a="http://schemas.openxmlformats.org/drawingml/2006/main" xmlns:r="http://schemas.openxmlformats.org/officeDocument/2006/relationships" xmlns:p="http://schemas.openxmlformats.org/presentationml/2006/main" xmlns:m="http://schemas.openxmlformats.org/officeDocument/2006/math" xmlns:w="http://schemas.openxmlformats.org/wordprocessingml/2006/main">
+  <p:cSld name="">
+    <p:spTree>
+      <p:nvGrpSpPr>
+        <p:cNvPr id="1" name=""/>
+        <p:cNvGrpSpPr/>
+        <p:nvPr/>
+      </p:nvGrpSpPr>
+      <p:grpSpPr bwMode="auto">
+        <a:xfrm>
+          <a:off x="0" y="0"/>
+          <a:ext cx="0" cy="0"/>
+          <a:chOff x="0" y="0"/>
+          <a:chExt cx="0" cy="0"/>
+        </a:xfrm>
+      </p:grpSpPr>
+      <p:sp>
+        <p:nvSpPr>
+          <p:cNvPr id="119725126" name="Slide Image Placeholder 1"/>
+          <p:cNvSpPr>
+            <a:spLocks noChangeAspect="1" noGrp="1" noRot="1"/>
+          </p:cNvSpPr>
+          <p:nvPr>
+            <p:ph type="sldImg"/>
+          </p:nvPr>
+        </p:nvSpPr>
+        <p:spPr bwMode="auto"/>
+      </p:sp>
+      <p:sp>
+        <p:nvSpPr>
+          <p:cNvPr id="393818185" name="Notes Placeholder 2"/>
+          <p:cNvSpPr>
+            <a:spLocks noGrp="1"/>
+          </p:cNvSpPr>
+          <p:nvPr>
+            <p:ph type="body" idx="1"/>
+          </p:nvPr>
+        </p:nvSpPr>
+        <p:spPr bwMode="auto"/>
+        <p:txBody>
+          <a:bodyPr/>
+          <a:lstStyle/>
+          <a:p>
+            <a:pPr>
+              <a:defRPr/>
+            </a:pPr>
+            <a:endParaRPr/>
+          </a:p>
+        </p:txBody>
+      </p:sp>
+      <p:sp>
+        <p:nvSpPr>
+          <p:cNvPr id="1816261577" name="Slide Number Placeholder 3"/>
           <p:cNvSpPr>
             <a:spLocks noGrp="1"/>
           </p:cNvSpPr>
@@ -776,7 +1034,7 @@
       </p:grpSpPr>
       <p:sp>
         <p:nvSpPr>
-          <p:cNvPr id="2136477417" name="Slide Image Placeholder 1"/>
+          <p:cNvPr id="2141185993" name="Slide Image Placeholder 1"/>
           <p:cNvSpPr>
             <a:spLocks noChangeAspect="1" noGrp="1" noRot="1"/>
           </p:cNvSpPr>
@@ -788,7 +1046,7 @@
       </p:sp>
       <p:sp>
         <p:nvSpPr>
-          <p:cNvPr id="1162925322" name="Notes Placeholder 2"/>
+          <p:cNvPr id="540395916" name="Notes Placeholder 2"/>
           <p:cNvSpPr>
             <a:spLocks noGrp="1"/>
           </p:cNvSpPr>
@@ -810,7 +1068,7 @@
       </p:sp>
       <p:sp>
         <p:nvSpPr>
-          <p:cNvPr id="1110719619" name="Slide Number Placeholder 3"/>
+          <p:cNvPr id="1541994517" name="Slide Number Placeholder 3"/>
           <p:cNvSpPr>
             <a:spLocks noGrp="1"/>
           </p:cNvSpPr>
@@ -861,7 +1119,7 @@
       </p:grpSpPr>
       <p:sp>
         <p:nvSpPr>
-          <p:cNvPr id="2" name="Slide Image Placeholder 1"/>
+          <p:cNvPr id="269019108" name="Slide Image Placeholder 1"/>
           <p:cNvSpPr>
             <a:spLocks noChangeAspect="1" noGrp="1" noRot="1"/>
           </p:cNvSpPr>
@@ -873,7 +1131,7 @@
       </p:sp>
       <p:sp>
         <p:nvSpPr>
-          <p:cNvPr id="3" name="Notes Placeholder 2"/>
+          <p:cNvPr id="968849585" name="Notes Placeholder 2"/>
           <p:cNvSpPr>
             <a:spLocks noGrp="1"/>
           </p:cNvSpPr>
@@ -895,7 +1153,7 @@
       </p:sp>
       <p:sp>
         <p:nvSpPr>
-          <p:cNvPr id="4" name="Slide Number Placeholder 3"/>
+          <p:cNvPr id="602583449" name="Slide Number Placeholder 3"/>
           <p:cNvSpPr>
             <a:spLocks noGrp="1"/>
           </p:cNvSpPr>
@@ -911,7 +1169,7 @@
             <a:pPr>
               <a:defRPr/>
             </a:pPr>
-            <a:fld id="{21216FB3-DB42-6A08-4AF7-0F3AB439D9A6}" type="slidenum">
+            <a:fld id="{179CF294-21B3-F560-A21E-8107897AEADF}" type="slidenum">
               <a:rPr/>
               <a:t/>
             </a:fld>
@@ -946,7 +1204,7 @@
       </p:grpSpPr>
       <p:sp>
         <p:nvSpPr>
-          <p:cNvPr id="1221180262" name="Slide Image Placeholder 1"/>
+          <p:cNvPr id="141182581" name="Slide Image Placeholder 1"/>
           <p:cNvSpPr>
             <a:spLocks noChangeAspect="1" noGrp="1" noRot="1"/>
           </p:cNvSpPr>
@@ -958,7 +1216,7 @@
       </p:sp>
       <p:sp>
         <p:nvSpPr>
-          <p:cNvPr id="1358109955" name="Notes Placeholder 2"/>
+          <p:cNvPr id="1979021411" name="Notes Placeholder 2"/>
           <p:cNvSpPr>
             <a:spLocks noGrp="1"/>
           </p:cNvSpPr>
@@ -980,7 +1238,7 @@
       </p:sp>
       <p:sp>
         <p:nvSpPr>
-          <p:cNvPr id="1065458239" name="Slide Number Placeholder 3"/>
+          <p:cNvPr id="301261418" name="Slide Number Placeholder 3"/>
           <p:cNvSpPr>
             <a:spLocks noGrp="1"/>
           </p:cNvSpPr>
@@ -996,7 +1254,7 @@
             <a:pPr>
               <a:defRPr/>
             </a:pPr>
-            <a:fld id="{4F705752-0C38-0F49-9A2C-27E409111FE8}" type="slidenum">
+            <a:fld id="{527439A2-67E8-0215-5218-5B32AFCD49DA}" type="slidenum">
               <a:rPr/>
               <a:t/>
             </a:fld>
@@ -1031,7 +1289,7 @@
       </p:grpSpPr>
       <p:sp>
         <p:nvSpPr>
-          <p:cNvPr id="227364297" name="Slide Image Placeholder 1"/>
+          <p:cNvPr id="2" name="Slide Image Placeholder 1"/>
           <p:cNvSpPr>
             <a:spLocks noChangeAspect="1" noGrp="1" noRot="1"/>
           </p:cNvSpPr>
@@ -1043,7 +1301,7 @@
       </p:sp>
       <p:sp>
         <p:nvSpPr>
-          <p:cNvPr id="935987977" name="Notes Placeholder 2"/>
+          <p:cNvPr id="3" name="Notes Placeholder 2"/>
           <p:cNvSpPr>
             <a:spLocks noGrp="1"/>
           </p:cNvSpPr>
@@ -1065,7 +1323,7 @@
       </p:sp>
       <p:sp>
         <p:nvSpPr>
-          <p:cNvPr id="545001859" name="Slide Number Placeholder 3"/>
+          <p:cNvPr id="4" name="Slide Number Placeholder 3"/>
           <p:cNvSpPr>
             <a:spLocks noGrp="1"/>
           </p:cNvSpPr>
@@ -1081,7 +1339,7 @@
             <a:pPr>
               <a:defRPr/>
             </a:pPr>
-            <a:fld id="{713B4F46-A54C-563C-F60F-6A3D197967AB}" type="slidenum">
+            <a:fld id="{2F8F81CA-5DFD-9CC0-5C56-856AD3120691}" type="slidenum">
               <a:rPr/>
               <a:t/>
             </a:fld>
@@ -1116,7 +1374,7 @@
       </p:grpSpPr>
       <p:sp>
         <p:nvSpPr>
-          <p:cNvPr id="1788857747" name="Slide Image Placeholder 1"/>
+          <p:cNvPr id="1995948244" name="Slide Image Placeholder 1"/>
           <p:cNvSpPr>
             <a:spLocks noChangeAspect="1" noGrp="1" noRot="1"/>
           </p:cNvSpPr>
@@ -1128,7 +1386,7 @@
       </p:sp>
       <p:sp>
         <p:nvSpPr>
-          <p:cNvPr id="43765420" name="Notes Placeholder 2"/>
+          <p:cNvPr id="262520362" name="Notes Placeholder 2"/>
           <p:cNvSpPr>
             <a:spLocks noGrp="1"/>
           </p:cNvSpPr>
@@ -1150,7 +1408,7 @@
       </p:sp>
       <p:sp>
         <p:nvSpPr>
-          <p:cNvPr id="962072152" name="Slide Number Placeholder 3"/>
+          <p:cNvPr id="1354756620" name="Slide Number Placeholder 3"/>
           <p:cNvSpPr>
             <a:spLocks noGrp="1"/>
           </p:cNvSpPr>
@@ -1166,7 +1424,7 @@
             <a:pPr>
               <a:defRPr/>
             </a:pPr>
-            <a:fld id="{179CF294-21B3-F560-A21E-8107897AEADF}" type="slidenum">
+            <a:fld id="{21216FB3-DB42-6A08-4AF7-0F3AB439D9A6}" type="slidenum">
               <a:rPr/>
               <a:t/>
             </a:fld>
@@ -1201,7 +1459,7 @@
       </p:grpSpPr>
       <p:sp>
         <p:nvSpPr>
-          <p:cNvPr id="2021856405" name="Slide Image Placeholder 1"/>
+          <p:cNvPr id="2" name="Slide Image Placeholder 1"/>
           <p:cNvSpPr>
             <a:spLocks noChangeAspect="1" noGrp="1" noRot="1"/>
           </p:cNvSpPr>
@@ -1213,7 +1471,7 @@
       </p:sp>
       <p:sp>
         <p:nvSpPr>
-          <p:cNvPr id="487941059" name="Notes Placeholder 2"/>
+          <p:cNvPr id="3" name="Notes Placeholder 2"/>
           <p:cNvSpPr>
             <a:spLocks noGrp="1"/>
           </p:cNvSpPr>
@@ -1235,7 +1493,7 @@
       </p:sp>
       <p:sp>
         <p:nvSpPr>
-          <p:cNvPr id="2135174091" name="Slide Number Placeholder 3"/>
+          <p:cNvPr id="4" name="Slide Number Placeholder 3"/>
           <p:cNvSpPr>
             <a:spLocks noGrp="1"/>
           </p:cNvSpPr>
@@ -1251,7 +1509,7 @@
             <a:pPr>
               <a:defRPr/>
             </a:pPr>
-            <a:fld id="{527439A2-67E8-0215-5218-5B32AFCD49DA}" type="slidenum">
+            <a:fld id="{17E4CA16-0E44-4D17-F6DF-3676ADDD6D68}" type="slidenum">
               <a:rPr/>
               <a:t/>
             </a:fld>
@@ -1286,7 +1544,7 @@
       </p:grpSpPr>
       <p:sp>
         <p:nvSpPr>
-          <p:cNvPr id="1555249552" name="Slide Image Placeholder 1"/>
+          <p:cNvPr id="1500098035" name="Slide Image Placeholder 1"/>
           <p:cNvSpPr>
             <a:spLocks noChangeAspect="1" noGrp="1" noRot="1"/>
           </p:cNvSpPr>
@@ -1298,7 +1556,7 @@
       </p:sp>
       <p:sp>
         <p:nvSpPr>
-          <p:cNvPr id="888052847" name="Notes Placeholder 2"/>
+          <p:cNvPr id="2118197933" name="Notes Placeholder 2"/>
           <p:cNvSpPr>
             <a:spLocks noGrp="1"/>
           </p:cNvSpPr>
@@ -1320,7 +1578,7 @@
       </p:sp>
       <p:sp>
         <p:nvSpPr>
-          <p:cNvPr id="1464331475" name="Slide Number Placeholder 3"/>
+          <p:cNvPr id="1468732285" name="Slide Number Placeholder 3"/>
           <p:cNvSpPr>
             <a:spLocks noGrp="1"/>
           </p:cNvSpPr>
@@ -1336,7 +1594,7 @@
             <a:pPr>
               <a:defRPr/>
             </a:pPr>
-            <a:fld id="{ABEF7C7D-E779-4B40-2F65-832F04C6C48A}" type="slidenum">
+            <a:fld id="{F7D8CB5B-1F08-8417-917A-77954FCF7824}" type="slidenum">
               <a:rPr/>
               <a:t/>
             </a:fld>
@@ -1371,7 +1629,7 @@
       </p:grpSpPr>
       <p:sp>
         <p:nvSpPr>
-          <p:cNvPr id="1916252987" name="Slide Image Placeholder 1"/>
+          <p:cNvPr id="498449657" name="Slide Image Placeholder 1"/>
           <p:cNvSpPr>
             <a:spLocks noChangeAspect="1" noGrp="1" noRot="1"/>
           </p:cNvSpPr>
@@ -1383,7 +1641,7 @@
       </p:sp>
       <p:sp>
         <p:nvSpPr>
-          <p:cNvPr id="1997868791" name="Notes Placeholder 2"/>
+          <p:cNvPr id="717168851" name="Notes Placeholder 2"/>
           <p:cNvSpPr>
             <a:spLocks noGrp="1"/>
           </p:cNvSpPr>
@@ -1405,7 +1663,7 @@
       </p:sp>
       <p:sp>
         <p:nvSpPr>
-          <p:cNvPr id="907772003" name="Slide Number Placeholder 3"/>
+          <p:cNvPr id="201581129" name="Slide Number Placeholder 3"/>
           <p:cNvSpPr>
             <a:spLocks noGrp="1"/>
           </p:cNvSpPr>
@@ -1421,7 +1679,7 @@
             <a:pPr>
               <a:defRPr/>
             </a:pPr>
-            <a:fld id="{114E3E1B-8D5A-2057-61F1-83FF16082702}" type="slidenum">
+            <a:fld id="{713B4F46-A54C-563C-F60F-6A3D197967AB}" type="slidenum">
               <a:rPr/>
               <a:t/>
             </a:fld>
@@ -1456,7 +1714,7 @@
       </p:grpSpPr>
       <p:sp>
         <p:nvSpPr>
-          <p:cNvPr id="1361604766" name="Shape 1059"/>
+          <p:cNvPr id="1744871573" name="Shape 1059"/>
           <p:cNvSpPr>
             <a:spLocks noChangeArrowheads="1" noGrp="1"/>
           </p:cNvSpPr>
@@ -1579,7 +1837,7 @@
       </p:sp>
       <p:sp>
         <p:nvSpPr>
-          <p:cNvPr id="1443726683" name="Shape 1060"/>
+          <p:cNvPr id="352185839" name="Shape 1060"/>
           <p:cNvSpPr>
             <a:spLocks noChangeArrowheads="1" noGrp="1"/>
           </p:cNvSpPr>
@@ -1670,7 +1928,7 @@
       </p:sp>
       <p:sp>
         <p:nvSpPr>
-          <p:cNvPr id="1858021488" name="Shape 1061"/>
+          <p:cNvPr id="1876477245" name="Shape 1061"/>
           <p:cNvSpPr>
             <a:spLocks noChangeArrowheads="1" noGrp="1"/>
           </p:cNvSpPr>
@@ -1756,7 +2014,7 @@
       </p:sp>
       <p:sp>
         <p:nvSpPr>
-          <p:cNvPr id="409781565" name="Shape 1062"/>
+          <p:cNvPr id="1763092978" name="Shape 1062"/>
           <p:cNvSpPr>
             <a:spLocks noChangeArrowheads="1" noGrp="1"/>
           </p:cNvSpPr>
@@ -1834,7 +2092,7 @@
       </p:sp>
       <p:sp>
         <p:nvSpPr>
-          <p:cNvPr id="2020034623" name="Shape 1063"/>
+          <p:cNvPr id="1511093587" name="Shape 1063"/>
           <p:cNvSpPr>
             <a:spLocks noChangeArrowheads="1" noGrp="1"/>
           </p:cNvSpPr>
@@ -1912,7 +2170,7 @@
       </p:sp>
       <p:sp>
         <p:nvSpPr>
-          <p:cNvPr id="562372629" name="Subtitle 2"/>
+          <p:cNvPr id="848523781" name="Subtitle 2"/>
           <p:cNvSpPr>
             <a:spLocks noGrp="1"/>
           </p:cNvSpPr>
@@ -2035,7 +2293,7 @@
       </p:sp>
       <p:sp>
         <p:nvSpPr>
-          <p:cNvPr id="386448257" name="Date Placeholder 3"/>
+          <p:cNvPr id="77269690" name="Date Placeholder 3"/>
           <p:cNvSpPr>
             <a:spLocks noGrp="1"/>
           </p:cNvSpPr>
@@ -2061,7 +2319,7 @@
       </p:sp>
       <p:sp>
         <p:nvSpPr>
-          <p:cNvPr id="706480022" name="Footer Placeholder 4"/>
+          <p:cNvPr id="1411101400" name="Footer Placeholder 4"/>
           <p:cNvSpPr>
             <a:spLocks noGrp="1"/>
           </p:cNvSpPr>
@@ -2083,7 +2341,7 @@
       </p:sp>
       <p:sp>
         <p:nvSpPr>
-          <p:cNvPr id="2110048032" name="Slide Number Placeholder 5"/>
+          <p:cNvPr id="1624634880" name="Slide Number Placeholder 5"/>
           <p:cNvSpPr>
             <a:spLocks noGrp="1"/>
           </p:cNvSpPr>
@@ -2109,7 +2367,7 @@
       </p:sp>
       <p:sp>
         <p:nvSpPr>
-          <p:cNvPr id="1264488901" name="Title 6"/>
+          <p:cNvPr id="1385124026" name="Title 6"/>
           <p:cNvSpPr>
             <a:spLocks noGrp="1"/>
           </p:cNvSpPr>
@@ -2169,7 +2427,7 @@
       </p:grpSpPr>
       <p:sp>
         <p:nvSpPr>
-          <p:cNvPr id="1724010757" name="Title 1"/>
+          <p:cNvPr id="487859008" name="Title 1"/>
           <p:cNvSpPr>
             <a:spLocks noGrp="1"/>
           </p:cNvSpPr>
@@ -2195,7 +2453,7 @@
       </p:sp>
       <p:sp>
         <p:nvSpPr>
-          <p:cNvPr id="1168036887" name="Vertical Text Placeholder 2"/>
+          <p:cNvPr id="1675631576" name="Vertical Text Placeholder 2"/>
           <p:cNvSpPr>
             <a:spLocks noGrp="1"/>
           </p:cNvSpPr>
@@ -2261,7 +2519,7 @@
       </p:sp>
       <p:sp>
         <p:nvSpPr>
-          <p:cNvPr id="822797777" name="Date Placeholder 3"/>
+          <p:cNvPr id="235480718" name="Date Placeholder 3"/>
           <p:cNvSpPr>
             <a:spLocks noGrp="1"/>
           </p:cNvSpPr>
@@ -2287,7 +2545,7 @@
       </p:sp>
       <p:sp>
         <p:nvSpPr>
-          <p:cNvPr id="213844211" name="Footer Placeholder 4"/>
+          <p:cNvPr id="930411169" name="Footer Placeholder 4"/>
           <p:cNvSpPr>
             <a:spLocks noGrp="1"/>
           </p:cNvSpPr>
@@ -2309,7 +2567,7 @@
       </p:sp>
       <p:sp>
         <p:nvSpPr>
-          <p:cNvPr id="945496698" name="Slide Number Placeholder 5"/>
+          <p:cNvPr id="403427374" name="Slide Number Placeholder 5"/>
           <p:cNvSpPr>
             <a:spLocks noGrp="1"/>
           </p:cNvSpPr>
@@ -2360,7 +2618,7 @@
       </p:grpSpPr>
       <p:sp>
         <p:nvSpPr>
-          <p:cNvPr id="901514425" name="Vertical Title 1"/>
+          <p:cNvPr id="1726713654" name="Vertical Title 1"/>
           <p:cNvSpPr>
             <a:spLocks noGrp="1"/>
           </p:cNvSpPr>
@@ -2395,7 +2653,7 @@
       </p:sp>
       <p:sp>
         <p:nvSpPr>
-          <p:cNvPr id="603358356" name="Vertical Text Placeholder 2"/>
+          <p:cNvPr id="364741061" name="Vertical Text Placeholder 2"/>
           <p:cNvSpPr>
             <a:spLocks noGrp="1"/>
           </p:cNvSpPr>
@@ -2466,7 +2724,7 @@
       </p:sp>
       <p:sp>
         <p:nvSpPr>
-          <p:cNvPr id="1837906410" name="Date Placeholder 3"/>
+          <p:cNvPr id="999984546" name="Date Placeholder 3"/>
           <p:cNvSpPr>
             <a:spLocks noGrp="1"/>
           </p:cNvSpPr>
@@ -2492,7 +2750,7 @@
       </p:sp>
       <p:sp>
         <p:nvSpPr>
-          <p:cNvPr id="1853479407" name="Footer Placeholder 4"/>
+          <p:cNvPr id="977589161" name="Footer Placeholder 4"/>
           <p:cNvSpPr>
             <a:spLocks noGrp="1"/>
           </p:cNvSpPr>
@@ -2514,7 +2772,7 @@
       </p:sp>
       <p:sp>
         <p:nvSpPr>
-          <p:cNvPr id="961255319" name="Slide Number Placeholder 5"/>
+          <p:cNvPr id="359158179" name="Slide Number Placeholder 5"/>
           <p:cNvSpPr>
             <a:spLocks noGrp="1"/>
           </p:cNvSpPr>
@@ -2565,7 +2823,7 @@
       </p:grpSpPr>
       <p:sp>
         <p:nvSpPr>
-          <p:cNvPr id="1791787101" name="Title 1"/>
+          <p:cNvPr id="1037992770" name="Title 1"/>
           <p:cNvSpPr>
             <a:spLocks noGrp="1"/>
           </p:cNvSpPr>
@@ -2591,7 +2849,7 @@
       </p:sp>
       <p:sp>
         <p:nvSpPr>
-          <p:cNvPr id="15610185" name="Content Placeholder 2"/>
+          <p:cNvPr id="1937589012" name="Content Placeholder 2"/>
           <p:cNvSpPr>
             <a:spLocks noGrp="1"/>
           </p:cNvSpPr>
@@ -2657,7 +2915,7 @@
       </p:sp>
       <p:sp>
         <p:nvSpPr>
-          <p:cNvPr id="1503545973" name="Date Placeholder 3"/>
+          <p:cNvPr id="340093836" name="Date Placeholder 3"/>
           <p:cNvSpPr>
             <a:spLocks noGrp="1"/>
           </p:cNvSpPr>
@@ -2683,7 +2941,7 @@
       </p:sp>
       <p:sp>
         <p:nvSpPr>
-          <p:cNvPr id="293403106" name="Footer Placeholder 4"/>
+          <p:cNvPr id="1102492367" name="Footer Placeholder 4"/>
           <p:cNvSpPr>
             <a:spLocks noGrp="1"/>
           </p:cNvSpPr>
@@ -2705,7 +2963,7 @@
       </p:sp>
       <p:sp>
         <p:nvSpPr>
-          <p:cNvPr id="1856825072" name="Slide Number Placeholder 5"/>
+          <p:cNvPr id="1014335586" name="Slide Number Placeholder 5"/>
           <p:cNvSpPr>
             <a:spLocks noGrp="1"/>
           </p:cNvSpPr>
@@ -2756,7 +3014,7 @@
       </p:grpSpPr>
       <p:sp>
         <p:nvSpPr>
-          <p:cNvPr id="441596050" name="Title 1"/>
+          <p:cNvPr id="1825436597" name="Title 1"/>
           <p:cNvSpPr>
             <a:spLocks noGrp="1"/>
           </p:cNvSpPr>
@@ -2791,7 +3049,7 @@
       </p:sp>
       <p:sp>
         <p:nvSpPr>
-          <p:cNvPr id="3408106" name="Text Placeholder 2"/>
+          <p:cNvPr id="1598405531" name="Text Placeholder 2"/>
           <p:cNvSpPr>
             <a:spLocks noGrp="1"/>
           </p:cNvSpPr>
@@ -2913,7 +3171,7 @@
       </p:sp>
       <p:sp>
         <p:nvSpPr>
-          <p:cNvPr id="1160799768" name="Date Placeholder 3"/>
+          <p:cNvPr id="2092295071" name="Date Placeholder 3"/>
           <p:cNvSpPr>
             <a:spLocks noGrp="1"/>
           </p:cNvSpPr>
@@ -2939,7 +3197,7 @@
       </p:sp>
       <p:sp>
         <p:nvSpPr>
-          <p:cNvPr id="80220066" name="Footer Placeholder 4"/>
+          <p:cNvPr id="1927630050" name="Footer Placeholder 4"/>
           <p:cNvSpPr>
             <a:spLocks noGrp="1"/>
           </p:cNvSpPr>
@@ -2961,7 +3219,7 @@
       </p:sp>
       <p:sp>
         <p:nvSpPr>
-          <p:cNvPr id="1290921426" name="Slide Number Placeholder 5"/>
+          <p:cNvPr id="646867921" name="Slide Number Placeholder 5"/>
           <p:cNvSpPr>
             <a:spLocks noGrp="1"/>
           </p:cNvSpPr>
@@ -3012,7 +3270,7 @@
       </p:grpSpPr>
       <p:sp>
         <p:nvSpPr>
-          <p:cNvPr id="1000992035" name="Title 1"/>
+          <p:cNvPr id="1700748770" name="Title 1"/>
           <p:cNvSpPr>
             <a:spLocks noGrp="1"/>
           </p:cNvSpPr>
@@ -3038,7 +3296,7 @@
       </p:sp>
       <p:sp>
         <p:nvSpPr>
-          <p:cNvPr id="2116548036" name="Content Placeholder 2"/>
+          <p:cNvPr id="785029825" name="Content Placeholder 2"/>
           <p:cNvSpPr>
             <a:spLocks noGrp="1"/>
           </p:cNvSpPr>
@@ -3137,7 +3395,7 @@
       </p:sp>
       <p:sp>
         <p:nvSpPr>
-          <p:cNvPr id="299514990" name="Content Placeholder 3"/>
+          <p:cNvPr id="582882606" name="Content Placeholder 3"/>
           <p:cNvSpPr>
             <a:spLocks noGrp="1"/>
           </p:cNvSpPr>
@@ -3236,7 +3494,7 @@
       </p:sp>
       <p:sp>
         <p:nvSpPr>
-          <p:cNvPr id="377373710" name="Date Placeholder 4"/>
+          <p:cNvPr id="1293640229" name="Date Placeholder 4"/>
           <p:cNvSpPr>
             <a:spLocks noGrp="1"/>
           </p:cNvSpPr>
@@ -3262,7 +3520,7 @@
       </p:sp>
       <p:sp>
         <p:nvSpPr>
-          <p:cNvPr id="532661011" name="Footer Placeholder 5"/>
+          <p:cNvPr id="1799523942" name="Footer Placeholder 5"/>
           <p:cNvSpPr>
             <a:spLocks noGrp="1"/>
           </p:cNvSpPr>
@@ -3284,7 +3542,7 @@
       </p:sp>
       <p:sp>
         <p:nvSpPr>
-          <p:cNvPr id="116776367" name="Slide Number Placeholder 6"/>
+          <p:cNvPr id="1516519325" name="Slide Number Placeholder 6"/>
           <p:cNvSpPr>
             <a:spLocks noGrp="1"/>
           </p:cNvSpPr>
@@ -3335,7 +3593,7 @@
       </p:grpSpPr>
       <p:sp>
         <p:nvSpPr>
-          <p:cNvPr id="80687333" name="Title 1"/>
+          <p:cNvPr id="559441482" name="Title 1"/>
           <p:cNvSpPr>
             <a:spLocks noGrp="1"/>
           </p:cNvSpPr>
@@ -3365,7 +3623,7 @@
       </p:sp>
       <p:sp>
         <p:nvSpPr>
-          <p:cNvPr id="1692879156" name="Text Placeholder 2"/>
+          <p:cNvPr id="131451600" name="Text Placeholder 2"/>
           <p:cNvSpPr>
             <a:spLocks noGrp="1"/>
           </p:cNvSpPr>
@@ -3433,7 +3691,7 @@
       </p:sp>
       <p:sp>
         <p:nvSpPr>
-          <p:cNvPr id="1588713457" name="Content Placeholder 3"/>
+          <p:cNvPr id="1766892977" name="Content Placeholder 3"/>
           <p:cNvSpPr>
             <a:spLocks noGrp="1"/>
           </p:cNvSpPr>
@@ -3532,7 +3790,7 @@
       </p:sp>
       <p:sp>
         <p:nvSpPr>
-          <p:cNvPr id="581812948" name="Text Placeholder 4"/>
+          <p:cNvPr id="1305456848" name="Text Placeholder 4"/>
           <p:cNvSpPr>
             <a:spLocks noGrp="1"/>
           </p:cNvSpPr>
@@ -3600,7 +3858,7 @@
       </p:sp>
       <p:sp>
         <p:nvSpPr>
-          <p:cNvPr id="47481304" name="Content Placeholder 5"/>
+          <p:cNvPr id="1789428309" name="Content Placeholder 5"/>
           <p:cNvSpPr>
             <a:spLocks noGrp="1"/>
           </p:cNvSpPr>
@@ -3699,7 +3957,7 @@
       </p:sp>
       <p:sp>
         <p:nvSpPr>
-          <p:cNvPr id="1041479345" name="Date Placeholder 6"/>
+          <p:cNvPr id="1878185432" name="Date Placeholder 6"/>
           <p:cNvSpPr>
             <a:spLocks noGrp="1"/>
           </p:cNvSpPr>
@@ -3725,7 +3983,7 @@
       </p:sp>
       <p:sp>
         <p:nvSpPr>
-          <p:cNvPr id="229041608" name="Footer Placeholder 7"/>
+          <p:cNvPr id="1415771520" name="Footer Placeholder 7"/>
           <p:cNvSpPr>
             <a:spLocks noGrp="1"/>
           </p:cNvSpPr>
@@ -3747,7 +4005,7 @@
       </p:sp>
       <p:sp>
         <p:nvSpPr>
-          <p:cNvPr id="2024346745" name="Slide Number Placeholder 8"/>
+          <p:cNvPr id="1286850231" name="Slide Number Placeholder 8"/>
           <p:cNvSpPr>
             <a:spLocks noGrp="1"/>
           </p:cNvSpPr>
@@ -3798,7 +4056,7 @@
       </p:grpSpPr>
       <p:sp>
         <p:nvSpPr>
-          <p:cNvPr id="1788733204" name="Title 1"/>
+          <p:cNvPr id="1105051799" name="Title 1"/>
           <p:cNvSpPr>
             <a:spLocks noGrp="1"/>
           </p:cNvSpPr>
@@ -3824,7 +4082,7 @@
       </p:sp>
       <p:sp>
         <p:nvSpPr>
-          <p:cNvPr id="808595696" name="Date Placeholder 2"/>
+          <p:cNvPr id="166798351" name="Date Placeholder 2"/>
           <p:cNvSpPr>
             <a:spLocks noGrp="1"/>
           </p:cNvSpPr>
@@ -3850,7 +4108,7 @@
       </p:sp>
       <p:sp>
         <p:nvSpPr>
-          <p:cNvPr id="2064847498" name="Footer Placeholder 3"/>
+          <p:cNvPr id="120747339" name="Footer Placeholder 3"/>
           <p:cNvSpPr>
             <a:spLocks noGrp="1"/>
           </p:cNvSpPr>
@@ -3872,7 +4130,7 @@
       </p:sp>
       <p:sp>
         <p:nvSpPr>
-          <p:cNvPr id="1588779311" name="Slide Number Placeholder 4"/>
+          <p:cNvPr id="234954683" name="Slide Number Placeholder 4"/>
           <p:cNvSpPr>
             <a:spLocks noGrp="1"/>
           </p:cNvSpPr>
@@ -3923,7 +4181,7 @@
       </p:grpSpPr>
       <p:sp>
         <p:nvSpPr>
-          <p:cNvPr id="804447782" name="Date Placeholder 1"/>
+          <p:cNvPr id="1156525622" name="Date Placeholder 1"/>
           <p:cNvSpPr>
             <a:spLocks noGrp="1"/>
           </p:cNvSpPr>
@@ -3949,7 +4207,7 @@
       </p:sp>
       <p:sp>
         <p:nvSpPr>
-          <p:cNvPr id="1940385705" name="Footer Placeholder 2"/>
+          <p:cNvPr id="1518135658" name="Footer Placeholder 2"/>
           <p:cNvSpPr>
             <a:spLocks noGrp="1"/>
           </p:cNvSpPr>
@@ -3971,7 +4229,7 @@
       </p:sp>
       <p:sp>
         <p:nvSpPr>
-          <p:cNvPr id="1134901183" name="Slide Number Placeholder 3"/>
+          <p:cNvPr id="1210935907" name="Slide Number Placeholder 3"/>
           <p:cNvSpPr>
             <a:spLocks noGrp="1"/>
           </p:cNvSpPr>
@@ -4022,7 +4280,7 @@
       </p:grpSpPr>
       <p:sp>
         <p:nvSpPr>
-          <p:cNvPr id="1007611105" name="Title 1"/>
+          <p:cNvPr id="1291845883" name="Title 1"/>
           <p:cNvSpPr>
             <a:spLocks noGrp="1"/>
           </p:cNvSpPr>
@@ -4057,7 +4315,7 @@
       </p:sp>
       <p:sp>
         <p:nvSpPr>
-          <p:cNvPr id="940310134" name="Content Placeholder 2"/>
+          <p:cNvPr id="2110104460" name="Content Placeholder 2"/>
           <p:cNvSpPr>
             <a:spLocks noGrp="1"/>
           </p:cNvSpPr>
@@ -4156,7 +4414,7 @@
       </p:sp>
       <p:sp>
         <p:nvSpPr>
-          <p:cNvPr id="1419996346" name="Text Placeholder 3"/>
+          <p:cNvPr id="2042456745" name="Text Placeholder 3"/>
           <p:cNvSpPr>
             <a:spLocks noGrp="1"/>
           </p:cNvSpPr>
@@ -4224,7 +4482,7 @@
       </p:sp>
       <p:sp>
         <p:nvSpPr>
-          <p:cNvPr id="978744076" name="Date Placeholder 4"/>
+          <p:cNvPr id="1436971044" name="Date Placeholder 4"/>
           <p:cNvSpPr>
             <a:spLocks noGrp="1"/>
           </p:cNvSpPr>
@@ -4250,7 +4508,7 @@
       </p:sp>
       <p:sp>
         <p:nvSpPr>
-          <p:cNvPr id="859123333" name="Footer Placeholder 5"/>
+          <p:cNvPr id="1300350376" name="Footer Placeholder 5"/>
           <p:cNvSpPr>
             <a:spLocks noGrp="1"/>
           </p:cNvSpPr>
@@ -4272,7 +4530,7 @@
       </p:sp>
       <p:sp>
         <p:nvSpPr>
-          <p:cNvPr id="490835867" name="Slide Number Placeholder 6"/>
+          <p:cNvPr id="1574196419" name="Slide Number Placeholder 6"/>
           <p:cNvSpPr>
             <a:spLocks noGrp="1"/>
           </p:cNvSpPr>
@@ -4323,7 +4581,7 @@
       </p:grpSpPr>
       <p:sp>
         <p:nvSpPr>
-          <p:cNvPr id="671318907" name="Title 1"/>
+          <p:cNvPr id="1853680800" name="Title 1"/>
           <p:cNvSpPr>
             <a:spLocks noGrp="1"/>
           </p:cNvSpPr>
@@ -4358,7 +4616,7 @@
       </p:sp>
       <p:sp>
         <p:nvSpPr>
-          <p:cNvPr id="2098991379" name="Picture Placeholder 2"/>
+          <p:cNvPr id="1224413231" name="Picture Placeholder 2"/>
           <p:cNvSpPr>
             <a:spLocks noGrp="1"/>
           </p:cNvSpPr>
@@ -4422,7 +4680,7 @@
       </p:sp>
       <p:sp>
         <p:nvSpPr>
-          <p:cNvPr id="1133672244" name="Text Placeholder 3"/>
+          <p:cNvPr id="100928422" name="Text Placeholder 3"/>
           <p:cNvSpPr>
             <a:spLocks noGrp="1"/>
           </p:cNvSpPr>
@@ -4490,7 +4748,7 @@
       </p:sp>
       <p:sp>
         <p:nvSpPr>
-          <p:cNvPr id="506133223" name="Date Placeholder 4"/>
+          <p:cNvPr id="1600742799" name="Date Placeholder 4"/>
           <p:cNvSpPr>
             <a:spLocks noGrp="1"/>
           </p:cNvSpPr>
@@ -4516,7 +4774,7 @@
       </p:sp>
       <p:sp>
         <p:nvSpPr>
-          <p:cNvPr id="881624304" name="Footer Placeholder 5"/>
+          <p:cNvPr id="298236195" name="Footer Placeholder 5"/>
           <p:cNvSpPr>
             <a:spLocks noGrp="1"/>
           </p:cNvSpPr>
@@ -4538,7 +4796,7 @@
       </p:sp>
       <p:sp>
         <p:nvSpPr>
-          <p:cNvPr id="383699409" name="Slide Number Placeholder 6"/>
+          <p:cNvPr id="1963672957" name="Slide Number Placeholder 6"/>
           <p:cNvSpPr>
             <a:spLocks noGrp="1"/>
           </p:cNvSpPr>
@@ -4594,7 +4852,7 @@
       </p:grpSpPr>
       <p:sp>
         <p:nvSpPr>
-          <p:cNvPr id="2057428238" name="Shape 1059"/>
+          <p:cNvPr id="600327829" name="Shape 1059"/>
           <p:cNvSpPr>
             <a:spLocks noChangeArrowheads="1" noGrp="1"/>
           </p:cNvSpPr>
@@ -4672,7 +4930,7 @@
       </p:sp>
       <p:sp>
         <p:nvSpPr>
-          <p:cNvPr id="1842909667" name="Shape 1060"/>
+          <p:cNvPr id="1377328496" name="Shape 1060"/>
           <p:cNvSpPr>
             <a:spLocks noChangeArrowheads="1" noGrp="1"/>
           </p:cNvSpPr>
@@ -4753,7 +5011,7 @@
       </p:sp>
       <p:sp>
         <p:nvSpPr>
-          <p:cNvPr id="1673697037" name="Shape 1061"/>
+          <p:cNvPr id="452219553" name="Shape 1061"/>
           <p:cNvSpPr>
             <a:spLocks noChangeArrowheads="1" noGrp="1"/>
           </p:cNvSpPr>
@@ -4871,7 +5129,7 @@
       </p:sp>
       <p:sp>
         <p:nvSpPr>
-          <p:cNvPr id="1450524932" name="Title 1"/>
+          <p:cNvPr id="711690960" name="Title 1"/>
           <p:cNvSpPr>
             <a:spLocks noGrp="1"/>
           </p:cNvSpPr>
@@ -4907,7 +5165,7 @@
       </p:sp>
       <p:sp>
         <p:nvSpPr>
-          <p:cNvPr id="1834658112" name="Text Placeholder 2"/>
+          <p:cNvPr id="1377320633" name="Text Placeholder 2"/>
           <p:cNvSpPr>
             <a:spLocks noGrp="1"/>
           </p:cNvSpPr>
@@ -4983,7 +5241,7 @@
       </p:sp>
       <p:sp>
         <p:nvSpPr>
-          <p:cNvPr id="1976158528" name="Date Placeholder 3"/>
+          <p:cNvPr id="597434697" name="Date Placeholder 3"/>
           <p:cNvSpPr>
             <a:spLocks noGrp="1"/>
           </p:cNvSpPr>
@@ -5027,7 +5285,7 @@
       </p:sp>
       <p:sp>
         <p:nvSpPr>
-          <p:cNvPr id="1509448092" name="Footer Placeholder 4"/>
+          <p:cNvPr id="710328788" name="Footer Placeholder 4"/>
           <p:cNvSpPr>
             <a:spLocks noGrp="1"/>
           </p:cNvSpPr>
@@ -5067,7 +5325,7 @@
       </p:sp>
       <p:sp>
         <p:nvSpPr>
-          <p:cNvPr id="501728937" name="Slide Number Placeholder 5"/>
+          <p:cNvPr id="734177754" name="Slide Number Placeholder 5"/>
           <p:cNvSpPr>
             <a:spLocks noGrp="1"/>
           </p:cNvSpPr>
@@ -5416,7 +5674,7 @@
       </p:grpSpPr>
       <p:sp>
         <p:nvSpPr>
-          <p:cNvPr id="538637553" name="Title 1"/>
+          <p:cNvPr id="1781584559" name="Title 1"/>
           <p:cNvSpPr>
             <a:spLocks noGrp="1"/>
           </p:cNvSpPr>
@@ -5453,7 +5711,7 @@
       </p:sp>
       <p:sp>
         <p:nvSpPr>
-          <p:cNvPr id="1729781235" name="Subtitle 2"/>
+          <p:cNvPr id="1463849354" name="Subtitle 2"/>
           <p:cNvSpPr>
             <a:spLocks noGrp="1"/>
           </p:cNvSpPr>
@@ -5513,7 +5771,7 @@
       </p:grpSpPr>
       <p:sp>
         <p:nvSpPr>
-          <p:cNvPr id="2085401184" name="Title 1"/>
+          <p:cNvPr id="328435794" name="Title 1"/>
           <p:cNvSpPr>
             <a:spLocks noGrp="1"/>
           </p:cNvSpPr>
@@ -5531,11 +5789,11 @@
             </a:pPr>
             <a:r>
               <a:rPr/>
-              <a:t>V.II. </a:t>
+              <a:t>IV. </a:t>
             </a:r>
             <a:r>
               <a:rPr lang="ru-RU"/>
-              <a:t>Итог – минусы </a:t>
+              <a:t>Основные принципы </a:t>
             </a:r>
             <a:r>
               <a:rPr lang="en-US"/>
@@ -5547,23 +5805,135 @@
       </p:sp>
       <p:sp>
         <p:nvSpPr>
-          <p:cNvPr id="1782545448" name="Content Placeholder 2"/>
-          <p:cNvSpPr>
-            <a:spLocks noGrp="1"/>
-          </p:cNvSpPr>
-          <p:nvPr>
-            <p:ph idx="1"/>
-          </p:nvPr>
-        </p:nvSpPr>
-        <p:spPr bwMode="auto"/>
+          <p:cNvPr id="2066911182" name="Content Placeholder 2"/>
+          <p:cNvSpPr>
+            <a:spLocks noGrp="1"/>
+          </p:cNvSpPr>
+          <p:nvPr>
+            <p:ph sz="half" idx="1"/>
+          </p:nvPr>
+        </p:nvSpPr>
+        <p:spPr bwMode="auto">
+          <a:xfrm>
+            <a:off x="609598" y="1600200"/>
+            <a:ext cx="5384799" cy="4525961"/>
+          </a:xfrm>
+        </p:spPr>
         <p:txBody>
           <a:bodyPr/>
-          <a:lstStyle/>
-          <a:p>
-            <a:pPr>
-              <a:defRPr/>
-            </a:pPr>
-            <a:endParaRPr/>
+          <a:lstStyle>
+            <a:lvl1pPr>
+              <a:defRPr sz="2800"/>
+            </a:lvl1pPr>
+            <a:lvl2pPr>
+              <a:defRPr sz="2400"/>
+            </a:lvl2pPr>
+            <a:lvl3pPr>
+              <a:defRPr sz="2000"/>
+            </a:lvl3pPr>
+            <a:lvl4pPr>
+              <a:defRPr sz="1800"/>
+            </a:lvl4pPr>
+            <a:lvl5pPr>
+              <a:defRPr sz="1800"/>
+            </a:lvl5pPr>
+            <a:lvl6pPr>
+              <a:defRPr sz="1800"/>
+            </a:lvl6pPr>
+            <a:lvl7pPr>
+              <a:defRPr sz="1800"/>
+            </a:lvl7pPr>
+            <a:lvl8pPr>
+              <a:defRPr sz="1800"/>
+            </a:lvl8pPr>
+            <a:lvl9pPr>
+              <a:defRPr sz="1800"/>
+            </a:lvl9pPr>
+          </a:lstStyle>
+          <a:p>
+            <a:pPr>
+              <a:defRPr/>
+            </a:pPr>
+            <a:r>
+              <a:rPr lang="ru-RU" sz="1600" b="1"/>
+              <a:t>Изоляция – </a:t>
+            </a:r>
+            <a:r>
+              <a:rPr lang="ru-RU" sz="1600" b="0"/>
+              <a:t>программы и их </a:t>
+            </a:r>
+            <a:r>
+              <a:rPr lang="en-US" sz="1600" b="0"/>
+              <a:t>runtime-</a:t>
+            </a:r>
+            <a:r>
+              <a:rPr lang="ru-RU" sz="1600" b="0"/>
+              <a:t>зависимости изолированны друг от друга, что избавляет от конфликтов зависимостей и позволяет хранить несколько версий одной программы</a:t>
+            </a:r>
+            <a:endParaRPr lang="ru-RU" sz="1600" b="0"/>
+          </a:p>
+        </p:txBody>
+      </p:sp>
+      <p:sp>
+        <p:nvSpPr>
+          <p:cNvPr id="1219494073" name="Content Placeholder 3"/>
+          <p:cNvSpPr>
+            <a:spLocks noGrp="1"/>
+          </p:cNvSpPr>
+          <p:nvPr>
+            <p:ph sz="half" idx="2"/>
+          </p:nvPr>
+        </p:nvSpPr>
+        <p:spPr bwMode="auto">
+          <a:xfrm>
+            <a:off x="6197598" y="1600200"/>
+            <a:ext cx="5384799" cy="4525961"/>
+          </a:xfrm>
+        </p:spPr>
+        <p:txBody>
+          <a:bodyPr/>
+          <a:lstStyle>
+            <a:lvl1pPr>
+              <a:defRPr sz="2800"/>
+            </a:lvl1pPr>
+            <a:lvl2pPr>
+              <a:defRPr sz="2400"/>
+            </a:lvl2pPr>
+            <a:lvl3pPr>
+              <a:defRPr sz="2000"/>
+            </a:lvl3pPr>
+            <a:lvl4pPr>
+              <a:defRPr sz="1800"/>
+            </a:lvl4pPr>
+            <a:lvl5pPr>
+              <a:defRPr sz="1800"/>
+            </a:lvl5pPr>
+            <a:lvl6pPr>
+              <a:defRPr sz="1800"/>
+            </a:lvl6pPr>
+            <a:lvl7pPr>
+              <a:defRPr sz="1800"/>
+            </a:lvl7pPr>
+            <a:lvl8pPr>
+              <a:defRPr sz="1800"/>
+            </a:lvl8pPr>
+            <a:lvl9pPr>
+              <a:defRPr sz="1800"/>
+            </a:lvl9pPr>
+          </a:lstStyle>
+          <a:p>
+            <a:pPr>
+              <a:defRPr/>
+            </a:pPr>
+            <a:r>
+              <a:rPr lang="ru-RU" sz="1600" b="1"/>
+              <a:t>Декларативность</a:t>
+            </a:r>
+            <a:r>
+              <a:rPr lang="ru-RU" sz="1600" b="0"/>
+              <a:t> – система </a:t>
+            </a:r>
+            <a:endParaRPr sz="1600" b="0"/>
           </a:p>
         </p:txBody>
       </p:sp>
@@ -5602,12 +5972,60 @@
       </p:grpSpPr>
       <p:sp>
         <p:nvSpPr>
-          <p:cNvPr id="1221484332" name="Title 1"/>
+          <p:cNvPr id="2101984899" name="Title 1"/>
           <p:cNvSpPr>
             <a:spLocks noGrp="1"/>
           </p:cNvSpPr>
           <p:nvPr>
             <p:ph type="title"/>
+          </p:nvPr>
+        </p:nvSpPr>
+        <p:spPr bwMode="auto"/>
+        <p:txBody>
+          <a:bodyPr vertOverflow="overflow" horzOverflow="overflow" vert="horz" wrap="square" lIns="91440" tIns="45720" rIns="91440" bIns="45720" numCol="1" spcCol="0" rtlCol="0" fromWordArt="0" anchor="ctr" anchorCtr="0" forceAA="0" upright="0" compatLnSpc="0">
+            <a:normAutofit fontScale="90000" lnSpcReduction="2000"/>
+          </a:bodyPr>
+          <a:lstStyle/>
+          <a:p>
+            <a:pPr>
+              <a:defRPr/>
+            </a:pPr>
+            <a:r>
+              <a:rPr/>
+              <a:t>IV. </a:t>
+            </a:r>
+            <a:r>
+              <a:rPr lang="ru-RU"/>
+              <a:t>Отличие идей </a:t>
+            </a:r>
+            <a:r>
+              <a:rPr lang="en-US"/>
+              <a:t>Clyx </a:t>
+            </a:r>
+            <a:r>
+              <a:rPr lang="ru-RU"/>
+              <a:t>от </a:t>
+            </a:r>
+            <a:r>
+              <a:rPr lang="en-US"/>
+              <a:t>NixOS</a:t>
+            </a:r>
+            <a:r>
+              <a:rPr lang="ru-RU"/>
+              <a:t>, решение проблем</a:t>
+            </a:r>
+            <a:endParaRPr/>
+          </a:p>
+        </p:txBody>
+      </p:sp>
+      <p:sp>
+        <p:nvSpPr>
+          <p:cNvPr id="189416047" name="Content Placeholder 2"/>
+          <p:cNvSpPr>
+            <a:spLocks noGrp="1"/>
+          </p:cNvSpPr>
+          <p:nvPr>
+            <p:ph idx="1"/>
           </p:nvPr>
         </p:nvSpPr>
         <p:spPr bwMode="auto"/>
@@ -5618,6 +6036,239 @@
             <a:pPr>
               <a:defRPr/>
             </a:pPr>
+            <a:endParaRPr/>
+          </a:p>
+        </p:txBody>
+      </p:sp>
+    </p:spTree>
+  </p:cSld>
+  <p:clrMapOvr>
+    <a:masterClrMapping/>
+  </p:clrMapOvr>
+  <mc:AlternateContent xmlns:mc="http://schemas.openxmlformats.org/markup-compatibility/2006">
+    <mc:Choice xmlns:p159="http://schemas.microsoft.com/office/powerpoint/2015/09/main" xmlns:p14="http://schemas.microsoft.com/office/powerpoint/2010/main" Requires="p159">
+      <p:transition p14:dur="2000" advClick="1"/>
+    </mc:Choice>
+    <mc:Fallback>
+      <p:transition advClick="1"/>
+    </mc:Fallback>
+  </mc:AlternateContent>
+</p:sld>
+</file>
+
+<file path=ppt/slides/slide12.xml><?xml version="1.0" encoding="utf-8"?>
+<p:sld xmlns:a="http://schemas.openxmlformats.org/drawingml/2006/main" xmlns:r="http://schemas.openxmlformats.org/officeDocument/2006/relationships" xmlns:p="http://schemas.openxmlformats.org/presentationml/2006/main" xmlns:m="http://schemas.openxmlformats.org/officeDocument/2006/math" xmlns:w="http://schemas.openxmlformats.org/wordprocessingml/2006/main" xmlns:mc="http://schemas.openxmlformats.org/markup-compatibility/2006" showMasterPhAnim="0" showMasterSp="1" show="1">
+  <p:cSld name="">
+    <p:spTree>
+      <p:nvGrpSpPr>
+        <p:cNvPr id="1" name=""/>
+        <p:cNvGrpSpPr/>
+        <p:nvPr/>
+      </p:nvGrpSpPr>
+      <p:grpSpPr bwMode="auto">
+        <a:xfrm>
+          <a:off x="0" y="0"/>
+          <a:ext cx="0" cy="0"/>
+          <a:chOff x="0" y="0"/>
+          <a:chExt cx="0" cy="0"/>
+        </a:xfrm>
+      </p:grpSpPr>
+      <p:sp>
+        <p:nvSpPr>
+          <p:cNvPr id="1686372012" name="Title 1"/>
+          <p:cNvSpPr>
+            <a:spLocks noGrp="1"/>
+          </p:cNvSpPr>
+          <p:nvPr>
+            <p:ph type="title"/>
+          </p:nvPr>
+        </p:nvSpPr>
+        <p:spPr bwMode="auto"/>
+        <p:txBody>
+          <a:bodyPr/>
+          <a:lstStyle/>
+          <a:p>
+            <a:pPr>
+              <a:defRPr/>
+            </a:pPr>
+            <a:r>
+              <a:rPr/>
+              <a:t>V.I. </a:t>
+            </a:r>
+            <a:r>
+              <a:rPr lang="ru-RU"/>
+              <a:t>Итог – почему </a:t>
+            </a:r>
+            <a:r>
+              <a:rPr lang="en-US"/>
+              <a:t>Clyx</a:t>
+            </a:r>
+            <a:endParaRPr/>
+          </a:p>
+        </p:txBody>
+      </p:sp>
+      <p:sp>
+        <p:nvSpPr>
+          <p:cNvPr id="1046209195" name="Content Placeholder 2"/>
+          <p:cNvSpPr>
+            <a:spLocks noGrp="1"/>
+          </p:cNvSpPr>
+          <p:nvPr>
+            <p:ph idx="1"/>
+          </p:nvPr>
+        </p:nvSpPr>
+        <p:spPr bwMode="auto"/>
+        <p:txBody>
+          <a:bodyPr/>
+          <a:lstStyle/>
+          <a:p>
+            <a:pPr>
+              <a:defRPr/>
+            </a:pPr>
+            <a:endParaRPr/>
+          </a:p>
+        </p:txBody>
+      </p:sp>
+    </p:spTree>
+  </p:cSld>
+  <p:clrMapOvr>
+    <a:masterClrMapping/>
+  </p:clrMapOvr>
+  <mc:AlternateContent xmlns:mc="http://schemas.openxmlformats.org/markup-compatibility/2006">
+    <mc:Choice xmlns:p159="http://schemas.microsoft.com/office/powerpoint/2015/09/main" xmlns:p14="http://schemas.microsoft.com/office/powerpoint/2010/main" Requires="p159">
+      <p:transition p14:dur="2000" advClick="1"/>
+    </mc:Choice>
+    <mc:Fallback>
+      <p:transition advClick="1"/>
+    </mc:Fallback>
+  </mc:AlternateContent>
+</p:sld>
+</file>
+
+<file path=ppt/slides/slide13.xml><?xml version="1.0" encoding="utf-8"?>
+<p:sld xmlns:a="http://schemas.openxmlformats.org/drawingml/2006/main" xmlns:r="http://schemas.openxmlformats.org/officeDocument/2006/relationships" xmlns:p="http://schemas.openxmlformats.org/presentationml/2006/main" xmlns:m="http://schemas.openxmlformats.org/officeDocument/2006/math" xmlns:w="http://schemas.openxmlformats.org/wordprocessingml/2006/main" xmlns:mc="http://schemas.openxmlformats.org/markup-compatibility/2006" showMasterPhAnim="0" showMasterSp="1" show="1">
+  <p:cSld name="">
+    <p:spTree>
+      <p:nvGrpSpPr>
+        <p:cNvPr id="1" name=""/>
+        <p:cNvGrpSpPr/>
+        <p:nvPr/>
+      </p:nvGrpSpPr>
+      <p:grpSpPr bwMode="auto">
+        <a:xfrm>
+          <a:off x="0" y="0"/>
+          <a:ext cx="0" cy="0"/>
+          <a:chOff x="0" y="0"/>
+          <a:chExt cx="0" cy="0"/>
+        </a:xfrm>
+      </p:grpSpPr>
+      <p:sp>
+        <p:nvSpPr>
+          <p:cNvPr id="1582769809" name="Title 1"/>
+          <p:cNvSpPr>
+            <a:spLocks noGrp="1"/>
+          </p:cNvSpPr>
+          <p:nvPr>
+            <p:ph type="title"/>
+          </p:nvPr>
+        </p:nvSpPr>
+        <p:spPr bwMode="auto"/>
+        <p:txBody>
+          <a:bodyPr/>
+          <a:lstStyle/>
+          <a:p>
+            <a:pPr>
+              <a:defRPr/>
+            </a:pPr>
+            <a:r>
+              <a:rPr/>
+              <a:t>V.II. </a:t>
+            </a:r>
+            <a:r>
+              <a:rPr lang="ru-RU"/>
+              <a:t>Итог – минусы </a:t>
+            </a:r>
+            <a:r>
+              <a:rPr lang="en-US"/>
+              <a:t>Clyx</a:t>
+            </a:r>
+            <a:endParaRPr/>
+          </a:p>
+        </p:txBody>
+      </p:sp>
+      <p:sp>
+        <p:nvSpPr>
+          <p:cNvPr id="1067470172" name="Content Placeholder 2"/>
+          <p:cNvSpPr>
+            <a:spLocks noGrp="1"/>
+          </p:cNvSpPr>
+          <p:nvPr>
+            <p:ph idx="1"/>
+          </p:nvPr>
+        </p:nvSpPr>
+        <p:spPr bwMode="auto"/>
+        <p:txBody>
+          <a:bodyPr/>
+          <a:lstStyle/>
+          <a:p>
+            <a:pPr>
+              <a:defRPr/>
+            </a:pPr>
+            <a:endParaRPr/>
+          </a:p>
+        </p:txBody>
+      </p:sp>
+    </p:spTree>
+  </p:cSld>
+  <p:clrMapOvr>
+    <a:masterClrMapping/>
+  </p:clrMapOvr>
+  <mc:AlternateContent xmlns:mc="http://schemas.openxmlformats.org/markup-compatibility/2006">
+    <mc:Choice xmlns:p159="http://schemas.microsoft.com/office/powerpoint/2015/09/main" xmlns:p14="http://schemas.microsoft.com/office/powerpoint/2010/main" Requires="p159">
+      <p:transition p14:dur="2000" advClick="1"/>
+    </mc:Choice>
+    <mc:Fallback>
+      <p:transition advClick="1"/>
+    </mc:Fallback>
+  </mc:AlternateContent>
+</p:sld>
+</file>
+
+<file path=ppt/slides/slide14.xml><?xml version="1.0" encoding="utf-8"?>
+<p:sld xmlns:a="http://schemas.openxmlformats.org/drawingml/2006/main" xmlns:r="http://schemas.openxmlformats.org/officeDocument/2006/relationships" xmlns:p="http://schemas.openxmlformats.org/presentationml/2006/main" xmlns:m="http://schemas.openxmlformats.org/officeDocument/2006/math" xmlns:w="http://schemas.openxmlformats.org/wordprocessingml/2006/main" xmlns:mc="http://schemas.openxmlformats.org/markup-compatibility/2006" showMasterPhAnim="0" showMasterSp="1" show="1">
+  <p:cSld name="">
+    <p:spTree>
+      <p:nvGrpSpPr>
+        <p:cNvPr id="1" name=""/>
+        <p:cNvGrpSpPr/>
+        <p:nvPr/>
+      </p:nvGrpSpPr>
+      <p:grpSpPr bwMode="auto">
+        <a:xfrm>
+          <a:off x="0" y="0"/>
+          <a:ext cx="0" cy="0"/>
+          <a:chOff x="0" y="0"/>
+          <a:chExt cx="0" cy="0"/>
+        </a:xfrm>
+      </p:grpSpPr>
+      <p:sp>
+        <p:nvSpPr>
+          <p:cNvPr id="793340099" name="Title 1"/>
+          <p:cNvSpPr>
+            <a:spLocks noGrp="1"/>
+          </p:cNvSpPr>
+          <p:nvPr>
+            <p:ph type="title"/>
+          </p:nvPr>
+        </p:nvSpPr>
+        <p:spPr bwMode="auto"/>
+        <p:txBody>
+          <a:bodyPr/>
+          <a:lstStyle/>
+          <a:p>
+            <a:pPr>
+              <a:defRPr/>
+            </a:pPr>
             <a:r>
               <a:rPr/>
               <a:t>V.III. </a:t>
@@ -5636,7 +6287,7 @@
       </p:sp>
       <p:sp>
         <p:nvSpPr>
-          <p:cNvPr id="797841894" name="Content Placeholder 2"/>
+          <p:cNvPr id="1653938270" name="Content Placeholder 2"/>
           <p:cNvSpPr>
             <a:spLocks noGrp="1"/>
           </p:cNvSpPr>
@@ -5691,7 +6342,7 @@
       </p:grpSpPr>
       <p:sp>
         <p:nvSpPr>
-          <p:cNvPr id="513476392" name="Title 1"/>
+          <p:cNvPr id="1042075395" name="Title 1"/>
           <p:cNvSpPr>
             <a:spLocks noGrp="1"/>
           </p:cNvSpPr>
@@ -5722,7 +6373,7 @@
       </p:sp>
       <p:sp>
         <p:nvSpPr>
-          <p:cNvPr id="1892579997" name="Content Placeholder 2"/>
+          <p:cNvPr id="637170414" name="Content Placeholder 2"/>
           <p:cNvSpPr>
             <a:spLocks noGrp="1"/>
           </p:cNvSpPr>
@@ -6267,7 +6918,7 @@
       </p:sp>
       <p:pic>
         <p:nvPicPr>
-          <p:cNvPr id="977548682" name=""/>
+          <p:cNvPr id="1308893785" name=""/>
           <p:cNvPicPr>
             <a:picLocks noChangeAspect="1"/>
           </p:cNvPicPr>
@@ -6289,7 +6940,7 @@
       </p:pic>
       <p:pic>
         <p:nvPicPr>
-          <p:cNvPr id="1877366427" name=""/>
+          <p:cNvPr id="1965470380" name=""/>
           <p:cNvPicPr>
             <a:picLocks noChangeAspect="1"/>
           </p:cNvPicPr>
@@ -6311,7 +6962,7 @@
       </p:pic>
       <p:pic>
         <p:nvPicPr>
-          <p:cNvPr id="2106732880" name=""/>
+          <p:cNvPr id="901389930" name=""/>
           <p:cNvPicPr>
             <a:picLocks noChangeAspect="1"/>
           </p:cNvPicPr>
@@ -6324,7 +6975,7 @@
         <p:spPr bwMode="auto">
           <a:xfrm flipH="0" flipV="0">
             <a:off x="4719109" y="5115162"/>
-            <a:ext cx="2640522" cy="875773"/>
+            <a:ext cx="2640521" cy="875773"/>
           </a:xfrm>
           <a:prstGeom prst="rect">
             <a:avLst/>
@@ -6333,7 +6984,7 @@
       </p:pic>
       <p:pic>
         <p:nvPicPr>
-          <p:cNvPr id="1534628498" name=""/>
+          <p:cNvPr id="1425389656" name=""/>
           <p:cNvPicPr>
             <a:picLocks noChangeAspect="1"/>
           </p:cNvPicPr>
@@ -6361,7 +7012,7 @@
       </p:pic>
       <p:pic>
         <p:nvPicPr>
-          <p:cNvPr id="1366800950" name=""/>
+          <p:cNvPr id="872448068" name=""/>
           <p:cNvPicPr>
             <a:picLocks noChangeAspect="1"/>
           </p:cNvPicPr>
@@ -6383,7 +7034,7 @@
       </p:pic>
       <p:pic>
         <p:nvPicPr>
-          <p:cNvPr id="679470168" name=""/>
+          <p:cNvPr id="701973518" name=""/>
           <p:cNvPicPr>
             <a:picLocks noChangeAspect="1"/>
           </p:cNvPicPr>
@@ -6438,7 +7089,7 @@
       </p:grpSpPr>
       <p:sp>
         <p:nvSpPr>
-          <p:cNvPr id="236037654" name="Title 1"/>
+          <p:cNvPr id="1835712211" name="Title 1"/>
           <p:cNvSpPr>
             <a:spLocks noGrp="1"/>
           </p:cNvSpPr>
@@ -6456,154 +7107,155 @@
             </a:pPr>
             <a:r>
               <a:rPr/>
-              <a:t>_. </a:t>
+              <a:t>II. </a:t>
             </a:r>
             <a:r>
               <a:rPr lang="ru-RU"/>
-              <a:t>Основные принципы </a:t>
-            </a:r>
-            <a:r>
-              <a:rPr lang="en-US"/>
-              <a:t>Clyx</a:t>
-            </a:r>
-            <a:endParaRPr/>
-          </a:p>
-        </p:txBody>
-      </p:sp>
-      <p:sp>
-        <p:nvSpPr>
-          <p:cNvPr id="390523747" name="Content Placeholder 2"/>
-          <p:cNvSpPr>
-            <a:spLocks noGrp="1"/>
-          </p:cNvSpPr>
-          <p:nvPr>
-            <p:ph sz="half" idx="1"/>
+              <a:t>Проблемы существующих ОС</a:t>
+            </a:r>
+            <a:endParaRPr/>
+          </a:p>
+        </p:txBody>
+      </p:sp>
+      <p:sp>
+        <p:nvSpPr>
+          <p:cNvPr id="636593573" name="Content Placeholder 2"/>
+          <p:cNvSpPr>
+            <a:spLocks noGrp="1"/>
+          </p:cNvSpPr>
+          <p:nvPr>
+            <p:ph idx="1"/>
           </p:nvPr>
         </p:nvSpPr>
         <p:spPr bwMode="auto">
-          <a:xfrm>
-            <a:off x="609598" y="1600200"/>
-            <a:ext cx="5384799" cy="4525961"/>
+          <a:xfrm flipH="0" flipV="0">
+            <a:off x="232193" y="1600200"/>
+            <a:ext cx="3515825" cy="4525961"/>
           </a:xfrm>
         </p:spPr>
         <p:txBody>
-          <a:bodyPr/>
-          <a:lstStyle>
-            <a:lvl1pPr>
-              <a:defRPr sz="2800"/>
-            </a:lvl1pPr>
-            <a:lvl2pPr>
-              <a:defRPr sz="2400"/>
-            </a:lvl2pPr>
-            <a:lvl3pPr>
-              <a:defRPr sz="2000"/>
-            </a:lvl3pPr>
-            <a:lvl4pPr>
-              <a:defRPr sz="1800"/>
-            </a:lvl4pPr>
-            <a:lvl5pPr>
-              <a:defRPr sz="1800"/>
-            </a:lvl5pPr>
-            <a:lvl6pPr>
-              <a:defRPr sz="1800"/>
-            </a:lvl6pPr>
-            <a:lvl7pPr>
-              <a:defRPr sz="1800"/>
-            </a:lvl7pPr>
-            <a:lvl8pPr>
-              <a:defRPr sz="1800"/>
-            </a:lvl8pPr>
-            <a:lvl9pPr>
-              <a:defRPr sz="1800"/>
-            </a:lvl9pPr>
-          </a:lstStyle>
-          <a:p>
-            <a:pPr>
-              <a:defRPr/>
-            </a:pPr>
-            <a:r>
-              <a:rPr lang="ru-RU" sz="1600" b="1"/>
-              <a:t>Изоляция – </a:t>
-            </a:r>
-            <a:r>
-              <a:rPr lang="ru-RU" sz="1600" b="0"/>
-              <a:t>программы и их </a:t>
-            </a:r>
-            <a:r>
-              <a:rPr lang="en-US" sz="1600" b="0"/>
-              <a:t>runtime-</a:t>
-            </a:r>
-            <a:r>
-              <a:rPr lang="ru-RU" sz="1600" b="0"/>
-              <a:t>зависимости изолированны друг от друга, что избавляет от конфликтов зависимостей и позволяет хранить несколько версий одной программы</a:t>
-            </a:r>
-            <a:endParaRPr lang="ru-RU" sz="1600" b="0"/>
-          </a:p>
-        </p:txBody>
-      </p:sp>
-      <p:sp>
-        <p:nvSpPr>
-          <p:cNvPr id="1462575508" name="Content Placeholder 3"/>
-          <p:cNvSpPr>
-            <a:spLocks noGrp="1"/>
-          </p:cNvSpPr>
-          <p:nvPr>
-            <p:ph sz="half" idx="2"/>
-          </p:nvPr>
-        </p:nvSpPr>
-        <p:spPr bwMode="auto">
-          <a:xfrm>
-            <a:off x="6197598" y="1600200"/>
-            <a:ext cx="5384799" cy="4525961"/>
-          </a:xfrm>
-        </p:spPr>
-        <p:txBody>
-          <a:bodyPr/>
-          <a:lstStyle>
-            <a:lvl1pPr>
-              <a:defRPr sz="2800"/>
-            </a:lvl1pPr>
-            <a:lvl2pPr>
-              <a:defRPr sz="2400"/>
-            </a:lvl2pPr>
-            <a:lvl3pPr>
-              <a:defRPr sz="2000"/>
-            </a:lvl3pPr>
-            <a:lvl4pPr>
-              <a:defRPr sz="1800"/>
-            </a:lvl4pPr>
-            <a:lvl5pPr>
-              <a:defRPr sz="1800"/>
-            </a:lvl5pPr>
-            <a:lvl6pPr>
-              <a:defRPr sz="1800"/>
-            </a:lvl6pPr>
-            <a:lvl7pPr>
-              <a:defRPr sz="1800"/>
-            </a:lvl7pPr>
-            <a:lvl8pPr>
-              <a:defRPr sz="1800"/>
-            </a:lvl8pPr>
-            <a:lvl9pPr>
-              <a:defRPr sz="1800"/>
-            </a:lvl9pPr>
-          </a:lstStyle>
-          <a:p>
-            <a:pPr>
-              <a:defRPr/>
-            </a:pPr>
-            <a:r>
-              <a:rPr lang="ru-RU" sz="1600" b="1"/>
-              <a:t>Декларативность</a:t>
-            </a:r>
-            <a:r>
-              <a:rPr lang="ru-RU" sz="1600" b="0"/>
-              <a:t> – система </a:t>
-            </a:r>
-            <a:endParaRPr sz="1600" b="0"/>
-          </a:p>
-        </p:txBody>
-      </p:sp>
+          <a:bodyPr vertOverflow="overflow" horzOverflow="overflow" vert="horz" wrap="square" lIns="91440" tIns="45720" rIns="91440" bIns="45720" numCol="1" spcCol="0" rtlCol="0" fromWordArt="0" anchor="t" anchorCtr="0" forceAA="0" upright="0" compatLnSpc="0">
+            <a:normAutofit/>
+          </a:bodyPr>
+          <a:lstStyle/>
+          <a:p>
+            <a:pPr>
+              <a:defRPr/>
+            </a:pPr>
+            <a:r>
+              <a:rPr lang="ru-RU" sz="2200" b="0" i="0" u="none" strike="noStrike" cap="none" spc="0">
+                <a:solidFill>
+                  <a:schemeClr val="tx1">
+                    <a:lumMod val="75000"/>
+                    <a:lumOff val="25000"/>
+                  </a:schemeClr>
+                </a:solidFill>
+                <a:latin typeface="Arial"/>
+                <a:ea typeface="Arial"/>
+                <a:cs typeface="Arial"/>
+              </a:rPr>
+              <a:t>Большинство решений </a:t>
+            </a:r>
+            <a:r>
+              <a:rPr lang="ru-RU" sz="2200" b="1" i="0" u="none" strike="noStrike" cap="none" spc="0">
+                <a:solidFill>
+                  <a:schemeClr val="tx1">
+                    <a:lumMod val="75000"/>
+                    <a:lumOff val="25000"/>
+                  </a:schemeClr>
+                </a:solidFill>
+                <a:latin typeface="Arial"/>
+                <a:ea typeface="Arial"/>
+                <a:cs typeface="Arial"/>
+              </a:rPr>
+              <a:t>либо сложны</a:t>
+            </a:r>
+            <a:r>
+              <a:rPr lang="ru-RU" sz="2200" b="0" i="0" u="none" strike="noStrike" cap="none" spc="0">
+                <a:solidFill>
+                  <a:schemeClr val="tx1">
+                    <a:lumMod val="75000"/>
+                    <a:lumOff val="25000"/>
+                  </a:schemeClr>
+                </a:solidFill>
+                <a:latin typeface="Arial"/>
+                <a:ea typeface="Arial"/>
+                <a:cs typeface="Arial"/>
+              </a:rPr>
+              <a:t> для массового пользователя, </a:t>
+            </a:r>
+            <a:r>
+              <a:rPr lang="ru-RU" sz="2200" b="1" i="0" u="none" strike="noStrike" cap="none" spc="0">
+                <a:solidFill>
+                  <a:schemeClr val="tx1">
+                    <a:lumMod val="75000"/>
+                    <a:lumOff val="25000"/>
+                  </a:schemeClr>
+                </a:solidFill>
+                <a:latin typeface="Arial"/>
+                <a:ea typeface="Arial"/>
+                <a:cs typeface="Arial"/>
+              </a:rPr>
+              <a:t>либо ориентированы на узкие сценарии</a:t>
+            </a:r>
+            <a:r>
+              <a:rPr lang="ru-RU" sz="2200" b="0" i="0" u="none" strike="noStrike" cap="none" spc="0">
+                <a:solidFill>
+                  <a:schemeClr val="tx1">
+                    <a:lumMod val="75000"/>
+                    <a:lumOff val="25000"/>
+                  </a:schemeClr>
+                </a:solidFill>
+                <a:latin typeface="Arial"/>
+                <a:ea typeface="Arial"/>
+                <a:cs typeface="Arial"/>
+              </a:rPr>
+              <a:t> – разработку, серверы, контейнеры.</a:t>
+            </a:r>
+            <a:endParaRPr sz="2200"/>
+          </a:p>
+        </p:txBody>
+      </p:sp>
+      <p:graphicFrame>
+        <p:nvGraphicFramePr>
+          <p:cNvPr id="693320960" name=""/>
+          <p:cNvGraphicFramePr>
+            <a:graphicFrameLocks xmlns:a="http://schemas.openxmlformats.org/drawingml/2006/main" noChangeAspect="1"/>
+          </p:cNvGraphicFramePr>
+          <p:nvPr/>
+        </p:nvGraphicFramePr>
+        <p:xfrm flipH="0" flipV="0">
+          <a:off x="4035500" y="1417637"/>
+          <a:ext cx="7898304" cy="4669481"/>
+        </p:xfrm>
+        <a:graphic>
+          <a:graphicData uri="http://schemas.openxmlformats.org/presentationml/2006/ole">
+            <p:oleObj name="oleObj" r:id="rId4" imgW="7896225" imgH="4667250" progId="Excel.Sheet.12">
+              <p:embed/>
+              <p:pic>
+                <p:nvPicPr>
+                  <p:cNvPr id="693320960" name=""/>
+                  <p:cNvPicPr/>
+                  <p:nvPr/>
+                </p:nvPicPr>
+                <p:blipFill rotWithShape="1">
+                  <a:blip r:embed="rId3"/>
+                  <a:stretch/>
+                </p:blipFill>
+                <p:spPr bwMode="auto">
+                  <a:xfrm flipH="0" flipV="0">
+                    <a:off x="4035500" y="1417637"/>
+                    <a:ext cx="7898304" cy="4669481"/>
+                  </a:xfrm>
+                  <a:prstGeom prst="rect">
+                    <a:avLst/>
+                  </a:prstGeom>
+                </p:spPr>
+              </p:pic>
+            </p:oleObj>
+          </a:graphicData>
+        </a:graphic>
+      </p:graphicFrame>
     </p:spTree>
   </p:cSld>
   <p:clrMapOvr>
@@ -6639,7 +7291,7 @@
       </p:grpSpPr>
       <p:sp>
         <p:nvSpPr>
-          <p:cNvPr id="1023439047" name="Title 1"/>
+          <p:cNvPr id="1970908924" name="Title 1"/>
           <p:cNvSpPr>
             <a:spLocks noGrp="1"/>
           </p:cNvSpPr>
@@ -6649,159 +7301,191 @@
         </p:nvSpPr>
         <p:spPr bwMode="auto"/>
         <p:txBody>
-          <a:bodyPr/>
+          <a:bodyPr vertOverflow="overflow" horzOverflow="overflow" vert="horz" wrap="square" lIns="91440" tIns="45720" rIns="91440" bIns="45720" numCol="1" spcCol="0" rtlCol="0" fromWordArt="0" anchor="ctr" anchorCtr="0" forceAA="0" upright="0" compatLnSpc="0">
+            <a:normAutofit fontScale="95000" lnSpcReduction="1000"/>
+          </a:bodyPr>
           <a:lstStyle/>
           <a:p>
             <a:pPr>
               <a:defRPr/>
             </a:pPr>
             <a:r>
-              <a:rPr/>
-              <a:t>_. </a:t>
-            </a:r>
-            <a:r>
-              <a:rPr lang="ru-RU"/>
-              <a:t>Основные принципы </a:t>
-            </a:r>
-            <a:r>
-              <a:rPr lang="en-US"/>
-              <a:t>Clyx</a:t>
-            </a:r>
-            <a:endParaRPr/>
-          </a:p>
-        </p:txBody>
-      </p:sp>
-      <p:sp>
-        <p:nvSpPr>
-          <p:cNvPr id="1863553534" name="Content Placeholder 2"/>
-          <p:cNvSpPr>
-            <a:spLocks noGrp="1"/>
-          </p:cNvSpPr>
-          <p:nvPr>
-            <p:ph sz="half" idx="1"/>
-          </p:nvPr>
-        </p:nvSpPr>
-        <p:spPr bwMode="auto">
-          <a:xfrm>
-            <a:off x="609598" y="1600200"/>
-            <a:ext cx="5384799" cy="4525961"/>
-          </a:xfrm>
-        </p:spPr>
-        <p:txBody>
-          <a:bodyPr/>
-          <a:lstStyle>
-            <a:lvl1pPr>
-              <a:defRPr sz="2800"/>
-            </a:lvl1pPr>
-            <a:lvl2pPr>
-              <a:defRPr sz="2400"/>
-            </a:lvl2pPr>
-            <a:lvl3pPr>
-              <a:defRPr sz="2000"/>
-            </a:lvl3pPr>
-            <a:lvl4pPr>
-              <a:defRPr sz="1800"/>
-            </a:lvl4pPr>
-            <a:lvl5pPr>
-              <a:defRPr sz="1800"/>
-            </a:lvl5pPr>
-            <a:lvl6pPr>
-              <a:defRPr sz="1800"/>
-            </a:lvl6pPr>
-            <a:lvl7pPr>
-              <a:defRPr sz="1800"/>
-            </a:lvl7pPr>
-            <a:lvl8pPr>
-              <a:defRPr sz="1800"/>
-            </a:lvl8pPr>
-            <a:lvl9pPr>
-              <a:defRPr sz="1800"/>
-            </a:lvl9pPr>
-          </a:lstStyle>
-          <a:p>
-            <a:pPr>
-              <a:defRPr/>
-            </a:pPr>
-            <a:r>
-              <a:rPr lang="ru-RU" sz="1600" b="1"/>
-              <a:t>Изоляция – </a:t>
-            </a:r>
-            <a:r>
-              <a:rPr lang="ru-RU" sz="1600" b="0"/>
-              <a:t>программы и их </a:t>
-            </a:r>
-            <a:r>
-              <a:rPr lang="en-US" sz="1600" b="0"/>
-              <a:t>runtime-</a:t>
-            </a:r>
-            <a:r>
-              <a:rPr lang="ru-RU" sz="1600" b="0"/>
-              <a:t>зависимости изолированны друг от друга, что избавляет от конфликтов зависимостей и позволяет хранить несколько версий одной программы</a:t>
-            </a:r>
-            <a:endParaRPr lang="ru-RU" sz="1600" b="0"/>
-          </a:p>
-        </p:txBody>
-      </p:sp>
-      <p:sp>
-        <p:nvSpPr>
-          <p:cNvPr id="69713998" name="Content Placeholder 3"/>
-          <p:cNvSpPr>
-            <a:spLocks noGrp="1"/>
-          </p:cNvSpPr>
-          <p:nvPr>
-            <p:ph sz="half" idx="2"/>
-          </p:nvPr>
-        </p:nvSpPr>
-        <p:spPr bwMode="auto">
-          <a:xfrm>
-            <a:off x="6197598" y="1600200"/>
-            <a:ext cx="5384799" cy="4525961"/>
-          </a:xfrm>
-        </p:spPr>
-        <p:txBody>
-          <a:bodyPr/>
-          <a:lstStyle>
-            <a:lvl1pPr>
-              <a:defRPr sz="2800"/>
-            </a:lvl1pPr>
-            <a:lvl2pPr>
-              <a:defRPr sz="2400"/>
-            </a:lvl2pPr>
-            <a:lvl3pPr>
-              <a:defRPr sz="2000"/>
-            </a:lvl3pPr>
-            <a:lvl4pPr>
-              <a:defRPr sz="1800"/>
-            </a:lvl4pPr>
-            <a:lvl5pPr>
-              <a:defRPr sz="1800"/>
-            </a:lvl5pPr>
-            <a:lvl6pPr>
-              <a:defRPr sz="1800"/>
-            </a:lvl6pPr>
-            <a:lvl7pPr>
-              <a:defRPr sz="1800"/>
-            </a:lvl7pPr>
-            <a:lvl8pPr>
-              <a:defRPr sz="1800"/>
-            </a:lvl8pPr>
-            <a:lvl9pPr>
-              <a:defRPr sz="1800"/>
-            </a:lvl9pPr>
-          </a:lstStyle>
-          <a:p>
-            <a:pPr>
-              <a:defRPr/>
-            </a:pPr>
-            <a:r>
-              <a:rPr lang="ru-RU" sz="1600" b="1"/>
-              <a:t>Декларативность</a:t>
-            </a:r>
-            <a:r>
-              <a:rPr lang="ru-RU" sz="1600" b="0"/>
-              <a:t> – система </a:t>
-            </a:r>
-            <a:endParaRPr sz="1600" b="0"/>
+              <a:rPr sz="3800"/>
+              <a:t>III. </a:t>
+            </a:r>
+            <a:r>
+              <a:rPr lang="ru-RU" sz="3800"/>
+              <a:t>Сравнение</a:t>
+            </a:r>
+            <a:r>
+              <a:rPr lang="en-US" sz="3800"/>
+              <a:t> </a:t>
+            </a:r>
+            <a:r>
+              <a:rPr lang="ru-RU" sz="3800"/>
+              <a:t>декларативных ОС </a:t>
+            </a:r>
+            <a:r>
+              <a:rPr lang="ru-RU" sz="3800"/>
+              <a:t>с другими дистрибутивами (на примере </a:t>
+            </a:r>
+            <a:r>
+              <a:rPr lang="en-US" sz="3800"/>
+              <a:t>NixOS</a:t>
+            </a:r>
+            <a:r>
+              <a:rPr lang="ru-RU" sz="3800"/>
+              <a:t>)</a:t>
+            </a:r>
+            <a:endParaRPr sz="3800"/>
+          </a:p>
+        </p:txBody>
+      </p:sp>
+      <p:sp>
+        <p:nvSpPr>
+          <p:cNvPr id="292428022" name="Content Placeholder 2"/>
+          <p:cNvSpPr>
+            <a:spLocks noGrp="1"/>
+          </p:cNvSpPr>
+          <p:nvPr>
+            <p:ph idx="1"/>
+          </p:nvPr>
+        </p:nvSpPr>
+        <p:spPr bwMode="auto"/>
+        <p:txBody>
+          <a:bodyPr vertOverflow="overflow" horzOverflow="overflow" vert="horz" wrap="square" lIns="91440" tIns="45720" rIns="91440" bIns="45720" numCol="1" spcCol="0" rtlCol="0" fromWordArt="0" anchor="t" anchorCtr="0" forceAA="0" upright="0" compatLnSpc="0">
+            <a:normAutofit fontScale="95000" lnSpcReduction="1000"/>
+          </a:bodyPr>
+          <a:lstStyle/>
+          <a:p>
+            <a:pPr>
+              <a:defRPr/>
+            </a:pPr>
+            <a:r>
+              <a:rPr lang="ru-RU" sz="2400"/>
+              <a:t>В отличие от классических дистрибутивов, ОС подобные </a:t>
+            </a:r>
+            <a:r>
+              <a:rPr lang="en-US" sz="2400"/>
+              <a:t>NixOS </a:t>
+            </a:r>
+            <a:r>
+              <a:rPr lang="ru-RU" sz="2400"/>
+              <a:t>управляются конфигурацией, к которой система приводится автоматически, а не командами вручную</a:t>
+            </a:r>
+            <a:r>
+              <a:rPr lang="ru-RU" sz="2400"/>
+              <a:t>.</a:t>
+            </a:r>
+            <a:endParaRPr sz="2400"/>
+          </a:p>
+          <a:p>
+            <a:pPr>
+              <a:defRPr/>
+            </a:pPr>
+            <a:r>
+              <a:rPr lang="ru-RU" sz="2400"/>
+              <a:t>Плюсы </a:t>
+            </a:r>
+            <a:r>
+              <a:rPr lang="en-US" sz="2400"/>
+              <a:t>NixOS:</a:t>
+            </a:r>
+            <a:endParaRPr sz="2400"/>
+          </a:p>
+          <a:p>
+            <a:pPr lvl="1">
+              <a:defRPr/>
+            </a:pPr>
+            <a:r>
+              <a:rPr lang="ru-RU" sz="2400"/>
+              <a:t>Пакеты изолированны друг от друга, </a:t>
+            </a:r>
+            <a:r>
+              <a:rPr lang="ru-RU" sz="2400" b="1"/>
+              <a:t>конфликты </a:t>
+            </a:r>
+            <a:r>
+              <a:rPr lang="ru-RU" sz="2400"/>
+              <a:t>архитектурно </a:t>
+            </a:r>
+            <a:r>
+              <a:rPr lang="ru-RU" sz="2400" b="1"/>
+              <a:t>невозможны</a:t>
+            </a:r>
+            <a:r>
+              <a:rPr lang="ru-RU" sz="2400"/>
+              <a:t>.</a:t>
+            </a:r>
+            <a:endParaRPr sz="2400"/>
+          </a:p>
+          <a:p>
+            <a:pPr lvl="1">
+              <a:defRPr/>
+            </a:pPr>
+            <a:r>
+              <a:rPr lang="ru-RU" sz="2400" b="1"/>
+              <a:t>Возможность отката</a:t>
+            </a:r>
+            <a:r>
+              <a:rPr lang="ru-RU" sz="2400"/>
+              <a:t> к предыдущей версии конфигурации.</a:t>
+            </a:r>
+            <a:endParaRPr lang="ru-RU" sz="2400"/>
+          </a:p>
+          <a:p>
+            <a:pPr lvl="1">
+              <a:defRPr/>
+            </a:pPr>
+            <a:r>
+              <a:rPr lang="ru-RU" sz="2400"/>
+              <a:t>Из одной конфигурации можно развернуть </a:t>
+            </a:r>
+            <a:r>
+              <a:rPr lang="ru-RU" sz="2400" b="1"/>
+              <a:t>множество одинаковых машин</a:t>
+            </a:r>
+            <a:r>
+              <a:rPr lang="ru-RU" sz="2400"/>
+              <a:t>, например, для офиса или кластеров серверов</a:t>
+            </a:r>
+            <a:endParaRPr lang="ru-RU" sz="2400"/>
+          </a:p>
+          <a:p>
+            <a:pPr lvl="0">
+              <a:defRPr/>
+            </a:pPr>
+            <a:r>
+              <a:rPr lang="ru-RU" sz="2800"/>
+              <a:t>Минусы </a:t>
+            </a:r>
+            <a:r>
+              <a:rPr lang="en-US" sz="2800"/>
+              <a:t>NixOS:</a:t>
+            </a:r>
+            <a:endParaRPr lang="en-US" sz="2800"/>
+          </a:p>
+          <a:p>
+            <a:pPr lvl="1">
+              <a:defRPr/>
+            </a:pPr>
+            <a:r>
+              <a:rPr lang="ru-RU" sz="2400" b="1"/>
+              <a:t>Высокий порог входа</a:t>
+            </a:r>
+            <a:r>
+              <a:rPr lang="ru-RU" sz="2400"/>
+              <a:t>, необходимость </a:t>
+            </a:r>
+            <a:r>
+              <a:rPr lang="ru-RU" sz="2400" b="1"/>
+              <a:t>учить язык программирования </a:t>
+            </a:r>
+            <a:r>
+              <a:rPr lang="en-US" sz="2400" b="1"/>
+              <a:t>nix</a:t>
+            </a:r>
+            <a:endParaRPr sz="2400"/>
           </a:p>
         </p:txBody>
       </p:sp>
@@ -6840,7 +7524,7 @@
       </p:grpSpPr>
       <p:sp>
         <p:nvSpPr>
-          <p:cNvPr id="1991063038" name="Title 1"/>
+          <p:cNvPr id="1286632588" name="Title 1"/>
           <p:cNvSpPr>
             <a:spLocks noGrp="1"/>
           </p:cNvSpPr>
@@ -6858,724 +7542,95 @@
             </a:pPr>
             <a:r>
               <a:rPr/>
-              <a:t>_. </a:t>
+              <a:t>III. </a:t>
             </a:r>
             <a:r>
               <a:rPr lang="ru-RU"/>
-              <a:t>Основные принципы </a:t>
+              <a:t>Способы решения проблем</a:t>
+            </a:r>
+            <a:endParaRPr/>
+          </a:p>
+        </p:txBody>
+      </p:sp>
+      <p:sp>
+        <p:nvSpPr>
+          <p:cNvPr id="1766749368" name="Content Placeholder 2"/>
+          <p:cNvSpPr>
+            <a:spLocks noGrp="1"/>
+          </p:cNvSpPr>
+          <p:nvPr>
+            <p:ph idx="1"/>
+          </p:nvPr>
+        </p:nvSpPr>
+        <p:spPr bwMode="auto"/>
+        <p:txBody>
+          <a:bodyPr/>
+          <a:lstStyle/>
+          <a:p>
+            <a:pPr>
+              <a:defRPr/>
+            </a:pPr>
+            <a:r>
+              <a:rPr lang="ru-RU"/>
+              <a:t>Конфигурация в </a:t>
             </a:r>
             <a:r>
               <a:rPr lang="en-US"/>
-              <a:t>Clyx: </a:t>
+              <a:t>Clyx </a:t>
             </a:r>
             <a:r>
               <a:rPr lang="ru-RU"/>
-              <a:t>Изоляция</a:t>
-            </a:r>
-            <a:endParaRPr/>
-          </a:p>
-        </p:txBody>
-      </p:sp>
-      <p:sp>
-        <p:nvSpPr>
-          <p:cNvPr id="1391179433" name="Content Placeholder 2"/>
-          <p:cNvSpPr>
-            <a:spLocks noGrp="1"/>
-          </p:cNvSpPr>
-          <p:nvPr>
-            <p:ph sz="half" idx="1"/>
-          </p:nvPr>
-        </p:nvSpPr>
-        <p:spPr bwMode="auto">
-          <a:xfrm flipH="0" flipV="0">
-            <a:off x="349009" y="1600200"/>
-            <a:ext cx="4225707" cy="4861601"/>
-          </a:xfrm>
-        </p:spPr>
-        <p:txBody>
-          <a:bodyPr vertOverflow="overflow" horzOverflow="overflow" vert="horz" wrap="square" lIns="91440" tIns="45720" rIns="91440" bIns="45720" numCol="1" spcCol="0" rtlCol="0" fromWordArt="0" anchor="t" anchorCtr="0" forceAA="0" upright="0" compatLnSpc="0">
-            <a:normAutofit/>
-          </a:bodyPr>
-          <a:lstStyle>
-            <a:lvl1pPr>
-              <a:defRPr sz="2800"/>
-            </a:lvl1pPr>
-            <a:lvl2pPr>
-              <a:defRPr sz="2400"/>
-            </a:lvl2pPr>
-            <a:lvl3pPr>
-              <a:defRPr sz="2000"/>
-            </a:lvl3pPr>
-            <a:lvl4pPr>
-              <a:defRPr sz="1800"/>
-            </a:lvl4pPr>
-            <a:lvl5pPr>
-              <a:defRPr sz="1800"/>
-            </a:lvl5pPr>
-            <a:lvl6pPr>
-              <a:defRPr sz="1800"/>
-            </a:lvl6pPr>
-            <a:lvl7pPr>
-              <a:defRPr sz="1800"/>
-            </a:lvl7pPr>
-            <a:lvl8pPr>
-              <a:defRPr sz="1800"/>
-            </a:lvl8pPr>
-            <a:lvl9pPr>
-              <a:defRPr sz="1800"/>
-            </a:lvl9pPr>
-          </a:lstStyle>
-          <a:p>
-            <a:pPr>
-              <a:defRPr/>
-            </a:pPr>
-            <a:r>
-              <a:rPr lang="ru-RU" sz="1800" b="1"/>
-              <a:t>Изоляция – </a:t>
-            </a:r>
-            <a:r>
-              <a:rPr lang="ru-RU" sz="1800" b="0"/>
-              <a:t>программы и их </a:t>
-            </a:r>
-            <a:r>
-              <a:rPr lang="en-US" sz="1800" b="0"/>
-              <a:t>runtime-</a:t>
-            </a:r>
-            <a:r>
-              <a:rPr lang="ru-RU" sz="1800" b="0"/>
-              <a:t>зависимости изолированны друг от друга, что </a:t>
-            </a:r>
-            <a:r>
-              <a:rPr lang="ru-RU" sz="1800" b="1"/>
-              <a:t>избавляет от конфликтов</a:t>
-            </a:r>
-            <a:r>
-              <a:rPr lang="ru-RU" sz="1800" b="0"/>
-              <a:t> зависимостей и позволяет хранить </a:t>
-            </a:r>
-            <a:r>
-              <a:rPr lang="ru-RU" sz="1800" b="1"/>
-              <a:t>несколько версий</a:t>
-            </a:r>
-            <a:r>
-              <a:rPr lang="ru-RU" sz="1800" b="0"/>
-              <a:t> одной программы</a:t>
-            </a:r>
-            <a:r>
-              <a:rPr lang="ru-RU" sz="1800" b="0"/>
+              <a:t>должна быть выполнена в конфигурационном языке, поддерживающим </a:t>
+            </a:r>
+            <a:r>
+              <a:rPr lang="en-US"/>
+              <a:t>LSP (</a:t>
+            </a:r>
+            <a:r>
+              <a:rPr lang="ru-RU" b="1"/>
+              <a:t>автодополнение</a:t>
+            </a:r>
+            <a:r>
+              <a:rPr lang="ru-RU"/>
+              <a:t>, </a:t>
+            </a:r>
+            <a:r>
+              <a:rPr lang="ru-RU" b="1"/>
+              <a:t>указание ошибок</a:t>
+            </a:r>
+            <a:r>
+              <a:rPr lang="en-US"/>
+              <a:t>)</a:t>
+            </a:r>
+            <a:r>
+              <a:rPr lang="ru-RU"/>
+              <a:t> и изменение конфигурации программой </a:t>
+            </a:r>
+            <a:r>
+              <a:rPr lang="ru-RU" b="1"/>
+              <a:t>без потерь форматирования</a:t>
+            </a:r>
+            <a:r>
+              <a:rPr lang="ru-RU"/>
+              <a:t>. Это дает </a:t>
+            </a:r>
+            <a:r>
+              <a:rPr lang="ru-RU" b="1"/>
+              <a:t>простоту</a:t>
+            </a:r>
+            <a:r>
+              <a:rPr lang="ru-RU"/>
+              <a:t>, возможность сделать </a:t>
+            </a:r>
+            <a:r>
+              <a:rPr lang="ru-RU" b="1"/>
+              <a:t>графическую программу для управления системой</a:t>
+            </a:r>
+            <a:r>
+              <a:rPr lang="ru-RU" b="0"/>
               <a:t>.</a:t>
             </a:r>
-            <a:endParaRPr sz="1800" b="0"/>
-          </a:p>
-          <a:p>
-            <a:pPr>
-              <a:defRPr/>
-            </a:pPr>
-            <a:r>
-              <a:rPr lang="ru-RU" sz="1800" b="0"/>
-              <a:t>Таким образом, согласно примеру, программе 1 доступна только зависимость 1 и общая зависимость, программе 2 только общая зависимость</a:t>
-            </a:r>
-            <a:r>
-              <a:rPr lang="ru-RU" sz="1800" b="0"/>
-              <a:t> и зависимость 2, а программе 3 только программа 2 и зависимость 3, </a:t>
-            </a:r>
-            <a:r>
-              <a:rPr lang="ru-RU" sz="1800" b="1"/>
-              <a:t>ей не доступны даже зависимости своей зависимости</a:t>
-            </a:r>
-            <a:r>
-              <a:rPr lang="ru-RU" sz="1800" b="0"/>
-              <a:t>.</a:t>
-            </a:r>
-            <a:endParaRPr sz="1800" b="0"/>
-          </a:p>
-        </p:txBody>
-      </p:sp>
-      <p:pic>
-        <p:nvPicPr>
-          <p:cNvPr id="1570392608" name=""/>
-          <p:cNvPicPr>
-            <a:picLocks noChangeAspect="1"/>
-          </p:cNvPicPr>
-          <p:nvPr/>
-        </p:nvPicPr>
-        <p:blipFill rotWithShape="1">
-          <a:blip r:embed="rId3"/>
-          <a:stretch/>
-        </p:blipFill>
-        <p:spPr bwMode="auto">
-          <a:xfrm flipH="0" flipV="0">
-            <a:off x="5349275" y="2243662"/>
-            <a:ext cx="1324513" cy="1324513"/>
-          </a:xfrm>
-          <a:prstGeom prst="rect">
-            <a:avLst/>
-          </a:prstGeom>
-        </p:spPr>
-      </p:pic>
-      <p:pic>
-        <p:nvPicPr>
-          <p:cNvPr id="1305012999" name=""/>
-          <p:cNvPicPr>
-            <a:picLocks noChangeAspect="1"/>
-          </p:cNvPicPr>
-          <p:nvPr/>
-        </p:nvPicPr>
-        <p:blipFill rotWithShape="1">
-          <a:blip r:embed="rId3"/>
-          <a:stretch/>
-        </p:blipFill>
-        <p:spPr bwMode="auto">
-          <a:xfrm flipH="0" flipV="0">
-            <a:off x="8993596" y="1581405"/>
-            <a:ext cx="1324513" cy="1324513"/>
-          </a:xfrm>
-          <a:prstGeom prst="rect">
-            <a:avLst/>
-          </a:prstGeom>
-        </p:spPr>
-      </p:pic>
-      <p:pic>
-        <p:nvPicPr>
-          <p:cNvPr id="1072218317" name=""/>
-          <p:cNvPicPr>
-            <a:picLocks noChangeAspect="1"/>
-          </p:cNvPicPr>
-          <p:nvPr/>
-        </p:nvPicPr>
-        <p:blipFill rotWithShape="1">
-          <a:blip r:embed="rId3"/>
-          <a:stretch/>
-        </p:blipFill>
-        <p:spPr bwMode="auto">
-          <a:xfrm flipH="0" flipV="0">
-            <a:off x="8161486" y="3213774"/>
-            <a:ext cx="1324513" cy="1324513"/>
-          </a:xfrm>
-          <a:prstGeom prst="rect">
-            <a:avLst/>
-          </a:prstGeom>
-        </p:spPr>
-      </p:pic>
-      <p:pic>
-        <p:nvPicPr>
-          <p:cNvPr id="289970956" name=""/>
-          <p:cNvPicPr>
-            <a:picLocks noChangeAspect="1"/>
-          </p:cNvPicPr>
-          <p:nvPr/>
-        </p:nvPicPr>
-        <p:blipFill rotWithShape="1">
-          <a:blip r:embed="rId4"/>
-          <a:stretch/>
-        </p:blipFill>
-        <p:spPr bwMode="auto">
-          <a:xfrm flipH="0" flipV="0">
-            <a:off x="5491880" y="4928902"/>
-            <a:ext cx="1039303" cy="1039303"/>
-          </a:xfrm>
-          <a:prstGeom prst="rect">
-            <a:avLst/>
-          </a:prstGeom>
-        </p:spPr>
-      </p:pic>
-      <p:pic>
-        <p:nvPicPr>
-          <p:cNvPr id="1845368235" name=""/>
-          <p:cNvPicPr>
-            <a:picLocks noChangeAspect="1"/>
-          </p:cNvPicPr>
-          <p:nvPr/>
-        </p:nvPicPr>
-        <p:blipFill rotWithShape="1">
-          <a:blip r:embed="rId4"/>
-          <a:stretch/>
-        </p:blipFill>
-        <p:spPr bwMode="auto">
-          <a:xfrm flipH="0" flipV="0">
-            <a:off x="7369563" y="4928902"/>
-            <a:ext cx="1039302" cy="1039302"/>
-          </a:xfrm>
-          <a:prstGeom prst="rect">
-            <a:avLst/>
-          </a:prstGeom>
-        </p:spPr>
-      </p:pic>
-      <p:pic>
-        <p:nvPicPr>
-          <p:cNvPr id="444123257" name=""/>
-          <p:cNvPicPr>
-            <a:picLocks noChangeAspect="1"/>
-          </p:cNvPicPr>
-          <p:nvPr/>
-        </p:nvPicPr>
-        <p:blipFill rotWithShape="1">
-          <a:blip r:embed="rId4"/>
-          <a:stretch/>
-        </p:blipFill>
-        <p:spPr bwMode="auto">
-          <a:xfrm flipH="0" flipV="0">
-            <a:off x="9939516" y="3343530"/>
-            <a:ext cx="1039302" cy="1039302"/>
-          </a:xfrm>
-          <a:prstGeom prst="rect">
-            <a:avLst/>
-          </a:prstGeom>
-        </p:spPr>
-      </p:pic>
-      <p:pic>
-        <p:nvPicPr>
-          <p:cNvPr id="743388273" name=""/>
-          <p:cNvPicPr>
-            <a:picLocks noChangeAspect="1"/>
-          </p:cNvPicPr>
-          <p:nvPr/>
-        </p:nvPicPr>
-        <p:blipFill rotWithShape="1">
-          <a:blip r:embed="rId4"/>
-          <a:stretch/>
-        </p:blipFill>
-        <p:spPr bwMode="auto">
-          <a:xfrm flipH="0" flipV="0">
-            <a:off x="9419865" y="4928902"/>
-            <a:ext cx="1039302" cy="1039302"/>
-          </a:xfrm>
-          <a:prstGeom prst="rect">
-            <a:avLst/>
-          </a:prstGeom>
-        </p:spPr>
-      </p:pic>
-      <p:sp>
-        <p:nvSpPr>
-          <p:cNvPr id="2004638915" name=""/>
-          <p:cNvSpPr/>
-          <p:nvPr/>
-        </p:nvSpPr>
-        <p:spPr bwMode="auto">
-          <a:xfrm rot="0" flipH="0" flipV="0">
-            <a:off x="5886650" y="3568176"/>
-            <a:ext cx="221072" cy="1248238"/>
-          </a:xfrm>
-          <a:prstGeom prst="downArrow">
-            <a:avLst>
-              <a:gd name="adj1" fmla="val 50000"/>
-              <a:gd name="adj2" fmla="val 50000"/>
-            </a:avLst>
-          </a:prstGeom>
-        </p:spPr>
-        <p:style>
-          <a:lnRef idx="2">
-            <a:schemeClr val="accent1">
-              <a:shade val="50000"/>
-            </a:schemeClr>
-          </a:lnRef>
-          <a:fillRef idx="1">
-            <a:schemeClr val="accent1"/>
-          </a:fillRef>
-          <a:effectRef idx="0">
-            <a:schemeClr val="accent1"/>
-          </a:effectRef>
-          <a:fontRef idx="minor">
-            <a:schemeClr val="lt1"/>
-          </a:fontRef>
-        </p:style>
-      </p:sp>
-      <p:sp>
-        <p:nvSpPr>
-          <p:cNvPr id="1747552102" name=""/>
-          <p:cNvSpPr/>
-          <p:nvPr/>
-        </p:nvSpPr>
-        <p:spPr bwMode="auto">
-          <a:xfrm rot="19646654" flipH="0" flipV="0">
-            <a:off x="6945309" y="3302236"/>
-            <a:ext cx="221071" cy="1766253"/>
-          </a:xfrm>
-          <a:prstGeom prst="downArrow">
-            <a:avLst>
-              <a:gd name="adj1" fmla="val 50000"/>
-              <a:gd name="adj2" fmla="val 50000"/>
-            </a:avLst>
-          </a:prstGeom>
-        </p:spPr>
-        <p:style>
-          <a:lnRef idx="2">
-            <a:schemeClr val="accent1">
-              <a:shade val="50000"/>
-            </a:schemeClr>
-          </a:lnRef>
-          <a:fillRef idx="1">
-            <a:schemeClr val="accent1"/>
-          </a:fillRef>
-          <a:effectRef idx="0">
-            <a:schemeClr val="accent1"/>
-          </a:effectRef>
-          <a:fontRef idx="minor">
-            <a:schemeClr val="lt1"/>
-          </a:fontRef>
-        </p:style>
-      </p:sp>
-      <p:sp>
-        <p:nvSpPr>
-          <p:cNvPr id="540818811" name=""/>
-          <p:cNvSpPr/>
-          <p:nvPr/>
-        </p:nvSpPr>
-        <p:spPr bwMode="auto">
-          <a:xfrm rot="1991830" flipH="0" flipV="0">
-            <a:off x="8233308" y="4278173"/>
-            <a:ext cx="221071" cy="726965"/>
-          </a:xfrm>
-          <a:prstGeom prst="downArrow">
-            <a:avLst>
-              <a:gd name="adj1" fmla="val 50000"/>
-              <a:gd name="adj2" fmla="val 50000"/>
-            </a:avLst>
-          </a:prstGeom>
-        </p:spPr>
-        <p:style>
-          <a:lnRef idx="2">
-            <a:schemeClr val="accent1">
-              <a:shade val="50000"/>
-            </a:schemeClr>
-          </a:lnRef>
-          <a:fillRef idx="1">
-            <a:schemeClr val="accent1"/>
-          </a:fillRef>
-          <a:effectRef idx="0">
-            <a:schemeClr val="accent1"/>
-          </a:effectRef>
-          <a:fontRef idx="minor">
-            <a:schemeClr val="lt1"/>
-          </a:fontRef>
-        </p:style>
-      </p:sp>
-      <p:sp>
-        <p:nvSpPr>
-          <p:cNvPr id="1151759563" name=""/>
-          <p:cNvSpPr/>
-          <p:nvPr/>
-        </p:nvSpPr>
-        <p:spPr bwMode="auto">
-          <a:xfrm rot="1991830" flipH="0" flipV="0">
-            <a:off x="9080862" y="2634971"/>
-            <a:ext cx="221070" cy="726964"/>
-          </a:xfrm>
-          <a:prstGeom prst="downArrow">
-            <a:avLst>
-              <a:gd name="adj1" fmla="val 50000"/>
-              <a:gd name="adj2" fmla="val 50000"/>
-            </a:avLst>
-          </a:prstGeom>
-        </p:spPr>
-        <p:style>
-          <a:lnRef idx="2">
-            <a:schemeClr val="accent1">
-              <a:shade val="50000"/>
-            </a:schemeClr>
-          </a:lnRef>
-          <a:fillRef idx="1">
-            <a:schemeClr val="accent1"/>
-          </a:fillRef>
-          <a:effectRef idx="0">
-            <a:schemeClr val="accent1"/>
-          </a:effectRef>
-          <a:fontRef idx="minor">
-            <a:schemeClr val="lt1"/>
-          </a:fontRef>
-        </p:style>
-      </p:sp>
-      <p:sp>
-        <p:nvSpPr>
-          <p:cNvPr id="454779701" name=""/>
-          <p:cNvSpPr/>
-          <p:nvPr/>
-        </p:nvSpPr>
-        <p:spPr bwMode="auto">
-          <a:xfrm rot="19444720" flipH="0" flipV="0">
-            <a:off x="9311113" y="4277253"/>
-            <a:ext cx="221070" cy="726964"/>
-          </a:xfrm>
-          <a:prstGeom prst="downArrow">
-            <a:avLst>
-              <a:gd name="adj1" fmla="val 50000"/>
-              <a:gd name="adj2" fmla="val 50000"/>
-            </a:avLst>
-          </a:prstGeom>
-        </p:spPr>
-        <p:style>
-          <a:lnRef idx="2">
-            <a:schemeClr val="accent1">
-              <a:shade val="50000"/>
-            </a:schemeClr>
-          </a:lnRef>
-          <a:fillRef idx="1">
-            <a:schemeClr val="accent1"/>
-          </a:fillRef>
-          <a:effectRef idx="0">
-            <a:schemeClr val="accent1"/>
-          </a:effectRef>
-          <a:fontRef idx="minor">
-            <a:schemeClr val="lt1"/>
-          </a:fontRef>
-        </p:style>
-      </p:sp>
-      <p:sp>
-        <p:nvSpPr>
-          <p:cNvPr id="1799519873" name=""/>
-          <p:cNvSpPr/>
-          <p:nvPr/>
-        </p:nvSpPr>
-        <p:spPr bwMode="auto">
-          <a:xfrm rot="19444720" flipH="0" flipV="0">
-            <a:off x="9952711" y="2658831"/>
-            <a:ext cx="221070" cy="726964"/>
-          </a:xfrm>
-          <a:prstGeom prst="downArrow">
-            <a:avLst>
-              <a:gd name="adj1" fmla="val 50000"/>
-              <a:gd name="adj2" fmla="val 50000"/>
-            </a:avLst>
-          </a:prstGeom>
-        </p:spPr>
-        <p:style>
-          <a:lnRef idx="2">
-            <a:schemeClr val="accent1">
-              <a:shade val="50000"/>
-            </a:schemeClr>
-          </a:lnRef>
-          <a:fillRef idx="1">
-            <a:schemeClr val="accent1"/>
-          </a:fillRef>
-          <a:effectRef idx="0">
-            <a:schemeClr val="accent1"/>
-          </a:effectRef>
-          <a:fontRef idx="minor">
-            <a:schemeClr val="lt1"/>
-          </a:fontRef>
-        </p:style>
-      </p:sp>
-      <p:sp>
-        <p:nvSpPr>
-          <p:cNvPr id="502234874" name=""/>
-          <p:cNvSpPr txBox="1"/>
-          <p:nvPr/>
-        </p:nvSpPr>
-        <p:spPr bwMode="auto">
-          <a:xfrm rot="0" flipH="0" flipV="0">
-            <a:off x="5293584" y="1967900"/>
-            <a:ext cx="1540900" cy="335639"/>
-          </a:xfrm>
-          <a:prstGeom prst="rect">
-            <a:avLst/>
-          </a:prstGeom>
-          <a:noFill/>
-        </p:spPr>
-        <p:txBody>
-          <a:bodyPr vertOverflow="overflow" horzOverflow="overflow" vert="horz" wrap="square" lIns="91440" tIns="45720" rIns="91440" bIns="45720" numCol="1" spcCol="0" rtlCol="0" fromWordArt="0" anchor="t" anchorCtr="0" forceAA="0" upright="0" compatLnSpc="0">
-            <a:spAutoFit/>
-          </a:bodyPr>
-          <a:p>
-            <a:pPr>
-              <a:defRPr/>
-            </a:pPr>
-            <a:r>
-              <a:rPr lang="ru-RU" sz="1600"/>
-              <a:t>Программа 1</a:t>
-            </a:r>
-            <a:endParaRPr sz="1600"/>
-          </a:p>
-        </p:txBody>
-      </p:sp>
-      <p:sp>
-        <p:nvSpPr>
-          <p:cNvPr id="392157877" name=""/>
-          <p:cNvSpPr txBox="1"/>
-          <p:nvPr/>
-        </p:nvSpPr>
-        <p:spPr bwMode="auto">
-          <a:xfrm rot="0" flipH="0" flipV="0">
-            <a:off x="8885223" y="1347516"/>
-            <a:ext cx="1541979" cy="335639"/>
-          </a:xfrm>
-          <a:prstGeom prst="rect">
-            <a:avLst/>
-          </a:prstGeom>
-          <a:noFill/>
-        </p:spPr>
-        <p:txBody>
-          <a:bodyPr vertOverflow="overflow" horzOverflow="overflow" vert="horz" wrap="square" lIns="91440" tIns="45720" rIns="91440" bIns="45720" numCol="1" spcCol="0" rtlCol="0" fromWordArt="0" anchor="t" anchorCtr="0" forceAA="0" upright="0" compatLnSpc="0">
-            <a:spAutoFit/>
-          </a:bodyPr>
-          <a:p>
-            <a:pPr>
-              <a:defRPr/>
-            </a:pPr>
-            <a:r>
-              <a:rPr lang="ru-RU" sz="1600"/>
-              <a:t>Программа 3</a:t>
-            </a:r>
-            <a:endParaRPr sz="1600"/>
-          </a:p>
-        </p:txBody>
-      </p:sp>
-      <p:sp>
-        <p:nvSpPr>
-          <p:cNvPr id="2046212899" name=""/>
-          <p:cNvSpPr txBox="1"/>
-          <p:nvPr/>
-        </p:nvSpPr>
-        <p:spPr bwMode="auto">
-          <a:xfrm rot="0" flipH="0" flipV="0">
-            <a:off x="7369563" y="3093359"/>
-            <a:ext cx="1541979" cy="335639"/>
-          </a:xfrm>
-          <a:prstGeom prst="rect">
-            <a:avLst/>
-          </a:prstGeom>
-          <a:noFill/>
-        </p:spPr>
-        <p:txBody>
-          <a:bodyPr vertOverflow="overflow" horzOverflow="overflow" vert="horz" wrap="square" lIns="91440" tIns="45720" rIns="91440" bIns="45720" numCol="1" spcCol="0" rtlCol="0" fromWordArt="0" anchor="t" anchorCtr="0" forceAA="0" upright="0" compatLnSpc="0">
-            <a:spAutoFit/>
-          </a:bodyPr>
-          <a:p>
-            <a:pPr>
-              <a:defRPr/>
-            </a:pPr>
-            <a:r>
-              <a:rPr lang="ru-RU" sz="1600"/>
-              <a:t>Программа 2</a:t>
-            </a:r>
-            <a:endParaRPr sz="1600"/>
-          </a:p>
-        </p:txBody>
-      </p:sp>
-      <p:sp>
-        <p:nvSpPr>
-          <p:cNvPr id="1591690278" name=""/>
-          <p:cNvSpPr txBox="1"/>
-          <p:nvPr/>
-        </p:nvSpPr>
-        <p:spPr bwMode="auto">
-          <a:xfrm rot="0" flipH="0" flipV="0">
-            <a:off x="7118045" y="6126162"/>
-            <a:ext cx="1548458" cy="579479"/>
-          </a:xfrm>
-          <a:prstGeom prst="rect">
-            <a:avLst/>
-          </a:prstGeom>
-          <a:noFill/>
-        </p:spPr>
-        <p:txBody>
-          <a:bodyPr vertOverflow="overflow" horzOverflow="overflow" vert="horz" wrap="square" lIns="91440" tIns="45720" rIns="91440" bIns="45720" numCol="1" spcCol="0" rtlCol="0" fromWordArt="0" anchor="t" anchorCtr="0" forceAA="0" upright="0" compatLnSpc="0">
-            <a:spAutoFit/>
-          </a:bodyPr>
-          <a:p>
-            <a:pPr>
-              <a:defRPr/>
-            </a:pPr>
-            <a:r>
-              <a:rPr lang="ru-RU" sz="1600"/>
-              <a:t>Общая зависимость</a:t>
-            </a:r>
-            <a:endParaRPr sz="1600"/>
-          </a:p>
-        </p:txBody>
-      </p:sp>
-      <p:sp>
-        <p:nvSpPr>
-          <p:cNvPr id="705628538" name=""/>
-          <p:cNvSpPr txBox="1"/>
-          <p:nvPr/>
-        </p:nvSpPr>
-        <p:spPr bwMode="auto">
-          <a:xfrm rot="0" flipH="0" flipV="0">
-            <a:off x="5213239" y="6126162"/>
-            <a:ext cx="1701591" cy="335639"/>
-          </a:xfrm>
-          <a:prstGeom prst="rect">
-            <a:avLst/>
-          </a:prstGeom>
-          <a:noFill/>
-        </p:spPr>
-        <p:txBody>
-          <a:bodyPr vertOverflow="overflow" horzOverflow="overflow" vert="horz" wrap="square" lIns="91440" tIns="45720" rIns="91440" bIns="45720" numCol="1" spcCol="0" rtlCol="0" fromWordArt="0" anchor="t" anchorCtr="0" forceAA="0" upright="0" compatLnSpc="0">
-            <a:spAutoFit/>
-          </a:bodyPr>
-          <a:p>
-            <a:pPr>
-              <a:defRPr/>
-            </a:pPr>
-            <a:r>
-              <a:rPr lang="ru-RU" sz="1600"/>
-              <a:t>Зависимость 1</a:t>
-            </a:r>
-            <a:endParaRPr sz="1600"/>
-          </a:p>
-        </p:txBody>
-      </p:sp>
-      <p:sp>
-        <p:nvSpPr>
-          <p:cNvPr id="821389437" name=""/>
-          <p:cNvSpPr txBox="1"/>
-          <p:nvPr/>
-        </p:nvSpPr>
-        <p:spPr bwMode="auto">
-          <a:xfrm rot="0" flipH="0" flipV="0">
-            <a:off x="9084877" y="6080262"/>
-            <a:ext cx="1702670" cy="335639"/>
-          </a:xfrm>
-          <a:prstGeom prst="rect">
-            <a:avLst/>
-          </a:prstGeom>
-          <a:noFill/>
-        </p:spPr>
-        <p:txBody>
-          <a:bodyPr vertOverflow="overflow" horzOverflow="overflow" vert="horz" wrap="square" lIns="91440" tIns="45720" rIns="91440" bIns="45720" numCol="1" spcCol="0" rtlCol="0" fromWordArt="0" anchor="t" anchorCtr="0" forceAA="0" upright="0" compatLnSpc="0">
-            <a:spAutoFit/>
-          </a:bodyPr>
-          <a:p>
-            <a:pPr>
-              <a:defRPr/>
-            </a:pPr>
-            <a:r>
-              <a:rPr lang="ru-RU" sz="1600"/>
-              <a:t>Зависимость 2</a:t>
-            </a:r>
-            <a:endParaRPr sz="1600"/>
-          </a:p>
-        </p:txBody>
-      </p:sp>
-      <p:sp>
-        <p:nvSpPr>
-          <p:cNvPr id="8913289" name=""/>
-          <p:cNvSpPr txBox="1"/>
-          <p:nvPr/>
-        </p:nvSpPr>
-        <p:spPr bwMode="auto">
-          <a:xfrm rot="0" flipH="0" flipV="0">
-            <a:off x="10186977" y="4411227"/>
-            <a:ext cx="1702310" cy="335639"/>
-          </a:xfrm>
-          <a:prstGeom prst="rect">
-            <a:avLst/>
-          </a:prstGeom>
-          <a:noFill/>
-        </p:spPr>
-        <p:txBody>
-          <a:bodyPr vertOverflow="overflow" horzOverflow="overflow" vert="horz" wrap="square" lIns="91440" tIns="45720" rIns="91440" bIns="45720" numCol="1" spcCol="0" rtlCol="0" fromWordArt="0" anchor="t" anchorCtr="0" forceAA="0" upright="0" compatLnSpc="0">
-            <a:spAutoFit/>
-          </a:bodyPr>
-          <a:p>
-            <a:pPr>
-              <a:defRPr/>
-            </a:pPr>
-            <a:r>
-              <a:rPr lang="ru-RU" sz="1600"/>
-              <a:t>Зависимость 3</a:t>
-            </a:r>
-            <a:endParaRPr sz="1600"/>
+            <a:endParaRPr b="0"/>
           </a:p>
         </p:txBody>
       </p:sp>
@@ -7614,7 +7669,7 @@
       </p:grpSpPr>
       <p:sp>
         <p:nvSpPr>
-          <p:cNvPr id="926603968" name="Title 1"/>
+          <p:cNvPr id="783167636" name="Title 1"/>
           <p:cNvSpPr>
             <a:spLocks noGrp="1"/>
           </p:cNvSpPr>
@@ -7624,7 +7679,9 @@
         </p:nvSpPr>
         <p:spPr bwMode="auto"/>
         <p:txBody>
-          <a:bodyPr/>
+          <a:bodyPr vertOverflow="overflow" horzOverflow="overflow" vert="horz" wrap="square" lIns="91440" tIns="45720" rIns="91440" bIns="45720" numCol="1" spcCol="0" rtlCol="0" fromWordArt="0" anchor="ctr" anchorCtr="0" forceAA="0" upright="0" compatLnSpc="0">
+            <a:normAutofit fontScale="90000" lnSpcReduction="2000"/>
+          </a:bodyPr>
           <a:lstStyle/>
           <a:p>
             <a:pPr>
@@ -7632,155 +7689,200 @@
             </a:pPr>
             <a:r>
               <a:rPr/>
-              <a:t>II. </a:t>
+              <a:t>IV. </a:t>
             </a:r>
             <a:r>
               <a:rPr lang="ru-RU"/>
-              <a:t>Проблемы существующих ОС</a:t>
-            </a:r>
-            <a:endParaRPr/>
-          </a:p>
-        </p:txBody>
-      </p:sp>
-      <p:sp>
-        <p:nvSpPr>
-          <p:cNvPr id="1921504450" name="Content Placeholder 2"/>
-          <p:cNvSpPr>
-            <a:spLocks noGrp="1"/>
-          </p:cNvSpPr>
-          <p:nvPr>
-            <p:ph idx="1"/>
+              <a:t>Основные принципы </a:t>
+            </a:r>
+            <a:r>
+              <a:rPr lang="en-US"/>
+              <a:t>Clyx:</a:t>
+            </a:r>
+            <a:br>
+              <a:rPr lang="en-US"/>
+            </a:br>
+            <a:r>
+              <a:rPr lang="ru-RU"/>
+              <a:t>Декларативность</a:t>
+            </a:r>
+            <a:endParaRPr/>
+          </a:p>
+        </p:txBody>
+      </p:sp>
+      <p:sp>
+        <p:nvSpPr>
+          <p:cNvPr id="668977431" name="Content Placeholder 3"/>
+          <p:cNvSpPr>
+            <a:spLocks noGrp="1"/>
+          </p:cNvSpPr>
+          <p:nvPr>
+            <p:ph sz="half" idx="2"/>
           </p:nvPr>
         </p:nvSpPr>
         <p:spPr bwMode="auto">
           <a:xfrm flipH="0" flipV="0">
-            <a:off x="232193" y="1600200"/>
-            <a:ext cx="3515825" cy="4525961"/>
+            <a:off x="5482762" y="1600200"/>
+            <a:ext cx="6099633" cy="4525960"/>
           </a:xfrm>
         </p:spPr>
         <p:txBody>
           <a:bodyPr vertOverflow="overflow" horzOverflow="overflow" vert="horz" wrap="square" lIns="91440" tIns="45720" rIns="91440" bIns="45720" numCol="1" spcCol="0" rtlCol="0" fromWordArt="0" anchor="t" anchorCtr="0" forceAA="0" upright="0" compatLnSpc="0">
             <a:normAutofit/>
           </a:bodyPr>
-          <a:lstStyle/>
-          <a:p>
-            <a:pPr>
-              <a:defRPr/>
-            </a:pPr>
-            <a:r>
-              <a:rPr lang="ru-RU" sz="2200" b="0" i="0" u="none" strike="noStrike" cap="none" spc="0">
-                <a:solidFill>
-                  <a:schemeClr val="tx1">
-                    <a:lumMod val="75000"/>
-                    <a:lumOff val="25000"/>
-                  </a:schemeClr>
-                </a:solidFill>
-                <a:latin typeface="Arial"/>
-                <a:ea typeface="Arial"/>
-                <a:cs typeface="Arial"/>
-              </a:rPr>
-              <a:t>Большинство решений </a:t>
-            </a:r>
-            <a:r>
-              <a:rPr lang="ru-RU" sz="2200" b="1" i="0" u="none" strike="noStrike" cap="none" spc="0">
-                <a:solidFill>
-                  <a:schemeClr val="tx1">
-                    <a:lumMod val="75000"/>
-                    <a:lumOff val="25000"/>
-                  </a:schemeClr>
-                </a:solidFill>
-                <a:latin typeface="Arial"/>
-                <a:ea typeface="Arial"/>
-                <a:cs typeface="Arial"/>
-              </a:rPr>
-              <a:t>либо сложны</a:t>
-            </a:r>
-            <a:r>
-              <a:rPr lang="ru-RU" sz="2200" b="0" i="0" u="none" strike="noStrike" cap="none" spc="0">
-                <a:solidFill>
-                  <a:schemeClr val="tx1">
-                    <a:lumMod val="75000"/>
-                    <a:lumOff val="25000"/>
-                  </a:schemeClr>
-                </a:solidFill>
-                <a:latin typeface="Arial"/>
-                <a:ea typeface="Arial"/>
-                <a:cs typeface="Arial"/>
-              </a:rPr>
-              <a:t> для массового пользователя, </a:t>
-            </a:r>
-            <a:r>
-              <a:rPr lang="ru-RU" sz="2200" b="1" i="0" u="none" strike="noStrike" cap="none" spc="0">
-                <a:solidFill>
-                  <a:schemeClr val="tx1">
-                    <a:lumMod val="75000"/>
-                    <a:lumOff val="25000"/>
-                  </a:schemeClr>
-                </a:solidFill>
-                <a:latin typeface="Arial"/>
-                <a:ea typeface="Arial"/>
-                <a:cs typeface="Arial"/>
-              </a:rPr>
-              <a:t>либо ориентированы на узкие сценарии</a:t>
-            </a:r>
-            <a:r>
-              <a:rPr lang="ru-RU" sz="2200" b="0" i="0" u="none" strike="noStrike" cap="none" spc="0">
-                <a:solidFill>
-                  <a:schemeClr val="tx1">
-                    <a:lumMod val="75000"/>
-                    <a:lumOff val="25000"/>
-                  </a:schemeClr>
-                </a:solidFill>
-                <a:latin typeface="Arial"/>
-                <a:ea typeface="Arial"/>
-                <a:cs typeface="Arial"/>
-              </a:rPr>
-              <a:t> – разработку, серверы, контейнеры.</a:t>
-            </a:r>
-            <a:endParaRPr sz="2200"/>
-          </a:p>
-        </p:txBody>
-      </p:sp>
-      <p:graphicFrame>
-        <p:nvGraphicFramePr>
-          <p:cNvPr id="2010654640" name=""/>
-          <p:cNvGraphicFramePr>
-            <a:graphicFrameLocks xmlns:a="http://schemas.openxmlformats.org/drawingml/2006/main" noChangeAspect="1"/>
-          </p:cNvGraphicFramePr>
+          <a:lstStyle>
+            <a:lvl1pPr>
+              <a:defRPr sz="2800"/>
+            </a:lvl1pPr>
+            <a:lvl2pPr>
+              <a:defRPr sz="2400"/>
+            </a:lvl2pPr>
+            <a:lvl3pPr>
+              <a:defRPr sz="2000"/>
+            </a:lvl3pPr>
+            <a:lvl4pPr>
+              <a:defRPr sz="1800"/>
+            </a:lvl4pPr>
+            <a:lvl5pPr>
+              <a:defRPr sz="1800"/>
+            </a:lvl5pPr>
+            <a:lvl6pPr>
+              <a:defRPr sz="1800"/>
+            </a:lvl6pPr>
+            <a:lvl7pPr>
+              <a:defRPr sz="1800"/>
+            </a:lvl7pPr>
+            <a:lvl8pPr>
+              <a:defRPr sz="1800"/>
+            </a:lvl8pPr>
+            <a:lvl9pPr>
+              <a:defRPr sz="1800"/>
+            </a:lvl9pPr>
+          </a:lstStyle>
+          <a:p>
+            <a:pPr>
+              <a:defRPr/>
+            </a:pPr>
+            <a:r>
+              <a:rPr lang="ru-RU" sz="1800" b="1"/>
+              <a:t>Декларативность</a:t>
+            </a:r>
+            <a:r>
+              <a:rPr lang="ru-RU" sz="1800" b="0"/>
+              <a:t> – система, конечное состояние которой описано в конфигурационном файле, а не достигается вручную (императивными коммандами). </a:t>
+            </a:r>
+            <a:endParaRPr sz="1800" b="0"/>
+          </a:p>
+          <a:p>
+            <a:pPr>
+              <a:defRPr/>
+            </a:pPr>
+            <a:r>
+              <a:rPr lang="ru-RU" sz="1800" b="0"/>
+              <a:t>Декларативный подход </a:t>
+            </a:r>
+            <a:r>
+              <a:rPr lang="ru-RU" sz="1800" b="1"/>
+              <a:t>исключает вероятность ошибки</a:t>
+            </a:r>
+            <a:r>
+              <a:rPr lang="ru-RU" sz="1800" b="0"/>
+              <a:t> оператора </a:t>
+            </a:r>
+            <a:r>
+              <a:rPr lang="ru-RU" sz="1800" b="1"/>
+              <a:t>при ручном управлении</a:t>
+            </a:r>
+            <a:r>
+              <a:rPr lang="ru-RU" sz="1800" b="0"/>
+              <a:t> системой</a:t>
+            </a:r>
+            <a:r>
+              <a:rPr lang="ru-RU" sz="1800" b="0"/>
+              <a:t>.</a:t>
+            </a:r>
+            <a:endParaRPr sz="1800" b="0"/>
+          </a:p>
+          <a:p>
+            <a:pPr>
+              <a:defRPr/>
+            </a:pPr>
+            <a:r>
+              <a:rPr lang="ru-RU" sz="1800" b="0"/>
+              <a:t>В декларативной системе можно нативно реализовать функцию </a:t>
+            </a:r>
+            <a:r>
+              <a:rPr lang="ru-RU" sz="1800" b="1"/>
+              <a:t>откатов</a:t>
+            </a:r>
+            <a:r>
+              <a:rPr lang="en-US" sz="1800" b="0"/>
+              <a:t>: </a:t>
+            </a:r>
+            <a:r>
+              <a:rPr lang="ru-RU" sz="1800" b="0"/>
+              <a:t>если что то сломалось, можно просто </a:t>
+            </a:r>
+            <a:r>
+              <a:rPr lang="ru-RU" sz="1800" b="1"/>
+              <a:t>вернуться к предыдущей конфигурации</a:t>
+            </a:r>
+            <a:r>
+              <a:rPr lang="ru-RU" sz="1800" b="0"/>
+              <a:t>.</a:t>
+            </a:r>
+            <a:endParaRPr lang="ru-RU" sz="1800" b="0"/>
+          </a:p>
+          <a:p>
+            <a:pPr>
+              <a:defRPr/>
+            </a:pPr>
+            <a:r>
+              <a:rPr lang="ru-RU" sz="1800" b="0"/>
+              <a:t>Имея конфиг системы, можно сделать ее точную копию. </a:t>
+            </a:r>
+            <a:r>
+              <a:rPr lang="ru-RU" sz="1800" b="0"/>
+              <a:t>Это упрощает </a:t>
+            </a:r>
+            <a:r>
+              <a:rPr lang="ru-RU" sz="1800" b="1"/>
+              <a:t>развертывание системы на множество устройств</a:t>
+            </a:r>
+            <a:r>
+              <a:rPr lang="en-US" sz="1800" b="0"/>
+              <a:t>: </a:t>
+            </a:r>
+            <a:r>
+              <a:rPr lang="ru-RU" sz="1800" b="0"/>
+              <a:t>офисы, школьные ноутбуки и т.д.</a:t>
+            </a:r>
+            <a:endParaRPr sz="1800" b="0"/>
+          </a:p>
+        </p:txBody>
+      </p:sp>
+      <p:pic>
+        <p:nvPicPr>
+          <p:cNvPr id="338890334" name=""/>
+          <p:cNvPicPr>
+            <a:picLocks noChangeAspect="1"/>
+          </p:cNvPicPr>
           <p:nvPr/>
-        </p:nvGraphicFramePr>
-        <p:xfrm flipH="0" flipV="0">
-          <a:off x="4035500" y="1417637"/>
-          <a:ext cx="7546897" cy="3129201"/>
-        </p:xfrm>
-        <a:graphic>
-          <a:graphicData uri="http://schemas.openxmlformats.org/presentationml/2006/ole">
-            <p:oleObj name="oleObj" r:id="rId4" imgW="4295775" imgH="1781175" progId="Excel.Sheet.12">
-              <p:embed/>
-              <p:pic>
-                <p:nvPicPr>
-                  <p:cNvPr id="2010654640" name=""/>
-                  <p:cNvPicPr/>
-                  <p:nvPr/>
-                </p:nvPicPr>
-                <p:blipFill rotWithShape="1">
-                  <a:blip r:embed="rId3"/>
-                  <a:stretch/>
-                </p:blipFill>
-                <p:spPr bwMode="auto">
-                  <a:xfrm flipH="0" flipV="0">
-                    <a:off x="4035500" y="1417637"/>
-                    <a:ext cx="7546897" cy="3129201"/>
-                  </a:xfrm>
-                  <a:prstGeom prst="rect">
-                    <a:avLst/>
-                  </a:prstGeom>
-                </p:spPr>
-              </p:pic>
-            </p:oleObj>
-          </a:graphicData>
-        </a:graphic>
-      </p:graphicFrame>
+        </p:nvPicPr>
+        <p:blipFill rotWithShape="1">
+          <a:blip r:embed="rId3"/>
+          <a:stretch/>
+        </p:blipFill>
+        <p:spPr bwMode="auto">
+          <a:xfrm flipH="0" flipV="0">
+            <a:off x="609598" y="976995"/>
+            <a:ext cx="4176150" cy="5149164"/>
+          </a:xfrm>
+          <a:prstGeom prst="rect">
+            <a:avLst/>
+          </a:prstGeom>
+        </p:spPr>
+      </p:pic>
     </p:spTree>
   </p:cSld>
   <p:clrMapOvr>
@@ -7816,7 +7918,7 @@
       </p:grpSpPr>
       <p:sp>
         <p:nvSpPr>
-          <p:cNvPr id="2051435675" name="Title 1"/>
+          <p:cNvPr id="1608725564" name="Title 1"/>
           <p:cNvSpPr>
             <a:spLocks noGrp="1"/>
           </p:cNvSpPr>
@@ -7827,7 +7929,7 @@
         <p:spPr bwMode="auto"/>
         <p:txBody>
           <a:bodyPr vertOverflow="overflow" horzOverflow="overflow" vert="horz" wrap="square" lIns="91440" tIns="45720" rIns="91440" bIns="45720" numCol="1" spcCol="0" rtlCol="0" fromWordArt="0" anchor="ctr" anchorCtr="0" forceAA="0" upright="0" compatLnSpc="0">
-            <a:normAutofit fontScale="95000" lnSpcReduction="1000"/>
+            <a:normAutofit fontScale="90000" lnSpcReduction="2000"/>
           </a:bodyPr>
           <a:lstStyle/>
           <a:p>
@@ -7835,144 +7937,683 @@
               <a:defRPr/>
             </a:pPr>
             <a:r>
-              <a:rPr sz="3800"/>
-              <a:t>III. </a:t>
-            </a:r>
-            <a:r>
-              <a:rPr lang="ru-RU" sz="3800"/>
-              <a:t>Сравнение</a:t>
-            </a:r>
-            <a:r>
-              <a:rPr lang="en-US" sz="3800"/>
-              <a:t> </a:t>
-            </a:r>
-            <a:r>
-              <a:rPr lang="ru-RU" sz="3800"/>
-              <a:t>декларативных ОС </a:t>
-            </a:r>
-            <a:r>
-              <a:rPr lang="ru-RU" sz="3800"/>
-              <a:t>с другими дистрибутивами (на примере </a:t>
-            </a:r>
-            <a:r>
-              <a:rPr lang="en-US" sz="3800"/>
-              <a:t>NixOS</a:t>
-            </a:r>
-            <a:r>
-              <a:rPr lang="ru-RU" sz="3800"/>
-              <a:t>)</a:t>
-            </a:r>
-            <a:endParaRPr sz="3800"/>
-          </a:p>
-        </p:txBody>
-      </p:sp>
-      <p:sp>
-        <p:nvSpPr>
-          <p:cNvPr id="1249715865" name="Content Placeholder 2"/>
-          <p:cNvSpPr>
-            <a:spLocks noGrp="1"/>
-          </p:cNvSpPr>
-          <p:nvPr>
-            <p:ph idx="1"/>
-          </p:nvPr>
-        </p:nvSpPr>
-        <p:spPr bwMode="auto"/>
+              <a:rPr lang="en-US" sz="4400" b="0" i="0" u="none" strike="noStrike" cap="none" spc="0">
+                <a:solidFill>
+                  <a:schemeClr val="tx1">
+                    <a:lumMod val="65000"/>
+                    <a:lumOff val="35000"/>
+                  </a:schemeClr>
+                </a:solidFill>
+                <a:latin typeface="+mj-lt"/>
+                <a:ea typeface="+mj-ea"/>
+                <a:cs typeface="+mj-cs"/>
+              </a:rPr>
+              <a:t>IV. </a:t>
+            </a:r>
+            <a:r>
+              <a:rPr lang="ru-RU" sz="4400" b="0" i="0" u="none" strike="noStrike" cap="none" spc="0">
+                <a:solidFill>
+                  <a:schemeClr val="tx1">
+                    <a:lumMod val="65000"/>
+                    <a:lumOff val="35000"/>
+                  </a:schemeClr>
+                </a:solidFill>
+                <a:latin typeface="+mj-lt"/>
+                <a:ea typeface="+mj-ea"/>
+                <a:cs typeface="+mj-cs"/>
+              </a:rPr>
+              <a:t>Основные принципы </a:t>
+            </a:r>
+            <a:r>
+              <a:rPr lang="en-US" sz="4400" b="0" i="0" u="none" strike="noStrike" cap="none" spc="0">
+                <a:solidFill>
+                  <a:schemeClr val="tx1">
+                    <a:lumMod val="65000"/>
+                    <a:lumOff val="35000"/>
+                  </a:schemeClr>
+                </a:solidFill>
+                <a:latin typeface="+mj-lt"/>
+                <a:ea typeface="+mj-ea"/>
+                <a:cs typeface="+mj-cs"/>
+              </a:rPr>
+              <a:t>Clyx:</a:t>
+            </a:r>
+            <a:br>
+              <a:rPr lang="en-US" sz="4400" b="0" i="0" u="none" strike="noStrike" cap="none" spc="0">
+                <a:solidFill>
+                  <a:schemeClr val="tx1">
+                    <a:lumMod val="65000"/>
+                    <a:lumOff val="35000"/>
+                  </a:schemeClr>
+                </a:solidFill>
+                <a:latin typeface="+mj-lt"/>
+                <a:ea typeface="+mj-ea"/>
+                <a:cs typeface="+mj-cs"/>
+              </a:rPr>
+            </a:br>
+            <a:r>
+              <a:rPr lang="ru-RU" sz="4400" b="0" i="0" u="none" strike="noStrike" cap="none" spc="0">
+                <a:solidFill>
+                  <a:schemeClr val="tx1">
+                    <a:lumMod val="65000"/>
+                    <a:lumOff val="35000"/>
+                  </a:schemeClr>
+                </a:solidFill>
+                <a:latin typeface="+mj-lt"/>
+                <a:ea typeface="+mj-ea"/>
+                <a:cs typeface="+mj-cs"/>
+              </a:rPr>
+              <a:t>Декларативность</a:t>
+            </a:r>
+            <a:endParaRPr sz="4400"/>
+          </a:p>
+        </p:txBody>
+      </p:sp>
+      <p:sp>
+        <p:nvSpPr>
+          <p:cNvPr id="1187594004" name="Content Placeholder 2"/>
+          <p:cNvSpPr>
+            <a:spLocks noGrp="1"/>
+          </p:cNvSpPr>
+          <p:nvPr>
+            <p:ph sz="half" idx="1"/>
+          </p:nvPr>
+        </p:nvSpPr>
+        <p:spPr bwMode="auto">
+          <a:xfrm flipH="0" flipV="0">
+            <a:off x="609598" y="1600200"/>
+            <a:ext cx="5384799" cy="572167"/>
+          </a:xfrm>
+        </p:spPr>
         <p:txBody>
           <a:bodyPr/>
-          <a:lstStyle/>
-          <a:p>
-            <a:pPr>
-              <a:defRPr/>
-            </a:pPr>
-            <a:r>
-              <a:rPr lang="ru-RU" sz="2400"/>
-              <a:t>В отличие от классических дистрибутивов, ОС подобные </a:t>
-            </a:r>
-            <a:r>
-              <a:rPr lang="en-US" sz="2400"/>
-              <a:t>NixOS </a:t>
-            </a:r>
-            <a:r>
-              <a:rPr lang="ru-RU" sz="2400"/>
-              <a:t>управляются конфигурацией, к которой система приводится автоматически, а не командами вручную</a:t>
-            </a:r>
-            <a:r>
-              <a:rPr lang="ru-RU" sz="2400"/>
-              <a:t>.</a:t>
-            </a:r>
-            <a:endParaRPr sz="2400"/>
-          </a:p>
-          <a:p>
-            <a:pPr>
-              <a:defRPr/>
-            </a:pPr>
-            <a:r>
-              <a:rPr lang="ru-RU" sz="2400"/>
-              <a:t>Плюсы </a:t>
-            </a:r>
-            <a:r>
-              <a:rPr lang="en-US" sz="2400"/>
-              <a:t>NixOS:</a:t>
-            </a:r>
-            <a:endParaRPr sz="2400"/>
-          </a:p>
-          <a:p>
-            <a:pPr lvl="1">
-              <a:defRPr/>
-            </a:pPr>
-            <a:r>
-              <a:rPr lang="ru-RU" sz="2400"/>
-              <a:t>Пакеты изолированны друг от друга, конфликты архитектурно невозможны.</a:t>
-            </a:r>
-            <a:endParaRPr sz="2400"/>
-          </a:p>
-          <a:p>
-            <a:pPr lvl="1">
-              <a:defRPr/>
-            </a:pPr>
-            <a:r>
-              <a:rPr lang="ru-RU" sz="2400"/>
-              <a:t>Возможность отката к предыдущей версии конфигурации.</a:t>
-            </a:r>
-            <a:endParaRPr lang="ru-RU" sz="2400"/>
-          </a:p>
-          <a:p>
-            <a:pPr lvl="1">
-              <a:defRPr/>
-            </a:pPr>
-            <a:r>
-              <a:rPr lang="ru-RU" sz="2400"/>
-              <a:t>Из одной конфигурации можно развернуть множество одинаковых машин, например, для офиса или кластеров серверов</a:t>
-            </a:r>
-            <a:endParaRPr lang="ru-RU" sz="2400"/>
-          </a:p>
-          <a:p>
-            <a:pPr lvl="0">
-              <a:defRPr/>
-            </a:pPr>
-            <a:r>
-              <a:rPr lang="ru-RU" sz="2800"/>
-              <a:t>Минусы </a:t>
-            </a:r>
-            <a:r>
-              <a:rPr lang="en-US" sz="2800"/>
-              <a:t>NixOS:</a:t>
-            </a:r>
-            <a:endParaRPr lang="en-US" sz="2800"/>
-          </a:p>
-          <a:p>
-            <a:pPr lvl="1">
-              <a:defRPr/>
-            </a:pPr>
-            <a:r>
-              <a:rPr lang="ru-RU" sz="2400"/>
-              <a:t>Высокий порог входа, необходимость учить язык программирования </a:t>
-            </a:r>
-            <a:r>
-              <a:rPr lang="en-US" sz="2400"/>
-              <a:t>nix</a:t>
-            </a:r>
-            <a:endParaRPr sz="2400"/>
+          <a:lstStyle>
+            <a:lvl1pPr>
+              <a:defRPr sz="2800"/>
+            </a:lvl1pPr>
+            <a:lvl2pPr>
+              <a:defRPr sz="2400"/>
+            </a:lvl2pPr>
+            <a:lvl3pPr>
+              <a:defRPr sz="2000"/>
+            </a:lvl3pPr>
+            <a:lvl4pPr>
+              <a:defRPr sz="1800"/>
+            </a:lvl4pPr>
+            <a:lvl5pPr>
+              <a:defRPr sz="1800"/>
+            </a:lvl5pPr>
+            <a:lvl6pPr>
+              <a:defRPr sz="1800"/>
+            </a:lvl6pPr>
+            <a:lvl7pPr>
+              <a:defRPr sz="1800"/>
+            </a:lvl7pPr>
+            <a:lvl8pPr>
+              <a:defRPr sz="1800"/>
+            </a:lvl8pPr>
+            <a:lvl9pPr>
+              <a:defRPr sz="1800"/>
+            </a:lvl9pPr>
+          </a:lstStyle>
+          <a:p>
+            <a:pPr>
+              <a:defRPr/>
+            </a:pPr>
+            <a:r>
+              <a:rPr lang="ru-RU"/>
+              <a:t>Императивная система</a:t>
+            </a:r>
+            <a:endParaRPr/>
+          </a:p>
+        </p:txBody>
+      </p:sp>
+      <p:sp>
+        <p:nvSpPr>
+          <p:cNvPr id="872965775" name="Content Placeholder 3"/>
+          <p:cNvSpPr>
+            <a:spLocks noGrp="1"/>
+          </p:cNvSpPr>
+          <p:nvPr>
+            <p:ph sz="half" idx="2"/>
+          </p:nvPr>
+        </p:nvSpPr>
+        <p:spPr bwMode="auto">
+          <a:xfrm flipH="0" flipV="0">
+            <a:off x="6197598" y="1600200"/>
+            <a:ext cx="5384799" cy="572167"/>
+          </a:xfrm>
+        </p:spPr>
+        <p:txBody>
+          <a:bodyPr/>
+          <a:lstStyle>
+            <a:lvl1pPr>
+              <a:defRPr sz="2800"/>
+            </a:lvl1pPr>
+            <a:lvl2pPr>
+              <a:defRPr sz="2400"/>
+            </a:lvl2pPr>
+            <a:lvl3pPr>
+              <a:defRPr sz="2000"/>
+            </a:lvl3pPr>
+            <a:lvl4pPr>
+              <a:defRPr sz="1800"/>
+            </a:lvl4pPr>
+            <a:lvl5pPr>
+              <a:defRPr sz="1800"/>
+            </a:lvl5pPr>
+            <a:lvl6pPr>
+              <a:defRPr sz="1800"/>
+            </a:lvl6pPr>
+            <a:lvl7pPr>
+              <a:defRPr sz="1800"/>
+            </a:lvl7pPr>
+            <a:lvl8pPr>
+              <a:defRPr sz="1800"/>
+            </a:lvl8pPr>
+            <a:lvl9pPr>
+              <a:defRPr sz="1800"/>
+            </a:lvl9pPr>
+          </a:lstStyle>
+          <a:p>
+            <a:pPr>
+              <a:defRPr/>
+            </a:pPr>
+            <a:r>
+              <a:rPr lang="ru-RU"/>
+              <a:t>Декларативная система</a:t>
+            </a:r>
+            <a:endParaRPr/>
+          </a:p>
+        </p:txBody>
+      </p:sp>
+      <p:sp>
+        <p:nvSpPr>
+          <p:cNvPr id="1762573031" name=""/>
+          <p:cNvSpPr/>
+          <p:nvPr/>
+        </p:nvSpPr>
+        <p:spPr bwMode="auto">
+          <a:xfrm rot="0" flipH="0" flipV="0">
+            <a:off x="1584009" y="2740526"/>
+            <a:ext cx="1948821" cy="534736"/>
+          </a:xfrm>
+          <a:prstGeom prst="flowChartAlternateProcess">
+            <a:avLst/>
+          </a:prstGeom>
+        </p:spPr>
+        <p:style>
+          <a:lnRef idx="2">
+            <a:schemeClr val="accent1">
+              <a:shade val="50000"/>
+            </a:schemeClr>
+          </a:lnRef>
+          <a:fillRef idx="1">
+            <a:schemeClr val="accent1"/>
+          </a:fillRef>
+          <a:effectRef idx="0">
+            <a:schemeClr val="accent1"/>
+          </a:effectRef>
+          <a:fontRef idx="minor">
+            <a:schemeClr val="lt1"/>
+          </a:fontRef>
+        </p:style>
+        <p:txBody>
+          <a:bodyPr anchor="ctr"/>
+          <a:p>
+            <a:pPr algn="ctr">
+              <a:defRPr/>
+            </a:pPr>
+            <a:r>
+              <a:rPr lang="ru-RU"/>
+              <a:t>Исх. Состояние</a:t>
+            </a:r>
+            <a:endParaRPr/>
+          </a:p>
+        </p:txBody>
+      </p:sp>
+      <p:sp>
+        <p:nvSpPr>
+          <p:cNvPr id="544955250" name=""/>
+          <p:cNvSpPr/>
+          <p:nvPr/>
+        </p:nvSpPr>
+        <p:spPr bwMode="auto">
+          <a:xfrm rot="0" flipH="0" flipV="0">
+            <a:off x="1584009" y="5800557"/>
+            <a:ext cx="1948821" cy="534735"/>
+          </a:xfrm>
+          <a:prstGeom prst="flowChartAlternateProcess">
+            <a:avLst/>
+          </a:prstGeom>
+        </p:spPr>
+        <p:style>
+          <a:lnRef idx="2">
+            <a:schemeClr val="accent1">
+              <a:shade val="50000"/>
+            </a:schemeClr>
+          </a:lnRef>
+          <a:fillRef idx="1">
+            <a:schemeClr val="accent1"/>
+          </a:fillRef>
+          <a:effectRef idx="0">
+            <a:schemeClr val="accent1"/>
+          </a:effectRef>
+          <a:fontRef idx="minor">
+            <a:schemeClr val="lt1"/>
+          </a:fontRef>
+        </p:style>
+        <p:txBody>
+          <a:bodyPr anchor="ctr"/>
+          <a:p>
+            <a:pPr algn="ctr">
+              <a:defRPr/>
+            </a:pPr>
+            <a:r>
+              <a:rPr lang="ru-RU"/>
+              <a:t>Цел. Состояние</a:t>
+            </a:r>
+            <a:endParaRPr/>
+          </a:p>
+        </p:txBody>
+      </p:sp>
+      <p:sp>
+        <p:nvSpPr>
+          <p:cNvPr id="440842549" name=""/>
+          <p:cNvSpPr/>
+          <p:nvPr/>
+        </p:nvSpPr>
+        <p:spPr bwMode="auto">
+          <a:xfrm rot="0" flipH="0" flipV="0">
+            <a:off x="2363095" y="3342105"/>
+            <a:ext cx="350920" cy="2356184"/>
+          </a:xfrm>
+          <a:prstGeom prst="downArrow">
+            <a:avLst>
+              <a:gd name="adj1" fmla="val 50000"/>
+              <a:gd name="adj2" fmla="val 50000"/>
+            </a:avLst>
+          </a:prstGeom>
+        </p:spPr>
+        <p:style>
+          <a:lnRef idx="2">
+            <a:schemeClr val="accent1">
+              <a:shade val="50000"/>
+            </a:schemeClr>
+          </a:lnRef>
+          <a:fillRef idx="1">
+            <a:schemeClr val="accent1"/>
+          </a:fillRef>
+          <a:effectRef idx="0">
+            <a:schemeClr val="accent1"/>
+          </a:effectRef>
+          <a:fontRef idx="minor">
+            <a:schemeClr val="lt1"/>
+          </a:fontRef>
+        </p:style>
+      </p:sp>
+      <p:sp>
+        <p:nvSpPr>
+          <p:cNvPr id="820834581" name=""/>
+          <p:cNvSpPr/>
+          <p:nvPr/>
+        </p:nvSpPr>
+        <p:spPr bwMode="auto">
+          <a:xfrm rot="0" flipH="0" flipV="0">
+            <a:off x="2697305" y="3509210"/>
+            <a:ext cx="2155657" cy="384341"/>
+          </a:xfrm>
+          <a:prstGeom prst="rect">
+            <a:avLst/>
+          </a:prstGeom>
+        </p:spPr>
+        <p:style>
+          <a:lnRef idx="2">
+            <a:schemeClr val="accent1">
+              <a:shade val="50000"/>
+            </a:schemeClr>
+          </a:lnRef>
+          <a:fillRef idx="1">
+            <a:schemeClr val="accent1"/>
+          </a:fillRef>
+          <a:effectRef idx="0">
+            <a:schemeClr val="accent1"/>
+          </a:effectRef>
+          <a:fontRef idx="minor">
+            <a:schemeClr val="lt1"/>
+          </a:fontRef>
+        </p:style>
+        <p:txBody>
+          <a:bodyPr anchor="ctr"/>
+          <a:p>
+            <a:pPr algn="ctr">
+              <a:defRPr/>
+            </a:pPr>
+            <a:r>
+              <a:rPr lang="ru-RU"/>
+              <a:t>Команда</a:t>
+            </a:r>
+            <a:r>
+              <a:rPr lang="ru-RU"/>
+              <a:t> 1</a:t>
+            </a:r>
+            <a:endParaRPr/>
+          </a:p>
+        </p:txBody>
+      </p:sp>
+      <p:sp>
+        <p:nvSpPr>
+          <p:cNvPr id="684860971" name=""/>
+          <p:cNvSpPr/>
+          <p:nvPr/>
+        </p:nvSpPr>
+        <p:spPr bwMode="auto">
+          <a:xfrm rot="0" flipH="0" flipV="0">
+            <a:off x="2714016" y="4135855"/>
+            <a:ext cx="2155656" cy="384341"/>
+          </a:xfrm>
+          <a:prstGeom prst="rect">
+            <a:avLst/>
+          </a:prstGeom>
+        </p:spPr>
+        <p:style>
+          <a:lnRef idx="2">
+            <a:schemeClr val="accent1">
+              <a:shade val="50000"/>
+            </a:schemeClr>
+          </a:lnRef>
+          <a:fillRef idx="1">
+            <a:schemeClr val="accent1"/>
+          </a:fillRef>
+          <a:effectRef idx="0">
+            <a:schemeClr val="accent1"/>
+          </a:effectRef>
+          <a:fontRef idx="minor">
+            <a:schemeClr val="lt1"/>
+          </a:fontRef>
+        </p:style>
+        <p:txBody>
+          <a:bodyPr anchor="ctr"/>
+          <a:p>
+            <a:pPr algn="ctr">
+              <a:defRPr/>
+            </a:pPr>
+            <a:r>
+              <a:rPr lang="ru-RU"/>
+              <a:t>Команда </a:t>
+            </a:r>
+            <a:r>
+              <a:rPr lang="ru-RU"/>
+              <a:t>2</a:t>
+            </a:r>
+            <a:endParaRPr/>
+          </a:p>
+        </p:txBody>
+      </p:sp>
+      <p:sp>
+        <p:nvSpPr>
+          <p:cNvPr id="271065857" name=""/>
+          <p:cNvSpPr/>
+          <p:nvPr/>
+        </p:nvSpPr>
+        <p:spPr bwMode="auto">
+          <a:xfrm rot="0" flipH="0" flipV="0">
+            <a:off x="2714016" y="4714372"/>
+            <a:ext cx="2155656" cy="599573"/>
+          </a:xfrm>
+          <a:prstGeom prst="rect">
+            <a:avLst/>
+          </a:prstGeom>
+        </p:spPr>
+        <p:style>
+          <a:lnRef idx="2">
+            <a:schemeClr val="accent1">
+              <a:shade val="50000"/>
+            </a:schemeClr>
+          </a:lnRef>
+          <a:fillRef idx="1">
+            <a:schemeClr val="accent1"/>
+          </a:fillRef>
+          <a:effectRef idx="0">
+            <a:schemeClr val="accent1"/>
+          </a:effectRef>
+          <a:fontRef idx="minor">
+            <a:schemeClr val="lt1"/>
+          </a:fontRef>
+        </p:style>
+        <p:txBody>
+          <a:bodyPr anchor="ctr"/>
+          <a:p>
+            <a:pPr algn="ctr">
+              <a:defRPr/>
+            </a:pPr>
+            <a:r>
+              <a:rPr lang="ru-RU"/>
+              <a:t>Ручной запуск программ</a:t>
+            </a:r>
+            <a:endParaRPr/>
+          </a:p>
+        </p:txBody>
+      </p:sp>
+      <p:sp>
+        <p:nvSpPr>
+          <p:cNvPr id="768029606" name=""/>
+          <p:cNvSpPr/>
+          <p:nvPr/>
+        </p:nvSpPr>
+        <p:spPr bwMode="auto">
+          <a:xfrm rot="0" flipH="0" flipV="0">
+            <a:off x="7250882" y="2740526"/>
+            <a:ext cx="1948821" cy="534735"/>
+          </a:xfrm>
+          <a:prstGeom prst="flowChartAlternateProcess">
+            <a:avLst/>
+          </a:prstGeom>
+        </p:spPr>
+        <p:style>
+          <a:lnRef idx="2">
+            <a:schemeClr val="accent1">
+              <a:shade val="50000"/>
+            </a:schemeClr>
+          </a:lnRef>
+          <a:fillRef idx="1">
+            <a:schemeClr val="accent1"/>
+          </a:fillRef>
+          <a:effectRef idx="0">
+            <a:schemeClr val="accent1"/>
+          </a:effectRef>
+          <a:fontRef idx="minor">
+            <a:schemeClr val="lt1"/>
+          </a:fontRef>
+        </p:style>
+        <p:txBody>
+          <a:bodyPr anchor="ctr"/>
+          <a:p>
+            <a:pPr algn="ctr">
+              <a:defRPr/>
+            </a:pPr>
+            <a:r>
+              <a:rPr lang="ru-RU"/>
+              <a:t>Исх. Состояние</a:t>
+            </a:r>
+            <a:endParaRPr/>
+          </a:p>
+        </p:txBody>
+      </p:sp>
+      <p:sp>
+        <p:nvSpPr>
+          <p:cNvPr id="135775756" name=""/>
+          <p:cNvSpPr/>
+          <p:nvPr/>
+        </p:nvSpPr>
+        <p:spPr bwMode="auto">
+          <a:xfrm rot="0" flipH="0" flipV="0">
+            <a:off x="7250882" y="5800557"/>
+            <a:ext cx="1948821" cy="534735"/>
+          </a:xfrm>
+          <a:prstGeom prst="flowChartAlternateProcess">
+            <a:avLst/>
+          </a:prstGeom>
+        </p:spPr>
+        <p:style>
+          <a:lnRef idx="2">
+            <a:schemeClr val="accent1">
+              <a:shade val="50000"/>
+            </a:schemeClr>
+          </a:lnRef>
+          <a:fillRef idx="1">
+            <a:schemeClr val="accent1"/>
+          </a:fillRef>
+          <a:effectRef idx="0">
+            <a:schemeClr val="accent1"/>
+          </a:effectRef>
+          <a:fontRef idx="minor">
+            <a:schemeClr val="lt1"/>
+          </a:fontRef>
+        </p:style>
+        <p:txBody>
+          <a:bodyPr anchor="ctr"/>
+          <a:p>
+            <a:pPr algn="ctr">
+              <a:defRPr/>
+            </a:pPr>
+            <a:r>
+              <a:rPr lang="ru-RU"/>
+              <a:t>Цел. Состояние</a:t>
+            </a:r>
+            <a:endParaRPr/>
+          </a:p>
+        </p:txBody>
+      </p:sp>
+      <p:sp>
+        <p:nvSpPr>
+          <p:cNvPr id="1325362793" name=""/>
+          <p:cNvSpPr/>
+          <p:nvPr/>
+        </p:nvSpPr>
+        <p:spPr bwMode="auto">
+          <a:xfrm rot="0" flipH="0" flipV="0">
+            <a:off x="8029968" y="3342105"/>
+            <a:ext cx="350920" cy="2356183"/>
+          </a:xfrm>
+          <a:prstGeom prst="downArrow">
+            <a:avLst>
+              <a:gd name="adj1" fmla="val 50000"/>
+              <a:gd name="adj2" fmla="val 50000"/>
+            </a:avLst>
+          </a:prstGeom>
+        </p:spPr>
+        <p:style>
+          <a:lnRef idx="2">
+            <a:schemeClr val="accent1">
+              <a:shade val="50000"/>
+            </a:schemeClr>
+          </a:lnRef>
+          <a:fillRef idx="1">
+            <a:schemeClr val="accent1"/>
+          </a:fillRef>
+          <a:effectRef idx="0">
+            <a:schemeClr val="accent1"/>
+          </a:effectRef>
+          <a:fontRef idx="minor">
+            <a:schemeClr val="lt1"/>
+          </a:fontRef>
+        </p:style>
+      </p:sp>
+      <p:sp>
+        <p:nvSpPr>
+          <p:cNvPr id="1638247887" name=""/>
+          <p:cNvSpPr/>
+          <p:nvPr/>
+        </p:nvSpPr>
+        <p:spPr bwMode="auto">
+          <a:xfrm rot="0" flipH="0" flipV="0">
+            <a:off x="8364178" y="3509210"/>
+            <a:ext cx="2155656" cy="626644"/>
+          </a:xfrm>
+          <a:prstGeom prst="rect">
+            <a:avLst/>
+          </a:prstGeom>
+        </p:spPr>
+        <p:style>
+          <a:lnRef idx="2">
+            <a:schemeClr val="accent1">
+              <a:shade val="50000"/>
+            </a:schemeClr>
+          </a:lnRef>
+          <a:fillRef idx="1">
+            <a:schemeClr val="accent1"/>
+          </a:fillRef>
+          <a:effectRef idx="0">
+            <a:schemeClr val="accent1"/>
+          </a:effectRef>
+          <a:fontRef idx="minor">
+            <a:schemeClr val="lt1"/>
+          </a:fontRef>
+        </p:style>
+        <p:txBody>
+          <a:bodyPr anchor="ctr"/>
+          <a:p>
+            <a:pPr algn="ctr">
+              <a:defRPr/>
+            </a:pPr>
+            <a:r>
+              <a:rPr lang="ru-RU"/>
+              <a:t>Описание системы</a:t>
+            </a:r>
+            <a:endParaRPr/>
+          </a:p>
+        </p:txBody>
+      </p:sp>
+      <p:sp>
+        <p:nvSpPr>
+          <p:cNvPr id="1370434456" name=""/>
+          <p:cNvSpPr/>
+          <p:nvPr/>
+        </p:nvSpPr>
+        <p:spPr bwMode="auto">
+          <a:xfrm rot="0" flipH="0" flipV="0">
+            <a:off x="8380888" y="4714373"/>
+            <a:ext cx="2155656" cy="599573"/>
+          </a:xfrm>
+          <a:prstGeom prst="rect">
+            <a:avLst/>
+          </a:prstGeom>
+        </p:spPr>
+        <p:style>
+          <a:lnRef idx="2">
+            <a:schemeClr val="accent1">
+              <a:shade val="50000"/>
+            </a:schemeClr>
+          </a:lnRef>
+          <a:fillRef idx="1">
+            <a:schemeClr val="accent1"/>
+          </a:fillRef>
+          <a:effectRef idx="0">
+            <a:schemeClr val="accent1"/>
+          </a:effectRef>
+          <a:fontRef idx="minor">
+            <a:schemeClr val="lt1"/>
+          </a:fontRef>
+        </p:style>
+        <p:txBody>
+          <a:bodyPr anchor="ctr"/>
+          <a:p>
+            <a:pPr algn="ctr">
+              <a:defRPr/>
+            </a:pPr>
+            <a:r>
+              <a:rPr lang="ru-RU" sz="1800" b="0" i="0" u="none" strike="noStrike" cap="none" spc="0">
+                <a:solidFill>
+                  <a:schemeClr val="lt1"/>
+                </a:solidFill>
+                <a:latin typeface="+mn-lt"/>
+                <a:ea typeface="+mn-ea"/>
+                <a:cs typeface="+mn-cs"/>
+              </a:rPr>
+              <a:t>Применение конфигурации</a:t>
+            </a:r>
+            <a:endParaRPr sz="1800"/>
           </a:p>
         </p:txBody>
       </p:sp>
@@ -8011,7 +8652,7 @@
       </p:grpSpPr>
       <p:sp>
         <p:nvSpPr>
-          <p:cNvPr id="979588513" name="Title 1"/>
+          <p:cNvPr id="268936171" name="Title 1"/>
           <p:cNvSpPr>
             <a:spLocks noGrp="1"/>
           </p:cNvSpPr>
@@ -8030,51 +8671,668 @@
               <a:defRPr/>
             </a:pPr>
             <a:r>
-              <a:rPr/>
+              <a:rPr lang="en-US" sz="4400" b="0" i="0" u="none" strike="noStrike" cap="none" spc="0">
+                <a:solidFill>
+                  <a:schemeClr val="tx1">
+                    <a:lumMod val="65000"/>
+                    <a:lumOff val="35000"/>
+                  </a:schemeClr>
+                </a:solidFill>
+                <a:latin typeface="Arial"/>
+                <a:ea typeface="Arial"/>
+                <a:cs typeface="Arial"/>
+              </a:rPr>
               <a:t>IV. </a:t>
             </a:r>
             <a:r>
+              <a:rPr lang="ru-RU" sz="4400" b="0" i="0" u="none" strike="noStrike" cap="none" spc="0">
+                <a:solidFill>
+                  <a:schemeClr val="tx1">
+                    <a:lumMod val="65000"/>
+                    <a:lumOff val="35000"/>
+                  </a:schemeClr>
+                </a:solidFill>
+                <a:latin typeface="Arial"/>
+                <a:ea typeface="Arial"/>
+                <a:cs typeface="Arial"/>
+              </a:rPr>
+              <a:t>Основные принципы </a:t>
+            </a:r>
+            <a:r>
+              <a:rPr lang="en-US" sz="4400" b="0" i="0" u="none" strike="noStrike" cap="none" spc="0">
+                <a:solidFill>
+                  <a:schemeClr val="tx1">
+                    <a:lumMod val="65000"/>
+                    <a:lumOff val="35000"/>
+                  </a:schemeClr>
+                </a:solidFill>
+                <a:latin typeface="Arial"/>
+                <a:ea typeface="Arial"/>
+                <a:cs typeface="Arial"/>
+              </a:rPr>
+              <a:t>Clyx:</a:t>
+            </a:r>
+            <a:br>
+              <a:rPr lang="en-US" sz="4400" b="0" i="0" u="none" strike="noStrike" cap="none" spc="0">
+                <a:solidFill>
+                  <a:schemeClr val="tx1">
+                    <a:lumMod val="65000"/>
+                    <a:lumOff val="35000"/>
+                  </a:schemeClr>
+                </a:solidFill>
+                <a:latin typeface="Arial"/>
+                <a:ea typeface="Arial"/>
+                <a:cs typeface="Arial"/>
+              </a:rPr>
+            </a:br>
+            <a:r>
+              <a:rPr lang="ru-RU" sz="4400" b="0" i="0" u="none" strike="noStrike" cap="none" spc="0">
+                <a:solidFill>
+                  <a:schemeClr val="tx1">
+                    <a:lumMod val="65000"/>
+                    <a:lumOff val="35000"/>
+                  </a:schemeClr>
+                </a:solidFill>
+                <a:latin typeface="Arial"/>
+                <a:ea typeface="Arial"/>
+                <a:cs typeface="Arial"/>
+              </a:rPr>
+              <a:t>Декларативность</a:t>
+            </a:r>
+            <a:endParaRPr sz="4400"/>
+          </a:p>
+        </p:txBody>
+      </p:sp>
+      <p:sp>
+        <p:nvSpPr>
+          <p:cNvPr id="1998605005" name="Text Placeholder 2"/>
+          <p:cNvSpPr>
+            <a:spLocks noGrp="1"/>
+          </p:cNvSpPr>
+          <p:nvPr>
+            <p:ph type="body" idx="1"/>
+          </p:nvPr>
+        </p:nvSpPr>
+        <p:spPr bwMode="auto">
+          <a:xfrm>
+            <a:off x="609598" y="1535112"/>
+            <a:ext cx="5386916" cy="639761"/>
+          </a:xfrm>
+        </p:spPr>
+        <p:txBody>
+          <a:bodyPr vertOverflow="overflow" horzOverflow="overflow" vert="horz" wrap="square" lIns="91440" tIns="45720" rIns="91440" bIns="45720" numCol="1" spcCol="0" rtlCol="0" fromWordArt="0" anchor="b" anchorCtr="0" forceAA="0" upright="0" compatLnSpc="0">
+            <a:normAutofit/>
+          </a:bodyPr>
+          <a:lstStyle>
+            <a:lvl1pPr marL="0" indent="0">
+              <a:buNone/>
+              <a:defRPr sz="2400" b="1"/>
+            </a:lvl1pPr>
+            <a:lvl2pPr marL="457200" indent="0">
+              <a:buNone/>
+              <a:defRPr sz="2000" b="1"/>
+            </a:lvl2pPr>
+            <a:lvl3pPr marL="914400" indent="0">
+              <a:buNone/>
+              <a:defRPr sz="1800" b="1"/>
+            </a:lvl3pPr>
+            <a:lvl4pPr marL="1371600" indent="0">
+              <a:buNone/>
+              <a:defRPr sz="1600" b="1"/>
+            </a:lvl4pPr>
+            <a:lvl5pPr marL="1828800" indent="0">
+              <a:buNone/>
+              <a:defRPr sz="1600" b="1"/>
+            </a:lvl5pPr>
+            <a:lvl6pPr marL="2286000" indent="0">
+              <a:buNone/>
+              <a:defRPr sz="1600" b="1"/>
+            </a:lvl6pPr>
+            <a:lvl7pPr marL="2743200" indent="0">
+              <a:buNone/>
+              <a:defRPr sz="1600" b="1"/>
+            </a:lvl7pPr>
+            <a:lvl8pPr marL="3200400" indent="0">
+              <a:buNone/>
+              <a:defRPr sz="1600" b="1"/>
+            </a:lvl8pPr>
+            <a:lvl9pPr marL="3657600" indent="0">
+              <a:buNone/>
+              <a:defRPr sz="1600" b="1"/>
+            </a:lvl9pPr>
+          </a:lstStyle>
+          <a:p>
+            <a:pPr>
+              <a:defRPr/>
+            </a:pPr>
+            <a:r>
+              <a:rPr lang="ru-RU" sz="2200"/>
+              <a:t>Императивная система</a:t>
+            </a:r>
+            <a:r>
+              <a:rPr sz="2200"/>
+              <a:t> (archlinux)</a:t>
+            </a:r>
+            <a:endParaRPr sz="2200"/>
+          </a:p>
+        </p:txBody>
+      </p:sp>
+      <p:sp>
+        <p:nvSpPr>
+          <p:cNvPr id="1222796122" name="Content Placeholder 3"/>
+          <p:cNvSpPr>
+            <a:spLocks noGrp="1"/>
+          </p:cNvSpPr>
+          <p:nvPr>
+            <p:ph sz="half" idx="2"/>
+          </p:nvPr>
+        </p:nvSpPr>
+        <p:spPr bwMode="auto">
+          <a:xfrm>
+            <a:off x="609598" y="2174873"/>
+            <a:ext cx="5386916" cy="3951288"/>
+          </a:xfrm>
+        </p:spPr>
+        <p:txBody>
+          <a:bodyPr vertOverflow="overflow" horzOverflow="overflow" vert="horz" wrap="square" lIns="91440" tIns="45720" rIns="91440" bIns="45720" numCol="1" spcCol="0" rtlCol="0" fromWordArt="0" anchor="t" anchorCtr="0" forceAA="0" upright="0" compatLnSpc="0">
+            <a:normAutofit fontScale="95000" lnSpcReduction="1000"/>
+          </a:bodyPr>
+          <a:lstStyle>
+            <a:lvl1pPr>
+              <a:defRPr sz="2400"/>
+            </a:lvl1pPr>
+            <a:lvl2pPr>
+              <a:defRPr sz="2000"/>
+            </a:lvl2pPr>
+            <a:lvl3pPr>
+              <a:defRPr sz="1800"/>
+            </a:lvl3pPr>
+            <a:lvl4pPr>
+              <a:defRPr sz="1600"/>
+            </a:lvl4pPr>
+            <a:lvl5pPr>
+              <a:defRPr sz="1600"/>
+            </a:lvl5pPr>
+            <a:lvl6pPr>
+              <a:defRPr sz="1600"/>
+            </a:lvl6pPr>
+            <a:lvl7pPr>
+              <a:defRPr sz="1600"/>
+            </a:lvl7pPr>
+            <a:lvl8pPr>
+              <a:defRPr sz="1600"/>
+            </a:lvl8pPr>
+            <a:lvl9pPr>
+              <a:defRPr sz="1600"/>
+            </a:lvl9pPr>
+          </a:lstStyle>
+          <a:p>
+            <a:pPr>
+              <a:defRPr/>
+            </a:pPr>
+            <a:r>
+              <a:rPr lang="ru-RU" sz="2400" b="0" i="0" u="none" strike="noStrike" cap="none" spc="0">
+                <a:solidFill>
+                  <a:schemeClr val="tx1">
+                    <a:lumMod val="75000"/>
+                    <a:lumOff val="25000"/>
+                  </a:schemeClr>
+                </a:solidFill>
+                <a:latin typeface="Arial"/>
+                <a:ea typeface="Arial"/>
+                <a:cs typeface="Arial"/>
+              </a:rPr>
+              <a:t>Ввод комманд</a:t>
+            </a:r>
+            <a:r>
+              <a:rPr lang="en-US" sz="2400" b="0" i="0" u="none" strike="noStrike" cap="none" spc="0">
+                <a:solidFill>
+                  <a:schemeClr val="tx1">
+                    <a:lumMod val="75000"/>
+                    <a:lumOff val="25000"/>
+                  </a:schemeClr>
+                </a:solidFill>
+                <a:latin typeface="Arial"/>
+                <a:ea typeface="Arial"/>
+                <a:cs typeface="Arial"/>
+              </a:rPr>
+              <a:t>:</a:t>
+            </a:r>
+            <a:endParaRPr sz="2400"/>
+          </a:p>
+          <a:p>
+            <a:pPr marL="0" indent="0">
+              <a:buFont typeface="Arial"/>
+              <a:buNone/>
+              <a:defRPr/>
+            </a:pPr>
+            <a:r>
+              <a:rPr lang="en-US" sz="2400" b="0" i="0" u="none" strike="noStrike" cap="none" spc="0">
+                <a:solidFill>
+                  <a:schemeClr val="tx1">
+                    <a:lumMod val="75000"/>
+                    <a:lumOff val="25000"/>
+                  </a:schemeClr>
+                </a:solidFill>
+                <a:latin typeface="+mn-lt"/>
+                <a:ea typeface="+mn-ea"/>
+                <a:cs typeface="+mn-cs"/>
+              </a:rPr>
+              <a:t>sudo pacman –Syu</a:t>
+            </a:r>
+            <a:endParaRPr lang="en-US" sz="2400" b="0" i="0" u="none" strike="noStrike" cap="none" spc="0">
+              <a:solidFill>
+                <a:schemeClr val="tx1">
+                  <a:lumMod val="75000"/>
+                  <a:lumOff val="25000"/>
+                </a:schemeClr>
+              </a:solidFill>
+              <a:latin typeface="Times New Roman"/>
+              <a:cs typeface="Times New Roman"/>
+            </a:endParaRPr>
+          </a:p>
+          <a:p>
+            <a:pPr marL="0" indent="0">
+              <a:buFont typeface="Arial"/>
+              <a:buNone/>
+              <a:defRPr/>
+            </a:pPr>
+            <a:r>
+              <a:rPr lang="en-US" sz="2400" b="0" i="0" u="none" strike="noStrike" cap="none" spc="0">
+                <a:solidFill>
+                  <a:schemeClr val="tx1">
+                    <a:lumMod val="75000"/>
+                    <a:lumOff val="25000"/>
+                  </a:schemeClr>
+                </a:solidFill>
+                <a:latin typeface="+mn-lt"/>
+                <a:ea typeface="+mn-ea"/>
+                <a:cs typeface="+mn-cs"/>
+              </a:rPr>
+              <a:t>sudo pacman –S postgresql</a:t>
+            </a:r>
+            <a:endParaRPr lang="en-US" sz="2400" b="0" i="0" u="none" strike="noStrike" cap="none" spc="0">
+              <a:solidFill>
+                <a:schemeClr val="tx1">
+                  <a:lumMod val="75000"/>
+                  <a:lumOff val="25000"/>
+                </a:schemeClr>
+              </a:solidFill>
+              <a:latin typeface="Times New Roman"/>
+              <a:cs typeface="Times New Roman"/>
+            </a:endParaRPr>
+          </a:p>
+          <a:p>
+            <a:pPr marL="0" indent="0">
+              <a:buFont typeface="Arial"/>
+              <a:buNone/>
+              <a:defRPr/>
+            </a:pPr>
+            <a:r>
+              <a:rPr lang="en-US" sz="2400" b="0" i="0" u="none" strike="noStrike" cap="none" spc="0">
+                <a:solidFill>
+                  <a:schemeClr val="tx1">
+                    <a:lumMod val="75000"/>
+                    <a:lumOff val="25000"/>
+                  </a:schemeClr>
+                </a:solidFill>
+                <a:latin typeface="Arial"/>
+                <a:ea typeface="Arial"/>
+                <a:cs typeface="Arial"/>
+              </a:rPr>
+              <a:t>sudo -iu postgres</a:t>
+            </a:r>
+            <a:endParaRPr lang="en-US" sz="2400" b="0" i="0" u="none" strike="noStrike" cap="none" spc="0">
+              <a:solidFill>
+                <a:schemeClr val="tx1">
+                  <a:lumMod val="75000"/>
+                  <a:lumOff val="25000"/>
+                </a:schemeClr>
+              </a:solidFill>
+              <a:latin typeface="Times New Roman"/>
+              <a:cs typeface="Times New Roman"/>
+            </a:endParaRPr>
+          </a:p>
+          <a:p>
+            <a:pPr marL="0" indent="0">
+              <a:buFont typeface="Arial"/>
+              <a:buNone/>
+              <a:defRPr/>
+            </a:pPr>
+            <a:r>
+              <a:rPr lang="en-US" sz="2400" b="0" i="0" u="none" strike="noStrike" cap="none" spc="0">
+                <a:solidFill>
+                  <a:schemeClr val="tx1">
+                    <a:lumMod val="75000"/>
+                    <a:lumOff val="25000"/>
+                  </a:schemeClr>
+                </a:solidFill>
+                <a:latin typeface="Arial"/>
+                <a:ea typeface="Arial"/>
+                <a:cs typeface="Arial"/>
+              </a:rPr>
+              <a:t>initdb --locale $LANG -E UTF8 -D '/var/lib/postgres/data' --data-checksums</a:t>
+            </a:r>
+            <a:endParaRPr lang="en-US" sz="2400" b="0" i="0" u="none" strike="noStrike" cap="none" spc="0">
+              <a:solidFill>
+                <a:schemeClr val="tx1">
+                  <a:lumMod val="75000"/>
+                  <a:lumOff val="25000"/>
+                </a:schemeClr>
+              </a:solidFill>
+              <a:latin typeface="Times New Roman"/>
+              <a:cs typeface="Times New Roman"/>
+            </a:endParaRPr>
+          </a:p>
+          <a:p>
+            <a:pPr marL="0" indent="0">
+              <a:buFont typeface="Arial"/>
+              <a:buNone/>
+              <a:defRPr/>
+            </a:pPr>
+            <a:r>
+              <a:rPr lang="en-US" sz="2400" b="0" i="0" u="none" strike="noStrike" cap="none" spc="0">
+                <a:solidFill>
+                  <a:schemeClr val="tx1">
+                    <a:lumMod val="75000"/>
+                    <a:lumOff val="25000"/>
+                  </a:schemeClr>
+                </a:solidFill>
+                <a:latin typeface="Arial"/>
+                <a:ea typeface="Arial"/>
+                <a:cs typeface="Arial"/>
+              </a:rPr>
+              <a:t>exit</a:t>
+            </a:r>
+            <a:endParaRPr lang="en-US" sz="2400" b="0" i="0" u="none" strike="noStrike" cap="none" spc="0">
+              <a:solidFill>
+                <a:schemeClr val="tx1">
+                  <a:lumMod val="75000"/>
+                  <a:lumOff val="25000"/>
+                </a:schemeClr>
+              </a:solidFill>
+              <a:latin typeface="Times New Roman"/>
+              <a:cs typeface="Times New Roman"/>
+            </a:endParaRPr>
+          </a:p>
+          <a:p>
+            <a:pPr marL="0" indent="0">
+              <a:buFont typeface="Arial"/>
+              <a:buNone/>
+              <a:defRPr/>
+            </a:pPr>
+            <a:r>
+              <a:rPr lang="en-US" sz="2400" b="0" i="0" u="none" strike="noStrike" cap="none" spc="0">
+                <a:solidFill>
+                  <a:schemeClr val="tx1">
+                    <a:lumMod val="75000"/>
+                    <a:lumOff val="25000"/>
+                  </a:schemeClr>
+                </a:solidFill>
+                <a:latin typeface="Arial"/>
+                <a:ea typeface="Arial"/>
+                <a:cs typeface="Arial"/>
+              </a:rPr>
+              <a:t>sudo systemctl enable postgresql</a:t>
+            </a:r>
+            <a:endParaRPr lang="en-US" sz="2400" b="0" i="0" u="none" strike="noStrike" cap="none" spc="0">
+              <a:solidFill>
+                <a:schemeClr val="tx1">
+                  <a:lumMod val="75000"/>
+                  <a:lumOff val="25000"/>
+                </a:schemeClr>
+              </a:solidFill>
+              <a:latin typeface="Arial"/>
+              <a:cs typeface="Arial"/>
+            </a:endParaRPr>
+          </a:p>
+          <a:p>
+            <a:pPr marL="0" indent="0">
+              <a:buFont typeface="Arial"/>
+              <a:buNone/>
+              <a:defRPr/>
+            </a:pPr>
+            <a:r>
+              <a:rPr lang="en-US" sz="2400" b="0" i="0" u="none" strike="noStrike" cap="none" spc="0">
+                <a:solidFill>
+                  <a:schemeClr val="tx1">
+                    <a:lumMod val="75000"/>
+                    <a:lumOff val="25000"/>
+                  </a:schemeClr>
+                </a:solidFill>
+                <a:latin typeface="Arial"/>
+                <a:ea typeface="Arial"/>
+                <a:cs typeface="Arial"/>
+              </a:rPr>
+              <a:t>sudo systemctl start postgresql</a:t>
+            </a:r>
+            <a:endParaRPr sz="2400"/>
+          </a:p>
+          <a:p>
+            <a:pPr>
+              <a:defRPr/>
+            </a:pPr>
+            <a:endParaRPr/>
+          </a:p>
+        </p:txBody>
+      </p:sp>
+      <p:sp>
+        <p:nvSpPr>
+          <p:cNvPr id="757928006" name="Text Placeholder 4"/>
+          <p:cNvSpPr>
+            <a:spLocks noGrp="1"/>
+          </p:cNvSpPr>
+          <p:nvPr>
+            <p:ph type="body" sz="quarter" idx="3"/>
+          </p:nvPr>
+        </p:nvSpPr>
+        <p:spPr bwMode="auto">
+          <a:xfrm>
+            <a:off x="6193369" y="1535112"/>
+            <a:ext cx="5389032" cy="639761"/>
+          </a:xfrm>
+        </p:spPr>
+        <p:txBody>
+          <a:bodyPr/>
+          <a:lstStyle>
+            <a:lvl1pPr marL="0" indent="0">
+              <a:buNone/>
+              <a:defRPr sz="2400" b="1"/>
+            </a:lvl1pPr>
+            <a:lvl2pPr marL="457200" indent="0">
+              <a:buNone/>
+              <a:defRPr sz="2000" b="1"/>
+            </a:lvl2pPr>
+            <a:lvl3pPr marL="914400" indent="0">
+              <a:buNone/>
+              <a:defRPr sz="1800" b="1"/>
+            </a:lvl3pPr>
+            <a:lvl4pPr marL="1371600" indent="0">
+              <a:buNone/>
+              <a:defRPr sz="1600" b="1"/>
+            </a:lvl4pPr>
+            <a:lvl5pPr marL="1828800" indent="0">
+              <a:buNone/>
+              <a:defRPr sz="1600" b="1"/>
+            </a:lvl5pPr>
+            <a:lvl6pPr marL="2286000" indent="0">
+              <a:buNone/>
+              <a:defRPr sz="1600" b="1"/>
+            </a:lvl6pPr>
+            <a:lvl7pPr marL="2743200" indent="0">
+              <a:buNone/>
+              <a:defRPr sz="1600" b="1"/>
+            </a:lvl7pPr>
+            <a:lvl8pPr marL="3200400" indent="0">
+              <a:buNone/>
+              <a:defRPr sz="1600" b="1"/>
+            </a:lvl8pPr>
+            <a:lvl9pPr marL="3657600" indent="0">
+              <a:buNone/>
+              <a:defRPr sz="1600" b="1"/>
+            </a:lvl9pPr>
+          </a:lstStyle>
+          <a:p>
+            <a:pPr>
+              <a:defRPr/>
+            </a:pPr>
+            <a:r>
+              <a:rPr lang="ru-RU" sz="2200"/>
+              <a:t>Декларативная система</a:t>
+            </a:r>
+            <a:endParaRPr sz="2200"/>
+          </a:p>
+        </p:txBody>
+      </p:sp>
+      <p:sp>
+        <p:nvSpPr>
+          <p:cNvPr id="1592760514" name="Content Placeholder 5"/>
+          <p:cNvSpPr>
+            <a:spLocks noGrp="1"/>
+          </p:cNvSpPr>
+          <p:nvPr>
+            <p:ph sz="quarter" idx="4"/>
+          </p:nvPr>
+        </p:nvSpPr>
+        <p:spPr bwMode="auto">
+          <a:xfrm>
+            <a:off x="6193369" y="2174873"/>
+            <a:ext cx="5389032" cy="3951288"/>
+          </a:xfrm>
+        </p:spPr>
+        <p:txBody>
+          <a:bodyPr/>
+          <a:lstStyle>
+            <a:lvl1pPr>
+              <a:defRPr sz="2400"/>
+            </a:lvl1pPr>
+            <a:lvl2pPr>
+              <a:defRPr sz="2000"/>
+            </a:lvl2pPr>
+            <a:lvl3pPr>
+              <a:defRPr sz="1800"/>
+            </a:lvl3pPr>
+            <a:lvl4pPr>
+              <a:defRPr sz="1600"/>
+            </a:lvl4pPr>
+            <a:lvl5pPr>
+              <a:defRPr sz="1600"/>
+            </a:lvl5pPr>
+            <a:lvl6pPr>
+              <a:defRPr sz="1600"/>
+            </a:lvl6pPr>
+            <a:lvl7pPr>
+              <a:defRPr sz="1600"/>
+            </a:lvl7pPr>
+            <a:lvl8pPr>
+              <a:defRPr sz="1600"/>
+            </a:lvl8pPr>
+            <a:lvl9pPr>
+              <a:defRPr sz="1600"/>
+            </a:lvl9pPr>
+          </a:lstStyle>
+          <a:p>
+            <a:pPr>
+              <a:defRPr/>
+            </a:pPr>
+            <a:r>
               <a:rPr lang="ru-RU"/>
-              <a:t>Отличие идей </a:t>
+              <a:t>Написание конфигурации</a:t>
             </a:r>
             <a:r>
               <a:rPr lang="en-US"/>
-              <a:t>Clyx </a:t>
-            </a:r>
+              <a:t>:</a:t>
+            </a:r>
+            <a:endParaRPr lang="en-US"/>
+          </a:p>
+          <a:p>
+            <a:pPr marL="0" indent="0">
+              <a:buFont typeface="Arial"/>
+              <a:buNone/>
+              <a:defRPr/>
+            </a:pPr>
+            <a:r>
+              <a:rPr/>
+              <a:t>{</a:t>
+            </a:r>
+            <a:endParaRPr/>
+          </a:p>
+          <a:p>
+            <a:pPr marL="0" indent="0">
+              <a:buFont typeface="Arial"/>
+              <a:buNone/>
+              <a:defRPr/>
+            </a:pPr>
+            <a:r>
+              <a:rPr/>
+              <a:t>    services.postgresql.enable = true;</a:t>
+            </a:r>
+            <a:endParaRPr/>
+          </a:p>
+          <a:p>
+            <a:pPr marL="0" indent="0">
+              <a:buFont typeface="Arial"/>
+              <a:buNone/>
+              <a:defRPr/>
+            </a:pPr>
+            <a:r>
+              <a:rPr/>
+              <a:t>}</a:t>
+            </a:r>
+            <a:endParaRPr/>
+          </a:p>
+          <a:p>
+            <a:pPr>
+              <a:defRPr/>
+            </a:pPr>
             <a:r>
               <a:rPr lang="ru-RU"/>
-              <a:t>от </a:t>
+              <a:t>Применение конфигурации</a:t>
+            </a:r>
+            <a:endParaRPr/>
+          </a:p>
+        </p:txBody>
+      </p:sp>
+      <p:sp>
+        <p:nvSpPr>
+          <p:cNvPr id="755599042" name=""/>
+          <p:cNvSpPr txBox="1"/>
+          <p:nvPr/>
+        </p:nvSpPr>
+        <p:spPr bwMode="auto">
+          <a:xfrm rot="0" flipH="0" flipV="0">
+            <a:off x="619999" y="1002631"/>
+            <a:ext cx="3692155" cy="640440"/>
+          </a:xfrm>
+          <a:prstGeom prst="rect">
+            <a:avLst/>
+          </a:prstGeom>
+          <a:noFill/>
+        </p:spPr>
+        <p:txBody>
+          <a:bodyPr vertOverflow="overflow" horzOverflow="overflow" vert="horz" wrap="square" lIns="91440" tIns="45720" rIns="91440" bIns="45720" numCol="1" spcCol="0" rtlCol="0" fromWordArt="0" anchor="t" anchorCtr="0" forceAA="0" upright="0" compatLnSpc="0">
+            <a:spAutoFit/>
+          </a:bodyPr>
+          <a:p>
+            <a:pPr>
+              <a:defRPr/>
+            </a:pPr>
+            <a:r>
+              <a:rPr lang="ru-RU"/>
+              <a:t>Пример</a:t>
             </a:r>
             <a:r>
               <a:rPr lang="en-US"/>
-              <a:t>NixOS</a:t>
+              <a:t>: </a:t>
             </a:r>
             <a:r>
               <a:rPr lang="ru-RU"/>
-              <a:t>, решение проблем</a:t>
-            </a:r>
-            <a:endParaRPr/>
-          </a:p>
-        </p:txBody>
-      </p:sp>
-      <p:sp>
-        <p:nvSpPr>
-          <p:cNvPr id="801279413" name="Content Placeholder 2"/>
-          <p:cNvSpPr>
-            <a:spLocks noGrp="1"/>
-          </p:cNvSpPr>
-          <p:nvPr>
-            <p:ph idx="1"/>
-          </p:nvPr>
-        </p:nvSpPr>
-        <p:spPr bwMode="auto"/>
-        <p:txBody>
-          <a:bodyPr/>
-          <a:lstStyle/>
-          <a:p>
-            <a:pPr>
-              <a:defRPr/>
-            </a:pPr>
+              <a:t>установка базы данных </a:t>
+            </a:r>
+            <a:r>
+              <a:rPr lang="en-US"/>
+              <a:t>postgresql</a:t>
+            </a:r>
             <a:endParaRPr/>
           </a:p>
         </p:txBody>
@@ -8114,7 +9372,7 @@
       </p:grpSpPr>
       <p:sp>
         <p:nvSpPr>
-          <p:cNvPr id="487698773" name="Title 1"/>
+          <p:cNvPr id="373090818" name="Title 1"/>
           <p:cNvSpPr>
             <a:spLocks noGrp="1"/>
           </p:cNvSpPr>
@@ -8124,7 +9382,9 @@
         </p:nvSpPr>
         <p:spPr bwMode="auto"/>
         <p:txBody>
-          <a:bodyPr/>
+          <a:bodyPr vertOverflow="overflow" horzOverflow="overflow" vert="horz" wrap="square" lIns="91440" tIns="45720" rIns="91440" bIns="45720" numCol="1" spcCol="0" rtlCol="0" fromWordArt="0" anchor="ctr" anchorCtr="0" forceAA="0" upright="0" compatLnSpc="0">
+            <a:normAutofit fontScale="90000" lnSpcReduction="2000"/>
+          </a:bodyPr>
           <a:lstStyle/>
           <a:p>
             <a:pPr>
@@ -8132,39 +9392,727 @@
             </a:pPr>
             <a:r>
               <a:rPr/>
-              <a:t>V.I. </a:t>
+              <a:t>IV. </a:t>
             </a:r>
             <a:r>
               <a:rPr lang="ru-RU"/>
-              <a:t>Итог – почему </a:t>
+              <a:t>Основные принципы </a:t>
             </a:r>
             <a:r>
               <a:rPr lang="en-US"/>
-              <a:t>Clyx</a:t>
-            </a:r>
-            <a:endParaRPr/>
-          </a:p>
-        </p:txBody>
-      </p:sp>
-      <p:sp>
-        <p:nvSpPr>
-          <p:cNvPr id="1633199837" name="Content Placeholder 2"/>
-          <p:cNvSpPr>
-            <a:spLocks noGrp="1"/>
-          </p:cNvSpPr>
-          <p:nvPr>
-            <p:ph idx="1"/>
-          </p:nvPr>
-        </p:nvSpPr>
-        <p:spPr bwMode="auto"/>
-        <p:txBody>
-          <a:bodyPr/>
-          <a:lstStyle/>
-          <a:p>
-            <a:pPr>
-              <a:defRPr/>
-            </a:pPr>
-            <a:endParaRPr/>
+              <a:t>Clyx:</a:t>
+            </a:r>
+            <a:br>
+              <a:rPr lang="en-US"/>
+            </a:br>
+            <a:r>
+              <a:rPr lang="ru-RU"/>
+              <a:t>Изоляция</a:t>
+            </a:r>
+            <a:endParaRPr/>
+          </a:p>
+        </p:txBody>
+      </p:sp>
+      <p:sp>
+        <p:nvSpPr>
+          <p:cNvPr id="480612414" name="Content Placeholder 2"/>
+          <p:cNvSpPr>
+            <a:spLocks noGrp="1"/>
+          </p:cNvSpPr>
+          <p:nvPr>
+            <p:ph sz="half" idx="1"/>
+          </p:nvPr>
+        </p:nvSpPr>
+        <p:spPr bwMode="auto">
+          <a:xfrm flipH="0" flipV="0">
+            <a:off x="349009" y="1600200"/>
+            <a:ext cx="4225707" cy="4861601"/>
+          </a:xfrm>
+        </p:spPr>
+        <p:txBody>
+          <a:bodyPr vertOverflow="overflow" horzOverflow="overflow" vert="horz" wrap="square" lIns="91440" tIns="45720" rIns="91440" bIns="45720" numCol="1" spcCol="0" rtlCol="0" fromWordArt="0" anchor="t" anchorCtr="0" forceAA="0" upright="0" compatLnSpc="0">
+            <a:normAutofit/>
+          </a:bodyPr>
+          <a:lstStyle>
+            <a:lvl1pPr>
+              <a:defRPr sz="2800"/>
+            </a:lvl1pPr>
+            <a:lvl2pPr>
+              <a:defRPr sz="2400"/>
+            </a:lvl2pPr>
+            <a:lvl3pPr>
+              <a:defRPr sz="2000"/>
+            </a:lvl3pPr>
+            <a:lvl4pPr>
+              <a:defRPr sz="1800"/>
+            </a:lvl4pPr>
+            <a:lvl5pPr>
+              <a:defRPr sz="1800"/>
+            </a:lvl5pPr>
+            <a:lvl6pPr>
+              <a:defRPr sz="1800"/>
+            </a:lvl6pPr>
+            <a:lvl7pPr>
+              <a:defRPr sz="1800"/>
+            </a:lvl7pPr>
+            <a:lvl8pPr>
+              <a:defRPr sz="1800"/>
+            </a:lvl8pPr>
+            <a:lvl9pPr>
+              <a:defRPr sz="1800"/>
+            </a:lvl9pPr>
+          </a:lstStyle>
+          <a:p>
+            <a:pPr>
+              <a:defRPr/>
+            </a:pPr>
+            <a:r>
+              <a:rPr lang="ru-RU" sz="1800" b="1"/>
+              <a:t>Изоляция – </a:t>
+            </a:r>
+            <a:r>
+              <a:rPr lang="ru-RU" sz="1800" b="0"/>
+              <a:t>программы и их </a:t>
+            </a:r>
+            <a:r>
+              <a:rPr lang="en-US" sz="1800" b="0"/>
+              <a:t>runtime-</a:t>
+            </a:r>
+            <a:r>
+              <a:rPr lang="ru-RU" sz="1800" b="0"/>
+              <a:t>зависимости изолированны друг от друга, что </a:t>
+            </a:r>
+            <a:r>
+              <a:rPr lang="ru-RU" sz="1800" b="1"/>
+              <a:t>избавляет от конфликтов</a:t>
+            </a:r>
+            <a:r>
+              <a:rPr lang="ru-RU" sz="1800" b="0"/>
+              <a:t> зависимостей и позволяет хранить </a:t>
+            </a:r>
+            <a:r>
+              <a:rPr lang="ru-RU" sz="1800" b="1"/>
+              <a:t>несколько версий</a:t>
+            </a:r>
+            <a:r>
+              <a:rPr lang="ru-RU" sz="1800" b="0"/>
+              <a:t> одной программы</a:t>
+            </a:r>
+            <a:r>
+              <a:rPr lang="ru-RU" sz="1800" b="0"/>
+              <a:t>.</a:t>
+            </a:r>
+            <a:endParaRPr sz="1800" b="0"/>
+          </a:p>
+          <a:p>
+            <a:pPr>
+              <a:defRPr/>
+            </a:pPr>
+            <a:r>
+              <a:rPr lang="ru-RU" sz="1800" b="0"/>
+              <a:t>Таким образом, согласно примеру, программе 1 доступна только зависимость 1 и общая зависимость, программе 2 только общая зависимость</a:t>
+            </a:r>
+            <a:r>
+              <a:rPr lang="ru-RU" sz="1800" b="0"/>
+              <a:t> и зависимость 2, а программе 3 только программа 2 и зависимость 3, </a:t>
+            </a:r>
+            <a:r>
+              <a:rPr lang="ru-RU" sz="1800" b="1"/>
+              <a:t>ей не доступны даже зависимости своей зависимости</a:t>
+            </a:r>
+            <a:r>
+              <a:rPr lang="ru-RU" sz="1800" b="0"/>
+              <a:t>.</a:t>
+            </a:r>
+            <a:endParaRPr sz="1800" b="0"/>
+          </a:p>
+        </p:txBody>
+      </p:sp>
+      <p:pic>
+        <p:nvPicPr>
+          <p:cNvPr id="1794423306" name=""/>
+          <p:cNvPicPr>
+            <a:picLocks noChangeAspect="1"/>
+          </p:cNvPicPr>
+          <p:nvPr/>
+        </p:nvPicPr>
+        <p:blipFill rotWithShape="1">
+          <a:blip r:embed="rId3"/>
+          <a:stretch/>
+        </p:blipFill>
+        <p:spPr bwMode="auto">
+          <a:xfrm flipH="0" flipV="0">
+            <a:off x="5349275" y="2243662"/>
+            <a:ext cx="1324513" cy="1324513"/>
+          </a:xfrm>
+          <a:prstGeom prst="rect">
+            <a:avLst/>
+          </a:prstGeom>
+        </p:spPr>
+      </p:pic>
+      <p:pic>
+        <p:nvPicPr>
+          <p:cNvPr id="1490823128" name=""/>
+          <p:cNvPicPr>
+            <a:picLocks noChangeAspect="1"/>
+          </p:cNvPicPr>
+          <p:nvPr/>
+        </p:nvPicPr>
+        <p:blipFill rotWithShape="1">
+          <a:blip r:embed="rId3"/>
+          <a:stretch/>
+        </p:blipFill>
+        <p:spPr bwMode="auto">
+          <a:xfrm flipH="0" flipV="0">
+            <a:off x="8993596" y="1581405"/>
+            <a:ext cx="1324513" cy="1324513"/>
+          </a:xfrm>
+          <a:prstGeom prst="rect">
+            <a:avLst/>
+          </a:prstGeom>
+        </p:spPr>
+      </p:pic>
+      <p:pic>
+        <p:nvPicPr>
+          <p:cNvPr id="634091415" name=""/>
+          <p:cNvPicPr>
+            <a:picLocks noChangeAspect="1"/>
+          </p:cNvPicPr>
+          <p:nvPr/>
+        </p:nvPicPr>
+        <p:blipFill rotWithShape="1">
+          <a:blip r:embed="rId3"/>
+          <a:stretch/>
+        </p:blipFill>
+        <p:spPr bwMode="auto">
+          <a:xfrm flipH="0" flipV="0">
+            <a:off x="8161486" y="3213774"/>
+            <a:ext cx="1324513" cy="1324513"/>
+          </a:xfrm>
+          <a:prstGeom prst="rect">
+            <a:avLst/>
+          </a:prstGeom>
+        </p:spPr>
+      </p:pic>
+      <p:pic>
+        <p:nvPicPr>
+          <p:cNvPr id="1546400738" name=""/>
+          <p:cNvPicPr>
+            <a:picLocks noChangeAspect="1"/>
+          </p:cNvPicPr>
+          <p:nvPr/>
+        </p:nvPicPr>
+        <p:blipFill rotWithShape="1">
+          <a:blip r:embed="rId4"/>
+          <a:stretch/>
+        </p:blipFill>
+        <p:spPr bwMode="auto">
+          <a:xfrm flipH="0" flipV="0">
+            <a:off x="5491880" y="4928902"/>
+            <a:ext cx="1039302" cy="1039302"/>
+          </a:xfrm>
+          <a:prstGeom prst="rect">
+            <a:avLst/>
+          </a:prstGeom>
+        </p:spPr>
+      </p:pic>
+      <p:pic>
+        <p:nvPicPr>
+          <p:cNvPr id="1428412397" name=""/>
+          <p:cNvPicPr>
+            <a:picLocks noChangeAspect="1"/>
+          </p:cNvPicPr>
+          <p:nvPr/>
+        </p:nvPicPr>
+        <p:blipFill rotWithShape="1">
+          <a:blip r:embed="rId4"/>
+          <a:stretch/>
+        </p:blipFill>
+        <p:spPr bwMode="auto">
+          <a:xfrm flipH="0" flipV="0">
+            <a:off x="7369563" y="4928902"/>
+            <a:ext cx="1039302" cy="1039302"/>
+          </a:xfrm>
+          <a:prstGeom prst="rect">
+            <a:avLst/>
+          </a:prstGeom>
+        </p:spPr>
+      </p:pic>
+      <p:pic>
+        <p:nvPicPr>
+          <p:cNvPr id="366122495" name=""/>
+          <p:cNvPicPr>
+            <a:picLocks noChangeAspect="1"/>
+          </p:cNvPicPr>
+          <p:nvPr/>
+        </p:nvPicPr>
+        <p:blipFill rotWithShape="1">
+          <a:blip r:embed="rId4"/>
+          <a:stretch/>
+        </p:blipFill>
+        <p:spPr bwMode="auto">
+          <a:xfrm flipH="0" flipV="0">
+            <a:off x="9939516" y="3343530"/>
+            <a:ext cx="1039302" cy="1039302"/>
+          </a:xfrm>
+          <a:prstGeom prst="rect">
+            <a:avLst/>
+          </a:prstGeom>
+        </p:spPr>
+      </p:pic>
+      <p:pic>
+        <p:nvPicPr>
+          <p:cNvPr id="1721025918" name=""/>
+          <p:cNvPicPr>
+            <a:picLocks noChangeAspect="1"/>
+          </p:cNvPicPr>
+          <p:nvPr/>
+        </p:nvPicPr>
+        <p:blipFill rotWithShape="1">
+          <a:blip r:embed="rId4"/>
+          <a:stretch/>
+        </p:blipFill>
+        <p:spPr bwMode="auto">
+          <a:xfrm flipH="0" flipV="0">
+            <a:off x="9419865" y="4928902"/>
+            <a:ext cx="1039302" cy="1039302"/>
+          </a:xfrm>
+          <a:prstGeom prst="rect">
+            <a:avLst/>
+          </a:prstGeom>
+        </p:spPr>
+      </p:pic>
+      <p:sp>
+        <p:nvSpPr>
+          <p:cNvPr id="872254584" name=""/>
+          <p:cNvSpPr/>
+          <p:nvPr/>
+        </p:nvSpPr>
+        <p:spPr bwMode="auto">
+          <a:xfrm rot="0" flipH="0" flipV="0">
+            <a:off x="5886650" y="3568176"/>
+            <a:ext cx="221072" cy="1248238"/>
+          </a:xfrm>
+          <a:prstGeom prst="downArrow">
+            <a:avLst>
+              <a:gd name="adj1" fmla="val 50000"/>
+              <a:gd name="adj2" fmla="val 50000"/>
+            </a:avLst>
+          </a:prstGeom>
+        </p:spPr>
+        <p:style>
+          <a:lnRef idx="2">
+            <a:schemeClr val="accent1">
+              <a:shade val="50000"/>
+            </a:schemeClr>
+          </a:lnRef>
+          <a:fillRef idx="1">
+            <a:schemeClr val="accent1"/>
+          </a:fillRef>
+          <a:effectRef idx="0">
+            <a:schemeClr val="accent1"/>
+          </a:effectRef>
+          <a:fontRef idx="minor">
+            <a:schemeClr val="lt1"/>
+          </a:fontRef>
+        </p:style>
+      </p:sp>
+      <p:sp>
+        <p:nvSpPr>
+          <p:cNvPr id="1895867170" name=""/>
+          <p:cNvSpPr/>
+          <p:nvPr/>
+        </p:nvSpPr>
+        <p:spPr bwMode="auto">
+          <a:xfrm rot="19646653" flipH="0" flipV="0">
+            <a:off x="6945309" y="3302236"/>
+            <a:ext cx="221071" cy="1766253"/>
+          </a:xfrm>
+          <a:prstGeom prst="downArrow">
+            <a:avLst>
+              <a:gd name="adj1" fmla="val 50000"/>
+              <a:gd name="adj2" fmla="val 50000"/>
+            </a:avLst>
+          </a:prstGeom>
+        </p:spPr>
+        <p:style>
+          <a:lnRef idx="2">
+            <a:schemeClr val="accent1">
+              <a:shade val="50000"/>
+            </a:schemeClr>
+          </a:lnRef>
+          <a:fillRef idx="1">
+            <a:schemeClr val="accent1"/>
+          </a:fillRef>
+          <a:effectRef idx="0">
+            <a:schemeClr val="accent1"/>
+          </a:effectRef>
+          <a:fontRef idx="minor">
+            <a:schemeClr val="lt1"/>
+          </a:fontRef>
+        </p:style>
+      </p:sp>
+      <p:sp>
+        <p:nvSpPr>
+          <p:cNvPr id="1458754399" name=""/>
+          <p:cNvSpPr/>
+          <p:nvPr/>
+        </p:nvSpPr>
+        <p:spPr bwMode="auto">
+          <a:xfrm rot="1991830" flipH="0" flipV="0">
+            <a:off x="8233308" y="4278173"/>
+            <a:ext cx="221071" cy="726965"/>
+          </a:xfrm>
+          <a:prstGeom prst="downArrow">
+            <a:avLst>
+              <a:gd name="adj1" fmla="val 50000"/>
+              <a:gd name="adj2" fmla="val 50000"/>
+            </a:avLst>
+          </a:prstGeom>
+        </p:spPr>
+        <p:style>
+          <a:lnRef idx="2">
+            <a:schemeClr val="accent1">
+              <a:shade val="50000"/>
+            </a:schemeClr>
+          </a:lnRef>
+          <a:fillRef idx="1">
+            <a:schemeClr val="accent1"/>
+          </a:fillRef>
+          <a:effectRef idx="0">
+            <a:schemeClr val="accent1"/>
+          </a:effectRef>
+          <a:fontRef idx="minor">
+            <a:schemeClr val="lt1"/>
+          </a:fontRef>
+        </p:style>
+      </p:sp>
+      <p:sp>
+        <p:nvSpPr>
+          <p:cNvPr id="1848152832" name=""/>
+          <p:cNvSpPr/>
+          <p:nvPr/>
+        </p:nvSpPr>
+        <p:spPr bwMode="auto">
+          <a:xfrm rot="1991830" flipH="0" flipV="0">
+            <a:off x="9080862" y="2634971"/>
+            <a:ext cx="221070" cy="726964"/>
+          </a:xfrm>
+          <a:prstGeom prst="downArrow">
+            <a:avLst>
+              <a:gd name="adj1" fmla="val 50000"/>
+              <a:gd name="adj2" fmla="val 50000"/>
+            </a:avLst>
+          </a:prstGeom>
+        </p:spPr>
+        <p:style>
+          <a:lnRef idx="2">
+            <a:schemeClr val="accent1">
+              <a:shade val="50000"/>
+            </a:schemeClr>
+          </a:lnRef>
+          <a:fillRef idx="1">
+            <a:schemeClr val="accent1"/>
+          </a:fillRef>
+          <a:effectRef idx="0">
+            <a:schemeClr val="accent1"/>
+          </a:effectRef>
+          <a:fontRef idx="minor">
+            <a:schemeClr val="lt1"/>
+          </a:fontRef>
+        </p:style>
+      </p:sp>
+      <p:sp>
+        <p:nvSpPr>
+          <p:cNvPr id="119669503" name=""/>
+          <p:cNvSpPr/>
+          <p:nvPr/>
+        </p:nvSpPr>
+        <p:spPr bwMode="auto">
+          <a:xfrm rot="19444720" flipH="0" flipV="0">
+            <a:off x="9311113" y="4277253"/>
+            <a:ext cx="221070" cy="726964"/>
+          </a:xfrm>
+          <a:prstGeom prst="downArrow">
+            <a:avLst>
+              <a:gd name="adj1" fmla="val 50000"/>
+              <a:gd name="adj2" fmla="val 50000"/>
+            </a:avLst>
+          </a:prstGeom>
+        </p:spPr>
+        <p:style>
+          <a:lnRef idx="2">
+            <a:schemeClr val="accent1">
+              <a:shade val="50000"/>
+            </a:schemeClr>
+          </a:lnRef>
+          <a:fillRef idx="1">
+            <a:schemeClr val="accent1"/>
+          </a:fillRef>
+          <a:effectRef idx="0">
+            <a:schemeClr val="accent1"/>
+          </a:effectRef>
+          <a:fontRef idx="minor">
+            <a:schemeClr val="lt1"/>
+          </a:fontRef>
+        </p:style>
+      </p:sp>
+      <p:sp>
+        <p:nvSpPr>
+          <p:cNvPr id="1976855533" name=""/>
+          <p:cNvSpPr/>
+          <p:nvPr/>
+        </p:nvSpPr>
+        <p:spPr bwMode="auto">
+          <a:xfrm rot="19444720" flipH="0" flipV="0">
+            <a:off x="9952711" y="2658831"/>
+            <a:ext cx="221070" cy="726964"/>
+          </a:xfrm>
+          <a:prstGeom prst="downArrow">
+            <a:avLst>
+              <a:gd name="adj1" fmla="val 50000"/>
+              <a:gd name="adj2" fmla="val 50000"/>
+            </a:avLst>
+          </a:prstGeom>
+        </p:spPr>
+        <p:style>
+          <a:lnRef idx="2">
+            <a:schemeClr val="accent1">
+              <a:shade val="50000"/>
+            </a:schemeClr>
+          </a:lnRef>
+          <a:fillRef idx="1">
+            <a:schemeClr val="accent1"/>
+          </a:fillRef>
+          <a:effectRef idx="0">
+            <a:schemeClr val="accent1"/>
+          </a:effectRef>
+          <a:fontRef idx="minor">
+            <a:schemeClr val="lt1"/>
+          </a:fontRef>
+        </p:style>
+      </p:sp>
+      <p:sp>
+        <p:nvSpPr>
+          <p:cNvPr id="1622537195" name=""/>
+          <p:cNvSpPr txBox="1"/>
+          <p:nvPr/>
+        </p:nvSpPr>
+        <p:spPr bwMode="auto">
+          <a:xfrm rot="0" flipH="0" flipV="0">
+            <a:off x="5293584" y="1967900"/>
+            <a:ext cx="1540900" cy="335639"/>
+          </a:xfrm>
+          <a:prstGeom prst="rect">
+            <a:avLst/>
+          </a:prstGeom>
+          <a:noFill/>
+        </p:spPr>
+        <p:txBody>
+          <a:bodyPr vertOverflow="overflow" horzOverflow="overflow" vert="horz" wrap="square" lIns="91440" tIns="45720" rIns="91440" bIns="45720" numCol="1" spcCol="0" rtlCol="0" fromWordArt="0" anchor="t" anchorCtr="0" forceAA="0" upright="0" compatLnSpc="0">
+            <a:spAutoFit/>
+          </a:bodyPr>
+          <a:p>
+            <a:pPr>
+              <a:defRPr/>
+            </a:pPr>
+            <a:r>
+              <a:rPr lang="ru-RU" sz="1600"/>
+              <a:t>Программа 1</a:t>
+            </a:r>
+            <a:endParaRPr sz="1600"/>
+          </a:p>
+        </p:txBody>
+      </p:sp>
+      <p:sp>
+        <p:nvSpPr>
+          <p:cNvPr id="298196130" name=""/>
+          <p:cNvSpPr txBox="1"/>
+          <p:nvPr/>
+        </p:nvSpPr>
+        <p:spPr bwMode="auto">
+          <a:xfrm rot="0" flipH="0" flipV="0">
+            <a:off x="8885223" y="1347516"/>
+            <a:ext cx="1541979" cy="335639"/>
+          </a:xfrm>
+          <a:prstGeom prst="rect">
+            <a:avLst/>
+          </a:prstGeom>
+          <a:noFill/>
+        </p:spPr>
+        <p:txBody>
+          <a:bodyPr vertOverflow="overflow" horzOverflow="overflow" vert="horz" wrap="square" lIns="91440" tIns="45720" rIns="91440" bIns="45720" numCol="1" spcCol="0" rtlCol="0" fromWordArt="0" anchor="t" anchorCtr="0" forceAA="0" upright="0" compatLnSpc="0">
+            <a:spAutoFit/>
+          </a:bodyPr>
+          <a:p>
+            <a:pPr>
+              <a:defRPr/>
+            </a:pPr>
+            <a:r>
+              <a:rPr lang="ru-RU" sz="1600"/>
+              <a:t>Программа 3</a:t>
+            </a:r>
+            <a:endParaRPr sz="1600"/>
+          </a:p>
+        </p:txBody>
+      </p:sp>
+      <p:sp>
+        <p:nvSpPr>
+          <p:cNvPr id="1585682071" name=""/>
+          <p:cNvSpPr txBox="1"/>
+          <p:nvPr/>
+        </p:nvSpPr>
+        <p:spPr bwMode="auto">
+          <a:xfrm rot="0" flipH="0" flipV="0">
+            <a:off x="7369563" y="3093359"/>
+            <a:ext cx="1541979" cy="335639"/>
+          </a:xfrm>
+          <a:prstGeom prst="rect">
+            <a:avLst/>
+          </a:prstGeom>
+          <a:noFill/>
+        </p:spPr>
+        <p:txBody>
+          <a:bodyPr vertOverflow="overflow" horzOverflow="overflow" vert="horz" wrap="square" lIns="91440" tIns="45720" rIns="91440" bIns="45720" numCol="1" spcCol="0" rtlCol="0" fromWordArt="0" anchor="t" anchorCtr="0" forceAA="0" upright="0" compatLnSpc="0">
+            <a:spAutoFit/>
+          </a:bodyPr>
+          <a:p>
+            <a:pPr>
+              <a:defRPr/>
+            </a:pPr>
+            <a:r>
+              <a:rPr lang="ru-RU" sz="1600"/>
+              <a:t>Программа 2</a:t>
+            </a:r>
+            <a:endParaRPr sz="1600"/>
+          </a:p>
+        </p:txBody>
+      </p:sp>
+      <p:sp>
+        <p:nvSpPr>
+          <p:cNvPr id="452337246" name=""/>
+          <p:cNvSpPr txBox="1"/>
+          <p:nvPr/>
+        </p:nvSpPr>
+        <p:spPr bwMode="auto">
+          <a:xfrm rot="0" flipH="0" flipV="0">
+            <a:off x="7118045" y="6126162"/>
+            <a:ext cx="1548458" cy="579479"/>
+          </a:xfrm>
+          <a:prstGeom prst="rect">
+            <a:avLst/>
+          </a:prstGeom>
+          <a:noFill/>
+        </p:spPr>
+        <p:txBody>
+          <a:bodyPr vertOverflow="overflow" horzOverflow="overflow" vert="horz" wrap="square" lIns="91440" tIns="45720" rIns="91440" bIns="45720" numCol="1" spcCol="0" rtlCol="0" fromWordArt="0" anchor="t" anchorCtr="0" forceAA="0" upright="0" compatLnSpc="0">
+            <a:spAutoFit/>
+          </a:bodyPr>
+          <a:p>
+            <a:pPr>
+              <a:defRPr/>
+            </a:pPr>
+            <a:r>
+              <a:rPr lang="ru-RU" sz="1600"/>
+              <a:t>Общая зависимость</a:t>
+            </a:r>
+            <a:endParaRPr sz="1600"/>
+          </a:p>
+        </p:txBody>
+      </p:sp>
+      <p:sp>
+        <p:nvSpPr>
+          <p:cNvPr id="1517471332" name=""/>
+          <p:cNvSpPr txBox="1"/>
+          <p:nvPr/>
+        </p:nvSpPr>
+        <p:spPr bwMode="auto">
+          <a:xfrm rot="0" flipH="0" flipV="0">
+            <a:off x="5213239" y="6126162"/>
+            <a:ext cx="1701591" cy="335639"/>
+          </a:xfrm>
+          <a:prstGeom prst="rect">
+            <a:avLst/>
+          </a:prstGeom>
+          <a:noFill/>
+        </p:spPr>
+        <p:txBody>
+          <a:bodyPr vertOverflow="overflow" horzOverflow="overflow" vert="horz" wrap="square" lIns="91440" tIns="45720" rIns="91440" bIns="45720" numCol="1" spcCol="0" rtlCol="0" fromWordArt="0" anchor="t" anchorCtr="0" forceAA="0" upright="0" compatLnSpc="0">
+            <a:spAutoFit/>
+          </a:bodyPr>
+          <a:p>
+            <a:pPr>
+              <a:defRPr/>
+            </a:pPr>
+            <a:r>
+              <a:rPr lang="ru-RU" sz="1600"/>
+              <a:t>Зависимость 1</a:t>
+            </a:r>
+            <a:endParaRPr sz="1600"/>
+          </a:p>
+        </p:txBody>
+      </p:sp>
+      <p:sp>
+        <p:nvSpPr>
+          <p:cNvPr id="849567124" name=""/>
+          <p:cNvSpPr txBox="1"/>
+          <p:nvPr/>
+        </p:nvSpPr>
+        <p:spPr bwMode="auto">
+          <a:xfrm rot="0" flipH="0" flipV="0">
+            <a:off x="9084877" y="6080262"/>
+            <a:ext cx="1702670" cy="335639"/>
+          </a:xfrm>
+          <a:prstGeom prst="rect">
+            <a:avLst/>
+          </a:prstGeom>
+          <a:noFill/>
+        </p:spPr>
+        <p:txBody>
+          <a:bodyPr vertOverflow="overflow" horzOverflow="overflow" vert="horz" wrap="square" lIns="91440" tIns="45720" rIns="91440" bIns="45720" numCol="1" spcCol="0" rtlCol="0" fromWordArt="0" anchor="t" anchorCtr="0" forceAA="0" upright="0" compatLnSpc="0">
+            <a:spAutoFit/>
+          </a:bodyPr>
+          <a:p>
+            <a:pPr>
+              <a:defRPr/>
+            </a:pPr>
+            <a:r>
+              <a:rPr lang="ru-RU" sz="1600"/>
+              <a:t>Зависимость 2</a:t>
+            </a:r>
+            <a:endParaRPr sz="1600"/>
+          </a:p>
+        </p:txBody>
+      </p:sp>
+      <p:sp>
+        <p:nvSpPr>
+          <p:cNvPr id="997311792" name=""/>
+          <p:cNvSpPr txBox="1"/>
+          <p:nvPr/>
+        </p:nvSpPr>
+        <p:spPr bwMode="auto">
+          <a:xfrm rot="0" flipH="0" flipV="0">
+            <a:off x="10186977" y="4411227"/>
+            <a:ext cx="1702310" cy="335639"/>
+          </a:xfrm>
+          <a:prstGeom prst="rect">
+            <a:avLst/>
+          </a:prstGeom>
+          <a:noFill/>
+        </p:spPr>
+        <p:txBody>
+          <a:bodyPr vertOverflow="overflow" horzOverflow="overflow" vert="horz" wrap="square" lIns="91440" tIns="45720" rIns="91440" bIns="45720" numCol="1" spcCol="0" rtlCol="0" fromWordArt="0" anchor="t" anchorCtr="0" forceAA="0" upright="0" compatLnSpc="0">
+            <a:spAutoFit/>
+          </a:bodyPr>
+          <a:p>
+            <a:pPr>
+              <a:defRPr/>
+            </a:pPr>
+            <a:r>
+              <a:rPr lang="ru-RU" sz="1600"/>
+              <a:t>Зависимость 3</a:t>
+            </a:r>
+            <a:endParaRPr sz="1600"/>
           </a:p>
         </p:txBody>
       </p:sp>

--- a/ClyxOS.pptx
+++ b/ClyxOS.pptx
@@ -5,7 +5,7 @@
     <p:sldMasterId id="2147483648" r:id="rId1"/>
   </p:sldMasterIdLst>
   <p:notesMasterIdLst>
-    <p:notesMasterId r:id="rId18"/>
+    <p:notesMasterId r:id="rId19"/>
   </p:notesMasterIdLst>
   <p:sldIdLst>
     <p:sldId id="256" r:id="rId4"/>
@@ -22,6 +22,7 @@
     <p:sldId id="267" r:id="rId15"/>
     <p:sldId id="268" r:id="rId16"/>
     <p:sldId id="269" r:id="rId17"/>
+    <p:sldId id="270" r:id="rId18"/>
   </p:sldIdLst>
   <p:sldSz cx="12192000" cy="6858000"/>
   <p:notesSz cx="6858000" cy="9144000"/>
@@ -147,7 +148,7 @@
       </p:grpSpPr>
       <p:sp>
         <p:nvSpPr>
-          <p:cNvPr id="179566383" name="Header Placeholder 1"/>
+          <p:cNvPr id="1326673946" name="Header Placeholder 1"/>
           <p:cNvSpPr>
             <a:spLocks noGrp="1"/>
           </p:cNvSpPr>
@@ -181,7 +182,7 @@
       </p:sp>
       <p:sp>
         <p:nvSpPr>
-          <p:cNvPr id="1493158772" name="Date Placeholder 2"/>
+          <p:cNvPr id="1628344649" name="Date Placeholder 2"/>
           <p:cNvSpPr>
             <a:spLocks noGrp="1"/>
           </p:cNvSpPr>
@@ -219,7 +220,7 @@
       </p:sp>
       <p:sp>
         <p:nvSpPr>
-          <p:cNvPr id="2093172003" name="Slide Image Placeholder 3"/>
+          <p:cNvPr id="1956943790" name="Slide Image Placeholder 3"/>
           <p:cNvSpPr>
             <a:spLocks noChangeAspect="1" noGrp="1" noRot="1"/>
           </p:cNvSpPr>
@@ -255,7 +256,7 @@
       </p:sp>
       <p:sp>
         <p:nvSpPr>
-          <p:cNvPr id="848478479" name="Notes Placeholder 4"/>
+          <p:cNvPr id="34208786" name="Notes Placeholder 4"/>
           <p:cNvSpPr>
             <a:spLocks noGrp="1"/>
           </p:cNvSpPr>
@@ -329,7 +330,7 @@
       </p:sp>
       <p:sp>
         <p:nvSpPr>
-          <p:cNvPr id="1606114938" name="Footer Placeholder 5"/>
+          <p:cNvPr id="1335527852" name="Footer Placeholder 5"/>
           <p:cNvSpPr>
             <a:spLocks noGrp="1"/>
           </p:cNvSpPr>
@@ -363,7 +364,7 @@
       </p:sp>
       <p:sp>
         <p:nvSpPr>
-          <p:cNvPr id="951011738" name="Slide Number Placeholder 6"/>
+          <p:cNvPr id="350822390" name="Slide Number Placeholder 6"/>
           <p:cNvSpPr>
             <a:spLocks noGrp="1"/>
           </p:cNvSpPr>
@@ -516,7 +517,7 @@
       </p:grpSpPr>
       <p:sp>
         <p:nvSpPr>
-          <p:cNvPr id="1867454917" name="Slide Image Placeholder 1"/>
+          <p:cNvPr id="306741434" name="Slide Image Placeholder 1"/>
           <p:cNvSpPr>
             <a:spLocks noChangeAspect="1" noGrp="1" noRot="1"/>
           </p:cNvSpPr>
@@ -533,7 +534,7 @@
       </p:sp>
       <p:sp>
         <p:nvSpPr>
-          <p:cNvPr id="571134079" name="Notes Placeholder 2"/>
+          <p:cNvPr id="1317301916" name="Notes Placeholder 2"/>
           <p:cNvSpPr>
             <a:spLocks noGrp="1"/>
           </p:cNvSpPr>
@@ -558,7 +559,7 @@
       </p:sp>
       <p:sp>
         <p:nvSpPr>
-          <p:cNvPr id="880860638" name="Slide Number Placeholder 3"/>
+          <p:cNvPr id="381254240" name="Slide Number Placeholder 3"/>
           <p:cNvSpPr>
             <a:spLocks noGrp="1"/>
           </p:cNvSpPr>
@@ -609,7 +610,7 @@
       </p:grpSpPr>
       <p:sp>
         <p:nvSpPr>
-          <p:cNvPr id="130217301" name="Slide Image Placeholder 1"/>
+          <p:cNvPr id="2" name="Slide Image Placeholder 1"/>
           <p:cNvSpPr>
             <a:spLocks noChangeAspect="1" noGrp="1" noRot="1"/>
           </p:cNvSpPr>
@@ -621,7 +622,7 @@
       </p:sp>
       <p:sp>
         <p:nvSpPr>
-          <p:cNvPr id="1282302534" name="Notes Placeholder 2"/>
+          <p:cNvPr id="3" name="Notes Placeholder 2"/>
           <p:cNvSpPr>
             <a:spLocks noGrp="1"/>
           </p:cNvSpPr>
@@ -643,7 +644,7 @@
       </p:sp>
       <p:sp>
         <p:nvSpPr>
-          <p:cNvPr id="1049079469" name="Slide Number Placeholder 3"/>
+          <p:cNvPr id="4" name="Slide Number Placeholder 3"/>
           <p:cNvSpPr>
             <a:spLocks noGrp="1"/>
           </p:cNvSpPr>
@@ -659,7 +660,7 @@
             <a:pPr>
               <a:defRPr/>
             </a:pPr>
-            <a:fld id="{4F705752-0C38-0F49-9A2C-27E409111FE8}" type="slidenum">
+            <a:fld id="{0021164B-3F42-0662-5992-358023444589}" type="slidenum">
               <a:rPr/>
               <a:t/>
             </a:fld>
@@ -694,7 +695,7 @@
       </p:grpSpPr>
       <p:sp>
         <p:nvSpPr>
-          <p:cNvPr id="695493767" name="Slide Image Placeholder 1"/>
+          <p:cNvPr id="872070516" name="Slide Image Placeholder 1"/>
           <p:cNvSpPr>
             <a:spLocks noChangeAspect="1" noGrp="1" noRot="1"/>
           </p:cNvSpPr>
@@ -706,7 +707,7 @@
       </p:sp>
       <p:sp>
         <p:nvSpPr>
-          <p:cNvPr id="42054625" name="Notes Placeholder 2"/>
+          <p:cNvPr id="1748730464" name="Notes Placeholder 2"/>
           <p:cNvSpPr>
             <a:spLocks noGrp="1"/>
           </p:cNvSpPr>
@@ -728,7 +729,7 @@
       </p:sp>
       <p:sp>
         <p:nvSpPr>
-          <p:cNvPr id="1360083474" name="Slide Number Placeholder 3"/>
+          <p:cNvPr id="759286482" name="Slide Number Placeholder 3"/>
           <p:cNvSpPr>
             <a:spLocks noGrp="1"/>
           </p:cNvSpPr>
@@ -744,7 +745,7 @@
             <a:pPr>
               <a:defRPr/>
             </a:pPr>
-            <a:fld id="{ABEF7C7D-E779-4B40-2F65-832F04C6C48A}" type="slidenum">
+            <a:fld id="{4F705752-0C38-0F49-9A2C-27E409111FE8}" type="slidenum">
               <a:rPr/>
               <a:t/>
             </a:fld>
@@ -779,7 +780,7 @@
       </p:grpSpPr>
       <p:sp>
         <p:nvSpPr>
-          <p:cNvPr id="1068138442" name="Slide Image Placeholder 1"/>
+          <p:cNvPr id="1423732207" name="Slide Image Placeholder 1"/>
           <p:cNvSpPr>
             <a:spLocks noChangeAspect="1" noGrp="1" noRot="1"/>
           </p:cNvSpPr>
@@ -791,7 +792,7 @@
       </p:sp>
       <p:sp>
         <p:nvSpPr>
-          <p:cNvPr id="1820075222" name="Notes Placeholder 2"/>
+          <p:cNvPr id="43814237" name="Notes Placeholder 2"/>
           <p:cNvSpPr>
             <a:spLocks noGrp="1"/>
           </p:cNvSpPr>
@@ -813,7 +814,7 @@
       </p:sp>
       <p:sp>
         <p:nvSpPr>
-          <p:cNvPr id="192971186" name="Slide Number Placeholder 3"/>
+          <p:cNvPr id="495632392" name="Slide Number Placeholder 3"/>
           <p:cNvSpPr>
             <a:spLocks noGrp="1"/>
           </p:cNvSpPr>
@@ -829,7 +830,7 @@
             <a:pPr>
               <a:defRPr/>
             </a:pPr>
-            <a:fld id="{114E3E1B-8D5A-2057-61F1-83FF16082702}" type="slidenum">
+            <a:fld id="{ABEF7C7D-E779-4B40-2F65-832F04C6C48A}" type="slidenum">
               <a:rPr/>
               <a:t/>
             </a:fld>
@@ -864,7 +865,7 @@
       </p:grpSpPr>
       <p:sp>
         <p:nvSpPr>
-          <p:cNvPr id="1751665923" name="Slide Image Placeholder 1"/>
+          <p:cNvPr id="1428762439" name="Slide Image Placeholder 1"/>
           <p:cNvSpPr>
             <a:spLocks noChangeAspect="1" noGrp="1" noRot="1"/>
           </p:cNvSpPr>
@@ -876,7 +877,7 @@
       </p:sp>
       <p:sp>
         <p:nvSpPr>
-          <p:cNvPr id="740602293" name="Notes Placeholder 2"/>
+          <p:cNvPr id="822157995" name="Notes Placeholder 2"/>
           <p:cNvSpPr>
             <a:spLocks noGrp="1"/>
           </p:cNvSpPr>
@@ -898,7 +899,7 @@
       </p:sp>
       <p:sp>
         <p:nvSpPr>
-          <p:cNvPr id="1548942265" name="Slide Number Placeholder 3"/>
+          <p:cNvPr id="542152712" name="Slide Number Placeholder 3"/>
           <p:cNvSpPr>
             <a:spLocks noGrp="1"/>
           </p:cNvSpPr>
@@ -914,7 +915,7 @@
             <a:pPr>
               <a:defRPr/>
             </a:pPr>
-            <a:fld id="{471BBC87-CBAF-E622-B935-3DD98305F33D}" type="slidenum">
+            <a:fld id="{114E3E1B-8D5A-2057-61F1-83FF16082702}" type="slidenum">
               <a:rPr/>
               <a:t/>
             </a:fld>
@@ -949,7 +950,7 @@
       </p:grpSpPr>
       <p:sp>
         <p:nvSpPr>
-          <p:cNvPr id="119725126" name="Slide Image Placeholder 1"/>
+          <p:cNvPr id="948177189" name="Slide Image Placeholder 1"/>
           <p:cNvSpPr>
             <a:spLocks noChangeAspect="1" noGrp="1" noRot="1"/>
           </p:cNvSpPr>
@@ -961,7 +962,7 @@
       </p:sp>
       <p:sp>
         <p:nvSpPr>
-          <p:cNvPr id="393818185" name="Notes Placeholder 2"/>
+          <p:cNvPr id="1630575667" name="Notes Placeholder 2"/>
           <p:cNvSpPr>
             <a:spLocks noGrp="1"/>
           </p:cNvSpPr>
@@ -983,7 +984,92 @@
       </p:sp>
       <p:sp>
         <p:nvSpPr>
-          <p:cNvPr id="1816261577" name="Slide Number Placeholder 3"/>
+          <p:cNvPr id="1068903473" name="Slide Number Placeholder 3"/>
+          <p:cNvSpPr>
+            <a:spLocks noGrp="1"/>
+          </p:cNvSpPr>
+          <p:nvPr>
+            <p:ph type="sldNum" sz="quarter" idx="10"/>
+          </p:nvPr>
+        </p:nvSpPr>
+        <p:spPr bwMode="auto"/>
+        <p:txBody>
+          <a:bodyPr/>
+          <a:lstStyle/>
+          <a:p>
+            <a:pPr>
+              <a:defRPr/>
+            </a:pPr>
+            <a:fld id="{471BBC87-CBAF-E622-B935-3DD98305F33D}" type="slidenum">
+              <a:rPr/>
+              <a:t/>
+            </a:fld>
+            <a:endParaRPr/>
+          </a:p>
+        </p:txBody>
+      </p:sp>
+    </p:spTree>
+  </p:cSld>
+  <p:clrMapOvr>
+    <a:masterClrMapping/>
+  </p:clrMapOvr>
+</p:notes>
+</file>
+
+<file path=ppt/notesSlides/notesSlide15.xml><?xml version="1.0" encoding="utf-8"?>
+<p:notes xmlns:a="http://schemas.openxmlformats.org/drawingml/2006/main" xmlns:r="http://schemas.openxmlformats.org/officeDocument/2006/relationships" xmlns:p="http://schemas.openxmlformats.org/presentationml/2006/main" xmlns:m="http://schemas.openxmlformats.org/officeDocument/2006/math" xmlns:w="http://schemas.openxmlformats.org/wordprocessingml/2006/main">
+  <p:cSld name="">
+    <p:spTree>
+      <p:nvGrpSpPr>
+        <p:cNvPr id="1" name=""/>
+        <p:cNvGrpSpPr/>
+        <p:nvPr/>
+      </p:nvGrpSpPr>
+      <p:grpSpPr bwMode="auto">
+        <a:xfrm>
+          <a:off x="0" y="0"/>
+          <a:ext cx="0" cy="0"/>
+          <a:chOff x="0" y="0"/>
+          <a:chExt cx="0" cy="0"/>
+        </a:xfrm>
+      </p:grpSpPr>
+      <p:sp>
+        <p:nvSpPr>
+          <p:cNvPr id="909084264" name="Slide Image Placeholder 1"/>
+          <p:cNvSpPr>
+            <a:spLocks noChangeAspect="1" noGrp="1" noRot="1"/>
+          </p:cNvSpPr>
+          <p:nvPr>
+            <p:ph type="sldImg"/>
+          </p:nvPr>
+        </p:nvSpPr>
+        <p:spPr bwMode="auto"/>
+      </p:sp>
+      <p:sp>
+        <p:nvSpPr>
+          <p:cNvPr id="1313902216" name="Notes Placeholder 2"/>
+          <p:cNvSpPr>
+            <a:spLocks noGrp="1"/>
+          </p:cNvSpPr>
+          <p:nvPr>
+            <p:ph type="body" idx="1"/>
+          </p:nvPr>
+        </p:nvSpPr>
+        <p:spPr bwMode="auto"/>
+        <p:txBody>
+          <a:bodyPr/>
+          <a:lstStyle/>
+          <a:p>
+            <a:pPr>
+              <a:defRPr/>
+            </a:pPr>
+            <a:endParaRPr/>
+          </a:p>
+        </p:txBody>
+      </p:sp>
+      <p:sp>
+        <p:nvSpPr>
+          <p:cNvPr id="883430565" name="Slide Number Placeholder 3"/>
           <p:cNvSpPr>
             <a:spLocks noGrp="1"/>
           </p:cNvSpPr>
@@ -1034,7 +1120,7 @@
       </p:grpSpPr>
       <p:sp>
         <p:nvSpPr>
-          <p:cNvPr id="2141185993" name="Slide Image Placeholder 1"/>
+          <p:cNvPr id="1366471271" name="Slide Image Placeholder 1"/>
           <p:cNvSpPr>
             <a:spLocks noChangeAspect="1" noGrp="1" noRot="1"/>
           </p:cNvSpPr>
@@ -1046,7 +1132,7 @@
       </p:sp>
       <p:sp>
         <p:nvSpPr>
-          <p:cNvPr id="540395916" name="Notes Placeholder 2"/>
+          <p:cNvPr id="2002028046" name="Notes Placeholder 2"/>
           <p:cNvSpPr>
             <a:spLocks noGrp="1"/>
           </p:cNvSpPr>
@@ -1068,7 +1154,7 @@
       </p:sp>
       <p:sp>
         <p:nvSpPr>
-          <p:cNvPr id="1541994517" name="Slide Number Placeholder 3"/>
+          <p:cNvPr id="1108237370" name="Slide Number Placeholder 3"/>
           <p:cNvSpPr>
             <a:spLocks noGrp="1"/>
           </p:cNvSpPr>
@@ -1119,7 +1205,7 @@
       </p:grpSpPr>
       <p:sp>
         <p:nvSpPr>
-          <p:cNvPr id="269019108" name="Slide Image Placeholder 1"/>
+          <p:cNvPr id="2038632126" name="Slide Image Placeholder 1"/>
           <p:cNvSpPr>
             <a:spLocks noChangeAspect="1" noGrp="1" noRot="1"/>
           </p:cNvSpPr>
@@ -1131,7 +1217,7 @@
       </p:sp>
       <p:sp>
         <p:nvSpPr>
-          <p:cNvPr id="968849585" name="Notes Placeholder 2"/>
+          <p:cNvPr id="1727010009" name="Notes Placeholder 2"/>
           <p:cNvSpPr>
             <a:spLocks noGrp="1"/>
           </p:cNvSpPr>
@@ -1153,7 +1239,7 @@
       </p:sp>
       <p:sp>
         <p:nvSpPr>
-          <p:cNvPr id="602583449" name="Slide Number Placeholder 3"/>
+          <p:cNvPr id="2045528304" name="Slide Number Placeholder 3"/>
           <p:cNvSpPr>
             <a:spLocks noGrp="1"/>
           </p:cNvSpPr>
@@ -1204,7 +1290,7 @@
       </p:grpSpPr>
       <p:sp>
         <p:nvSpPr>
-          <p:cNvPr id="141182581" name="Slide Image Placeholder 1"/>
+          <p:cNvPr id="1107571973" name="Slide Image Placeholder 1"/>
           <p:cNvSpPr>
             <a:spLocks noChangeAspect="1" noGrp="1" noRot="1"/>
           </p:cNvSpPr>
@@ -1216,7 +1302,7 @@
       </p:sp>
       <p:sp>
         <p:nvSpPr>
-          <p:cNvPr id="1979021411" name="Notes Placeholder 2"/>
+          <p:cNvPr id="1782058198" name="Notes Placeholder 2"/>
           <p:cNvSpPr>
             <a:spLocks noGrp="1"/>
           </p:cNvSpPr>
@@ -1238,7 +1324,7 @@
       </p:sp>
       <p:sp>
         <p:nvSpPr>
-          <p:cNvPr id="301261418" name="Slide Number Placeholder 3"/>
+          <p:cNvPr id="917393413" name="Slide Number Placeholder 3"/>
           <p:cNvSpPr>
             <a:spLocks noGrp="1"/>
           </p:cNvSpPr>
@@ -1289,7 +1375,7 @@
       </p:grpSpPr>
       <p:sp>
         <p:nvSpPr>
-          <p:cNvPr id="2" name="Slide Image Placeholder 1"/>
+          <p:cNvPr id="1795388725" name="Slide Image Placeholder 1"/>
           <p:cNvSpPr>
             <a:spLocks noChangeAspect="1" noGrp="1" noRot="1"/>
           </p:cNvSpPr>
@@ -1301,7 +1387,7 @@
       </p:sp>
       <p:sp>
         <p:nvSpPr>
-          <p:cNvPr id="3" name="Notes Placeholder 2"/>
+          <p:cNvPr id="1903889919" name="Notes Placeholder 2"/>
           <p:cNvSpPr>
             <a:spLocks noGrp="1"/>
           </p:cNvSpPr>
@@ -1323,7 +1409,7 @@
       </p:sp>
       <p:sp>
         <p:nvSpPr>
-          <p:cNvPr id="4" name="Slide Number Placeholder 3"/>
+          <p:cNvPr id="1526455358" name="Slide Number Placeholder 3"/>
           <p:cNvSpPr>
             <a:spLocks noGrp="1"/>
           </p:cNvSpPr>
@@ -1374,7 +1460,7 @@
       </p:grpSpPr>
       <p:sp>
         <p:nvSpPr>
-          <p:cNvPr id="1995948244" name="Slide Image Placeholder 1"/>
+          <p:cNvPr id="1739697910" name="Slide Image Placeholder 1"/>
           <p:cNvSpPr>
             <a:spLocks noChangeAspect="1" noGrp="1" noRot="1"/>
           </p:cNvSpPr>
@@ -1386,7 +1472,7 @@
       </p:sp>
       <p:sp>
         <p:nvSpPr>
-          <p:cNvPr id="262520362" name="Notes Placeholder 2"/>
+          <p:cNvPr id="356734367" name="Notes Placeholder 2"/>
           <p:cNvSpPr>
             <a:spLocks noGrp="1"/>
           </p:cNvSpPr>
@@ -1408,7 +1494,7 @@
       </p:sp>
       <p:sp>
         <p:nvSpPr>
-          <p:cNvPr id="1354756620" name="Slide Number Placeholder 3"/>
+          <p:cNvPr id="1380841143" name="Slide Number Placeholder 3"/>
           <p:cNvSpPr>
             <a:spLocks noGrp="1"/>
           </p:cNvSpPr>
@@ -1459,7 +1545,7 @@
       </p:grpSpPr>
       <p:sp>
         <p:nvSpPr>
-          <p:cNvPr id="2" name="Slide Image Placeholder 1"/>
+          <p:cNvPr id="994642237" name="Slide Image Placeholder 1"/>
           <p:cNvSpPr>
             <a:spLocks noChangeAspect="1" noGrp="1" noRot="1"/>
           </p:cNvSpPr>
@@ -1471,7 +1557,7 @@
       </p:sp>
       <p:sp>
         <p:nvSpPr>
-          <p:cNvPr id="3" name="Notes Placeholder 2"/>
+          <p:cNvPr id="707594404" name="Notes Placeholder 2"/>
           <p:cNvSpPr>
             <a:spLocks noGrp="1"/>
           </p:cNvSpPr>
@@ -1493,7 +1579,7 @@
       </p:sp>
       <p:sp>
         <p:nvSpPr>
-          <p:cNvPr id="4" name="Slide Number Placeholder 3"/>
+          <p:cNvPr id="644762516" name="Slide Number Placeholder 3"/>
           <p:cNvSpPr>
             <a:spLocks noGrp="1"/>
           </p:cNvSpPr>
@@ -1544,7 +1630,7 @@
       </p:grpSpPr>
       <p:sp>
         <p:nvSpPr>
-          <p:cNvPr id="1500098035" name="Slide Image Placeholder 1"/>
+          <p:cNvPr id="449158867" name="Slide Image Placeholder 1"/>
           <p:cNvSpPr>
             <a:spLocks noChangeAspect="1" noGrp="1" noRot="1"/>
           </p:cNvSpPr>
@@ -1556,7 +1642,7 @@
       </p:sp>
       <p:sp>
         <p:nvSpPr>
-          <p:cNvPr id="2118197933" name="Notes Placeholder 2"/>
+          <p:cNvPr id="737764015" name="Notes Placeholder 2"/>
           <p:cNvSpPr>
             <a:spLocks noGrp="1"/>
           </p:cNvSpPr>
@@ -1578,7 +1664,7 @@
       </p:sp>
       <p:sp>
         <p:nvSpPr>
-          <p:cNvPr id="1468732285" name="Slide Number Placeholder 3"/>
+          <p:cNvPr id="965725934" name="Slide Number Placeholder 3"/>
           <p:cNvSpPr>
             <a:spLocks noGrp="1"/>
           </p:cNvSpPr>
@@ -1629,7 +1715,7 @@
       </p:grpSpPr>
       <p:sp>
         <p:nvSpPr>
-          <p:cNvPr id="498449657" name="Slide Image Placeholder 1"/>
+          <p:cNvPr id="1877837521" name="Slide Image Placeholder 1"/>
           <p:cNvSpPr>
             <a:spLocks noChangeAspect="1" noGrp="1" noRot="1"/>
           </p:cNvSpPr>
@@ -1641,7 +1727,7 @@
       </p:sp>
       <p:sp>
         <p:nvSpPr>
-          <p:cNvPr id="717168851" name="Notes Placeholder 2"/>
+          <p:cNvPr id="817944002" name="Notes Placeholder 2"/>
           <p:cNvSpPr>
             <a:spLocks noGrp="1"/>
           </p:cNvSpPr>
@@ -1663,7 +1749,7 @@
       </p:sp>
       <p:sp>
         <p:nvSpPr>
-          <p:cNvPr id="201581129" name="Slide Number Placeholder 3"/>
+          <p:cNvPr id="2045718058" name="Slide Number Placeholder 3"/>
           <p:cNvSpPr>
             <a:spLocks noGrp="1"/>
           </p:cNvSpPr>
@@ -1714,7 +1800,7 @@
       </p:grpSpPr>
       <p:sp>
         <p:nvSpPr>
-          <p:cNvPr id="1744871573" name="Shape 1059"/>
+          <p:cNvPr id="299732436" name="Shape 1059"/>
           <p:cNvSpPr>
             <a:spLocks noChangeArrowheads="1" noGrp="1"/>
           </p:cNvSpPr>
@@ -1837,7 +1923,7 @@
       </p:sp>
       <p:sp>
         <p:nvSpPr>
-          <p:cNvPr id="352185839" name="Shape 1060"/>
+          <p:cNvPr id="1981478781" name="Shape 1060"/>
           <p:cNvSpPr>
             <a:spLocks noChangeArrowheads="1" noGrp="1"/>
           </p:cNvSpPr>
@@ -1928,7 +2014,7 @@
       </p:sp>
       <p:sp>
         <p:nvSpPr>
-          <p:cNvPr id="1876477245" name="Shape 1061"/>
+          <p:cNvPr id="878133315" name="Shape 1061"/>
           <p:cNvSpPr>
             <a:spLocks noChangeArrowheads="1" noGrp="1"/>
           </p:cNvSpPr>
@@ -2014,7 +2100,7 @@
       </p:sp>
       <p:sp>
         <p:nvSpPr>
-          <p:cNvPr id="1763092978" name="Shape 1062"/>
+          <p:cNvPr id="644839170" name="Shape 1062"/>
           <p:cNvSpPr>
             <a:spLocks noChangeArrowheads="1" noGrp="1"/>
           </p:cNvSpPr>
@@ -2092,7 +2178,7 @@
       </p:sp>
       <p:sp>
         <p:nvSpPr>
-          <p:cNvPr id="1511093587" name="Shape 1063"/>
+          <p:cNvPr id="1626042137" name="Shape 1063"/>
           <p:cNvSpPr>
             <a:spLocks noChangeArrowheads="1" noGrp="1"/>
           </p:cNvSpPr>
@@ -2170,7 +2256,7 @@
       </p:sp>
       <p:sp>
         <p:nvSpPr>
-          <p:cNvPr id="848523781" name="Subtitle 2"/>
+          <p:cNvPr id="1148945941" name="Subtitle 2"/>
           <p:cNvSpPr>
             <a:spLocks noGrp="1"/>
           </p:cNvSpPr>
@@ -2293,7 +2379,7 @@
       </p:sp>
       <p:sp>
         <p:nvSpPr>
-          <p:cNvPr id="77269690" name="Date Placeholder 3"/>
+          <p:cNvPr id="356821109" name="Date Placeholder 3"/>
           <p:cNvSpPr>
             <a:spLocks noGrp="1"/>
           </p:cNvSpPr>
@@ -2319,7 +2405,7 @@
       </p:sp>
       <p:sp>
         <p:nvSpPr>
-          <p:cNvPr id="1411101400" name="Footer Placeholder 4"/>
+          <p:cNvPr id="1489619607" name="Footer Placeholder 4"/>
           <p:cNvSpPr>
             <a:spLocks noGrp="1"/>
           </p:cNvSpPr>
@@ -2341,7 +2427,7 @@
       </p:sp>
       <p:sp>
         <p:nvSpPr>
-          <p:cNvPr id="1624634880" name="Slide Number Placeholder 5"/>
+          <p:cNvPr id="1144468871" name="Slide Number Placeholder 5"/>
           <p:cNvSpPr>
             <a:spLocks noGrp="1"/>
           </p:cNvSpPr>
@@ -2367,7 +2453,7 @@
       </p:sp>
       <p:sp>
         <p:nvSpPr>
-          <p:cNvPr id="1385124026" name="Title 6"/>
+          <p:cNvPr id="1267255774" name="Title 6"/>
           <p:cNvSpPr>
             <a:spLocks noGrp="1"/>
           </p:cNvSpPr>
@@ -2427,7 +2513,7 @@
       </p:grpSpPr>
       <p:sp>
         <p:nvSpPr>
-          <p:cNvPr id="487859008" name="Title 1"/>
+          <p:cNvPr id="1496941660" name="Title 1"/>
           <p:cNvSpPr>
             <a:spLocks noGrp="1"/>
           </p:cNvSpPr>
@@ -2453,7 +2539,7 @@
       </p:sp>
       <p:sp>
         <p:nvSpPr>
-          <p:cNvPr id="1675631576" name="Vertical Text Placeholder 2"/>
+          <p:cNvPr id="184417507" name="Vertical Text Placeholder 2"/>
           <p:cNvSpPr>
             <a:spLocks noGrp="1"/>
           </p:cNvSpPr>
@@ -2519,7 +2605,7 @@
       </p:sp>
       <p:sp>
         <p:nvSpPr>
-          <p:cNvPr id="235480718" name="Date Placeholder 3"/>
+          <p:cNvPr id="1824600197" name="Date Placeholder 3"/>
           <p:cNvSpPr>
             <a:spLocks noGrp="1"/>
           </p:cNvSpPr>
@@ -2545,7 +2631,7 @@
       </p:sp>
       <p:sp>
         <p:nvSpPr>
-          <p:cNvPr id="930411169" name="Footer Placeholder 4"/>
+          <p:cNvPr id="1235307425" name="Footer Placeholder 4"/>
           <p:cNvSpPr>
             <a:spLocks noGrp="1"/>
           </p:cNvSpPr>
@@ -2567,7 +2653,7 @@
       </p:sp>
       <p:sp>
         <p:nvSpPr>
-          <p:cNvPr id="403427374" name="Slide Number Placeholder 5"/>
+          <p:cNvPr id="1350638185" name="Slide Number Placeholder 5"/>
           <p:cNvSpPr>
             <a:spLocks noGrp="1"/>
           </p:cNvSpPr>
@@ -2618,7 +2704,7 @@
       </p:grpSpPr>
       <p:sp>
         <p:nvSpPr>
-          <p:cNvPr id="1726713654" name="Vertical Title 1"/>
+          <p:cNvPr id="374578802" name="Vertical Title 1"/>
           <p:cNvSpPr>
             <a:spLocks noGrp="1"/>
           </p:cNvSpPr>
@@ -2653,7 +2739,7 @@
       </p:sp>
       <p:sp>
         <p:nvSpPr>
-          <p:cNvPr id="364741061" name="Vertical Text Placeholder 2"/>
+          <p:cNvPr id="1721120492" name="Vertical Text Placeholder 2"/>
           <p:cNvSpPr>
             <a:spLocks noGrp="1"/>
           </p:cNvSpPr>
@@ -2724,7 +2810,7 @@
       </p:sp>
       <p:sp>
         <p:nvSpPr>
-          <p:cNvPr id="999984546" name="Date Placeholder 3"/>
+          <p:cNvPr id="761219404" name="Date Placeholder 3"/>
           <p:cNvSpPr>
             <a:spLocks noGrp="1"/>
           </p:cNvSpPr>
@@ -2750,7 +2836,7 @@
       </p:sp>
       <p:sp>
         <p:nvSpPr>
-          <p:cNvPr id="977589161" name="Footer Placeholder 4"/>
+          <p:cNvPr id="1001770197" name="Footer Placeholder 4"/>
           <p:cNvSpPr>
             <a:spLocks noGrp="1"/>
           </p:cNvSpPr>
@@ -2772,7 +2858,7 @@
       </p:sp>
       <p:sp>
         <p:nvSpPr>
-          <p:cNvPr id="359158179" name="Slide Number Placeholder 5"/>
+          <p:cNvPr id="1252559058" name="Slide Number Placeholder 5"/>
           <p:cNvSpPr>
             <a:spLocks noGrp="1"/>
           </p:cNvSpPr>
@@ -2823,7 +2909,7 @@
       </p:grpSpPr>
       <p:sp>
         <p:nvSpPr>
-          <p:cNvPr id="1037992770" name="Title 1"/>
+          <p:cNvPr id="1819406127" name="Title 1"/>
           <p:cNvSpPr>
             <a:spLocks noGrp="1"/>
           </p:cNvSpPr>
@@ -2849,7 +2935,7 @@
       </p:sp>
       <p:sp>
         <p:nvSpPr>
-          <p:cNvPr id="1937589012" name="Content Placeholder 2"/>
+          <p:cNvPr id="86805619" name="Content Placeholder 2"/>
           <p:cNvSpPr>
             <a:spLocks noGrp="1"/>
           </p:cNvSpPr>
@@ -2915,7 +3001,7 @@
       </p:sp>
       <p:sp>
         <p:nvSpPr>
-          <p:cNvPr id="340093836" name="Date Placeholder 3"/>
+          <p:cNvPr id="699375531" name="Date Placeholder 3"/>
           <p:cNvSpPr>
             <a:spLocks noGrp="1"/>
           </p:cNvSpPr>
@@ -2941,7 +3027,7 @@
       </p:sp>
       <p:sp>
         <p:nvSpPr>
-          <p:cNvPr id="1102492367" name="Footer Placeholder 4"/>
+          <p:cNvPr id="2012011402" name="Footer Placeholder 4"/>
           <p:cNvSpPr>
             <a:spLocks noGrp="1"/>
           </p:cNvSpPr>
@@ -2963,7 +3049,7 @@
       </p:sp>
       <p:sp>
         <p:nvSpPr>
-          <p:cNvPr id="1014335586" name="Slide Number Placeholder 5"/>
+          <p:cNvPr id="477846132" name="Slide Number Placeholder 5"/>
           <p:cNvSpPr>
             <a:spLocks noGrp="1"/>
           </p:cNvSpPr>
@@ -3014,7 +3100,7 @@
       </p:grpSpPr>
       <p:sp>
         <p:nvSpPr>
-          <p:cNvPr id="1825436597" name="Title 1"/>
+          <p:cNvPr id="1312445991" name="Title 1"/>
           <p:cNvSpPr>
             <a:spLocks noGrp="1"/>
           </p:cNvSpPr>
@@ -3049,7 +3135,7 @@
       </p:sp>
       <p:sp>
         <p:nvSpPr>
-          <p:cNvPr id="1598405531" name="Text Placeholder 2"/>
+          <p:cNvPr id="1275894705" name="Text Placeholder 2"/>
           <p:cNvSpPr>
             <a:spLocks noGrp="1"/>
           </p:cNvSpPr>
@@ -3171,7 +3257,7 @@
       </p:sp>
       <p:sp>
         <p:nvSpPr>
-          <p:cNvPr id="2092295071" name="Date Placeholder 3"/>
+          <p:cNvPr id="1375187708" name="Date Placeholder 3"/>
           <p:cNvSpPr>
             <a:spLocks noGrp="1"/>
           </p:cNvSpPr>
@@ -3197,7 +3283,7 @@
       </p:sp>
       <p:sp>
         <p:nvSpPr>
-          <p:cNvPr id="1927630050" name="Footer Placeholder 4"/>
+          <p:cNvPr id="937099712" name="Footer Placeholder 4"/>
           <p:cNvSpPr>
             <a:spLocks noGrp="1"/>
           </p:cNvSpPr>
@@ -3219,7 +3305,7 @@
       </p:sp>
       <p:sp>
         <p:nvSpPr>
-          <p:cNvPr id="646867921" name="Slide Number Placeholder 5"/>
+          <p:cNvPr id="1660701315" name="Slide Number Placeholder 5"/>
           <p:cNvSpPr>
             <a:spLocks noGrp="1"/>
           </p:cNvSpPr>
@@ -3270,7 +3356,7 @@
       </p:grpSpPr>
       <p:sp>
         <p:nvSpPr>
-          <p:cNvPr id="1700748770" name="Title 1"/>
+          <p:cNvPr id="1730601523" name="Title 1"/>
           <p:cNvSpPr>
             <a:spLocks noGrp="1"/>
           </p:cNvSpPr>
@@ -3296,7 +3382,7 @@
       </p:sp>
       <p:sp>
         <p:nvSpPr>
-          <p:cNvPr id="785029825" name="Content Placeholder 2"/>
+          <p:cNvPr id="178160043" name="Content Placeholder 2"/>
           <p:cNvSpPr>
             <a:spLocks noGrp="1"/>
           </p:cNvSpPr>
@@ -3395,7 +3481,7 @@
       </p:sp>
       <p:sp>
         <p:nvSpPr>
-          <p:cNvPr id="582882606" name="Content Placeholder 3"/>
+          <p:cNvPr id="207640385" name="Content Placeholder 3"/>
           <p:cNvSpPr>
             <a:spLocks noGrp="1"/>
           </p:cNvSpPr>
@@ -3494,7 +3580,7 @@
       </p:sp>
       <p:sp>
         <p:nvSpPr>
-          <p:cNvPr id="1293640229" name="Date Placeholder 4"/>
+          <p:cNvPr id="739741652" name="Date Placeholder 4"/>
           <p:cNvSpPr>
             <a:spLocks noGrp="1"/>
           </p:cNvSpPr>
@@ -3520,7 +3606,7 @@
       </p:sp>
       <p:sp>
         <p:nvSpPr>
-          <p:cNvPr id="1799523942" name="Footer Placeholder 5"/>
+          <p:cNvPr id="332236090" name="Footer Placeholder 5"/>
           <p:cNvSpPr>
             <a:spLocks noGrp="1"/>
           </p:cNvSpPr>
@@ -3542,7 +3628,7 @@
       </p:sp>
       <p:sp>
         <p:nvSpPr>
-          <p:cNvPr id="1516519325" name="Slide Number Placeholder 6"/>
+          <p:cNvPr id="1244351704" name="Slide Number Placeholder 6"/>
           <p:cNvSpPr>
             <a:spLocks noGrp="1"/>
           </p:cNvSpPr>
@@ -3593,7 +3679,7 @@
       </p:grpSpPr>
       <p:sp>
         <p:nvSpPr>
-          <p:cNvPr id="559441482" name="Title 1"/>
+          <p:cNvPr id="893685785" name="Title 1"/>
           <p:cNvSpPr>
             <a:spLocks noGrp="1"/>
           </p:cNvSpPr>
@@ -3623,7 +3709,7 @@
       </p:sp>
       <p:sp>
         <p:nvSpPr>
-          <p:cNvPr id="131451600" name="Text Placeholder 2"/>
+          <p:cNvPr id="214285048" name="Text Placeholder 2"/>
           <p:cNvSpPr>
             <a:spLocks noGrp="1"/>
           </p:cNvSpPr>
@@ -3691,7 +3777,7 @@
       </p:sp>
       <p:sp>
         <p:nvSpPr>
-          <p:cNvPr id="1766892977" name="Content Placeholder 3"/>
+          <p:cNvPr id="2105422510" name="Content Placeholder 3"/>
           <p:cNvSpPr>
             <a:spLocks noGrp="1"/>
           </p:cNvSpPr>
@@ -3790,7 +3876,7 @@
       </p:sp>
       <p:sp>
         <p:nvSpPr>
-          <p:cNvPr id="1305456848" name="Text Placeholder 4"/>
+          <p:cNvPr id="2109100385" name="Text Placeholder 4"/>
           <p:cNvSpPr>
             <a:spLocks noGrp="1"/>
           </p:cNvSpPr>
@@ -3858,7 +3944,7 @@
       </p:sp>
       <p:sp>
         <p:nvSpPr>
-          <p:cNvPr id="1789428309" name="Content Placeholder 5"/>
+          <p:cNvPr id="1331471385" name="Content Placeholder 5"/>
           <p:cNvSpPr>
             <a:spLocks noGrp="1"/>
           </p:cNvSpPr>
@@ -3957,7 +4043,7 @@
       </p:sp>
       <p:sp>
         <p:nvSpPr>
-          <p:cNvPr id="1878185432" name="Date Placeholder 6"/>
+          <p:cNvPr id="838464375" name="Date Placeholder 6"/>
           <p:cNvSpPr>
             <a:spLocks noGrp="1"/>
           </p:cNvSpPr>
@@ -3983,7 +4069,7 @@
       </p:sp>
       <p:sp>
         <p:nvSpPr>
-          <p:cNvPr id="1415771520" name="Footer Placeholder 7"/>
+          <p:cNvPr id="1267170750" name="Footer Placeholder 7"/>
           <p:cNvSpPr>
             <a:spLocks noGrp="1"/>
           </p:cNvSpPr>
@@ -4005,7 +4091,7 @@
       </p:sp>
       <p:sp>
         <p:nvSpPr>
-          <p:cNvPr id="1286850231" name="Slide Number Placeholder 8"/>
+          <p:cNvPr id="1956893633" name="Slide Number Placeholder 8"/>
           <p:cNvSpPr>
             <a:spLocks noGrp="1"/>
           </p:cNvSpPr>
@@ -4056,7 +4142,7 @@
       </p:grpSpPr>
       <p:sp>
         <p:nvSpPr>
-          <p:cNvPr id="1105051799" name="Title 1"/>
+          <p:cNvPr id="939921064" name="Title 1"/>
           <p:cNvSpPr>
             <a:spLocks noGrp="1"/>
           </p:cNvSpPr>
@@ -4082,7 +4168,7 @@
       </p:sp>
       <p:sp>
         <p:nvSpPr>
-          <p:cNvPr id="166798351" name="Date Placeholder 2"/>
+          <p:cNvPr id="648590676" name="Date Placeholder 2"/>
           <p:cNvSpPr>
             <a:spLocks noGrp="1"/>
           </p:cNvSpPr>
@@ -4108,7 +4194,7 @@
       </p:sp>
       <p:sp>
         <p:nvSpPr>
-          <p:cNvPr id="120747339" name="Footer Placeholder 3"/>
+          <p:cNvPr id="912149062" name="Footer Placeholder 3"/>
           <p:cNvSpPr>
             <a:spLocks noGrp="1"/>
           </p:cNvSpPr>
@@ -4130,7 +4216,7 @@
       </p:sp>
       <p:sp>
         <p:nvSpPr>
-          <p:cNvPr id="234954683" name="Slide Number Placeholder 4"/>
+          <p:cNvPr id="704105383" name="Slide Number Placeholder 4"/>
           <p:cNvSpPr>
             <a:spLocks noGrp="1"/>
           </p:cNvSpPr>
@@ -4181,7 +4267,7 @@
       </p:grpSpPr>
       <p:sp>
         <p:nvSpPr>
-          <p:cNvPr id="1156525622" name="Date Placeholder 1"/>
+          <p:cNvPr id="1659369366" name="Date Placeholder 1"/>
           <p:cNvSpPr>
             <a:spLocks noGrp="1"/>
           </p:cNvSpPr>
@@ -4207,7 +4293,7 @@
       </p:sp>
       <p:sp>
         <p:nvSpPr>
-          <p:cNvPr id="1518135658" name="Footer Placeholder 2"/>
+          <p:cNvPr id="217259344" name="Footer Placeholder 2"/>
           <p:cNvSpPr>
             <a:spLocks noGrp="1"/>
           </p:cNvSpPr>
@@ -4229,7 +4315,7 @@
       </p:sp>
       <p:sp>
         <p:nvSpPr>
-          <p:cNvPr id="1210935907" name="Slide Number Placeholder 3"/>
+          <p:cNvPr id="1968599165" name="Slide Number Placeholder 3"/>
           <p:cNvSpPr>
             <a:spLocks noGrp="1"/>
           </p:cNvSpPr>
@@ -4280,7 +4366,7 @@
       </p:grpSpPr>
       <p:sp>
         <p:nvSpPr>
-          <p:cNvPr id="1291845883" name="Title 1"/>
+          <p:cNvPr id="519121305" name="Title 1"/>
           <p:cNvSpPr>
             <a:spLocks noGrp="1"/>
           </p:cNvSpPr>
@@ -4315,7 +4401,7 @@
       </p:sp>
       <p:sp>
         <p:nvSpPr>
-          <p:cNvPr id="2110104460" name="Content Placeholder 2"/>
+          <p:cNvPr id="1449534547" name="Content Placeholder 2"/>
           <p:cNvSpPr>
             <a:spLocks noGrp="1"/>
           </p:cNvSpPr>
@@ -4414,7 +4500,7 @@
       </p:sp>
       <p:sp>
         <p:nvSpPr>
-          <p:cNvPr id="2042456745" name="Text Placeholder 3"/>
+          <p:cNvPr id="1680074490" name="Text Placeholder 3"/>
           <p:cNvSpPr>
             <a:spLocks noGrp="1"/>
           </p:cNvSpPr>
@@ -4482,7 +4568,7 @@
       </p:sp>
       <p:sp>
         <p:nvSpPr>
-          <p:cNvPr id="1436971044" name="Date Placeholder 4"/>
+          <p:cNvPr id="1412086596" name="Date Placeholder 4"/>
           <p:cNvSpPr>
             <a:spLocks noGrp="1"/>
           </p:cNvSpPr>
@@ -4508,7 +4594,7 @@
       </p:sp>
       <p:sp>
         <p:nvSpPr>
-          <p:cNvPr id="1300350376" name="Footer Placeholder 5"/>
+          <p:cNvPr id="1322068381" name="Footer Placeholder 5"/>
           <p:cNvSpPr>
             <a:spLocks noGrp="1"/>
           </p:cNvSpPr>
@@ -4530,7 +4616,7 @@
       </p:sp>
       <p:sp>
         <p:nvSpPr>
-          <p:cNvPr id="1574196419" name="Slide Number Placeholder 6"/>
+          <p:cNvPr id="233679518" name="Slide Number Placeholder 6"/>
           <p:cNvSpPr>
             <a:spLocks noGrp="1"/>
           </p:cNvSpPr>
@@ -4581,7 +4667,7 @@
       </p:grpSpPr>
       <p:sp>
         <p:nvSpPr>
-          <p:cNvPr id="1853680800" name="Title 1"/>
+          <p:cNvPr id="964090339" name="Title 1"/>
           <p:cNvSpPr>
             <a:spLocks noGrp="1"/>
           </p:cNvSpPr>
@@ -4616,7 +4702,7 @@
       </p:sp>
       <p:sp>
         <p:nvSpPr>
-          <p:cNvPr id="1224413231" name="Picture Placeholder 2"/>
+          <p:cNvPr id="58429603" name="Picture Placeholder 2"/>
           <p:cNvSpPr>
             <a:spLocks noGrp="1"/>
           </p:cNvSpPr>
@@ -4680,7 +4766,7 @@
       </p:sp>
       <p:sp>
         <p:nvSpPr>
-          <p:cNvPr id="100928422" name="Text Placeholder 3"/>
+          <p:cNvPr id="1360955617" name="Text Placeholder 3"/>
           <p:cNvSpPr>
             <a:spLocks noGrp="1"/>
           </p:cNvSpPr>
@@ -4748,7 +4834,7 @@
       </p:sp>
       <p:sp>
         <p:nvSpPr>
-          <p:cNvPr id="1600742799" name="Date Placeholder 4"/>
+          <p:cNvPr id="1729117890" name="Date Placeholder 4"/>
           <p:cNvSpPr>
             <a:spLocks noGrp="1"/>
           </p:cNvSpPr>
@@ -4774,7 +4860,7 @@
       </p:sp>
       <p:sp>
         <p:nvSpPr>
-          <p:cNvPr id="298236195" name="Footer Placeholder 5"/>
+          <p:cNvPr id="148557878" name="Footer Placeholder 5"/>
           <p:cNvSpPr>
             <a:spLocks noGrp="1"/>
           </p:cNvSpPr>
@@ -4796,7 +4882,7 @@
       </p:sp>
       <p:sp>
         <p:nvSpPr>
-          <p:cNvPr id="1963672957" name="Slide Number Placeholder 6"/>
+          <p:cNvPr id="825113991" name="Slide Number Placeholder 6"/>
           <p:cNvSpPr>
             <a:spLocks noGrp="1"/>
           </p:cNvSpPr>
@@ -4852,7 +4938,7 @@
       </p:grpSpPr>
       <p:sp>
         <p:nvSpPr>
-          <p:cNvPr id="600327829" name="Shape 1059"/>
+          <p:cNvPr id="975885808" name="Shape 1059"/>
           <p:cNvSpPr>
             <a:spLocks noChangeArrowheads="1" noGrp="1"/>
           </p:cNvSpPr>
@@ -4930,7 +5016,7 @@
       </p:sp>
       <p:sp>
         <p:nvSpPr>
-          <p:cNvPr id="1377328496" name="Shape 1060"/>
+          <p:cNvPr id="1794495930" name="Shape 1060"/>
           <p:cNvSpPr>
             <a:spLocks noChangeArrowheads="1" noGrp="1"/>
           </p:cNvSpPr>
@@ -5011,7 +5097,7 @@
       </p:sp>
       <p:sp>
         <p:nvSpPr>
-          <p:cNvPr id="452219553" name="Shape 1061"/>
+          <p:cNvPr id="1357480153" name="Shape 1061"/>
           <p:cNvSpPr>
             <a:spLocks noChangeArrowheads="1" noGrp="1"/>
           </p:cNvSpPr>
@@ -5129,7 +5215,7 @@
       </p:sp>
       <p:sp>
         <p:nvSpPr>
-          <p:cNvPr id="711690960" name="Title 1"/>
+          <p:cNvPr id="495448379" name="Title 1"/>
           <p:cNvSpPr>
             <a:spLocks noGrp="1"/>
           </p:cNvSpPr>
@@ -5165,7 +5251,7 @@
       </p:sp>
       <p:sp>
         <p:nvSpPr>
-          <p:cNvPr id="1377320633" name="Text Placeholder 2"/>
+          <p:cNvPr id="2114091282" name="Text Placeholder 2"/>
           <p:cNvSpPr>
             <a:spLocks noGrp="1"/>
           </p:cNvSpPr>
@@ -5241,7 +5327,7 @@
       </p:sp>
       <p:sp>
         <p:nvSpPr>
-          <p:cNvPr id="597434697" name="Date Placeholder 3"/>
+          <p:cNvPr id="358443864" name="Date Placeholder 3"/>
           <p:cNvSpPr>
             <a:spLocks noGrp="1"/>
           </p:cNvSpPr>
@@ -5285,7 +5371,7 @@
       </p:sp>
       <p:sp>
         <p:nvSpPr>
-          <p:cNvPr id="710328788" name="Footer Placeholder 4"/>
+          <p:cNvPr id="2052770916" name="Footer Placeholder 4"/>
           <p:cNvSpPr>
             <a:spLocks noGrp="1"/>
           </p:cNvSpPr>
@@ -5325,7 +5411,7 @@
       </p:sp>
       <p:sp>
         <p:nvSpPr>
-          <p:cNvPr id="734177754" name="Slide Number Placeholder 5"/>
+          <p:cNvPr id="179163957" name="Slide Number Placeholder 5"/>
           <p:cNvSpPr>
             <a:spLocks noGrp="1"/>
           </p:cNvSpPr>
@@ -5674,7 +5760,7 @@
       </p:grpSpPr>
       <p:sp>
         <p:nvSpPr>
-          <p:cNvPr id="1781584559" name="Title 1"/>
+          <p:cNvPr id="1711759290" name="Title 1"/>
           <p:cNvSpPr>
             <a:spLocks noGrp="1"/>
           </p:cNvSpPr>
@@ -5711,7 +5797,7 @@
       </p:sp>
       <p:sp>
         <p:nvSpPr>
-          <p:cNvPr id="1463849354" name="Subtitle 2"/>
+          <p:cNvPr id="788135800" name="Subtitle 2"/>
           <p:cNvSpPr>
             <a:spLocks noGrp="1"/>
           </p:cNvSpPr>
@@ -5771,7 +5857,7 @@
       </p:grpSpPr>
       <p:sp>
         <p:nvSpPr>
-          <p:cNvPr id="328435794" name="Title 1"/>
+          <p:cNvPr id="1992860617" name="Title 1"/>
           <p:cNvSpPr>
             <a:spLocks noGrp="1"/>
           </p:cNvSpPr>
@@ -5789,11 +5875,11 @@
             </a:pPr>
             <a:r>
               <a:rPr/>
-              <a:t>IV. </a:t>
+              <a:t>V. </a:t>
             </a:r>
             <a:r>
               <a:rPr lang="ru-RU"/>
-              <a:t>Основные принципы </a:t>
+              <a:t>Сферы применения </a:t>
             </a:r>
             <a:r>
               <a:rPr lang="en-US"/>
@@ -5805,7 +5891,7 @@
       </p:sp>
       <p:sp>
         <p:nvSpPr>
-          <p:cNvPr id="2066911182" name="Content Placeholder 2"/>
+          <p:cNvPr id="424806573" name="Content Placeholder 2"/>
           <p:cNvSpPr>
             <a:spLocks noGrp="1"/>
           </p:cNvSpPr>
@@ -5854,29 +5940,13 @@
             <a:pPr>
               <a:defRPr/>
             </a:pPr>
-            <a:r>
-              <a:rPr lang="ru-RU" sz="1600" b="1"/>
-              <a:t>Изоляция – </a:t>
-            </a:r>
-            <a:r>
-              <a:rPr lang="ru-RU" sz="1600" b="0"/>
-              <a:t>программы и их </a:t>
-            </a:r>
-            <a:r>
-              <a:rPr lang="en-US" sz="1600" b="0"/>
-              <a:t>runtime-</a:t>
-            </a:r>
-            <a:r>
-              <a:rPr lang="ru-RU" sz="1600" b="0"/>
-              <a:t>зависимости изолированны друг от друга, что избавляет от конфликтов зависимостей и позволяет хранить несколько версий одной программы</a:t>
-            </a:r>
-            <a:endParaRPr lang="ru-RU" sz="1600" b="0"/>
-          </a:p>
-        </p:txBody>
-      </p:sp>
-      <p:sp>
-        <p:nvSpPr>
-          <p:cNvPr id="1219494073" name="Content Placeholder 3"/>
+            <a:endParaRPr/>
+          </a:p>
+        </p:txBody>
+      </p:sp>
+      <p:sp>
+        <p:nvSpPr>
+          <p:cNvPr id="776270827" name="Content Placeholder 3"/>
           <p:cNvSpPr>
             <a:spLocks noGrp="1"/>
           </p:cNvSpPr>
@@ -5925,15 +5995,7 @@
             <a:pPr>
               <a:defRPr/>
             </a:pPr>
-            <a:r>
-              <a:rPr lang="ru-RU" sz="1600" b="1"/>
-              <a:t>Декларативность</a:t>
-            </a:r>
-            <a:r>
-              <a:rPr lang="ru-RU" sz="1600" b="0"/>
-              <a:t> – система </a:t>
-            </a:r>
-            <a:endParaRPr sz="1600" b="0"/>
+            <a:endParaRPr/>
           </a:p>
         </p:txBody>
       </p:sp>
@@ -5972,60 +6034,12 @@
       </p:grpSpPr>
       <p:sp>
         <p:nvSpPr>
-          <p:cNvPr id="2101984899" name="Title 1"/>
+          <p:cNvPr id="866350270" name="Title 1"/>
           <p:cNvSpPr>
             <a:spLocks noGrp="1"/>
           </p:cNvSpPr>
           <p:nvPr>
             <p:ph type="title"/>
-          </p:nvPr>
-        </p:nvSpPr>
-        <p:spPr bwMode="auto"/>
-        <p:txBody>
-          <a:bodyPr vertOverflow="overflow" horzOverflow="overflow" vert="horz" wrap="square" lIns="91440" tIns="45720" rIns="91440" bIns="45720" numCol="1" spcCol="0" rtlCol="0" fromWordArt="0" anchor="ctr" anchorCtr="0" forceAA="0" upright="0" compatLnSpc="0">
-            <a:normAutofit fontScale="90000" lnSpcReduction="2000"/>
-          </a:bodyPr>
-          <a:lstStyle/>
-          <a:p>
-            <a:pPr>
-              <a:defRPr/>
-            </a:pPr>
-            <a:r>
-              <a:rPr/>
-              <a:t>IV. </a:t>
-            </a:r>
-            <a:r>
-              <a:rPr lang="ru-RU"/>
-              <a:t>Отличие идей </a:t>
-            </a:r>
-            <a:r>
-              <a:rPr lang="en-US"/>
-              <a:t>Clyx </a:t>
-            </a:r>
-            <a:r>
-              <a:rPr lang="ru-RU"/>
-              <a:t>от </a:t>
-            </a:r>
-            <a:r>
-              <a:rPr lang="en-US"/>
-              <a:t>NixOS</a:t>
-            </a:r>
-            <a:r>
-              <a:rPr lang="ru-RU"/>
-              <a:t>, решение проблем</a:t>
-            </a:r>
-            <a:endParaRPr/>
-          </a:p>
-        </p:txBody>
-      </p:sp>
-      <p:sp>
-        <p:nvSpPr>
-          <p:cNvPr id="189416047" name="Content Placeholder 2"/>
-          <p:cNvSpPr>
-            <a:spLocks noGrp="1"/>
-          </p:cNvSpPr>
-          <p:nvPr>
-            <p:ph idx="1"/>
           </p:nvPr>
         </p:nvSpPr>
         <p:spPr bwMode="auto"/>
@@ -6036,7 +6050,153 @@
             <a:pPr>
               <a:defRPr/>
             </a:pPr>
-            <a:endParaRPr/>
+            <a:r>
+              <a:rPr/>
+              <a:t>IV. </a:t>
+            </a:r>
+            <a:r>
+              <a:rPr lang="ru-RU"/>
+              <a:t>Основные принципы </a:t>
+            </a:r>
+            <a:r>
+              <a:rPr lang="en-US"/>
+              <a:t>Clyx</a:t>
+            </a:r>
+            <a:endParaRPr/>
+          </a:p>
+        </p:txBody>
+      </p:sp>
+      <p:sp>
+        <p:nvSpPr>
+          <p:cNvPr id="1621782668" name="Content Placeholder 2"/>
+          <p:cNvSpPr>
+            <a:spLocks noGrp="1"/>
+          </p:cNvSpPr>
+          <p:nvPr>
+            <p:ph sz="half" idx="1"/>
+          </p:nvPr>
+        </p:nvSpPr>
+        <p:spPr bwMode="auto">
+          <a:xfrm>
+            <a:off x="609598" y="1600200"/>
+            <a:ext cx="5384799" cy="4525961"/>
+          </a:xfrm>
+        </p:spPr>
+        <p:txBody>
+          <a:bodyPr/>
+          <a:lstStyle>
+            <a:lvl1pPr>
+              <a:defRPr sz="2800"/>
+            </a:lvl1pPr>
+            <a:lvl2pPr>
+              <a:defRPr sz="2400"/>
+            </a:lvl2pPr>
+            <a:lvl3pPr>
+              <a:defRPr sz="2000"/>
+            </a:lvl3pPr>
+            <a:lvl4pPr>
+              <a:defRPr sz="1800"/>
+            </a:lvl4pPr>
+            <a:lvl5pPr>
+              <a:defRPr sz="1800"/>
+            </a:lvl5pPr>
+            <a:lvl6pPr>
+              <a:defRPr sz="1800"/>
+            </a:lvl6pPr>
+            <a:lvl7pPr>
+              <a:defRPr sz="1800"/>
+            </a:lvl7pPr>
+            <a:lvl8pPr>
+              <a:defRPr sz="1800"/>
+            </a:lvl8pPr>
+            <a:lvl9pPr>
+              <a:defRPr sz="1800"/>
+            </a:lvl9pPr>
+          </a:lstStyle>
+          <a:p>
+            <a:pPr>
+              <a:defRPr/>
+            </a:pPr>
+            <a:r>
+              <a:rPr lang="ru-RU" sz="1600" b="1"/>
+              <a:t>Изоляция – </a:t>
+            </a:r>
+            <a:r>
+              <a:rPr lang="ru-RU" sz="1600" b="0"/>
+              <a:t>программы и их </a:t>
+            </a:r>
+            <a:r>
+              <a:rPr lang="en-US" sz="1600" b="0"/>
+              <a:t>runtime-</a:t>
+            </a:r>
+            <a:r>
+              <a:rPr lang="ru-RU" sz="1600" b="0"/>
+              <a:t>зависимости изолированны друг от друга, что избавляет от конфликтов зависимостей и позволяет хранить несколько версий одной программы</a:t>
+            </a:r>
+            <a:endParaRPr lang="ru-RU" sz="1600" b="0"/>
+          </a:p>
+        </p:txBody>
+      </p:sp>
+      <p:sp>
+        <p:nvSpPr>
+          <p:cNvPr id="1298092219" name="Content Placeholder 3"/>
+          <p:cNvSpPr>
+            <a:spLocks noGrp="1"/>
+          </p:cNvSpPr>
+          <p:nvPr>
+            <p:ph sz="half" idx="2"/>
+          </p:nvPr>
+        </p:nvSpPr>
+        <p:spPr bwMode="auto">
+          <a:xfrm>
+            <a:off x="6197598" y="1600200"/>
+            <a:ext cx="5384799" cy="4525961"/>
+          </a:xfrm>
+        </p:spPr>
+        <p:txBody>
+          <a:bodyPr/>
+          <a:lstStyle>
+            <a:lvl1pPr>
+              <a:defRPr sz="2800"/>
+            </a:lvl1pPr>
+            <a:lvl2pPr>
+              <a:defRPr sz="2400"/>
+            </a:lvl2pPr>
+            <a:lvl3pPr>
+              <a:defRPr sz="2000"/>
+            </a:lvl3pPr>
+            <a:lvl4pPr>
+              <a:defRPr sz="1800"/>
+            </a:lvl4pPr>
+            <a:lvl5pPr>
+              <a:defRPr sz="1800"/>
+            </a:lvl5pPr>
+            <a:lvl6pPr>
+              <a:defRPr sz="1800"/>
+            </a:lvl6pPr>
+            <a:lvl7pPr>
+              <a:defRPr sz="1800"/>
+            </a:lvl7pPr>
+            <a:lvl8pPr>
+              <a:defRPr sz="1800"/>
+            </a:lvl8pPr>
+            <a:lvl9pPr>
+              <a:defRPr sz="1800"/>
+            </a:lvl9pPr>
+          </a:lstStyle>
+          <a:p>
+            <a:pPr>
+              <a:defRPr/>
+            </a:pPr>
+            <a:r>
+              <a:rPr lang="ru-RU" sz="1600" b="1"/>
+              <a:t>Декларативность</a:t>
+            </a:r>
+            <a:r>
+              <a:rPr lang="ru-RU" sz="1600" b="0"/>
+              <a:t> – система </a:t>
+            </a:r>
+            <a:endParaRPr sz="1600" b="0"/>
           </a:p>
         </p:txBody>
       </p:sp>
@@ -6075,7 +6235,7 @@
       </p:grpSpPr>
       <p:sp>
         <p:nvSpPr>
-          <p:cNvPr id="1686372012" name="Title 1"/>
+          <p:cNvPr id="1395725786" name="Title 1"/>
           <p:cNvSpPr>
             <a:spLocks noGrp="1"/>
           </p:cNvSpPr>
@@ -6085,7 +6245,9 @@
         </p:nvSpPr>
         <p:spPr bwMode="auto"/>
         <p:txBody>
-          <a:bodyPr/>
+          <a:bodyPr vertOverflow="overflow" horzOverflow="overflow" vert="horz" wrap="square" lIns="91440" tIns="45720" rIns="91440" bIns="45720" numCol="1" spcCol="0" rtlCol="0" fromWordArt="0" anchor="ctr" anchorCtr="0" forceAA="0" upright="0" compatLnSpc="0">
+            <a:normAutofit fontScale="90000" lnSpcReduction="2000"/>
+          </a:bodyPr>
           <a:lstStyle/>
           <a:p>
             <a:pPr>
@@ -6093,23 +6255,35 @@
             </a:pPr>
             <a:r>
               <a:rPr/>
-              <a:t>V.I. </a:t>
+              <a:t>IV. </a:t>
             </a:r>
             <a:r>
               <a:rPr lang="ru-RU"/>
-              <a:t>Итог – почему </a:t>
+              <a:t>Отличие идей </a:t>
             </a:r>
             <a:r>
               <a:rPr lang="en-US"/>
-              <a:t>Clyx</a:t>
-            </a:r>
-            <a:endParaRPr/>
-          </a:p>
-        </p:txBody>
-      </p:sp>
-      <p:sp>
-        <p:nvSpPr>
-          <p:cNvPr id="1046209195" name="Content Placeholder 2"/>
+              <a:t>Clyx </a:t>
+            </a:r>
+            <a:r>
+              <a:rPr lang="ru-RU"/>
+              <a:t>от </a:t>
+            </a:r>
+            <a:r>
+              <a:rPr lang="en-US"/>
+              <a:t>NixOS</a:t>
+            </a:r>
+            <a:r>
+              <a:rPr lang="ru-RU"/>
+              <a:t>, решение проблем</a:t>
+            </a:r>
+            <a:endParaRPr/>
+          </a:p>
+        </p:txBody>
+      </p:sp>
+      <p:sp>
+        <p:nvSpPr>
+          <p:cNvPr id="1329434500" name="Content Placeholder 2"/>
           <p:cNvSpPr>
             <a:spLocks noGrp="1"/>
           </p:cNvSpPr>
@@ -6164,7 +6338,7 @@
       </p:grpSpPr>
       <p:sp>
         <p:nvSpPr>
-          <p:cNvPr id="1582769809" name="Title 1"/>
+          <p:cNvPr id="1643022065" name="Title 1"/>
           <p:cNvSpPr>
             <a:spLocks noGrp="1"/>
           </p:cNvSpPr>
@@ -6182,11 +6356,11 @@
             </a:pPr>
             <a:r>
               <a:rPr/>
-              <a:t>V.II. </a:t>
+              <a:t>V.I. </a:t>
             </a:r>
             <a:r>
               <a:rPr lang="ru-RU"/>
-              <a:t>Итог – минусы </a:t>
+              <a:t>Итог – почему </a:t>
             </a:r>
             <a:r>
               <a:rPr lang="en-US"/>
@@ -6198,7 +6372,7 @@
       </p:sp>
       <p:sp>
         <p:nvSpPr>
-          <p:cNvPr id="1067470172" name="Content Placeholder 2"/>
+          <p:cNvPr id="1509672543" name="Content Placeholder 2"/>
           <p:cNvSpPr>
             <a:spLocks noGrp="1"/>
           </p:cNvSpPr>
@@ -6253,7 +6427,7 @@
       </p:grpSpPr>
       <p:sp>
         <p:nvSpPr>
-          <p:cNvPr id="793340099" name="Title 1"/>
+          <p:cNvPr id="900717158" name="Title 1"/>
           <p:cNvSpPr>
             <a:spLocks noGrp="1"/>
           </p:cNvSpPr>
@@ -6271,6 +6445,95 @@
             </a:pPr>
             <a:r>
               <a:rPr/>
+              <a:t>V.II. </a:t>
+            </a:r>
+            <a:r>
+              <a:rPr lang="ru-RU"/>
+              <a:t>Итог – минусы </a:t>
+            </a:r>
+            <a:r>
+              <a:rPr lang="en-US"/>
+              <a:t>Clyx</a:t>
+            </a:r>
+            <a:endParaRPr/>
+          </a:p>
+        </p:txBody>
+      </p:sp>
+      <p:sp>
+        <p:nvSpPr>
+          <p:cNvPr id="159287718" name="Content Placeholder 2"/>
+          <p:cNvSpPr>
+            <a:spLocks noGrp="1"/>
+          </p:cNvSpPr>
+          <p:nvPr>
+            <p:ph idx="1"/>
+          </p:nvPr>
+        </p:nvSpPr>
+        <p:spPr bwMode="auto"/>
+        <p:txBody>
+          <a:bodyPr/>
+          <a:lstStyle/>
+          <a:p>
+            <a:pPr>
+              <a:defRPr/>
+            </a:pPr>
+            <a:endParaRPr/>
+          </a:p>
+        </p:txBody>
+      </p:sp>
+    </p:spTree>
+  </p:cSld>
+  <p:clrMapOvr>
+    <a:masterClrMapping/>
+  </p:clrMapOvr>
+  <mc:AlternateContent xmlns:mc="http://schemas.openxmlformats.org/markup-compatibility/2006">
+    <mc:Choice xmlns:p159="http://schemas.microsoft.com/office/powerpoint/2015/09/main" xmlns:p14="http://schemas.microsoft.com/office/powerpoint/2010/main" Requires="p159">
+      <p:transition p14:dur="2000" advClick="1"/>
+    </mc:Choice>
+    <mc:Fallback>
+      <p:transition advClick="1"/>
+    </mc:Fallback>
+  </mc:AlternateContent>
+</p:sld>
+</file>
+
+<file path=ppt/slides/slide15.xml><?xml version="1.0" encoding="utf-8"?>
+<p:sld xmlns:a="http://schemas.openxmlformats.org/drawingml/2006/main" xmlns:r="http://schemas.openxmlformats.org/officeDocument/2006/relationships" xmlns:p="http://schemas.openxmlformats.org/presentationml/2006/main" xmlns:m="http://schemas.openxmlformats.org/officeDocument/2006/math" xmlns:w="http://schemas.openxmlformats.org/wordprocessingml/2006/main" xmlns:mc="http://schemas.openxmlformats.org/markup-compatibility/2006" showMasterPhAnim="0" showMasterSp="1" show="1">
+  <p:cSld name="">
+    <p:spTree>
+      <p:nvGrpSpPr>
+        <p:cNvPr id="1" name=""/>
+        <p:cNvGrpSpPr/>
+        <p:nvPr/>
+      </p:nvGrpSpPr>
+      <p:grpSpPr bwMode="auto">
+        <a:xfrm>
+          <a:off x="0" y="0"/>
+          <a:ext cx="0" cy="0"/>
+          <a:chOff x="0" y="0"/>
+          <a:chExt cx="0" cy="0"/>
+        </a:xfrm>
+      </p:grpSpPr>
+      <p:sp>
+        <p:nvSpPr>
+          <p:cNvPr id="1716049191" name="Title 1"/>
+          <p:cNvSpPr>
+            <a:spLocks noGrp="1"/>
+          </p:cNvSpPr>
+          <p:nvPr>
+            <p:ph type="title"/>
+          </p:nvPr>
+        </p:nvSpPr>
+        <p:spPr bwMode="auto"/>
+        <p:txBody>
+          <a:bodyPr/>
+          <a:lstStyle/>
+          <a:p>
+            <a:pPr>
+              <a:defRPr/>
+            </a:pPr>
+            <a:r>
+              <a:rPr/>
               <a:t>V.III. </a:t>
             </a:r>
             <a:r>
@@ -6287,7 +6550,7 @@
       </p:sp>
       <p:sp>
         <p:nvSpPr>
-          <p:cNvPr id="1653938270" name="Content Placeholder 2"/>
+          <p:cNvPr id="156179289" name="Content Placeholder 2"/>
           <p:cNvSpPr>
             <a:spLocks noGrp="1"/>
           </p:cNvSpPr>
@@ -6342,7 +6605,7 @@
       </p:grpSpPr>
       <p:sp>
         <p:nvSpPr>
-          <p:cNvPr id="1042075395" name="Title 1"/>
+          <p:cNvPr id="2026829244" name="Title 1"/>
           <p:cNvSpPr>
             <a:spLocks noGrp="1"/>
           </p:cNvSpPr>
@@ -6373,7 +6636,7 @@
       </p:sp>
       <p:sp>
         <p:nvSpPr>
-          <p:cNvPr id="637170414" name="Content Placeholder 2"/>
+          <p:cNvPr id="1313376304" name="Content Placeholder 2"/>
           <p:cNvSpPr>
             <a:spLocks noGrp="1"/>
           </p:cNvSpPr>
@@ -6918,7 +7181,7 @@
       </p:sp>
       <p:pic>
         <p:nvPicPr>
-          <p:cNvPr id="1308893785" name=""/>
+          <p:cNvPr id="1638424055" name=""/>
           <p:cNvPicPr>
             <a:picLocks noChangeAspect="1"/>
           </p:cNvPicPr>
@@ -6940,7 +7203,7 @@
       </p:pic>
       <p:pic>
         <p:nvPicPr>
-          <p:cNvPr id="1965470380" name=""/>
+          <p:cNvPr id="346126511" name=""/>
           <p:cNvPicPr>
             <a:picLocks noChangeAspect="1"/>
           </p:cNvPicPr>
@@ -6962,7 +7225,7 @@
       </p:pic>
       <p:pic>
         <p:nvPicPr>
-          <p:cNvPr id="901389930" name=""/>
+          <p:cNvPr id="1322262845" name=""/>
           <p:cNvPicPr>
             <a:picLocks noChangeAspect="1"/>
           </p:cNvPicPr>
@@ -6984,7 +7247,7 @@
       </p:pic>
       <p:pic>
         <p:nvPicPr>
-          <p:cNvPr id="1425389656" name=""/>
+          <p:cNvPr id="867392909" name=""/>
           <p:cNvPicPr>
             <a:picLocks noChangeAspect="1"/>
           </p:cNvPicPr>
@@ -7012,7 +7275,7 @@
       </p:pic>
       <p:pic>
         <p:nvPicPr>
-          <p:cNvPr id="872448068" name=""/>
+          <p:cNvPr id="1117659912" name=""/>
           <p:cNvPicPr>
             <a:picLocks noChangeAspect="1"/>
           </p:cNvPicPr>
@@ -7034,7 +7297,7 @@
       </p:pic>
       <p:pic>
         <p:nvPicPr>
-          <p:cNvPr id="701973518" name=""/>
+          <p:cNvPr id="904502206" name=""/>
           <p:cNvPicPr>
             <a:picLocks noChangeAspect="1"/>
           </p:cNvPicPr>
@@ -7089,7 +7352,7 @@
       </p:grpSpPr>
       <p:sp>
         <p:nvSpPr>
-          <p:cNvPr id="1835712211" name="Title 1"/>
+          <p:cNvPr id="1338383188" name="Title 1"/>
           <p:cNvSpPr>
             <a:spLocks noGrp="1"/>
           </p:cNvSpPr>
@@ -7119,7 +7382,7 @@
       </p:sp>
       <p:sp>
         <p:nvSpPr>
-          <p:cNvPr id="636593573" name="Content Placeholder 2"/>
+          <p:cNvPr id="1218392560" name="Content Placeholder 2"/>
           <p:cNvSpPr>
             <a:spLocks noGrp="1"/>
           </p:cNvSpPr>
@@ -7218,7 +7481,7 @@
       </p:sp>
       <p:graphicFrame>
         <p:nvGraphicFramePr>
-          <p:cNvPr id="693320960" name=""/>
+          <p:cNvPr id="1087706983" name=""/>
           <p:cNvGraphicFramePr>
             <a:graphicFrameLocks xmlns:a="http://schemas.openxmlformats.org/drawingml/2006/main" noChangeAspect="1"/>
           </p:cNvGraphicFramePr>
@@ -7234,7 +7497,7 @@
               <p:embed/>
               <p:pic>
                 <p:nvPicPr>
-                  <p:cNvPr id="693320960" name=""/>
+                  <p:cNvPr id="1087706983" name=""/>
                   <p:cNvPicPr/>
                   <p:nvPr/>
                 </p:nvPicPr>
@@ -7291,7 +7554,7 @@
       </p:grpSpPr>
       <p:sp>
         <p:nvSpPr>
-          <p:cNvPr id="1970908924" name="Title 1"/>
+          <p:cNvPr id="1238911498" name="Title 1"/>
           <p:cNvSpPr>
             <a:spLocks noGrp="1"/>
           </p:cNvSpPr>
@@ -7343,7 +7606,7 @@
       </p:sp>
       <p:sp>
         <p:nvSpPr>
-          <p:cNvPr id="292428022" name="Content Placeholder 2"/>
+          <p:cNvPr id="1581649522" name="Content Placeholder 2"/>
           <p:cNvSpPr>
             <a:spLocks noGrp="1"/>
           </p:cNvSpPr>
@@ -7524,7 +7787,7 @@
       </p:grpSpPr>
       <p:sp>
         <p:nvSpPr>
-          <p:cNvPr id="1286632588" name="Title 1"/>
+          <p:cNvPr id="767058669" name="Title 1"/>
           <p:cNvSpPr>
             <a:spLocks noGrp="1"/>
           </p:cNvSpPr>
@@ -7554,7 +7817,7 @@
       </p:sp>
       <p:sp>
         <p:nvSpPr>
-          <p:cNvPr id="1766749368" name="Content Placeholder 2"/>
+          <p:cNvPr id="1254965300" name="Content Placeholder 2"/>
           <p:cNvSpPr>
             <a:spLocks noGrp="1"/>
           </p:cNvSpPr>
@@ -7669,7 +7932,7 @@
       </p:grpSpPr>
       <p:sp>
         <p:nvSpPr>
-          <p:cNvPr id="783167636" name="Title 1"/>
+          <p:cNvPr id="111708808" name="Title 1"/>
           <p:cNvSpPr>
             <a:spLocks noGrp="1"/>
           </p:cNvSpPr>
@@ -7712,7 +7975,7 @@
       </p:sp>
       <p:sp>
         <p:nvSpPr>
-          <p:cNvPr id="668977431" name="Content Placeholder 3"/>
+          <p:cNvPr id="1479778934" name="Content Placeholder 3"/>
           <p:cNvSpPr>
             <a:spLocks noGrp="1"/>
           </p:cNvSpPr>
@@ -7722,7 +7985,7 @@
         </p:nvSpPr>
         <p:spPr bwMode="auto">
           <a:xfrm flipH="0" flipV="0">
-            <a:off x="5482762" y="1600200"/>
+            <a:off x="5482761" y="1600200"/>
             <a:ext cx="6099633" cy="4525960"/>
           </a:xfrm>
         </p:spPr>
@@ -7863,7 +8126,7 @@
       </p:sp>
       <p:pic>
         <p:nvPicPr>
-          <p:cNvPr id="338890334" name=""/>
+          <p:cNvPr id="102163410" name=""/>
           <p:cNvPicPr>
             <a:picLocks noChangeAspect="1"/>
           </p:cNvPicPr>
@@ -7918,7 +8181,7 @@
       </p:grpSpPr>
       <p:sp>
         <p:nvSpPr>
-          <p:cNvPr id="1608725564" name="Title 1"/>
+          <p:cNvPr id="488663048" name="Title 1"/>
           <p:cNvSpPr>
             <a:spLocks noGrp="1"/>
           </p:cNvSpPr>
@@ -8011,7 +8274,7 @@
       </p:sp>
       <p:sp>
         <p:nvSpPr>
-          <p:cNvPr id="1187594004" name="Content Placeholder 2"/>
+          <p:cNvPr id="1576964692" name="Content Placeholder 2"/>
           <p:cNvSpPr>
             <a:spLocks noGrp="1"/>
           </p:cNvSpPr>
@@ -8070,7 +8333,7 @@
       </p:sp>
       <p:sp>
         <p:nvSpPr>
-          <p:cNvPr id="872965775" name="Content Placeholder 3"/>
+          <p:cNvPr id="1514808964" name="Content Placeholder 3"/>
           <p:cNvSpPr>
             <a:spLocks noGrp="1"/>
           </p:cNvSpPr>
@@ -8129,7 +8392,7 @@
       </p:sp>
       <p:sp>
         <p:nvSpPr>
-          <p:cNvPr id="1762573031" name=""/>
+          <p:cNvPr id="193053342" name=""/>
           <p:cNvSpPr/>
           <p:nvPr/>
         </p:nvSpPr>
@@ -8174,7 +8437,7 @@
       </p:sp>
       <p:sp>
         <p:nvSpPr>
-          <p:cNvPr id="544955250" name=""/>
+          <p:cNvPr id="1364087839" name=""/>
           <p:cNvSpPr/>
           <p:nvPr/>
         </p:nvSpPr>
@@ -8219,7 +8482,7 @@
       </p:sp>
       <p:sp>
         <p:nvSpPr>
-          <p:cNvPr id="440842549" name=""/>
+          <p:cNvPr id="119457925" name=""/>
           <p:cNvSpPr/>
           <p:nvPr/>
         </p:nvSpPr>
@@ -8254,7 +8517,7 @@
       </p:sp>
       <p:sp>
         <p:nvSpPr>
-          <p:cNvPr id="820834581" name=""/>
+          <p:cNvPr id="631971293" name=""/>
           <p:cNvSpPr/>
           <p:nvPr/>
         </p:nvSpPr>
@@ -8303,7 +8566,7 @@
       </p:sp>
       <p:sp>
         <p:nvSpPr>
-          <p:cNvPr id="684860971" name=""/>
+          <p:cNvPr id="848733479" name=""/>
           <p:cNvSpPr/>
           <p:nvPr/>
         </p:nvSpPr>
@@ -8352,13 +8615,13 @@
       </p:sp>
       <p:sp>
         <p:nvSpPr>
-          <p:cNvPr id="271065857" name=""/>
+          <p:cNvPr id="582565537" name=""/>
           <p:cNvSpPr/>
           <p:nvPr/>
         </p:nvSpPr>
         <p:spPr bwMode="auto">
           <a:xfrm rot="0" flipH="0" flipV="0">
-            <a:off x="2714016" y="4714372"/>
+            <a:off x="2714016" y="4714371"/>
             <a:ext cx="2155656" cy="599573"/>
           </a:xfrm>
           <a:prstGeom prst="rect">
@@ -8397,13 +8660,13 @@
       </p:sp>
       <p:sp>
         <p:nvSpPr>
-          <p:cNvPr id="768029606" name=""/>
+          <p:cNvPr id="82822706" name=""/>
           <p:cNvSpPr/>
           <p:nvPr/>
         </p:nvSpPr>
         <p:spPr bwMode="auto">
           <a:xfrm rot="0" flipH="0" flipV="0">
-            <a:off x="7250882" y="2740526"/>
+            <a:off x="7250881" y="2740526"/>
             <a:ext cx="1948821" cy="534735"/>
           </a:xfrm>
           <a:prstGeom prst="flowChartAlternateProcess">
@@ -8442,13 +8705,13 @@
       </p:sp>
       <p:sp>
         <p:nvSpPr>
-          <p:cNvPr id="135775756" name=""/>
+          <p:cNvPr id="1529125953" name=""/>
           <p:cNvSpPr/>
           <p:nvPr/>
         </p:nvSpPr>
         <p:spPr bwMode="auto">
           <a:xfrm rot="0" flipH="0" flipV="0">
-            <a:off x="7250882" y="5800557"/>
+            <a:off x="7250881" y="5800557"/>
             <a:ext cx="1948821" cy="534735"/>
           </a:xfrm>
           <a:prstGeom prst="flowChartAlternateProcess">
@@ -8487,7 +8750,7 @@
       </p:sp>
       <p:sp>
         <p:nvSpPr>
-          <p:cNvPr id="1325362793" name=""/>
+          <p:cNvPr id="531182413" name=""/>
           <p:cNvSpPr/>
           <p:nvPr/>
         </p:nvSpPr>
@@ -8522,7 +8785,7 @@
       </p:sp>
       <p:sp>
         <p:nvSpPr>
-          <p:cNvPr id="1638247887" name=""/>
+          <p:cNvPr id="1735467545" name=""/>
           <p:cNvSpPr/>
           <p:nvPr/>
         </p:nvSpPr>
@@ -8567,7 +8830,7 @@
       </p:sp>
       <p:sp>
         <p:nvSpPr>
-          <p:cNvPr id="1370434456" name=""/>
+          <p:cNvPr id="974005034" name=""/>
           <p:cNvSpPr/>
           <p:nvPr/>
         </p:nvSpPr>
@@ -8652,7 +8915,7 @@
       </p:grpSpPr>
       <p:sp>
         <p:nvSpPr>
-          <p:cNvPr id="268936171" name="Title 1"/>
+          <p:cNvPr id="387097511" name="Title 1"/>
           <p:cNvSpPr>
             <a:spLocks noGrp="1"/>
           </p:cNvSpPr>
@@ -8745,7 +9008,7 @@
       </p:sp>
       <p:sp>
         <p:nvSpPr>
-          <p:cNvPr id="1998605005" name="Text Placeholder 2"/>
+          <p:cNvPr id="1955853420" name="Text Placeholder 2"/>
           <p:cNvSpPr>
             <a:spLocks noGrp="1"/>
           </p:cNvSpPr>
@@ -8819,7 +9082,7 @@
       </p:sp>
       <p:sp>
         <p:nvSpPr>
-          <p:cNvPr id="1222796122" name="Content Placeholder 3"/>
+          <p:cNvPr id="557823826" name="Content Placeholder 3"/>
           <p:cNvSpPr>
             <a:spLocks noGrp="1"/>
           </p:cNvSpPr>
@@ -9118,7 +9381,7 @@
       </p:sp>
       <p:sp>
         <p:nvSpPr>
-          <p:cNvPr id="757928006" name="Text Placeholder 4"/>
+          <p:cNvPr id="1076235763" name="Text Placeholder 4"/>
           <p:cNvSpPr>
             <a:spLocks noGrp="1"/>
           </p:cNvSpPr>
@@ -9186,7 +9449,7 @@
       </p:sp>
       <p:sp>
         <p:nvSpPr>
-          <p:cNvPr id="1592760514" name="Content Placeholder 5"/>
+          <p:cNvPr id="1862607407" name="Content Placeholder 5"/>
           <p:cNvSpPr>
             <a:spLocks noGrp="1"/>
           </p:cNvSpPr>
@@ -9295,14 +9558,14 @@
       </p:sp>
       <p:sp>
         <p:nvSpPr>
-          <p:cNvPr id="755599042" name=""/>
+          <p:cNvPr id="1379655883" name=""/>
           <p:cNvSpPr txBox="1"/>
           <p:nvPr/>
         </p:nvSpPr>
         <p:spPr bwMode="auto">
           <a:xfrm rot="0" flipH="0" flipV="0">
             <a:off x="619999" y="1002631"/>
-            <a:ext cx="3692155" cy="640440"/>
+            <a:ext cx="3692154" cy="640440"/>
           </a:xfrm>
           <a:prstGeom prst="rect">
             <a:avLst/>
@@ -9372,7 +9635,7 @@
       </p:grpSpPr>
       <p:sp>
         <p:nvSpPr>
-          <p:cNvPr id="373090818" name="Title 1"/>
+          <p:cNvPr id="1527274039" name="Title 1"/>
           <p:cNvSpPr>
             <a:spLocks noGrp="1"/>
           </p:cNvSpPr>
@@ -9415,7 +9678,7 @@
       </p:sp>
       <p:sp>
         <p:nvSpPr>
-          <p:cNvPr id="480612414" name="Content Placeholder 2"/>
+          <p:cNvPr id="292898782" name="Content Placeholder 2"/>
           <p:cNvSpPr>
             <a:spLocks noGrp="1"/>
           </p:cNvSpPr>
@@ -9530,7 +9793,7 @@
       </p:sp>
       <p:pic>
         <p:nvPicPr>
-          <p:cNvPr id="1794423306" name=""/>
+          <p:cNvPr id="442632349" name=""/>
           <p:cNvPicPr>
             <a:picLocks noChangeAspect="1"/>
           </p:cNvPicPr>
@@ -9552,7 +9815,7 @@
       </p:pic>
       <p:pic>
         <p:nvPicPr>
-          <p:cNvPr id="1490823128" name=""/>
+          <p:cNvPr id="232417419" name=""/>
           <p:cNvPicPr>
             <a:picLocks noChangeAspect="1"/>
           </p:cNvPicPr>
@@ -9574,7 +9837,7 @@
       </p:pic>
       <p:pic>
         <p:nvPicPr>
-          <p:cNvPr id="634091415" name=""/>
+          <p:cNvPr id="1902370760" name=""/>
           <p:cNvPicPr>
             <a:picLocks noChangeAspect="1"/>
           </p:cNvPicPr>
@@ -9596,7 +9859,7 @@
       </p:pic>
       <p:pic>
         <p:nvPicPr>
-          <p:cNvPr id="1546400738" name=""/>
+          <p:cNvPr id="1015428905" name=""/>
           <p:cNvPicPr>
             <a:picLocks noChangeAspect="1"/>
           </p:cNvPicPr>
@@ -9618,7 +9881,7 @@
       </p:pic>
       <p:pic>
         <p:nvPicPr>
-          <p:cNvPr id="1428412397" name=""/>
+          <p:cNvPr id="1886844080" name=""/>
           <p:cNvPicPr>
             <a:picLocks noChangeAspect="1"/>
           </p:cNvPicPr>
@@ -9640,7 +9903,7 @@
       </p:pic>
       <p:pic>
         <p:nvPicPr>
-          <p:cNvPr id="366122495" name=""/>
+          <p:cNvPr id="1265578686" name=""/>
           <p:cNvPicPr>
             <a:picLocks noChangeAspect="1"/>
           </p:cNvPicPr>
@@ -9662,7 +9925,7 @@
       </p:pic>
       <p:pic>
         <p:nvPicPr>
-          <p:cNvPr id="1721025918" name=""/>
+          <p:cNvPr id="1245550997" name=""/>
           <p:cNvPicPr>
             <a:picLocks noChangeAspect="1"/>
           </p:cNvPicPr>
@@ -9684,7 +9947,7 @@
       </p:pic>
       <p:sp>
         <p:nvSpPr>
-          <p:cNvPr id="872254584" name=""/>
+          <p:cNvPr id="1867473941" name=""/>
           <p:cNvSpPr/>
           <p:nvPr/>
         </p:nvSpPr>
@@ -9719,12 +9982,12 @@
       </p:sp>
       <p:sp>
         <p:nvSpPr>
-          <p:cNvPr id="1895867170" name=""/>
+          <p:cNvPr id="1235822129" name=""/>
           <p:cNvSpPr/>
           <p:nvPr/>
         </p:nvSpPr>
         <p:spPr bwMode="auto">
-          <a:xfrm rot="19646653" flipH="0" flipV="0">
+          <a:xfrm rot="19646652" flipH="0" flipV="0">
             <a:off x="6945309" y="3302236"/>
             <a:ext cx="221071" cy="1766253"/>
           </a:xfrm>
@@ -9754,7 +10017,7 @@
       </p:sp>
       <p:sp>
         <p:nvSpPr>
-          <p:cNvPr id="1458754399" name=""/>
+          <p:cNvPr id="2070271397" name=""/>
           <p:cNvSpPr/>
           <p:nvPr/>
         </p:nvSpPr>
@@ -9789,7 +10052,7 @@
       </p:sp>
       <p:sp>
         <p:nvSpPr>
-          <p:cNvPr id="1848152832" name=""/>
+          <p:cNvPr id="1620148351" name=""/>
           <p:cNvSpPr/>
           <p:nvPr/>
         </p:nvSpPr>
@@ -9824,7 +10087,7 @@
       </p:sp>
       <p:sp>
         <p:nvSpPr>
-          <p:cNvPr id="119669503" name=""/>
+          <p:cNvPr id="1029223690" name=""/>
           <p:cNvSpPr/>
           <p:nvPr/>
         </p:nvSpPr>
@@ -9859,7 +10122,7 @@
       </p:sp>
       <p:sp>
         <p:nvSpPr>
-          <p:cNvPr id="1976855533" name=""/>
+          <p:cNvPr id="1479955242" name=""/>
           <p:cNvSpPr/>
           <p:nvPr/>
         </p:nvSpPr>
@@ -9894,7 +10157,7 @@
       </p:sp>
       <p:sp>
         <p:nvSpPr>
-          <p:cNvPr id="1622537195" name=""/>
+          <p:cNvPr id="170173860" name=""/>
           <p:cNvSpPr txBox="1"/>
           <p:nvPr/>
         </p:nvSpPr>
@@ -9926,7 +10189,7 @@
       </p:sp>
       <p:sp>
         <p:nvSpPr>
-          <p:cNvPr id="298196130" name=""/>
+          <p:cNvPr id="1847244368" name=""/>
           <p:cNvSpPr txBox="1"/>
           <p:nvPr/>
         </p:nvSpPr>
@@ -9958,7 +10221,7 @@
       </p:sp>
       <p:sp>
         <p:nvSpPr>
-          <p:cNvPr id="1585682071" name=""/>
+          <p:cNvPr id="1443643190" name=""/>
           <p:cNvSpPr txBox="1"/>
           <p:nvPr/>
         </p:nvSpPr>
@@ -9990,7 +10253,7 @@
       </p:sp>
       <p:sp>
         <p:nvSpPr>
-          <p:cNvPr id="452337246" name=""/>
+          <p:cNvPr id="1628790369" name=""/>
           <p:cNvSpPr txBox="1"/>
           <p:nvPr/>
         </p:nvSpPr>
@@ -10022,7 +10285,7 @@
       </p:sp>
       <p:sp>
         <p:nvSpPr>
-          <p:cNvPr id="1517471332" name=""/>
+          <p:cNvPr id="1821458812" name=""/>
           <p:cNvSpPr txBox="1"/>
           <p:nvPr/>
         </p:nvSpPr>
@@ -10054,7 +10317,7 @@
       </p:sp>
       <p:sp>
         <p:nvSpPr>
-          <p:cNvPr id="849567124" name=""/>
+          <p:cNvPr id="119024078" name=""/>
           <p:cNvSpPr txBox="1"/>
           <p:nvPr/>
         </p:nvSpPr>
@@ -10086,7 +10349,7 @@
       </p:sp>
       <p:sp>
         <p:nvSpPr>
-          <p:cNvPr id="997311792" name=""/>
+          <p:cNvPr id="993194731" name=""/>
           <p:cNvSpPr txBox="1"/>
           <p:nvPr/>
         </p:nvSpPr>
